--- a/docs/final/RUDP_Presentation.pptx
+++ b/docs/final/RUDP_Presentation.pptx
@@ -42,9 +42,10 @@
     <p:sldId id="290" r:id="rId36"/>
     <p:sldId id="291" r:id="rId37"/>
     <p:sldId id="292" r:id="rId38"/>
+    <p:sldId id="293" r:id="rId39"/>
   </p:sldIdLst>
   <p:notesMasterIdLst>
-    <p:notesMasterId r:id="rId39"/>
+    <p:notesMasterId r:id="rId40"/>
   </p:notesMasterIdLst>
   <p:sldSz cx="12192000" cy="6858000"/>
   <p:notesSz cx="6858000" cy="12192000"/>
@@ -3521,6 +3522,94 @@
 </p:notes>
 </file>
 
+<file path=ppt/notesSlides/notesSlide38.xml><?xml version="1.0" encoding="utf-8"?>
+<p:notes xmlns:a="http://schemas.openxmlformats.org/drawingml/2006/main" xmlns:r="http://schemas.openxmlformats.org/officeDocument/2006/relationships" xmlns:p="http://schemas.openxmlformats.org/presentationml/2006/main">
+  <p:cSld>
+    <p:spTree>
+      <p:nvGrpSpPr>
+        <p:cNvPr id="1" name=""/>
+        <p:cNvGrpSpPr/>
+        <p:nvPr/>
+      </p:nvGrpSpPr>
+      <p:grpSpPr>
+        <a:xfrm>
+          <a:off x="0" y="0"/>
+          <a:ext cx="0" cy="0"/>
+          <a:chOff x="0" y="0"/>
+          <a:chExt cx="0" cy="0"/>
+        </a:xfrm>
+      </p:grpSpPr>
+      <p:sp>
+        <p:nvSpPr>
+          <p:cNvPr id="2" name="Slide Image Placeholder 1"/>
+          <p:cNvSpPr>
+            <a:spLocks noGrp="1" noRot="1" noChangeAspect="1"/>
+          </p:cNvSpPr>
+          <p:nvPr>
+            <p:ph type="sldImg"/>
+          </p:nvPr>
+        </p:nvSpPr>
+        <p:spPr/>
+      </p:sp>
+      <p:sp>
+        <p:nvSpPr>
+          <p:cNvPr id="3" name="Notes Placeholder 2"/>
+          <p:cNvSpPr>
+            <a:spLocks noGrp="1"/>
+          </p:cNvSpPr>
+          <p:nvPr>
+            <p:ph type="body" idx="1"/>
+          </p:nvPr>
+        </p:nvSpPr>
+        <p:spPr/>
+        <p:txBody>
+          <a:bodyPr/>
+          <a:lstStyle/>
+          <a:p>
+            <a:r>
+              <a:rPr lang="en-US" dirty="0"/>
+              <a:t/>
+            </a:r>
+            <a:endParaRPr lang="en-US" dirty="0"/>
+          </a:p>
+        </p:txBody>
+      </p:sp>
+      <p:sp>
+        <p:nvSpPr>
+          <p:cNvPr id="4" name="Slide Number Placeholder 3"/>
+          <p:cNvSpPr>
+            <a:spLocks noGrp="1"/>
+          </p:cNvSpPr>
+          <p:nvPr>
+            <p:ph type="sldNum" sz="quarter" idx="10"/>
+          </p:nvPr>
+        </p:nvSpPr>
+        <p:spPr/>
+        <p:txBody>
+          <a:bodyPr/>
+          <a:lstStyle/>
+          <a:p>
+            <a:fld id="{F7021451-1387-4CA6-816F-3879F97B5CBC}" type="slidenum">
+              <a:rPr lang="en-US"/>
+              <a:t>38</a:t>
+            </a:fld>
+            <a:endParaRPr lang="en-US"/>
+          </a:p>
+        </p:txBody>
+      </p:sp>
+    </p:spTree>
+    <p:extLst>
+      <p:ext uri="{BB962C8B-B14F-4D97-AF65-F5344CB8AC3E}">
+        <p14:creationId xmlns:p14="http://schemas.microsoft.com/office/powerpoint/2010/main" val="1024086991"/>
+      </p:ext>
+    </p:extLst>
+  </p:cSld>
+  <p:clrMapOvr>
+    <a:masterClrMapping/>
+  </p:clrMapOvr>
+</p:notes>
+</file>
+
 <file path=ppt/notesSlides/notesSlide4.xml><?xml version="1.0" encoding="utf-8"?>
 <p:notes xmlns:a="http://schemas.openxmlformats.org/drawingml/2006/main" xmlns:r="http://schemas.openxmlformats.org/officeDocument/2006/relationships" xmlns:p="http://schemas.openxmlformats.org/presentationml/2006/main">
   <p:cSld>
@@ -4640,7 +4729,7 @@
                 <a:ea typeface="Courier New" pitchFamily="34" charset="-122"/>
                 <a:cs typeface="Courier New" pitchFamily="34" charset="-120"/>
               </a:rPr>
-              <a:t>10 / 37   Smart-RUDP</a:t>
+              <a:t>10 / 38   Smart-RUDP</a:t>
             </a:r>
             <a:endParaRPr lang="en-US" sz="1000" dirty="0"/>
           </a:p>
@@ -4837,7 +4926,7 @@
                 <a:ea typeface="Courier New" pitchFamily="34" charset="-122"/>
                 <a:cs typeface="Courier New" pitchFamily="34" charset="-120"/>
               </a:rPr>
-              <a:t>11 / 37   Smart-RUDP</a:t>
+              <a:t>11 / 38   Smart-RUDP</a:t>
             </a:r>
             <a:endParaRPr lang="en-US" sz="1000" dirty="0"/>
           </a:p>
@@ -5667,7 +5756,7 @@
                 <a:ea typeface="Courier New" pitchFamily="34" charset="-122"/>
                 <a:cs typeface="Courier New" pitchFamily="34" charset="-120"/>
               </a:rPr>
-              <a:t>12 / 37   Smart-RUDP</a:t>
+              <a:t>12 / 38   Smart-RUDP</a:t>
             </a:r>
             <a:endParaRPr lang="en-US" sz="1000" dirty="0"/>
           </a:p>
@@ -5964,7 +6053,7 @@
                 <a:ea typeface="Courier New" pitchFamily="34" charset="-122"/>
                 <a:cs typeface="Courier New" pitchFamily="34" charset="-120"/>
               </a:rPr>
-              <a:t>13 / 37   Smart-RUDP</a:t>
+              <a:t>13 / 38   Smart-RUDP</a:t>
             </a:r>
             <a:endParaRPr lang="en-US" sz="1000" dirty="0"/>
           </a:p>
@@ -6264,7 +6353,7 @@
                 <a:ea typeface="Courier New" pitchFamily="34" charset="-122"/>
                 <a:cs typeface="Courier New" pitchFamily="34" charset="-120"/>
               </a:rPr>
-              <a:t>14 / 37   Smart-RUDP</a:t>
+              <a:t>14 / 38   Smart-RUDP</a:t>
             </a:r>
             <a:endParaRPr lang="en-US" sz="1000" dirty="0"/>
           </a:p>
@@ -6648,7 +6737,7 @@
                 <a:ea typeface="Courier New" pitchFamily="34" charset="-122"/>
                 <a:cs typeface="Courier New" pitchFamily="34" charset="-120"/>
               </a:rPr>
-              <a:t>15 / 37   Smart-RUDP</a:t>
+              <a:t>15 / 38   Smart-RUDP</a:t>
             </a:r>
             <a:endParaRPr lang="en-US" sz="1000" dirty="0"/>
           </a:p>
@@ -7106,7 +7195,7 @@
                 <a:ea typeface="Courier New" pitchFamily="34" charset="-122"/>
                 <a:cs typeface="Courier New" pitchFamily="34" charset="-120"/>
               </a:rPr>
-              <a:t>16 / 37   Smart-RUDP</a:t>
+              <a:t>16 / 38   Smart-RUDP</a:t>
             </a:r>
             <a:endParaRPr lang="en-US" sz="1000" dirty="0"/>
           </a:p>
@@ -7791,7 +7880,7 @@
                 <a:ea typeface="Courier New" pitchFamily="34" charset="-122"/>
                 <a:cs typeface="Courier New" pitchFamily="34" charset="-120"/>
               </a:rPr>
-              <a:t>17 / 37   Smart-RUDP</a:t>
+              <a:t>17 / 38   Smart-RUDP</a:t>
             </a:r>
             <a:endParaRPr lang="en-US" sz="1000" dirty="0"/>
           </a:p>
@@ -8031,7 +8120,7 @@
                 <a:ea typeface="Courier New" pitchFamily="34" charset="-122"/>
                 <a:cs typeface="Courier New" pitchFamily="34" charset="-120"/>
               </a:rPr>
-              <a:t>18 / 37   Smart-RUDP</a:t>
+              <a:t>18 / 38   Smart-RUDP</a:t>
             </a:r>
             <a:endParaRPr lang="en-US" sz="1000" dirty="0"/>
           </a:p>
@@ -8271,7 +8360,7 @@
                 <a:ea typeface="Courier New" pitchFamily="34" charset="-122"/>
                 <a:cs typeface="Courier New" pitchFamily="34" charset="-120"/>
               </a:rPr>
-              <a:t>19 / 37   Smart-RUDP</a:t>
+              <a:t>19 / 38   Smart-RUDP</a:t>
             </a:r>
             <a:endParaRPr lang="en-US" sz="1000" dirty="0"/>
           </a:p>
@@ -8493,7 +8582,7 @@
                 <a:ea typeface="Courier New" pitchFamily="34" charset="-122"/>
                 <a:cs typeface="Courier New" pitchFamily="34" charset="-120"/>
               </a:rPr>
-              <a:t>2 / 37   Smart-RUDP</a:t>
+              <a:t>2 / 38   Smart-RUDP</a:t>
             </a:r>
             <a:endParaRPr lang="en-US" sz="1000" dirty="0"/>
           </a:p>
@@ -8887,7 +8976,7 @@
                 <a:ea typeface="Courier New" pitchFamily="34" charset="-122"/>
                 <a:cs typeface="Courier New" pitchFamily="34" charset="-120"/>
               </a:rPr>
-              <a:t>20 / 37   Smart-RUDP</a:t>
+              <a:t>20 / 38   Smart-RUDP</a:t>
             </a:r>
             <a:endParaRPr lang="en-US" sz="1000" dirty="0"/>
           </a:p>
@@ -9211,7 +9300,7 @@
                 <a:ea typeface="Courier New" pitchFamily="34" charset="-122"/>
                 <a:cs typeface="Courier New" pitchFamily="34" charset="-120"/>
               </a:rPr>
-              <a:t>21 / 37   Smart-RUDP</a:t>
+              <a:t>21 / 38   Smart-RUDP</a:t>
             </a:r>
             <a:endParaRPr lang="en-US" sz="1000" dirty="0"/>
           </a:p>
@@ -10918,7 +11007,7 @@
                 <a:ea typeface="Courier New" pitchFamily="34" charset="-122"/>
                 <a:cs typeface="Courier New" pitchFamily="34" charset="-120"/>
               </a:rPr>
-              <a:t>22 / 37   Smart-RUDP</a:t>
+              <a:t>22 / 38   Smart-RUDP</a:t>
             </a:r>
             <a:endParaRPr lang="en-US" sz="1000" dirty="0"/>
           </a:p>
@@ -12301,7 +12390,7 @@
                 <a:ea typeface="Courier New" pitchFamily="34" charset="-122"/>
                 <a:cs typeface="Courier New" pitchFamily="34" charset="-120"/>
               </a:rPr>
-              <a:t>23 / 37   Smart-RUDP</a:t>
+              <a:t>23 / 38   Smart-RUDP</a:t>
             </a:r>
             <a:endParaRPr lang="en-US" sz="1000" dirty="0"/>
           </a:p>
@@ -13844,7 +13933,7 @@
                 <a:ea typeface="Courier New" pitchFamily="34" charset="-122"/>
                 <a:cs typeface="Courier New" pitchFamily="34" charset="-120"/>
               </a:rPr>
-              <a:t>24 / 37   Smart-RUDP</a:t>
+              <a:t>24 / 38   Smart-RUDP</a:t>
             </a:r>
             <a:endParaRPr lang="en-US" sz="1000" dirty="0"/>
           </a:p>
@@ -15522,7 +15611,7 @@
                 <a:ea typeface="Courier New" pitchFamily="34" charset="-122"/>
                 <a:cs typeface="Courier New" pitchFamily="34" charset="-120"/>
               </a:rPr>
-              <a:t>25 / 37   Smart-RUDP</a:t>
+              <a:t>25 / 38   Smart-RUDP</a:t>
             </a:r>
             <a:endParaRPr lang="en-US" sz="1000" dirty="0"/>
           </a:p>
@@ -17200,7 +17289,7 @@
                 <a:ea typeface="Courier New" pitchFamily="34" charset="-122"/>
                 <a:cs typeface="Courier New" pitchFamily="34" charset="-120"/>
               </a:rPr>
-              <a:t>26 / 37   Smart-RUDP</a:t>
+              <a:t>26 / 38   Smart-RUDP</a:t>
             </a:r>
             <a:endParaRPr lang="en-US" sz="1000" dirty="0"/>
           </a:p>
@@ -19540,7 +19629,7 @@
                 <a:ea typeface="Courier New" pitchFamily="34" charset="-122"/>
                 <a:cs typeface="Courier New" pitchFamily="34" charset="-120"/>
               </a:rPr>
-              <a:t>27 / 37   Smart-RUDP</a:t>
+              <a:t>27 / 38   Smart-RUDP</a:t>
             </a:r>
             <a:endParaRPr lang="en-US" sz="1000" dirty="0"/>
           </a:p>
@@ -19998,7 +20087,7 @@
                 <a:ea typeface="Courier New" pitchFamily="34" charset="-122"/>
                 <a:cs typeface="Courier New" pitchFamily="34" charset="-120"/>
               </a:rPr>
-              <a:t>28 / 37   Smart-RUDP</a:t>
+              <a:t>28 / 38   Smart-RUDP</a:t>
             </a:r>
             <a:endParaRPr lang="en-US" sz="1000" dirty="0"/>
           </a:p>
@@ -20230,7 +20319,7 @@
                 <a:ea typeface="Courier New" pitchFamily="34" charset="-122"/>
                 <a:cs typeface="Courier New" pitchFamily="34" charset="-120"/>
               </a:rPr>
-              <a:t>29 / 37   Smart-RUDP</a:t>
+              <a:t>29 / 38   Smart-RUDP</a:t>
             </a:r>
             <a:endParaRPr lang="en-US" sz="1000" dirty="0"/>
           </a:p>
@@ -22976,7 +23065,7 @@
                 <a:ea typeface="Courier New" pitchFamily="34" charset="-122"/>
                 <a:cs typeface="Courier New" pitchFamily="34" charset="-120"/>
               </a:rPr>
-              <a:t>3 / 37   Smart-RUDP</a:t>
+              <a:t>3 / 38   Smart-RUDP</a:t>
             </a:r>
             <a:endParaRPr lang="en-US" sz="1000" dirty="0"/>
           </a:p>
@@ -23370,7 +23459,7 @@
                 <a:ea typeface="Courier New" pitchFamily="34" charset="-122"/>
                 <a:cs typeface="Courier New" pitchFamily="34" charset="-120"/>
               </a:rPr>
-              <a:t>30 / 37   Smart-RUDP</a:t>
+              <a:t>30 / 38   Smart-RUDP</a:t>
             </a:r>
             <a:endParaRPr lang="en-US" sz="1000" dirty="0"/>
           </a:p>
@@ -23610,7 +23699,7 @@
                 <a:ea typeface="Courier New" pitchFamily="34" charset="-122"/>
                 <a:cs typeface="Courier New" pitchFamily="34" charset="-120"/>
               </a:rPr>
-              <a:t>31 / 37   Smart-RUDP</a:t>
+              <a:t>31 / 38   Smart-RUDP</a:t>
             </a:r>
             <a:endParaRPr lang="en-US" sz="1000" dirty="0"/>
           </a:p>
@@ -25927,7 +26016,7 @@
                 <a:ea typeface="Courier New" pitchFamily="34" charset="-122"/>
                 <a:cs typeface="Courier New" pitchFamily="34" charset="-120"/>
               </a:rPr>
-              <a:t>32 / 37   Smart-RUDP</a:t>
+              <a:t>32 / 38   Smart-RUDP</a:t>
             </a:r>
             <a:endParaRPr lang="en-US" sz="1000" dirty="0"/>
           </a:p>
@@ -27907,7 +27996,7 @@
                 <a:ea typeface="Courier New" pitchFamily="34" charset="-122"/>
                 <a:cs typeface="Courier New" pitchFamily="34" charset="-120"/>
               </a:rPr>
-              <a:t>33 / 37   Smart-RUDP</a:t>
+              <a:t>33 / 38   Smart-RUDP</a:t>
             </a:r>
             <a:endParaRPr lang="en-US" sz="1000" dirty="0"/>
           </a:p>
@@ -30550,7 +30639,7 @@
                 <a:ea typeface="Courier New" pitchFamily="34" charset="-122"/>
                 <a:cs typeface="Courier New" pitchFamily="34" charset="-120"/>
               </a:rPr>
-              <a:t>34 / 37   Smart-RUDP</a:t>
+              <a:t>34 / 38   Smart-RUDP</a:t>
             </a:r>
             <a:endParaRPr lang="en-US" sz="1000" dirty="0"/>
           </a:p>
@@ -31602,6 +31691,2737 @@
                 <a:ea typeface="Courier New" pitchFamily="34" charset="-122"/>
                 <a:cs typeface="Courier New" pitchFamily="34" charset="-120"/>
               </a:rPr>
+              <a:t>First run between two machines</a:t>
+            </a:r>
+            <a:endParaRPr lang="en-US" sz="3000" dirty="0"/>
+          </a:p>
+        </p:txBody>
+      </p:sp>
+      <p:sp>
+        <p:nvSpPr>
+          <p:cNvPr id="3" name="Text 1"/>
+          <p:cNvSpPr/>
+          <p:nvPr/>
+        </p:nvSpPr>
+        <p:spPr>
+          <a:xfrm>
+            <a:off x="9418320" y="6446520"/>
+            <a:ext cx="2377440" cy="274320"/>
+          </a:xfrm>
+          <a:prstGeom prst="rect">
+            <a:avLst/>
+          </a:prstGeom>
+          <a:noFill/>
+          <a:ln/>
+        </p:spPr>
+        <p:txBody>
+          <a:bodyPr wrap="square" lIns="0" tIns="0" rIns="0" bIns="0" rtlCol="0" anchor="ctr"/>
+          <a:lstStyle/>
+          <a:p>
+            <a:pPr algn="r" indent="0" marL="0">
+              <a:buNone/>
+            </a:pPr>
+            <a:r>
+              <a:rPr lang="en-US" sz="1000" dirty="0">
+                <a:solidFill>
+                  <a:srgbClr val="8B98A5"/>
+                </a:solidFill>
+                <a:latin typeface="Courier New" pitchFamily="34" charset="0"/>
+                <a:ea typeface="Courier New" pitchFamily="34" charset="-122"/>
+                <a:cs typeface="Courier New" pitchFamily="34" charset="-120"/>
+              </a:rPr>
+              <a:t>35 / 38   Smart-RUDP</a:t>
+            </a:r>
+            <a:endParaRPr lang="en-US" sz="1000" dirty="0"/>
+          </a:p>
+        </p:txBody>
+      </p:sp>
+      <p:graphicFrame>
+        <p:nvGraphicFramePr>
+          <p:cNvPr id="36" name="Table 0"/>
+          <p:cNvGraphicFramePr>
+            <a:graphicFrameLocks noGrp="1"/>
+          </p:cNvGraphicFramePr>
+          <p:nvPr>
+            <p:extLst>
+              <p:ext uri="{D42A27DB-BD31-4B8C-83A1-F6EECF244321}">
+                <p14:modId xmlns:p14="http://schemas.microsoft.com/office/powerpoint/2010/main" val="1579011935"/>
+              </p:ext>
+            </p:extLst>
+          </p:nvPr>
+        </p:nvGraphicFramePr>
+        <p:xfrm>
+          <a:off x="548640" y="1188720"/>
+          <a:ext cx="7863840" cy="914400"/>
+        </p:xfrm>
+        <a:graphic>
+          <a:graphicData uri="http://schemas.openxmlformats.org/drawingml/2006/table">
+            <a:tbl>
+              <a:tblPr/>
+              <a:tblGrid>
+                <a:gridCol w="2194560"/>
+                <a:gridCol w="1005840"/>
+                <a:gridCol w="1097280"/>
+                <a:gridCol w="1097280"/>
+                <a:gridCol w="1280160"/>
+                <a:gridCol w="1188720"/>
+              </a:tblGrid>
+              <a:tr h="384048">
+                <a:tc>
+                  <a:txBody>
+                    <a:bodyPr/>
+                    <a:lstStyle/>
+                    <a:p>
+                      <a:pPr indent="0" marL="0">
+                        <a:buNone/>
+                      </a:pPr>
+                      <a:r>
+                        <a:rPr lang="en-US" sz="1300" b="1" dirty="0">
+                          <a:solidFill>
+                            <a:srgbClr val="0B0F14"/>
+                          </a:solidFill>
+                          <a:latin typeface="Courier New" pitchFamily="34" charset="0"/>
+                          <a:ea typeface="Courier New" pitchFamily="34" charset="-122"/>
+                          <a:cs typeface="Courier New" pitchFamily="34" charset="-120"/>
+                        </a:rPr>
+                        <a:t>Time (s)</a:t>
+                      </a:r>
+                      <a:endParaRPr lang="en-US" sz="1300" dirty="0">
+                        <a:latin typeface="Courier New" charset="0"/>
+                        <a:ea typeface="Courier New" charset="0"/>
+                        <a:cs typeface="Courier New" charset="0"/>
+                      </a:endParaRPr>
+                    </a:p>
+                  </a:txBody>
+                  <a:tcPr marL="91440" marR="91440" marT="45720" marB="45720">
+                    <a:lnL w="12700" cap="flat" cmpd="sng" algn="ctr">
+                      <a:solidFill>
+                        <a:srgbClr val="2A3441"/>
+                      </a:solidFill>
+                      <a:prstDash val="solid"/>
+                      <a:round/>
+                      <a:headEnd type="none" w="med" len="med"/>
+                      <a:tailEnd type="none" w="med" len="med"/>
+                    </a:lnL>
+                    <a:lnR w="12700" cap="flat" cmpd="sng" algn="ctr">
+                      <a:solidFill>
+                        <a:srgbClr val="2A3441"/>
+                      </a:solidFill>
+                      <a:prstDash val="solid"/>
+                      <a:round/>
+                      <a:headEnd type="none" w="med" len="med"/>
+                      <a:tailEnd type="none" w="med" len="med"/>
+                    </a:lnR>
+                    <a:lnT w="12700" cap="flat" cmpd="sng" algn="ctr">
+                      <a:solidFill>
+                        <a:srgbClr val="2A3441"/>
+                      </a:solidFill>
+                      <a:prstDash val="solid"/>
+                      <a:round/>
+                      <a:headEnd type="none" w="med" len="med"/>
+                      <a:tailEnd type="none" w="med" len="med"/>
+                    </a:lnT>
+                    <a:lnB w="12700" cap="flat" cmpd="sng" algn="ctr">
+                      <a:solidFill>
+                        <a:srgbClr val="2A3441"/>
+                      </a:solidFill>
+                      <a:prstDash val="solid"/>
+                      <a:round/>
+                      <a:headEnd type="none" w="med" len="med"/>
+                      <a:tailEnd type="none" w="med" len="med"/>
+                    </a:lnB>
+                    <a:solidFill>
+                      <a:srgbClr val="39FF88"/>
+                    </a:solidFill>
+                  </a:tcPr>
+                </a:tc>
+                <a:tc>
+                  <a:txBody>
+                    <a:bodyPr/>
+                    <a:lstStyle/>
+                    <a:p>
+                      <a:pPr indent="0" marL="0">
+                        <a:buNone/>
+                      </a:pPr>
+                      <a:r>
+                        <a:rPr lang="en-US" sz="1300" b="1" dirty="0">
+                          <a:solidFill>
+                            <a:srgbClr val="0B0F14"/>
+                          </a:solidFill>
+                          <a:latin typeface="Courier New" pitchFamily="34" charset="0"/>
+                          <a:ea typeface="Courier New" pitchFamily="34" charset="-122"/>
+                          <a:cs typeface="Courier New" pitchFamily="34" charset="-120"/>
+                        </a:rPr>
+                        <a:t>TCP</a:t>
+                      </a:r>
+                      <a:endParaRPr lang="en-US" sz="1300" dirty="0">
+                        <a:latin typeface="Courier New" charset="0"/>
+                        <a:ea typeface="Courier New" charset="0"/>
+                        <a:cs typeface="Courier New" charset="0"/>
+                      </a:endParaRPr>
+                    </a:p>
+                  </a:txBody>
+                  <a:tcPr marL="91440" marR="91440" marT="45720" marB="45720">
+                    <a:lnL w="12700" cap="flat" cmpd="sng" algn="ctr">
+                      <a:solidFill>
+                        <a:srgbClr val="2A3441"/>
+                      </a:solidFill>
+                      <a:prstDash val="solid"/>
+                      <a:round/>
+                      <a:headEnd type="none" w="med" len="med"/>
+                      <a:tailEnd type="none" w="med" len="med"/>
+                    </a:lnL>
+                    <a:lnR w="12700" cap="flat" cmpd="sng" algn="ctr">
+                      <a:solidFill>
+                        <a:srgbClr val="2A3441"/>
+                      </a:solidFill>
+                      <a:prstDash val="solid"/>
+                      <a:round/>
+                      <a:headEnd type="none" w="med" len="med"/>
+                      <a:tailEnd type="none" w="med" len="med"/>
+                    </a:lnR>
+                    <a:lnT w="12700" cap="flat" cmpd="sng" algn="ctr">
+                      <a:solidFill>
+                        <a:srgbClr val="2A3441"/>
+                      </a:solidFill>
+                      <a:prstDash val="solid"/>
+                      <a:round/>
+                      <a:headEnd type="none" w="med" len="med"/>
+                      <a:tailEnd type="none" w="med" len="med"/>
+                    </a:lnT>
+                    <a:lnB w="12700" cap="flat" cmpd="sng" algn="ctr">
+                      <a:solidFill>
+                        <a:srgbClr val="2A3441"/>
+                      </a:solidFill>
+                      <a:prstDash val="solid"/>
+                      <a:round/>
+                      <a:headEnd type="none" w="med" len="med"/>
+                      <a:tailEnd type="none" w="med" len="med"/>
+                    </a:lnB>
+                    <a:solidFill>
+                      <a:srgbClr val="39FF88"/>
+                    </a:solidFill>
+                  </a:tcPr>
+                </a:tc>
+                <a:tc>
+                  <a:txBody>
+                    <a:bodyPr/>
+                    <a:lstStyle/>
+                    <a:p>
+                      <a:pPr indent="0" marL="0">
+                        <a:buNone/>
+                      </a:pPr>
+                      <a:r>
+                        <a:rPr lang="en-US" sz="1300" b="1" dirty="0">
+                          <a:solidFill>
+                            <a:srgbClr val="0B0F14"/>
+                          </a:solidFill>
+                          <a:latin typeface="Courier New" pitchFamily="34" charset="0"/>
+                          <a:ea typeface="Courier New" pitchFamily="34" charset="-122"/>
+                          <a:cs typeface="Courier New" pitchFamily="34" charset="-120"/>
+                        </a:rPr>
+                        <a:t>AIMD</a:t>
+                      </a:r>
+                      <a:endParaRPr lang="en-US" sz="1300" dirty="0">
+                        <a:latin typeface="Courier New" charset="0"/>
+                        <a:ea typeface="Courier New" charset="0"/>
+                        <a:cs typeface="Courier New" charset="0"/>
+                      </a:endParaRPr>
+                    </a:p>
+                  </a:txBody>
+                  <a:tcPr marL="91440" marR="91440" marT="45720" marB="45720">
+                    <a:lnL w="12700" cap="flat" cmpd="sng" algn="ctr">
+                      <a:solidFill>
+                        <a:srgbClr val="2A3441"/>
+                      </a:solidFill>
+                      <a:prstDash val="solid"/>
+                      <a:round/>
+                      <a:headEnd type="none" w="med" len="med"/>
+                      <a:tailEnd type="none" w="med" len="med"/>
+                    </a:lnL>
+                    <a:lnR w="12700" cap="flat" cmpd="sng" algn="ctr">
+                      <a:solidFill>
+                        <a:srgbClr val="2A3441"/>
+                      </a:solidFill>
+                      <a:prstDash val="solid"/>
+                      <a:round/>
+                      <a:headEnd type="none" w="med" len="med"/>
+                      <a:tailEnd type="none" w="med" len="med"/>
+                    </a:lnR>
+                    <a:lnT w="12700" cap="flat" cmpd="sng" algn="ctr">
+                      <a:solidFill>
+                        <a:srgbClr val="2A3441"/>
+                      </a:solidFill>
+                      <a:prstDash val="solid"/>
+                      <a:round/>
+                      <a:headEnd type="none" w="med" len="med"/>
+                      <a:tailEnd type="none" w="med" len="med"/>
+                    </a:lnT>
+                    <a:lnB w="12700" cap="flat" cmpd="sng" algn="ctr">
+                      <a:solidFill>
+                        <a:srgbClr val="2A3441"/>
+                      </a:solidFill>
+                      <a:prstDash val="solid"/>
+                      <a:round/>
+                      <a:headEnd type="none" w="med" len="med"/>
+                      <a:tailEnd type="none" w="med" len="med"/>
+                    </a:lnB>
+                    <a:solidFill>
+                      <a:srgbClr val="39FF88"/>
+                    </a:solidFill>
+                  </a:tcPr>
+                </a:tc>
+                <a:tc>
+                  <a:txBody>
+                    <a:bodyPr/>
+                    <a:lstStyle/>
+                    <a:p>
+                      <a:pPr indent="0" marL="0">
+                        <a:buNone/>
+                      </a:pPr>
+                      <a:r>
+                        <a:rPr lang="en-US" sz="1300" b="1" dirty="0">
+                          <a:solidFill>
+                            <a:srgbClr val="0B0F14"/>
+                          </a:solidFill>
+                          <a:latin typeface="Courier New" pitchFamily="34" charset="0"/>
+                          <a:ea typeface="Courier New" pitchFamily="34" charset="-122"/>
+                          <a:cs typeface="Courier New" pitchFamily="34" charset="-120"/>
+                        </a:rPr>
+                        <a:t>CUBIC</a:t>
+                      </a:r>
+                      <a:endParaRPr lang="en-US" sz="1300" dirty="0">
+                        <a:latin typeface="Courier New" charset="0"/>
+                        <a:ea typeface="Courier New" charset="0"/>
+                        <a:cs typeface="Courier New" charset="0"/>
+                      </a:endParaRPr>
+                    </a:p>
+                  </a:txBody>
+                  <a:tcPr marL="91440" marR="91440" marT="45720" marB="45720">
+                    <a:lnL w="12700" cap="flat" cmpd="sng" algn="ctr">
+                      <a:solidFill>
+                        <a:srgbClr val="2A3441"/>
+                      </a:solidFill>
+                      <a:prstDash val="solid"/>
+                      <a:round/>
+                      <a:headEnd type="none" w="med" len="med"/>
+                      <a:tailEnd type="none" w="med" len="med"/>
+                    </a:lnL>
+                    <a:lnR w="12700" cap="flat" cmpd="sng" algn="ctr">
+                      <a:solidFill>
+                        <a:srgbClr val="2A3441"/>
+                      </a:solidFill>
+                      <a:prstDash val="solid"/>
+                      <a:round/>
+                      <a:headEnd type="none" w="med" len="med"/>
+                      <a:tailEnd type="none" w="med" len="med"/>
+                    </a:lnR>
+                    <a:lnT w="12700" cap="flat" cmpd="sng" algn="ctr">
+                      <a:solidFill>
+                        <a:srgbClr val="2A3441"/>
+                      </a:solidFill>
+                      <a:prstDash val="solid"/>
+                      <a:round/>
+                      <a:headEnd type="none" w="med" len="med"/>
+                      <a:tailEnd type="none" w="med" len="med"/>
+                    </a:lnT>
+                    <a:lnB w="12700" cap="flat" cmpd="sng" algn="ctr">
+                      <a:solidFill>
+                        <a:srgbClr val="2A3441"/>
+                      </a:solidFill>
+                      <a:prstDash val="solid"/>
+                      <a:round/>
+                      <a:headEnd type="none" w="med" len="med"/>
+                      <a:tailEnd type="none" w="med" len="med"/>
+                    </a:lnB>
+                    <a:solidFill>
+                      <a:srgbClr val="39FF88"/>
+                    </a:solidFill>
+                  </a:tcPr>
+                </a:tc>
+                <a:tc>
+                  <a:txBody>
+                    <a:bodyPr/>
+                    <a:lstStyle/>
+                    <a:p>
+                      <a:pPr indent="0" marL="0">
+                        <a:buNone/>
+                      </a:pPr>
+                      <a:r>
+                        <a:rPr lang="en-US" sz="1300" b="1" dirty="0">
+                          <a:solidFill>
+                            <a:srgbClr val="0B0F14"/>
+                          </a:solidFill>
+                          <a:latin typeface="Courier New" pitchFamily="34" charset="0"/>
+                          <a:ea typeface="Courier New" pitchFamily="34" charset="-122"/>
+                          <a:cs typeface="Courier New" pitchFamily="34" charset="-120"/>
+                        </a:rPr>
+                        <a:t>BBR-style</a:t>
+                      </a:r>
+                      <a:endParaRPr lang="en-US" sz="1300" dirty="0">
+                        <a:latin typeface="Courier New" charset="0"/>
+                        <a:ea typeface="Courier New" charset="0"/>
+                        <a:cs typeface="Courier New" charset="0"/>
+                      </a:endParaRPr>
+                    </a:p>
+                  </a:txBody>
+                  <a:tcPr marL="91440" marR="91440" marT="45720" marB="45720">
+                    <a:lnL w="12700" cap="flat" cmpd="sng" algn="ctr">
+                      <a:solidFill>
+                        <a:srgbClr val="2A3441"/>
+                      </a:solidFill>
+                      <a:prstDash val="solid"/>
+                      <a:round/>
+                      <a:headEnd type="none" w="med" len="med"/>
+                      <a:tailEnd type="none" w="med" len="med"/>
+                    </a:lnL>
+                    <a:lnR w="12700" cap="flat" cmpd="sng" algn="ctr">
+                      <a:solidFill>
+                        <a:srgbClr val="2A3441"/>
+                      </a:solidFill>
+                      <a:prstDash val="solid"/>
+                      <a:round/>
+                      <a:headEnd type="none" w="med" len="med"/>
+                      <a:tailEnd type="none" w="med" len="med"/>
+                    </a:lnR>
+                    <a:lnT w="12700" cap="flat" cmpd="sng" algn="ctr">
+                      <a:solidFill>
+                        <a:srgbClr val="2A3441"/>
+                      </a:solidFill>
+                      <a:prstDash val="solid"/>
+                      <a:round/>
+                      <a:headEnd type="none" w="med" len="med"/>
+                      <a:tailEnd type="none" w="med" len="med"/>
+                    </a:lnT>
+                    <a:lnB w="12700" cap="flat" cmpd="sng" algn="ctr">
+                      <a:solidFill>
+                        <a:srgbClr val="2A3441"/>
+                      </a:solidFill>
+                      <a:prstDash val="solid"/>
+                      <a:round/>
+                      <a:headEnd type="none" w="med" len="med"/>
+                      <a:tailEnd type="none" w="med" len="med"/>
+                    </a:lnB>
+                    <a:solidFill>
+                      <a:srgbClr val="39FF88"/>
+                    </a:solidFill>
+                  </a:tcPr>
+                </a:tc>
+                <a:tc>
+                  <a:txBody>
+                    <a:bodyPr/>
+                    <a:lstStyle/>
+                    <a:p>
+                      <a:pPr indent="0" marL="0">
+                        <a:buNone/>
+                      </a:pPr>
+                      <a:r>
+                        <a:rPr lang="en-US" sz="1300" b="1" dirty="0">
+                          <a:solidFill>
+                            <a:srgbClr val="0B0F14"/>
+                          </a:solidFill>
+                          <a:latin typeface="Courier New" pitchFamily="34" charset="0"/>
+                          <a:ea typeface="Courier New" pitchFamily="34" charset="-122"/>
+                          <a:cs typeface="Courier New" pitchFamily="34" charset="-120"/>
+                        </a:rPr>
+                        <a:t>Neural</a:t>
+                      </a:r>
+                      <a:endParaRPr lang="en-US" sz="1300" dirty="0">
+                        <a:latin typeface="Courier New" charset="0"/>
+                        <a:ea typeface="Courier New" charset="0"/>
+                        <a:cs typeface="Courier New" charset="0"/>
+                      </a:endParaRPr>
+                    </a:p>
+                  </a:txBody>
+                  <a:tcPr marL="91440" marR="91440" marT="45720" marB="45720">
+                    <a:lnL w="12700" cap="flat" cmpd="sng" algn="ctr">
+                      <a:solidFill>
+                        <a:srgbClr val="2A3441"/>
+                      </a:solidFill>
+                      <a:prstDash val="solid"/>
+                      <a:round/>
+                      <a:headEnd type="none" w="med" len="med"/>
+                      <a:tailEnd type="none" w="med" len="med"/>
+                    </a:lnL>
+                    <a:lnR w="12700" cap="flat" cmpd="sng" algn="ctr">
+                      <a:solidFill>
+                        <a:srgbClr val="2A3441"/>
+                      </a:solidFill>
+                      <a:prstDash val="solid"/>
+                      <a:round/>
+                      <a:headEnd type="none" w="med" len="med"/>
+                      <a:tailEnd type="none" w="med" len="med"/>
+                    </a:lnR>
+                    <a:lnT w="12700" cap="flat" cmpd="sng" algn="ctr">
+                      <a:solidFill>
+                        <a:srgbClr val="2A3441"/>
+                      </a:solidFill>
+                      <a:prstDash val="solid"/>
+                      <a:round/>
+                      <a:headEnd type="none" w="med" len="med"/>
+                      <a:tailEnd type="none" w="med" len="med"/>
+                    </a:lnT>
+                    <a:lnB w="12700" cap="flat" cmpd="sng" algn="ctr">
+                      <a:solidFill>
+                        <a:srgbClr val="2A3441"/>
+                      </a:solidFill>
+                      <a:prstDash val="solid"/>
+                      <a:round/>
+                      <a:headEnd type="none" w="med" len="med"/>
+                      <a:tailEnd type="none" w="med" len="med"/>
+                    </a:lnB>
+                    <a:solidFill>
+                      <a:srgbClr val="39FF88"/>
+                    </a:solidFill>
+                  </a:tcPr>
+                </a:tc>
+              </a:tr>
+              <a:tr h="384048">
+                <a:tc>
+                  <a:txBody>
+                    <a:bodyPr/>
+                    <a:lstStyle/>
+                    <a:p>
+                      <a:pPr indent="0" marL="0">
+                        <a:buNone/>
+                      </a:pPr>
+                      <a:r>
+                        <a:rPr lang="en-US" sz="1300" dirty="0">
+                          <a:solidFill>
+                            <a:srgbClr val="E6EDF3"/>
+                          </a:solidFill>
+                          <a:latin typeface="Calibri" pitchFamily="34" charset="0"/>
+                          <a:ea typeface="Calibri" pitchFamily="34" charset="-122"/>
+                          <a:cs typeface="Calibri" pitchFamily="34" charset="-120"/>
+                        </a:rPr>
+                        <a:t>Rep 1 (clean)</a:t>
+                      </a:r>
+                      <a:endParaRPr lang="en-US" sz="1300" dirty="0">
+                        <a:latin typeface="Calibri" charset="0"/>
+                        <a:ea typeface="Calibri" charset="0"/>
+                        <a:cs typeface="Calibri" charset="0"/>
+                      </a:endParaRPr>
+                    </a:p>
+                  </a:txBody>
+                  <a:tcPr marL="91440" marR="91440" marT="45720" marB="45720">
+                    <a:lnL w="12700" cap="flat" cmpd="sng" algn="ctr">
+                      <a:solidFill>
+                        <a:srgbClr val="2A3441"/>
+                      </a:solidFill>
+                      <a:prstDash val="solid"/>
+                      <a:round/>
+                      <a:headEnd type="none" w="med" len="med"/>
+                      <a:tailEnd type="none" w="med" len="med"/>
+                    </a:lnL>
+                    <a:lnR w="12700" cap="flat" cmpd="sng" algn="ctr">
+                      <a:solidFill>
+                        <a:srgbClr val="2A3441"/>
+                      </a:solidFill>
+                      <a:prstDash val="solid"/>
+                      <a:round/>
+                      <a:headEnd type="none" w="med" len="med"/>
+                      <a:tailEnd type="none" w="med" len="med"/>
+                    </a:lnR>
+                    <a:lnT w="12700" cap="flat" cmpd="sng" algn="ctr">
+                      <a:solidFill>
+                        <a:srgbClr val="2A3441"/>
+                      </a:solidFill>
+                      <a:prstDash val="solid"/>
+                      <a:round/>
+                      <a:headEnd type="none" w="med" len="med"/>
+                      <a:tailEnd type="none" w="med" len="med"/>
+                    </a:lnT>
+                    <a:lnB w="12700" cap="flat" cmpd="sng" algn="ctr">
+                      <a:solidFill>
+                        <a:srgbClr val="2A3441"/>
+                      </a:solidFill>
+                      <a:prstDash val="solid"/>
+                      <a:round/>
+                      <a:headEnd type="none" w="med" len="med"/>
+                      <a:tailEnd type="none" w="med" len="med"/>
+                    </a:lnB>
+                    <a:solidFill>
+                      <a:srgbClr val="141B24"/>
+                    </a:solidFill>
+                  </a:tcPr>
+                </a:tc>
+                <a:tc>
+                  <a:txBody>
+                    <a:bodyPr/>
+                    <a:lstStyle/>
+                    <a:p>
+                      <a:pPr indent="0" marL="0">
+                        <a:buNone/>
+                      </a:pPr>
+                      <a:r>
+                        <a:rPr lang="en-US" sz="1300" dirty="0">
+                          <a:solidFill>
+                            <a:srgbClr val="E6EDF3"/>
+                          </a:solidFill>
+                          <a:latin typeface="Calibri" pitchFamily="34" charset="0"/>
+                          <a:ea typeface="Calibri" pitchFamily="34" charset="-122"/>
+                          <a:cs typeface="Calibri" pitchFamily="34" charset="-120"/>
+                        </a:rPr>
+                        <a:t>2.5</a:t>
+                      </a:r>
+                      <a:endParaRPr lang="en-US" sz="1300" dirty="0">
+                        <a:latin typeface="Calibri" charset="0"/>
+                        <a:ea typeface="Calibri" charset="0"/>
+                        <a:cs typeface="Calibri" charset="0"/>
+                      </a:endParaRPr>
+                    </a:p>
+                  </a:txBody>
+                  <a:tcPr marL="91440" marR="91440" marT="45720" marB="45720">
+                    <a:lnL w="12700" cap="flat" cmpd="sng" algn="ctr">
+                      <a:solidFill>
+                        <a:srgbClr val="2A3441"/>
+                      </a:solidFill>
+                      <a:prstDash val="solid"/>
+                      <a:round/>
+                      <a:headEnd type="none" w="med" len="med"/>
+                      <a:tailEnd type="none" w="med" len="med"/>
+                    </a:lnL>
+                    <a:lnR w="12700" cap="flat" cmpd="sng" algn="ctr">
+                      <a:solidFill>
+                        <a:srgbClr val="2A3441"/>
+                      </a:solidFill>
+                      <a:prstDash val="solid"/>
+                      <a:round/>
+                      <a:headEnd type="none" w="med" len="med"/>
+                      <a:tailEnd type="none" w="med" len="med"/>
+                    </a:lnR>
+                    <a:lnT w="12700" cap="flat" cmpd="sng" algn="ctr">
+                      <a:solidFill>
+                        <a:srgbClr val="2A3441"/>
+                      </a:solidFill>
+                      <a:prstDash val="solid"/>
+                      <a:round/>
+                      <a:headEnd type="none" w="med" len="med"/>
+                      <a:tailEnd type="none" w="med" len="med"/>
+                    </a:lnT>
+                    <a:lnB w="12700" cap="flat" cmpd="sng" algn="ctr">
+                      <a:solidFill>
+                        <a:srgbClr val="2A3441"/>
+                      </a:solidFill>
+                      <a:prstDash val="solid"/>
+                      <a:round/>
+                      <a:headEnd type="none" w="med" len="med"/>
+                      <a:tailEnd type="none" w="med" len="med"/>
+                    </a:lnB>
+                    <a:solidFill>
+                      <a:srgbClr val="141B24"/>
+                    </a:solidFill>
+                  </a:tcPr>
+                </a:tc>
+                <a:tc>
+                  <a:txBody>
+                    <a:bodyPr/>
+                    <a:lstStyle/>
+                    <a:p>
+                      <a:pPr indent="0" marL="0">
+                        <a:buNone/>
+                      </a:pPr>
+                      <a:r>
+                        <a:rPr lang="en-US" sz="1300" dirty="0">
+                          <a:solidFill>
+                            <a:srgbClr val="E6EDF3"/>
+                          </a:solidFill>
+                          <a:latin typeface="Calibri" pitchFamily="34" charset="0"/>
+                          <a:ea typeface="Calibri" pitchFamily="34" charset="-122"/>
+                          <a:cs typeface="Calibri" pitchFamily="34" charset="-120"/>
+                        </a:rPr>
+                        <a:t>14.2</a:t>
+                      </a:r>
+                      <a:endParaRPr lang="en-US" sz="1300" dirty="0">
+                        <a:latin typeface="Calibri" charset="0"/>
+                        <a:ea typeface="Calibri" charset="0"/>
+                        <a:cs typeface="Calibri" charset="0"/>
+                      </a:endParaRPr>
+                    </a:p>
+                  </a:txBody>
+                  <a:tcPr marL="91440" marR="91440" marT="45720" marB="45720">
+                    <a:lnL w="12700" cap="flat" cmpd="sng" algn="ctr">
+                      <a:solidFill>
+                        <a:srgbClr val="2A3441"/>
+                      </a:solidFill>
+                      <a:prstDash val="solid"/>
+                      <a:round/>
+                      <a:headEnd type="none" w="med" len="med"/>
+                      <a:tailEnd type="none" w="med" len="med"/>
+                    </a:lnL>
+                    <a:lnR w="12700" cap="flat" cmpd="sng" algn="ctr">
+                      <a:solidFill>
+                        <a:srgbClr val="2A3441"/>
+                      </a:solidFill>
+                      <a:prstDash val="solid"/>
+                      <a:round/>
+                      <a:headEnd type="none" w="med" len="med"/>
+                      <a:tailEnd type="none" w="med" len="med"/>
+                    </a:lnR>
+                    <a:lnT w="12700" cap="flat" cmpd="sng" algn="ctr">
+                      <a:solidFill>
+                        <a:srgbClr val="2A3441"/>
+                      </a:solidFill>
+                      <a:prstDash val="solid"/>
+                      <a:round/>
+                      <a:headEnd type="none" w="med" len="med"/>
+                      <a:tailEnd type="none" w="med" len="med"/>
+                    </a:lnT>
+                    <a:lnB w="12700" cap="flat" cmpd="sng" algn="ctr">
+                      <a:solidFill>
+                        <a:srgbClr val="2A3441"/>
+                      </a:solidFill>
+                      <a:prstDash val="solid"/>
+                      <a:round/>
+                      <a:headEnd type="none" w="med" len="med"/>
+                      <a:tailEnd type="none" w="med" len="med"/>
+                    </a:lnB>
+                    <a:solidFill>
+                      <a:srgbClr val="141B24"/>
+                    </a:solidFill>
+                  </a:tcPr>
+                </a:tc>
+                <a:tc>
+                  <a:txBody>
+                    <a:bodyPr/>
+                    <a:lstStyle/>
+                    <a:p>
+                      <a:pPr indent="0" marL="0">
+                        <a:buNone/>
+                      </a:pPr>
+                      <a:r>
+                        <a:rPr lang="en-US" sz="1300" dirty="0">
+                          <a:solidFill>
+                            <a:srgbClr val="E6EDF3"/>
+                          </a:solidFill>
+                          <a:latin typeface="Calibri" pitchFamily="34" charset="0"/>
+                          <a:ea typeface="Calibri" pitchFamily="34" charset="-122"/>
+                          <a:cs typeface="Calibri" pitchFamily="34" charset="-120"/>
+                        </a:rPr>
+                        <a:t>12.4</a:t>
+                      </a:r>
+                      <a:endParaRPr lang="en-US" sz="1300" dirty="0">
+                        <a:latin typeface="Calibri" charset="0"/>
+                        <a:ea typeface="Calibri" charset="0"/>
+                        <a:cs typeface="Calibri" charset="0"/>
+                      </a:endParaRPr>
+                    </a:p>
+                  </a:txBody>
+                  <a:tcPr marL="91440" marR="91440" marT="45720" marB="45720">
+                    <a:lnL w="12700" cap="flat" cmpd="sng" algn="ctr">
+                      <a:solidFill>
+                        <a:srgbClr val="2A3441"/>
+                      </a:solidFill>
+                      <a:prstDash val="solid"/>
+                      <a:round/>
+                      <a:headEnd type="none" w="med" len="med"/>
+                      <a:tailEnd type="none" w="med" len="med"/>
+                    </a:lnL>
+                    <a:lnR w="12700" cap="flat" cmpd="sng" algn="ctr">
+                      <a:solidFill>
+                        <a:srgbClr val="2A3441"/>
+                      </a:solidFill>
+                      <a:prstDash val="solid"/>
+                      <a:round/>
+                      <a:headEnd type="none" w="med" len="med"/>
+                      <a:tailEnd type="none" w="med" len="med"/>
+                    </a:lnR>
+                    <a:lnT w="12700" cap="flat" cmpd="sng" algn="ctr">
+                      <a:solidFill>
+                        <a:srgbClr val="2A3441"/>
+                      </a:solidFill>
+                      <a:prstDash val="solid"/>
+                      <a:round/>
+                      <a:headEnd type="none" w="med" len="med"/>
+                      <a:tailEnd type="none" w="med" len="med"/>
+                    </a:lnT>
+                    <a:lnB w="12700" cap="flat" cmpd="sng" algn="ctr">
+                      <a:solidFill>
+                        <a:srgbClr val="2A3441"/>
+                      </a:solidFill>
+                      <a:prstDash val="solid"/>
+                      <a:round/>
+                      <a:headEnd type="none" w="med" len="med"/>
+                      <a:tailEnd type="none" w="med" len="med"/>
+                    </a:lnB>
+                    <a:solidFill>
+                      <a:srgbClr val="141B24"/>
+                    </a:solidFill>
+                  </a:tcPr>
+                </a:tc>
+                <a:tc>
+                  <a:txBody>
+                    <a:bodyPr/>
+                    <a:lstStyle/>
+                    <a:p>
+                      <a:pPr indent="0" marL="0">
+                        <a:buNone/>
+                      </a:pPr>
+                      <a:r>
+                        <a:rPr lang="en-US" sz="1300" dirty="0">
+                          <a:solidFill>
+                            <a:srgbClr val="E6EDF3"/>
+                          </a:solidFill>
+                          <a:latin typeface="Calibri" pitchFamily="34" charset="0"/>
+                          <a:ea typeface="Calibri" pitchFamily="34" charset="-122"/>
+                          <a:cs typeface="Calibri" pitchFamily="34" charset="-120"/>
+                        </a:rPr>
+                        <a:t>6.4</a:t>
+                      </a:r>
+                      <a:endParaRPr lang="en-US" sz="1300" dirty="0">
+                        <a:latin typeface="Calibri" charset="0"/>
+                        <a:ea typeface="Calibri" charset="0"/>
+                        <a:cs typeface="Calibri" charset="0"/>
+                      </a:endParaRPr>
+                    </a:p>
+                  </a:txBody>
+                  <a:tcPr marL="91440" marR="91440" marT="45720" marB="45720">
+                    <a:lnL w="12700" cap="flat" cmpd="sng" algn="ctr">
+                      <a:solidFill>
+                        <a:srgbClr val="2A3441"/>
+                      </a:solidFill>
+                      <a:prstDash val="solid"/>
+                      <a:round/>
+                      <a:headEnd type="none" w="med" len="med"/>
+                      <a:tailEnd type="none" w="med" len="med"/>
+                    </a:lnL>
+                    <a:lnR w="12700" cap="flat" cmpd="sng" algn="ctr">
+                      <a:solidFill>
+                        <a:srgbClr val="2A3441"/>
+                      </a:solidFill>
+                      <a:prstDash val="solid"/>
+                      <a:round/>
+                      <a:headEnd type="none" w="med" len="med"/>
+                      <a:tailEnd type="none" w="med" len="med"/>
+                    </a:lnR>
+                    <a:lnT w="12700" cap="flat" cmpd="sng" algn="ctr">
+                      <a:solidFill>
+                        <a:srgbClr val="2A3441"/>
+                      </a:solidFill>
+                      <a:prstDash val="solid"/>
+                      <a:round/>
+                      <a:headEnd type="none" w="med" len="med"/>
+                      <a:tailEnd type="none" w="med" len="med"/>
+                    </a:lnT>
+                    <a:lnB w="12700" cap="flat" cmpd="sng" algn="ctr">
+                      <a:solidFill>
+                        <a:srgbClr val="2A3441"/>
+                      </a:solidFill>
+                      <a:prstDash val="solid"/>
+                      <a:round/>
+                      <a:headEnd type="none" w="med" len="med"/>
+                      <a:tailEnd type="none" w="med" len="med"/>
+                    </a:lnB>
+                    <a:solidFill>
+                      <a:srgbClr val="141B24"/>
+                    </a:solidFill>
+                  </a:tcPr>
+                </a:tc>
+                <a:tc>
+                  <a:txBody>
+                    <a:bodyPr/>
+                    <a:lstStyle/>
+                    <a:p>
+                      <a:pPr indent="0" marL="0">
+                        <a:buNone/>
+                      </a:pPr>
+                      <a:r>
+                        <a:rPr lang="en-US" sz="1300" dirty="0">
+                          <a:solidFill>
+                            <a:srgbClr val="E6EDF3"/>
+                          </a:solidFill>
+                          <a:latin typeface="Calibri" pitchFamily="34" charset="0"/>
+                          <a:ea typeface="Calibri" pitchFamily="34" charset="-122"/>
+                          <a:cs typeface="Calibri" pitchFamily="34" charset="-120"/>
+                        </a:rPr>
+                        <a:t>4.7</a:t>
+                      </a:r>
+                      <a:endParaRPr lang="en-US" sz="1300" dirty="0">
+                        <a:latin typeface="Calibri" charset="0"/>
+                        <a:ea typeface="Calibri" charset="0"/>
+                        <a:cs typeface="Calibri" charset="0"/>
+                      </a:endParaRPr>
+                    </a:p>
+                  </a:txBody>
+                  <a:tcPr marL="91440" marR="91440" marT="45720" marB="45720">
+                    <a:lnL w="12700" cap="flat" cmpd="sng" algn="ctr">
+                      <a:solidFill>
+                        <a:srgbClr val="2A3441"/>
+                      </a:solidFill>
+                      <a:prstDash val="solid"/>
+                      <a:round/>
+                      <a:headEnd type="none" w="med" len="med"/>
+                      <a:tailEnd type="none" w="med" len="med"/>
+                    </a:lnL>
+                    <a:lnR w="12700" cap="flat" cmpd="sng" algn="ctr">
+                      <a:solidFill>
+                        <a:srgbClr val="2A3441"/>
+                      </a:solidFill>
+                      <a:prstDash val="solid"/>
+                      <a:round/>
+                      <a:headEnd type="none" w="med" len="med"/>
+                      <a:tailEnd type="none" w="med" len="med"/>
+                    </a:lnR>
+                    <a:lnT w="12700" cap="flat" cmpd="sng" algn="ctr">
+                      <a:solidFill>
+                        <a:srgbClr val="2A3441"/>
+                      </a:solidFill>
+                      <a:prstDash val="solid"/>
+                      <a:round/>
+                      <a:headEnd type="none" w="med" len="med"/>
+                      <a:tailEnd type="none" w="med" len="med"/>
+                    </a:lnT>
+                    <a:lnB w="12700" cap="flat" cmpd="sng" algn="ctr">
+                      <a:solidFill>
+                        <a:srgbClr val="2A3441"/>
+                      </a:solidFill>
+                      <a:prstDash val="solid"/>
+                      <a:round/>
+                      <a:headEnd type="none" w="med" len="med"/>
+                      <a:tailEnd type="none" w="med" len="med"/>
+                    </a:lnB>
+                    <a:solidFill>
+                      <a:srgbClr val="141B24"/>
+                    </a:solidFill>
+                  </a:tcPr>
+                </a:tc>
+              </a:tr>
+              <a:tr h="384048">
+                <a:tc>
+                  <a:txBody>
+                    <a:bodyPr/>
+                    <a:lstStyle/>
+                    <a:p>
+                      <a:pPr indent="0" marL="0">
+                        <a:buNone/>
+                      </a:pPr>
+                      <a:r>
+                        <a:rPr lang="en-US" sz="1300" dirty="0">
+                          <a:solidFill>
+                            <a:srgbClr val="E6EDF3"/>
+                          </a:solidFill>
+                          <a:latin typeface="Calibri" pitchFamily="34" charset="0"/>
+                          <a:ea typeface="Calibri" pitchFamily="34" charset="-122"/>
+                          <a:cs typeface="Calibri" pitchFamily="34" charset="-120"/>
+                        </a:rPr>
+                        <a:t>Rep 2 (clean)</a:t>
+                      </a:r>
+                      <a:endParaRPr lang="en-US" sz="1300" dirty="0">
+                        <a:latin typeface="Calibri" charset="0"/>
+                        <a:ea typeface="Calibri" charset="0"/>
+                        <a:cs typeface="Calibri" charset="0"/>
+                      </a:endParaRPr>
+                    </a:p>
+                  </a:txBody>
+                  <a:tcPr marL="91440" marR="91440" marT="45720" marB="45720">
+                    <a:lnL w="12700" cap="flat" cmpd="sng" algn="ctr">
+                      <a:solidFill>
+                        <a:srgbClr val="2A3441"/>
+                      </a:solidFill>
+                      <a:prstDash val="solid"/>
+                      <a:round/>
+                      <a:headEnd type="none" w="med" len="med"/>
+                      <a:tailEnd type="none" w="med" len="med"/>
+                    </a:lnL>
+                    <a:lnR w="12700" cap="flat" cmpd="sng" algn="ctr">
+                      <a:solidFill>
+                        <a:srgbClr val="2A3441"/>
+                      </a:solidFill>
+                      <a:prstDash val="solid"/>
+                      <a:round/>
+                      <a:headEnd type="none" w="med" len="med"/>
+                      <a:tailEnd type="none" w="med" len="med"/>
+                    </a:lnR>
+                    <a:lnT w="12700" cap="flat" cmpd="sng" algn="ctr">
+                      <a:solidFill>
+                        <a:srgbClr val="2A3441"/>
+                      </a:solidFill>
+                      <a:prstDash val="solid"/>
+                      <a:round/>
+                      <a:headEnd type="none" w="med" len="med"/>
+                      <a:tailEnd type="none" w="med" len="med"/>
+                    </a:lnT>
+                    <a:lnB w="12700" cap="flat" cmpd="sng" algn="ctr">
+                      <a:solidFill>
+                        <a:srgbClr val="2A3441"/>
+                      </a:solidFill>
+                      <a:prstDash val="solid"/>
+                      <a:round/>
+                      <a:headEnd type="none" w="med" len="med"/>
+                      <a:tailEnd type="none" w="med" len="med"/>
+                    </a:lnB>
+                    <a:solidFill>
+                      <a:srgbClr val="141B24"/>
+                    </a:solidFill>
+                  </a:tcPr>
+                </a:tc>
+                <a:tc>
+                  <a:txBody>
+                    <a:bodyPr/>
+                    <a:lstStyle/>
+                    <a:p>
+                      <a:pPr indent="0" marL="0">
+                        <a:buNone/>
+                      </a:pPr>
+                      <a:r>
+                        <a:rPr lang="en-US" sz="1300" dirty="0">
+                          <a:solidFill>
+                            <a:srgbClr val="E6EDF3"/>
+                          </a:solidFill>
+                          <a:latin typeface="Calibri" pitchFamily="34" charset="0"/>
+                          <a:ea typeface="Calibri" pitchFamily="34" charset="-122"/>
+                          <a:cs typeface="Calibri" pitchFamily="34" charset="-120"/>
+                        </a:rPr>
+                        <a:t>2.0</a:t>
+                      </a:r>
+                      <a:endParaRPr lang="en-US" sz="1300" dirty="0">
+                        <a:latin typeface="Calibri" charset="0"/>
+                        <a:ea typeface="Calibri" charset="0"/>
+                        <a:cs typeface="Calibri" charset="0"/>
+                      </a:endParaRPr>
+                    </a:p>
+                  </a:txBody>
+                  <a:tcPr marL="91440" marR="91440" marT="45720" marB="45720">
+                    <a:lnL w="12700" cap="flat" cmpd="sng" algn="ctr">
+                      <a:solidFill>
+                        <a:srgbClr val="2A3441"/>
+                      </a:solidFill>
+                      <a:prstDash val="solid"/>
+                      <a:round/>
+                      <a:headEnd type="none" w="med" len="med"/>
+                      <a:tailEnd type="none" w="med" len="med"/>
+                    </a:lnL>
+                    <a:lnR w="12700" cap="flat" cmpd="sng" algn="ctr">
+                      <a:solidFill>
+                        <a:srgbClr val="2A3441"/>
+                      </a:solidFill>
+                      <a:prstDash val="solid"/>
+                      <a:round/>
+                      <a:headEnd type="none" w="med" len="med"/>
+                      <a:tailEnd type="none" w="med" len="med"/>
+                    </a:lnR>
+                    <a:lnT w="12700" cap="flat" cmpd="sng" algn="ctr">
+                      <a:solidFill>
+                        <a:srgbClr val="2A3441"/>
+                      </a:solidFill>
+                      <a:prstDash val="solid"/>
+                      <a:round/>
+                      <a:headEnd type="none" w="med" len="med"/>
+                      <a:tailEnd type="none" w="med" len="med"/>
+                    </a:lnT>
+                    <a:lnB w="12700" cap="flat" cmpd="sng" algn="ctr">
+                      <a:solidFill>
+                        <a:srgbClr val="2A3441"/>
+                      </a:solidFill>
+                      <a:prstDash val="solid"/>
+                      <a:round/>
+                      <a:headEnd type="none" w="med" len="med"/>
+                      <a:tailEnd type="none" w="med" len="med"/>
+                    </a:lnB>
+                    <a:solidFill>
+                      <a:srgbClr val="141B24"/>
+                    </a:solidFill>
+                  </a:tcPr>
+                </a:tc>
+                <a:tc>
+                  <a:txBody>
+                    <a:bodyPr/>
+                    <a:lstStyle/>
+                    <a:p>
+                      <a:pPr indent="0" marL="0">
+                        <a:buNone/>
+                      </a:pPr>
+                      <a:r>
+                        <a:rPr lang="en-US" sz="1300" dirty="0">
+                          <a:solidFill>
+                            <a:srgbClr val="E6EDF3"/>
+                          </a:solidFill>
+                          <a:latin typeface="Calibri" pitchFamily="34" charset="0"/>
+                          <a:ea typeface="Calibri" pitchFamily="34" charset="-122"/>
+                          <a:cs typeface="Calibri" pitchFamily="34" charset="-120"/>
+                        </a:rPr>
+                        <a:t>12.0</a:t>
+                      </a:r>
+                      <a:endParaRPr lang="en-US" sz="1300" dirty="0">
+                        <a:latin typeface="Calibri" charset="0"/>
+                        <a:ea typeface="Calibri" charset="0"/>
+                        <a:cs typeface="Calibri" charset="0"/>
+                      </a:endParaRPr>
+                    </a:p>
+                  </a:txBody>
+                  <a:tcPr marL="91440" marR="91440" marT="45720" marB="45720">
+                    <a:lnL w="12700" cap="flat" cmpd="sng" algn="ctr">
+                      <a:solidFill>
+                        <a:srgbClr val="2A3441"/>
+                      </a:solidFill>
+                      <a:prstDash val="solid"/>
+                      <a:round/>
+                      <a:headEnd type="none" w="med" len="med"/>
+                      <a:tailEnd type="none" w="med" len="med"/>
+                    </a:lnL>
+                    <a:lnR w="12700" cap="flat" cmpd="sng" algn="ctr">
+                      <a:solidFill>
+                        <a:srgbClr val="2A3441"/>
+                      </a:solidFill>
+                      <a:prstDash val="solid"/>
+                      <a:round/>
+                      <a:headEnd type="none" w="med" len="med"/>
+                      <a:tailEnd type="none" w="med" len="med"/>
+                    </a:lnR>
+                    <a:lnT w="12700" cap="flat" cmpd="sng" algn="ctr">
+                      <a:solidFill>
+                        <a:srgbClr val="2A3441"/>
+                      </a:solidFill>
+                      <a:prstDash val="solid"/>
+                      <a:round/>
+                      <a:headEnd type="none" w="med" len="med"/>
+                      <a:tailEnd type="none" w="med" len="med"/>
+                    </a:lnT>
+                    <a:lnB w="12700" cap="flat" cmpd="sng" algn="ctr">
+                      <a:solidFill>
+                        <a:srgbClr val="2A3441"/>
+                      </a:solidFill>
+                      <a:prstDash val="solid"/>
+                      <a:round/>
+                      <a:headEnd type="none" w="med" len="med"/>
+                      <a:tailEnd type="none" w="med" len="med"/>
+                    </a:lnB>
+                    <a:solidFill>
+                      <a:srgbClr val="141B24"/>
+                    </a:solidFill>
+                  </a:tcPr>
+                </a:tc>
+                <a:tc>
+                  <a:txBody>
+                    <a:bodyPr/>
+                    <a:lstStyle/>
+                    <a:p>
+                      <a:pPr indent="0" marL="0">
+                        <a:buNone/>
+                      </a:pPr>
+                      <a:r>
+                        <a:rPr lang="en-US" sz="1300" dirty="0">
+                          <a:solidFill>
+                            <a:srgbClr val="E6EDF3"/>
+                          </a:solidFill>
+                          <a:latin typeface="Calibri" pitchFamily="34" charset="0"/>
+                          <a:ea typeface="Calibri" pitchFamily="34" charset="-122"/>
+                          <a:cs typeface="Calibri" pitchFamily="34" charset="-120"/>
+                        </a:rPr>
+                        <a:t>-</a:t>
+                      </a:r>
+                      <a:endParaRPr lang="en-US" sz="1300" dirty="0">
+                        <a:latin typeface="Calibri" charset="0"/>
+                        <a:ea typeface="Calibri" charset="0"/>
+                        <a:cs typeface="Calibri" charset="0"/>
+                      </a:endParaRPr>
+                    </a:p>
+                  </a:txBody>
+                  <a:tcPr marL="91440" marR="91440" marT="45720" marB="45720">
+                    <a:lnL w="12700" cap="flat" cmpd="sng" algn="ctr">
+                      <a:solidFill>
+                        <a:srgbClr val="2A3441"/>
+                      </a:solidFill>
+                      <a:prstDash val="solid"/>
+                      <a:round/>
+                      <a:headEnd type="none" w="med" len="med"/>
+                      <a:tailEnd type="none" w="med" len="med"/>
+                    </a:lnL>
+                    <a:lnR w="12700" cap="flat" cmpd="sng" algn="ctr">
+                      <a:solidFill>
+                        <a:srgbClr val="2A3441"/>
+                      </a:solidFill>
+                      <a:prstDash val="solid"/>
+                      <a:round/>
+                      <a:headEnd type="none" w="med" len="med"/>
+                      <a:tailEnd type="none" w="med" len="med"/>
+                    </a:lnR>
+                    <a:lnT w="12700" cap="flat" cmpd="sng" algn="ctr">
+                      <a:solidFill>
+                        <a:srgbClr val="2A3441"/>
+                      </a:solidFill>
+                      <a:prstDash val="solid"/>
+                      <a:round/>
+                      <a:headEnd type="none" w="med" len="med"/>
+                      <a:tailEnd type="none" w="med" len="med"/>
+                    </a:lnT>
+                    <a:lnB w="12700" cap="flat" cmpd="sng" algn="ctr">
+                      <a:solidFill>
+                        <a:srgbClr val="2A3441"/>
+                      </a:solidFill>
+                      <a:prstDash val="solid"/>
+                      <a:round/>
+                      <a:headEnd type="none" w="med" len="med"/>
+                      <a:tailEnd type="none" w="med" len="med"/>
+                    </a:lnB>
+                    <a:solidFill>
+                      <a:srgbClr val="141B24"/>
+                    </a:solidFill>
+                  </a:tcPr>
+                </a:tc>
+                <a:tc>
+                  <a:txBody>
+                    <a:bodyPr/>
+                    <a:lstStyle/>
+                    <a:p>
+                      <a:pPr indent="0" marL="0">
+                        <a:buNone/>
+                      </a:pPr>
+                      <a:r>
+                        <a:rPr lang="en-US" sz="1300" dirty="0">
+                          <a:solidFill>
+                            <a:srgbClr val="E6EDF3"/>
+                          </a:solidFill>
+                          <a:latin typeface="Calibri" pitchFamily="34" charset="0"/>
+                          <a:ea typeface="Calibri" pitchFamily="34" charset="-122"/>
+                          <a:cs typeface="Calibri" pitchFamily="34" charset="-120"/>
+                        </a:rPr>
+                        <a:t>-</a:t>
+                      </a:r>
+                      <a:endParaRPr lang="en-US" sz="1300" dirty="0">
+                        <a:latin typeface="Calibri" charset="0"/>
+                        <a:ea typeface="Calibri" charset="0"/>
+                        <a:cs typeface="Calibri" charset="0"/>
+                      </a:endParaRPr>
+                    </a:p>
+                  </a:txBody>
+                  <a:tcPr marL="91440" marR="91440" marT="45720" marB="45720">
+                    <a:lnL w="12700" cap="flat" cmpd="sng" algn="ctr">
+                      <a:solidFill>
+                        <a:srgbClr val="2A3441"/>
+                      </a:solidFill>
+                      <a:prstDash val="solid"/>
+                      <a:round/>
+                      <a:headEnd type="none" w="med" len="med"/>
+                      <a:tailEnd type="none" w="med" len="med"/>
+                    </a:lnL>
+                    <a:lnR w="12700" cap="flat" cmpd="sng" algn="ctr">
+                      <a:solidFill>
+                        <a:srgbClr val="2A3441"/>
+                      </a:solidFill>
+                      <a:prstDash val="solid"/>
+                      <a:round/>
+                      <a:headEnd type="none" w="med" len="med"/>
+                      <a:tailEnd type="none" w="med" len="med"/>
+                    </a:lnR>
+                    <a:lnT w="12700" cap="flat" cmpd="sng" algn="ctr">
+                      <a:solidFill>
+                        <a:srgbClr val="2A3441"/>
+                      </a:solidFill>
+                      <a:prstDash val="solid"/>
+                      <a:round/>
+                      <a:headEnd type="none" w="med" len="med"/>
+                      <a:tailEnd type="none" w="med" len="med"/>
+                    </a:lnT>
+                    <a:lnB w="12700" cap="flat" cmpd="sng" algn="ctr">
+                      <a:solidFill>
+                        <a:srgbClr val="2A3441"/>
+                      </a:solidFill>
+                      <a:prstDash val="solid"/>
+                      <a:round/>
+                      <a:headEnd type="none" w="med" len="med"/>
+                      <a:tailEnd type="none" w="med" len="med"/>
+                    </a:lnB>
+                    <a:solidFill>
+                      <a:srgbClr val="141B24"/>
+                    </a:solidFill>
+                  </a:tcPr>
+                </a:tc>
+                <a:tc>
+                  <a:txBody>
+                    <a:bodyPr/>
+                    <a:lstStyle/>
+                    <a:p>
+                      <a:pPr indent="0" marL="0">
+                        <a:buNone/>
+                      </a:pPr>
+                      <a:r>
+                        <a:rPr lang="en-US" sz="1300" dirty="0">
+                          <a:solidFill>
+                            <a:srgbClr val="E6EDF3"/>
+                          </a:solidFill>
+                          <a:latin typeface="Calibri" pitchFamily="34" charset="0"/>
+                          <a:ea typeface="Calibri" pitchFamily="34" charset="-122"/>
+                          <a:cs typeface="Calibri" pitchFamily="34" charset="-120"/>
+                        </a:rPr>
+                        <a:t>-</a:t>
+                      </a:r>
+                      <a:endParaRPr lang="en-US" sz="1300" dirty="0">
+                        <a:latin typeface="Calibri" charset="0"/>
+                        <a:ea typeface="Calibri" charset="0"/>
+                        <a:cs typeface="Calibri" charset="0"/>
+                      </a:endParaRPr>
+                    </a:p>
+                  </a:txBody>
+                  <a:tcPr marL="91440" marR="91440" marT="45720" marB="45720">
+                    <a:lnL w="12700" cap="flat" cmpd="sng" algn="ctr">
+                      <a:solidFill>
+                        <a:srgbClr val="2A3441"/>
+                      </a:solidFill>
+                      <a:prstDash val="solid"/>
+                      <a:round/>
+                      <a:headEnd type="none" w="med" len="med"/>
+                      <a:tailEnd type="none" w="med" len="med"/>
+                    </a:lnL>
+                    <a:lnR w="12700" cap="flat" cmpd="sng" algn="ctr">
+                      <a:solidFill>
+                        <a:srgbClr val="2A3441"/>
+                      </a:solidFill>
+                      <a:prstDash val="solid"/>
+                      <a:round/>
+                      <a:headEnd type="none" w="med" len="med"/>
+                      <a:tailEnd type="none" w="med" len="med"/>
+                    </a:lnR>
+                    <a:lnT w="12700" cap="flat" cmpd="sng" algn="ctr">
+                      <a:solidFill>
+                        <a:srgbClr val="2A3441"/>
+                      </a:solidFill>
+                      <a:prstDash val="solid"/>
+                      <a:round/>
+                      <a:headEnd type="none" w="med" len="med"/>
+                      <a:tailEnd type="none" w="med" len="med"/>
+                    </a:lnT>
+                    <a:lnB w="12700" cap="flat" cmpd="sng" algn="ctr">
+                      <a:solidFill>
+                        <a:srgbClr val="2A3441"/>
+                      </a:solidFill>
+                      <a:prstDash val="solid"/>
+                      <a:round/>
+                      <a:headEnd type="none" w="med" len="med"/>
+                      <a:tailEnd type="none" w="med" len="med"/>
+                    </a:lnB>
+                    <a:solidFill>
+                      <a:srgbClr val="141B24"/>
+                    </a:solidFill>
+                  </a:tcPr>
+                </a:tc>
+              </a:tr>
+              <a:tr h="384048">
+                <a:tc>
+                  <a:txBody>
+                    <a:bodyPr/>
+                    <a:lstStyle/>
+                    <a:p>
+                      <a:pPr indent="0" marL="0">
+                        <a:buNone/>
+                      </a:pPr>
+                      <a:r>
+                        <a:rPr lang="en-US" sz="1300" dirty="0">
+                          <a:solidFill>
+                            <a:srgbClr val="E6EDF3"/>
+                          </a:solidFill>
+                          <a:latin typeface="Calibri" pitchFamily="34" charset="0"/>
+                          <a:ea typeface="Calibri" pitchFamily="34" charset="-122"/>
+                          <a:cs typeface="Calibri" pitchFamily="34" charset="-120"/>
+                        </a:rPr>
+                        <a:t>Rep 3</a:t>
+                      </a:r>
+                      <a:endParaRPr lang="en-US" sz="1300" dirty="0">
+                        <a:latin typeface="Calibri" charset="0"/>
+                        <a:ea typeface="Calibri" charset="0"/>
+                        <a:cs typeface="Calibri" charset="0"/>
+                      </a:endParaRPr>
+                    </a:p>
+                  </a:txBody>
+                  <a:tcPr marL="91440" marR="91440" marT="45720" marB="45720">
+                    <a:lnL w="12700" cap="flat" cmpd="sng" algn="ctr">
+                      <a:solidFill>
+                        <a:srgbClr val="2A3441"/>
+                      </a:solidFill>
+                      <a:prstDash val="solid"/>
+                      <a:round/>
+                      <a:headEnd type="none" w="med" len="med"/>
+                      <a:tailEnd type="none" w="med" len="med"/>
+                    </a:lnL>
+                    <a:lnR w="12700" cap="flat" cmpd="sng" algn="ctr">
+                      <a:solidFill>
+                        <a:srgbClr val="2A3441"/>
+                      </a:solidFill>
+                      <a:prstDash val="solid"/>
+                      <a:round/>
+                      <a:headEnd type="none" w="med" len="med"/>
+                      <a:tailEnd type="none" w="med" len="med"/>
+                    </a:lnR>
+                    <a:lnT w="12700" cap="flat" cmpd="sng" algn="ctr">
+                      <a:solidFill>
+                        <a:srgbClr val="2A3441"/>
+                      </a:solidFill>
+                      <a:prstDash val="solid"/>
+                      <a:round/>
+                      <a:headEnd type="none" w="med" len="med"/>
+                      <a:tailEnd type="none" w="med" len="med"/>
+                    </a:lnT>
+                    <a:lnB w="12700" cap="flat" cmpd="sng" algn="ctr">
+                      <a:solidFill>
+                        <a:srgbClr val="2A3441"/>
+                      </a:solidFill>
+                      <a:prstDash val="solid"/>
+                      <a:round/>
+                      <a:headEnd type="none" w="med" len="med"/>
+                      <a:tailEnd type="none" w="med" len="med"/>
+                    </a:lnB>
+                    <a:solidFill>
+                      <a:srgbClr val="141B24"/>
+                    </a:solidFill>
+                  </a:tcPr>
+                </a:tc>
+                <a:tc>
+                  <a:txBody>
+                    <a:bodyPr/>
+                    <a:lstStyle/>
+                    <a:p>
+                      <a:pPr indent="0" marL="0">
+                        <a:buNone/>
+                      </a:pPr>
+                      <a:r>
+                        <a:rPr lang="en-US" sz="1300" dirty="0">
+                          <a:solidFill>
+                            <a:srgbClr val="E6EDF3"/>
+                          </a:solidFill>
+                          <a:latin typeface="Calibri" pitchFamily="34" charset="0"/>
+                          <a:ea typeface="Calibri" pitchFamily="34" charset="-122"/>
+                          <a:cs typeface="Calibri" pitchFamily="34" charset="-120"/>
+                        </a:rPr>
+                        <a:t>39.3</a:t>
+                      </a:r>
+                      <a:endParaRPr lang="en-US" sz="1300" dirty="0">
+                        <a:latin typeface="Calibri" charset="0"/>
+                        <a:ea typeface="Calibri" charset="0"/>
+                        <a:cs typeface="Calibri" charset="0"/>
+                      </a:endParaRPr>
+                    </a:p>
+                  </a:txBody>
+                  <a:tcPr marL="91440" marR="91440" marT="45720" marB="45720">
+                    <a:lnL w="12700" cap="flat" cmpd="sng" algn="ctr">
+                      <a:solidFill>
+                        <a:srgbClr val="2A3441"/>
+                      </a:solidFill>
+                      <a:prstDash val="solid"/>
+                      <a:round/>
+                      <a:headEnd type="none" w="med" len="med"/>
+                      <a:tailEnd type="none" w="med" len="med"/>
+                    </a:lnL>
+                    <a:lnR w="12700" cap="flat" cmpd="sng" algn="ctr">
+                      <a:solidFill>
+                        <a:srgbClr val="2A3441"/>
+                      </a:solidFill>
+                      <a:prstDash val="solid"/>
+                      <a:round/>
+                      <a:headEnd type="none" w="med" len="med"/>
+                      <a:tailEnd type="none" w="med" len="med"/>
+                    </a:lnR>
+                    <a:lnT w="12700" cap="flat" cmpd="sng" algn="ctr">
+                      <a:solidFill>
+                        <a:srgbClr val="2A3441"/>
+                      </a:solidFill>
+                      <a:prstDash val="solid"/>
+                      <a:round/>
+                      <a:headEnd type="none" w="med" len="med"/>
+                      <a:tailEnd type="none" w="med" len="med"/>
+                    </a:lnT>
+                    <a:lnB w="12700" cap="flat" cmpd="sng" algn="ctr">
+                      <a:solidFill>
+                        <a:srgbClr val="2A3441"/>
+                      </a:solidFill>
+                      <a:prstDash val="solid"/>
+                      <a:round/>
+                      <a:headEnd type="none" w="med" len="med"/>
+                      <a:tailEnd type="none" w="med" len="med"/>
+                    </a:lnB>
+                    <a:solidFill>
+                      <a:srgbClr val="141B24"/>
+                    </a:solidFill>
+                  </a:tcPr>
+                </a:tc>
+                <a:tc>
+                  <a:txBody>
+                    <a:bodyPr/>
+                    <a:lstStyle/>
+                    <a:p>
+                      <a:pPr indent="0" marL="0">
+                        <a:buNone/>
+                      </a:pPr>
+                      <a:r>
+                        <a:rPr lang="en-US" sz="1300" dirty="0">
+                          <a:solidFill>
+                            <a:srgbClr val="E6EDF3"/>
+                          </a:solidFill>
+                          <a:latin typeface="Calibri" pitchFamily="34" charset="0"/>
+                          <a:ea typeface="Calibri" pitchFamily="34" charset="-122"/>
+                          <a:cs typeface="Calibri" pitchFamily="34" charset="-120"/>
+                        </a:rPr>
+                        <a:t>-</a:t>
+                      </a:r>
+                      <a:endParaRPr lang="en-US" sz="1300" dirty="0">
+                        <a:latin typeface="Calibri" charset="0"/>
+                        <a:ea typeface="Calibri" charset="0"/>
+                        <a:cs typeface="Calibri" charset="0"/>
+                      </a:endParaRPr>
+                    </a:p>
+                  </a:txBody>
+                  <a:tcPr marL="91440" marR="91440" marT="45720" marB="45720">
+                    <a:lnL w="12700" cap="flat" cmpd="sng" algn="ctr">
+                      <a:solidFill>
+                        <a:srgbClr val="2A3441"/>
+                      </a:solidFill>
+                      <a:prstDash val="solid"/>
+                      <a:round/>
+                      <a:headEnd type="none" w="med" len="med"/>
+                      <a:tailEnd type="none" w="med" len="med"/>
+                    </a:lnL>
+                    <a:lnR w="12700" cap="flat" cmpd="sng" algn="ctr">
+                      <a:solidFill>
+                        <a:srgbClr val="2A3441"/>
+                      </a:solidFill>
+                      <a:prstDash val="solid"/>
+                      <a:round/>
+                      <a:headEnd type="none" w="med" len="med"/>
+                      <a:tailEnd type="none" w="med" len="med"/>
+                    </a:lnR>
+                    <a:lnT w="12700" cap="flat" cmpd="sng" algn="ctr">
+                      <a:solidFill>
+                        <a:srgbClr val="2A3441"/>
+                      </a:solidFill>
+                      <a:prstDash val="solid"/>
+                      <a:round/>
+                      <a:headEnd type="none" w="med" len="med"/>
+                      <a:tailEnd type="none" w="med" len="med"/>
+                    </a:lnT>
+                    <a:lnB w="12700" cap="flat" cmpd="sng" algn="ctr">
+                      <a:solidFill>
+                        <a:srgbClr val="2A3441"/>
+                      </a:solidFill>
+                      <a:prstDash val="solid"/>
+                      <a:round/>
+                      <a:headEnd type="none" w="med" len="med"/>
+                      <a:tailEnd type="none" w="med" len="med"/>
+                    </a:lnB>
+                    <a:solidFill>
+                      <a:srgbClr val="141B24"/>
+                    </a:solidFill>
+                  </a:tcPr>
+                </a:tc>
+                <a:tc>
+                  <a:txBody>
+                    <a:bodyPr/>
+                    <a:lstStyle/>
+                    <a:p>
+                      <a:pPr indent="0" marL="0">
+                        <a:buNone/>
+                      </a:pPr>
+                      <a:r>
+                        <a:rPr lang="en-US" sz="1300" dirty="0">
+                          <a:solidFill>
+                            <a:srgbClr val="E6EDF3"/>
+                          </a:solidFill>
+                          <a:latin typeface="Calibri" pitchFamily="34" charset="0"/>
+                          <a:ea typeface="Calibri" pitchFamily="34" charset="-122"/>
+                          <a:cs typeface="Calibri" pitchFamily="34" charset="-120"/>
+                        </a:rPr>
+                        <a:t>240</a:t>
+                      </a:r>
+                      <a:endParaRPr lang="en-US" sz="1300" dirty="0">
+                        <a:latin typeface="Calibri" charset="0"/>
+                        <a:ea typeface="Calibri" charset="0"/>
+                        <a:cs typeface="Calibri" charset="0"/>
+                      </a:endParaRPr>
+                    </a:p>
+                  </a:txBody>
+                  <a:tcPr marL="91440" marR="91440" marT="45720" marB="45720">
+                    <a:lnL w="12700" cap="flat" cmpd="sng" algn="ctr">
+                      <a:solidFill>
+                        <a:srgbClr val="2A3441"/>
+                      </a:solidFill>
+                      <a:prstDash val="solid"/>
+                      <a:round/>
+                      <a:headEnd type="none" w="med" len="med"/>
+                      <a:tailEnd type="none" w="med" len="med"/>
+                    </a:lnL>
+                    <a:lnR w="12700" cap="flat" cmpd="sng" algn="ctr">
+                      <a:solidFill>
+                        <a:srgbClr val="2A3441"/>
+                      </a:solidFill>
+                      <a:prstDash val="solid"/>
+                      <a:round/>
+                      <a:headEnd type="none" w="med" len="med"/>
+                      <a:tailEnd type="none" w="med" len="med"/>
+                    </a:lnR>
+                    <a:lnT w="12700" cap="flat" cmpd="sng" algn="ctr">
+                      <a:solidFill>
+                        <a:srgbClr val="2A3441"/>
+                      </a:solidFill>
+                      <a:prstDash val="solid"/>
+                      <a:round/>
+                      <a:headEnd type="none" w="med" len="med"/>
+                      <a:tailEnd type="none" w="med" len="med"/>
+                    </a:lnT>
+                    <a:lnB w="12700" cap="flat" cmpd="sng" algn="ctr">
+                      <a:solidFill>
+                        <a:srgbClr val="2A3441"/>
+                      </a:solidFill>
+                      <a:prstDash val="solid"/>
+                      <a:round/>
+                      <a:headEnd type="none" w="med" len="med"/>
+                      <a:tailEnd type="none" w="med" len="med"/>
+                    </a:lnB>
+                    <a:solidFill>
+                      <a:srgbClr val="141B24"/>
+                    </a:solidFill>
+                  </a:tcPr>
+                </a:tc>
+                <a:tc>
+                  <a:txBody>
+                    <a:bodyPr/>
+                    <a:lstStyle/>
+                    <a:p>
+                      <a:pPr indent="0" marL="0">
+                        <a:buNone/>
+                      </a:pPr>
+                      <a:r>
+                        <a:rPr lang="en-US" sz="1300" dirty="0">
+                          <a:solidFill>
+                            <a:srgbClr val="E6EDF3"/>
+                          </a:solidFill>
+                          <a:latin typeface="Calibri" pitchFamily="34" charset="0"/>
+                          <a:ea typeface="Calibri" pitchFamily="34" charset="-122"/>
+                          <a:cs typeface="Calibri" pitchFamily="34" charset="-120"/>
+                        </a:rPr>
+                        <a:t>53</a:t>
+                      </a:r>
+                      <a:endParaRPr lang="en-US" sz="1300" dirty="0">
+                        <a:latin typeface="Calibri" charset="0"/>
+                        <a:ea typeface="Calibri" charset="0"/>
+                        <a:cs typeface="Calibri" charset="0"/>
+                      </a:endParaRPr>
+                    </a:p>
+                  </a:txBody>
+                  <a:tcPr marL="91440" marR="91440" marT="45720" marB="45720">
+                    <a:lnL w="12700" cap="flat" cmpd="sng" algn="ctr">
+                      <a:solidFill>
+                        <a:srgbClr val="2A3441"/>
+                      </a:solidFill>
+                      <a:prstDash val="solid"/>
+                      <a:round/>
+                      <a:headEnd type="none" w="med" len="med"/>
+                      <a:tailEnd type="none" w="med" len="med"/>
+                    </a:lnL>
+                    <a:lnR w="12700" cap="flat" cmpd="sng" algn="ctr">
+                      <a:solidFill>
+                        <a:srgbClr val="2A3441"/>
+                      </a:solidFill>
+                      <a:prstDash val="solid"/>
+                      <a:round/>
+                      <a:headEnd type="none" w="med" len="med"/>
+                      <a:tailEnd type="none" w="med" len="med"/>
+                    </a:lnR>
+                    <a:lnT w="12700" cap="flat" cmpd="sng" algn="ctr">
+                      <a:solidFill>
+                        <a:srgbClr val="2A3441"/>
+                      </a:solidFill>
+                      <a:prstDash val="solid"/>
+                      <a:round/>
+                      <a:headEnd type="none" w="med" len="med"/>
+                      <a:tailEnd type="none" w="med" len="med"/>
+                    </a:lnT>
+                    <a:lnB w="12700" cap="flat" cmpd="sng" algn="ctr">
+                      <a:solidFill>
+                        <a:srgbClr val="2A3441"/>
+                      </a:solidFill>
+                      <a:prstDash val="solid"/>
+                      <a:round/>
+                      <a:headEnd type="none" w="med" len="med"/>
+                      <a:tailEnd type="none" w="med" len="med"/>
+                    </a:lnB>
+                    <a:solidFill>
+                      <a:srgbClr val="141B24"/>
+                    </a:solidFill>
+                  </a:tcPr>
+                </a:tc>
+                <a:tc>
+                  <a:txBody>
+                    <a:bodyPr/>
+                    <a:lstStyle/>
+                    <a:p>
+                      <a:pPr indent="0" marL="0">
+                        <a:buNone/>
+                      </a:pPr>
+                      <a:r>
+                        <a:rPr lang="en-US" sz="1300" dirty="0">
+                          <a:solidFill>
+                            <a:srgbClr val="E6EDF3"/>
+                          </a:solidFill>
+                          <a:latin typeface="Calibri" pitchFamily="34" charset="0"/>
+                          <a:ea typeface="Calibri" pitchFamily="34" charset="-122"/>
+                          <a:cs typeface="Calibri" pitchFamily="34" charset="-120"/>
+                        </a:rPr>
+                        <a:t>71</a:t>
+                      </a:r>
+                      <a:endParaRPr lang="en-US" sz="1300" dirty="0">
+                        <a:latin typeface="Calibri" charset="0"/>
+                        <a:ea typeface="Calibri" charset="0"/>
+                        <a:cs typeface="Calibri" charset="0"/>
+                      </a:endParaRPr>
+                    </a:p>
+                  </a:txBody>
+                  <a:tcPr marL="91440" marR="91440" marT="45720" marB="45720">
+                    <a:lnL w="12700" cap="flat" cmpd="sng" algn="ctr">
+                      <a:solidFill>
+                        <a:srgbClr val="2A3441"/>
+                      </a:solidFill>
+                      <a:prstDash val="solid"/>
+                      <a:round/>
+                      <a:headEnd type="none" w="med" len="med"/>
+                      <a:tailEnd type="none" w="med" len="med"/>
+                    </a:lnL>
+                    <a:lnR w="12700" cap="flat" cmpd="sng" algn="ctr">
+                      <a:solidFill>
+                        <a:srgbClr val="2A3441"/>
+                      </a:solidFill>
+                      <a:prstDash val="solid"/>
+                      <a:round/>
+                      <a:headEnd type="none" w="med" len="med"/>
+                      <a:tailEnd type="none" w="med" len="med"/>
+                    </a:lnR>
+                    <a:lnT w="12700" cap="flat" cmpd="sng" algn="ctr">
+                      <a:solidFill>
+                        <a:srgbClr val="2A3441"/>
+                      </a:solidFill>
+                      <a:prstDash val="solid"/>
+                      <a:round/>
+                      <a:headEnd type="none" w="med" len="med"/>
+                      <a:tailEnd type="none" w="med" len="med"/>
+                    </a:lnT>
+                    <a:lnB w="12700" cap="flat" cmpd="sng" algn="ctr">
+                      <a:solidFill>
+                        <a:srgbClr val="2A3441"/>
+                      </a:solidFill>
+                      <a:prstDash val="solid"/>
+                      <a:round/>
+                      <a:headEnd type="none" w="med" len="med"/>
+                      <a:tailEnd type="none" w="med" len="med"/>
+                    </a:lnB>
+                    <a:solidFill>
+                      <a:srgbClr val="141B24"/>
+                    </a:solidFill>
+                  </a:tcPr>
+                </a:tc>
+              </a:tr>
+              <a:tr h="384048">
+                <a:tc>
+                  <a:txBody>
+                    <a:bodyPr/>
+                    <a:lstStyle/>
+                    <a:p>
+                      <a:pPr indent="0" marL="0">
+                        <a:buNone/>
+                      </a:pPr>
+                      <a:r>
+                        <a:rPr lang="en-US" sz="1300" dirty="0">
+                          <a:solidFill>
+                            <a:srgbClr val="E6EDF3"/>
+                          </a:solidFill>
+                          <a:latin typeface="Calibri" pitchFamily="34" charset="0"/>
+                          <a:ea typeface="Calibri" pitchFamily="34" charset="-122"/>
+                          <a:cs typeface="Calibri" pitchFamily="34" charset="-120"/>
+                        </a:rPr>
+                        <a:t>Rep 4</a:t>
+                      </a:r>
+                      <a:endParaRPr lang="en-US" sz="1300" dirty="0">
+                        <a:latin typeface="Calibri" charset="0"/>
+                        <a:ea typeface="Calibri" charset="0"/>
+                        <a:cs typeface="Calibri" charset="0"/>
+                      </a:endParaRPr>
+                    </a:p>
+                  </a:txBody>
+                  <a:tcPr marL="91440" marR="91440" marT="45720" marB="45720">
+                    <a:lnL w="12700" cap="flat" cmpd="sng" algn="ctr">
+                      <a:solidFill>
+                        <a:srgbClr val="2A3441"/>
+                      </a:solidFill>
+                      <a:prstDash val="solid"/>
+                      <a:round/>
+                      <a:headEnd type="none" w="med" len="med"/>
+                      <a:tailEnd type="none" w="med" len="med"/>
+                    </a:lnL>
+                    <a:lnR w="12700" cap="flat" cmpd="sng" algn="ctr">
+                      <a:solidFill>
+                        <a:srgbClr val="2A3441"/>
+                      </a:solidFill>
+                      <a:prstDash val="solid"/>
+                      <a:round/>
+                      <a:headEnd type="none" w="med" len="med"/>
+                      <a:tailEnd type="none" w="med" len="med"/>
+                    </a:lnR>
+                    <a:lnT w="12700" cap="flat" cmpd="sng" algn="ctr">
+                      <a:solidFill>
+                        <a:srgbClr val="2A3441"/>
+                      </a:solidFill>
+                      <a:prstDash val="solid"/>
+                      <a:round/>
+                      <a:headEnd type="none" w="med" len="med"/>
+                      <a:tailEnd type="none" w="med" len="med"/>
+                    </a:lnT>
+                    <a:lnB w="12700" cap="flat" cmpd="sng" algn="ctr">
+                      <a:solidFill>
+                        <a:srgbClr val="2A3441"/>
+                      </a:solidFill>
+                      <a:prstDash val="solid"/>
+                      <a:round/>
+                      <a:headEnd type="none" w="med" len="med"/>
+                      <a:tailEnd type="none" w="med" len="med"/>
+                    </a:lnB>
+                    <a:solidFill>
+                      <a:srgbClr val="141B24"/>
+                    </a:solidFill>
+                  </a:tcPr>
+                </a:tc>
+                <a:tc>
+                  <a:txBody>
+                    <a:bodyPr/>
+                    <a:lstStyle/>
+                    <a:p>
+                      <a:pPr indent="0" marL="0">
+                        <a:buNone/>
+                      </a:pPr>
+                      <a:r>
+                        <a:rPr lang="en-US" sz="1300" dirty="0">
+                          <a:solidFill>
+                            <a:srgbClr val="E6EDF3"/>
+                          </a:solidFill>
+                          <a:latin typeface="Calibri" pitchFamily="34" charset="0"/>
+                          <a:ea typeface="Calibri" pitchFamily="34" charset="-122"/>
+                          <a:cs typeface="Calibri" pitchFamily="34" charset="-120"/>
+                        </a:rPr>
+                        <a:t>11.4</a:t>
+                      </a:r>
+                      <a:endParaRPr lang="en-US" sz="1300" dirty="0">
+                        <a:latin typeface="Calibri" charset="0"/>
+                        <a:ea typeface="Calibri" charset="0"/>
+                        <a:cs typeface="Calibri" charset="0"/>
+                      </a:endParaRPr>
+                    </a:p>
+                  </a:txBody>
+                  <a:tcPr marL="91440" marR="91440" marT="45720" marB="45720">
+                    <a:lnL w="12700" cap="flat" cmpd="sng" algn="ctr">
+                      <a:solidFill>
+                        <a:srgbClr val="2A3441"/>
+                      </a:solidFill>
+                      <a:prstDash val="solid"/>
+                      <a:round/>
+                      <a:headEnd type="none" w="med" len="med"/>
+                      <a:tailEnd type="none" w="med" len="med"/>
+                    </a:lnL>
+                    <a:lnR w="12700" cap="flat" cmpd="sng" algn="ctr">
+                      <a:solidFill>
+                        <a:srgbClr val="2A3441"/>
+                      </a:solidFill>
+                      <a:prstDash val="solid"/>
+                      <a:round/>
+                      <a:headEnd type="none" w="med" len="med"/>
+                      <a:tailEnd type="none" w="med" len="med"/>
+                    </a:lnR>
+                    <a:lnT w="12700" cap="flat" cmpd="sng" algn="ctr">
+                      <a:solidFill>
+                        <a:srgbClr val="2A3441"/>
+                      </a:solidFill>
+                      <a:prstDash val="solid"/>
+                      <a:round/>
+                      <a:headEnd type="none" w="med" len="med"/>
+                      <a:tailEnd type="none" w="med" len="med"/>
+                    </a:lnT>
+                    <a:lnB w="12700" cap="flat" cmpd="sng" algn="ctr">
+                      <a:solidFill>
+                        <a:srgbClr val="2A3441"/>
+                      </a:solidFill>
+                      <a:prstDash val="solid"/>
+                      <a:round/>
+                      <a:headEnd type="none" w="med" len="med"/>
+                      <a:tailEnd type="none" w="med" len="med"/>
+                    </a:lnB>
+                    <a:solidFill>
+                      <a:srgbClr val="141B24"/>
+                    </a:solidFill>
+                  </a:tcPr>
+                </a:tc>
+                <a:tc>
+                  <a:txBody>
+                    <a:bodyPr/>
+                    <a:lstStyle/>
+                    <a:p>
+                      <a:pPr indent="0" marL="0">
+                        <a:buNone/>
+                      </a:pPr>
+                      <a:r>
+                        <a:rPr lang="en-US" sz="1300" dirty="0">
+                          <a:solidFill>
+                            <a:srgbClr val="E6EDF3"/>
+                          </a:solidFill>
+                          <a:latin typeface="Calibri" pitchFamily="34" charset="0"/>
+                          <a:ea typeface="Calibri" pitchFamily="34" charset="-122"/>
+                          <a:cs typeface="Calibri" pitchFamily="34" charset="-120"/>
+                        </a:rPr>
+                        <a:t>87</a:t>
+                      </a:r>
+                      <a:endParaRPr lang="en-US" sz="1300" dirty="0">
+                        <a:latin typeface="Calibri" charset="0"/>
+                        <a:ea typeface="Calibri" charset="0"/>
+                        <a:cs typeface="Calibri" charset="0"/>
+                      </a:endParaRPr>
+                    </a:p>
+                  </a:txBody>
+                  <a:tcPr marL="91440" marR="91440" marT="45720" marB="45720">
+                    <a:lnL w="12700" cap="flat" cmpd="sng" algn="ctr">
+                      <a:solidFill>
+                        <a:srgbClr val="2A3441"/>
+                      </a:solidFill>
+                      <a:prstDash val="solid"/>
+                      <a:round/>
+                      <a:headEnd type="none" w="med" len="med"/>
+                      <a:tailEnd type="none" w="med" len="med"/>
+                    </a:lnL>
+                    <a:lnR w="12700" cap="flat" cmpd="sng" algn="ctr">
+                      <a:solidFill>
+                        <a:srgbClr val="2A3441"/>
+                      </a:solidFill>
+                      <a:prstDash val="solid"/>
+                      <a:round/>
+                      <a:headEnd type="none" w="med" len="med"/>
+                      <a:tailEnd type="none" w="med" len="med"/>
+                    </a:lnR>
+                    <a:lnT w="12700" cap="flat" cmpd="sng" algn="ctr">
+                      <a:solidFill>
+                        <a:srgbClr val="2A3441"/>
+                      </a:solidFill>
+                      <a:prstDash val="solid"/>
+                      <a:round/>
+                      <a:headEnd type="none" w="med" len="med"/>
+                      <a:tailEnd type="none" w="med" len="med"/>
+                    </a:lnT>
+                    <a:lnB w="12700" cap="flat" cmpd="sng" algn="ctr">
+                      <a:solidFill>
+                        <a:srgbClr val="2A3441"/>
+                      </a:solidFill>
+                      <a:prstDash val="solid"/>
+                      <a:round/>
+                      <a:headEnd type="none" w="med" len="med"/>
+                      <a:tailEnd type="none" w="med" len="med"/>
+                    </a:lnB>
+                    <a:solidFill>
+                      <a:srgbClr val="141B24"/>
+                    </a:solidFill>
+                  </a:tcPr>
+                </a:tc>
+                <a:tc>
+                  <a:txBody>
+                    <a:bodyPr/>
+                    <a:lstStyle/>
+                    <a:p>
+                      <a:pPr indent="0" marL="0">
+                        <a:buNone/>
+                      </a:pPr>
+                      <a:r>
+                        <a:rPr lang="en-US" sz="1300" dirty="0">
+                          <a:solidFill>
+                            <a:srgbClr val="E6EDF3"/>
+                          </a:solidFill>
+                          <a:latin typeface="Calibri" pitchFamily="34" charset="0"/>
+                          <a:ea typeface="Calibri" pitchFamily="34" charset="-122"/>
+                          <a:cs typeface="Calibri" pitchFamily="34" charset="-120"/>
+                        </a:rPr>
+                        <a:t>218</a:t>
+                      </a:r>
+                      <a:endParaRPr lang="en-US" sz="1300" dirty="0">
+                        <a:latin typeface="Calibri" charset="0"/>
+                        <a:ea typeface="Calibri" charset="0"/>
+                        <a:cs typeface="Calibri" charset="0"/>
+                      </a:endParaRPr>
+                    </a:p>
+                  </a:txBody>
+                  <a:tcPr marL="91440" marR="91440" marT="45720" marB="45720">
+                    <a:lnL w="12700" cap="flat" cmpd="sng" algn="ctr">
+                      <a:solidFill>
+                        <a:srgbClr val="2A3441"/>
+                      </a:solidFill>
+                      <a:prstDash val="solid"/>
+                      <a:round/>
+                      <a:headEnd type="none" w="med" len="med"/>
+                      <a:tailEnd type="none" w="med" len="med"/>
+                    </a:lnL>
+                    <a:lnR w="12700" cap="flat" cmpd="sng" algn="ctr">
+                      <a:solidFill>
+                        <a:srgbClr val="2A3441"/>
+                      </a:solidFill>
+                      <a:prstDash val="solid"/>
+                      <a:round/>
+                      <a:headEnd type="none" w="med" len="med"/>
+                      <a:tailEnd type="none" w="med" len="med"/>
+                    </a:lnR>
+                    <a:lnT w="12700" cap="flat" cmpd="sng" algn="ctr">
+                      <a:solidFill>
+                        <a:srgbClr val="2A3441"/>
+                      </a:solidFill>
+                      <a:prstDash val="solid"/>
+                      <a:round/>
+                      <a:headEnd type="none" w="med" len="med"/>
+                      <a:tailEnd type="none" w="med" len="med"/>
+                    </a:lnT>
+                    <a:lnB w="12700" cap="flat" cmpd="sng" algn="ctr">
+                      <a:solidFill>
+                        <a:srgbClr val="2A3441"/>
+                      </a:solidFill>
+                      <a:prstDash val="solid"/>
+                      <a:round/>
+                      <a:headEnd type="none" w="med" len="med"/>
+                      <a:tailEnd type="none" w="med" len="med"/>
+                    </a:lnB>
+                    <a:solidFill>
+                      <a:srgbClr val="141B24"/>
+                    </a:solidFill>
+                  </a:tcPr>
+                </a:tc>
+                <a:tc>
+                  <a:txBody>
+                    <a:bodyPr/>
+                    <a:lstStyle/>
+                    <a:p>
+                      <a:pPr indent="0" marL="0">
+                        <a:buNone/>
+                      </a:pPr>
+                      <a:r>
+                        <a:rPr lang="en-US" sz="1300" dirty="0">
+                          <a:solidFill>
+                            <a:srgbClr val="E6EDF3"/>
+                          </a:solidFill>
+                          <a:latin typeface="Calibri" pitchFamily="34" charset="0"/>
+                          <a:ea typeface="Calibri" pitchFamily="34" charset="-122"/>
+                          <a:cs typeface="Calibri" pitchFamily="34" charset="-120"/>
+                        </a:rPr>
+                        <a:t>69</a:t>
+                      </a:r>
+                      <a:endParaRPr lang="en-US" sz="1300" dirty="0">
+                        <a:latin typeface="Calibri" charset="0"/>
+                        <a:ea typeface="Calibri" charset="0"/>
+                        <a:cs typeface="Calibri" charset="0"/>
+                      </a:endParaRPr>
+                    </a:p>
+                  </a:txBody>
+                  <a:tcPr marL="91440" marR="91440" marT="45720" marB="45720">
+                    <a:lnL w="12700" cap="flat" cmpd="sng" algn="ctr">
+                      <a:solidFill>
+                        <a:srgbClr val="2A3441"/>
+                      </a:solidFill>
+                      <a:prstDash val="solid"/>
+                      <a:round/>
+                      <a:headEnd type="none" w="med" len="med"/>
+                      <a:tailEnd type="none" w="med" len="med"/>
+                    </a:lnL>
+                    <a:lnR w="12700" cap="flat" cmpd="sng" algn="ctr">
+                      <a:solidFill>
+                        <a:srgbClr val="2A3441"/>
+                      </a:solidFill>
+                      <a:prstDash val="solid"/>
+                      <a:round/>
+                      <a:headEnd type="none" w="med" len="med"/>
+                      <a:tailEnd type="none" w="med" len="med"/>
+                    </a:lnR>
+                    <a:lnT w="12700" cap="flat" cmpd="sng" algn="ctr">
+                      <a:solidFill>
+                        <a:srgbClr val="2A3441"/>
+                      </a:solidFill>
+                      <a:prstDash val="solid"/>
+                      <a:round/>
+                      <a:headEnd type="none" w="med" len="med"/>
+                      <a:tailEnd type="none" w="med" len="med"/>
+                    </a:lnT>
+                    <a:lnB w="12700" cap="flat" cmpd="sng" algn="ctr">
+                      <a:solidFill>
+                        <a:srgbClr val="2A3441"/>
+                      </a:solidFill>
+                      <a:prstDash val="solid"/>
+                      <a:round/>
+                      <a:headEnd type="none" w="med" len="med"/>
+                      <a:tailEnd type="none" w="med" len="med"/>
+                    </a:lnB>
+                    <a:solidFill>
+                      <a:srgbClr val="141B24"/>
+                    </a:solidFill>
+                  </a:tcPr>
+                </a:tc>
+                <a:tc>
+                  <a:txBody>
+                    <a:bodyPr/>
+                    <a:lstStyle/>
+                    <a:p>
+                      <a:pPr indent="0" marL="0">
+                        <a:buNone/>
+                      </a:pPr>
+                      <a:r>
+                        <a:rPr lang="en-US" sz="1300" dirty="0">
+                          <a:solidFill>
+                            <a:srgbClr val="E6EDF3"/>
+                          </a:solidFill>
+                          <a:latin typeface="Calibri" pitchFamily="34" charset="0"/>
+                          <a:ea typeface="Calibri" pitchFamily="34" charset="-122"/>
+                          <a:cs typeface="Calibri" pitchFamily="34" charset="-120"/>
+                        </a:rPr>
+                        <a:t>111</a:t>
+                      </a:r>
+                      <a:endParaRPr lang="en-US" sz="1300" dirty="0">
+                        <a:latin typeface="Calibri" charset="0"/>
+                        <a:ea typeface="Calibri" charset="0"/>
+                        <a:cs typeface="Calibri" charset="0"/>
+                      </a:endParaRPr>
+                    </a:p>
+                  </a:txBody>
+                  <a:tcPr marL="91440" marR="91440" marT="45720" marB="45720">
+                    <a:lnL w="12700" cap="flat" cmpd="sng" algn="ctr">
+                      <a:solidFill>
+                        <a:srgbClr val="2A3441"/>
+                      </a:solidFill>
+                      <a:prstDash val="solid"/>
+                      <a:round/>
+                      <a:headEnd type="none" w="med" len="med"/>
+                      <a:tailEnd type="none" w="med" len="med"/>
+                    </a:lnL>
+                    <a:lnR w="12700" cap="flat" cmpd="sng" algn="ctr">
+                      <a:solidFill>
+                        <a:srgbClr val="2A3441"/>
+                      </a:solidFill>
+                      <a:prstDash val="solid"/>
+                      <a:round/>
+                      <a:headEnd type="none" w="med" len="med"/>
+                      <a:tailEnd type="none" w="med" len="med"/>
+                    </a:lnR>
+                    <a:lnT w="12700" cap="flat" cmpd="sng" algn="ctr">
+                      <a:solidFill>
+                        <a:srgbClr val="2A3441"/>
+                      </a:solidFill>
+                      <a:prstDash val="solid"/>
+                      <a:round/>
+                      <a:headEnd type="none" w="med" len="med"/>
+                      <a:tailEnd type="none" w="med" len="med"/>
+                    </a:lnT>
+                    <a:lnB w="12700" cap="flat" cmpd="sng" algn="ctr">
+                      <a:solidFill>
+                        <a:srgbClr val="2A3441"/>
+                      </a:solidFill>
+                      <a:prstDash val="solid"/>
+                      <a:round/>
+                      <a:headEnd type="none" w="med" len="med"/>
+                      <a:tailEnd type="none" w="med" len="med"/>
+                    </a:lnB>
+                    <a:solidFill>
+                      <a:srgbClr val="141B24"/>
+                    </a:solidFill>
+                  </a:tcPr>
+                </a:tc>
+              </a:tr>
+              <a:tr h="384048">
+                <a:tc>
+                  <a:txBody>
+                    <a:bodyPr/>
+                    <a:lstStyle/>
+                    <a:p>
+                      <a:pPr indent="0" marL="0">
+                        <a:buNone/>
+                      </a:pPr>
+                      <a:r>
+                        <a:rPr lang="en-US" sz="1300" dirty="0">
+                          <a:solidFill>
+                            <a:srgbClr val="E6EDF3"/>
+                          </a:solidFill>
+                          <a:latin typeface="Calibri" pitchFamily="34" charset="0"/>
+                          <a:ea typeface="Calibri" pitchFamily="34" charset="-122"/>
+                          <a:cs typeface="Calibri" pitchFamily="34" charset="-120"/>
+                        </a:rPr>
+                        <a:t>Rep 5</a:t>
+                      </a:r>
+                      <a:endParaRPr lang="en-US" sz="1300" dirty="0">
+                        <a:latin typeface="Calibri" charset="0"/>
+                        <a:ea typeface="Calibri" charset="0"/>
+                        <a:cs typeface="Calibri" charset="0"/>
+                      </a:endParaRPr>
+                    </a:p>
+                  </a:txBody>
+                  <a:tcPr marL="91440" marR="91440" marT="45720" marB="45720">
+                    <a:lnL w="12700" cap="flat" cmpd="sng" algn="ctr">
+                      <a:solidFill>
+                        <a:srgbClr val="2A3441"/>
+                      </a:solidFill>
+                      <a:prstDash val="solid"/>
+                      <a:round/>
+                      <a:headEnd type="none" w="med" len="med"/>
+                      <a:tailEnd type="none" w="med" len="med"/>
+                    </a:lnL>
+                    <a:lnR w="12700" cap="flat" cmpd="sng" algn="ctr">
+                      <a:solidFill>
+                        <a:srgbClr val="2A3441"/>
+                      </a:solidFill>
+                      <a:prstDash val="solid"/>
+                      <a:round/>
+                      <a:headEnd type="none" w="med" len="med"/>
+                      <a:tailEnd type="none" w="med" len="med"/>
+                    </a:lnR>
+                    <a:lnT w="12700" cap="flat" cmpd="sng" algn="ctr">
+                      <a:solidFill>
+                        <a:srgbClr val="2A3441"/>
+                      </a:solidFill>
+                      <a:prstDash val="solid"/>
+                      <a:round/>
+                      <a:headEnd type="none" w="med" len="med"/>
+                      <a:tailEnd type="none" w="med" len="med"/>
+                    </a:lnT>
+                    <a:lnB w="12700" cap="flat" cmpd="sng" algn="ctr">
+                      <a:solidFill>
+                        <a:srgbClr val="2A3441"/>
+                      </a:solidFill>
+                      <a:prstDash val="solid"/>
+                      <a:round/>
+                      <a:headEnd type="none" w="med" len="med"/>
+                      <a:tailEnd type="none" w="med" len="med"/>
+                    </a:lnB>
+                    <a:solidFill>
+                      <a:srgbClr val="141B24"/>
+                    </a:solidFill>
+                  </a:tcPr>
+                </a:tc>
+                <a:tc>
+                  <a:txBody>
+                    <a:bodyPr/>
+                    <a:lstStyle/>
+                    <a:p>
+                      <a:pPr indent="0" marL="0">
+                        <a:buNone/>
+                      </a:pPr>
+                      <a:r>
+                        <a:rPr lang="en-US" sz="1300" dirty="0">
+                          <a:solidFill>
+                            <a:srgbClr val="E6EDF3"/>
+                          </a:solidFill>
+                          <a:latin typeface="Calibri" pitchFamily="34" charset="0"/>
+                          <a:ea typeface="Calibri" pitchFamily="34" charset="-122"/>
+                          <a:cs typeface="Calibri" pitchFamily="34" charset="-120"/>
+                        </a:rPr>
+                        <a:t>50.9</a:t>
+                      </a:r>
+                      <a:endParaRPr lang="en-US" sz="1300" dirty="0">
+                        <a:latin typeface="Calibri" charset="0"/>
+                        <a:ea typeface="Calibri" charset="0"/>
+                        <a:cs typeface="Calibri" charset="0"/>
+                      </a:endParaRPr>
+                    </a:p>
+                  </a:txBody>
+                  <a:tcPr marL="91440" marR="91440" marT="45720" marB="45720">
+                    <a:lnL w="12700" cap="flat" cmpd="sng" algn="ctr">
+                      <a:solidFill>
+                        <a:srgbClr val="2A3441"/>
+                      </a:solidFill>
+                      <a:prstDash val="solid"/>
+                      <a:round/>
+                      <a:headEnd type="none" w="med" len="med"/>
+                      <a:tailEnd type="none" w="med" len="med"/>
+                    </a:lnL>
+                    <a:lnR w="12700" cap="flat" cmpd="sng" algn="ctr">
+                      <a:solidFill>
+                        <a:srgbClr val="2A3441"/>
+                      </a:solidFill>
+                      <a:prstDash val="solid"/>
+                      <a:round/>
+                      <a:headEnd type="none" w="med" len="med"/>
+                      <a:tailEnd type="none" w="med" len="med"/>
+                    </a:lnR>
+                    <a:lnT w="12700" cap="flat" cmpd="sng" algn="ctr">
+                      <a:solidFill>
+                        <a:srgbClr val="2A3441"/>
+                      </a:solidFill>
+                      <a:prstDash val="solid"/>
+                      <a:round/>
+                      <a:headEnd type="none" w="med" len="med"/>
+                      <a:tailEnd type="none" w="med" len="med"/>
+                    </a:lnT>
+                    <a:lnB w="12700" cap="flat" cmpd="sng" algn="ctr">
+                      <a:solidFill>
+                        <a:srgbClr val="2A3441"/>
+                      </a:solidFill>
+                      <a:prstDash val="solid"/>
+                      <a:round/>
+                      <a:headEnd type="none" w="med" len="med"/>
+                      <a:tailEnd type="none" w="med" len="med"/>
+                    </a:lnB>
+                    <a:solidFill>
+                      <a:srgbClr val="141B24"/>
+                    </a:solidFill>
+                  </a:tcPr>
+                </a:tc>
+                <a:tc>
+                  <a:txBody>
+                    <a:bodyPr/>
+                    <a:lstStyle/>
+                    <a:p>
+                      <a:pPr indent="0" marL="0">
+                        <a:buNone/>
+                      </a:pPr>
+                      <a:r>
+                        <a:rPr lang="en-US" sz="1300" dirty="0">
+                          <a:solidFill>
+                            <a:srgbClr val="E6EDF3"/>
+                          </a:solidFill>
+                          <a:latin typeface="Calibri" pitchFamily="34" charset="0"/>
+                          <a:ea typeface="Calibri" pitchFamily="34" charset="-122"/>
+                          <a:cs typeface="Calibri" pitchFamily="34" charset="-120"/>
+                        </a:rPr>
+                        <a:t>143</a:t>
+                      </a:r>
+                      <a:endParaRPr lang="en-US" sz="1300" dirty="0">
+                        <a:latin typeface="Calibri" charset="0"/>
+                        <a:ea typeface="Calibri" charset="0"/>
+                        <a:cs typeface="Calibri" charset="0"/>
+                      </a:endParaRPr>
+                    </a:p>
+                  </a:txBody>
+                  <a:tcPr marL="91440" marR="91440" marT="45720" marB="45720">
+                    <a:lnL w="12700" cap="flat" cmpd="sng" algn="ctr">
+                      <a:solidFill>
+                        <a:srgbClr val="2A3441"/>
+                      </a:solidFill>
+                      <a:prstDash val="solid"/>
+                      <a:round/>
+                      <a:headEnd type="none" w="med" len="med"/>
+                      <a:tailEnd type="none" w="med" len="med"/>
+                    </a:lnL>
+                    <a:lnR w="12700" cap="flat" cmpd="sng" algn="ctr">
+                      <a:solidFill>
+                        <a:srgbClr val="2A3441"/>
+                      </a:solidFill>
+                      <a:prstDash val="solid"/>
+                      <a:round/>
+                      <a:headEnd type="none" w="med" len="med"/>
+                      <a:tailEnd type="none" w="med" len="med"/>
+                    </a:lnR>
+                    <a:lnT w="12700" cap="flat" cmpd="sng" algn="ctr">
+                      <a:solidFill>
+                        <a:srgbClr val="2A3441"/>
+                      </a:solidFill>
+                      <a:prstDash val="solid"/>
+                      <a:round/>
+                      <a:headEnd type="none" w="med" len="med"/>
+                      <a:tailEnd type="none" w="med" len="med"/>
+                    </a:lnT>
+                    <a:lnB w="12700" cap="flat" cmpd="sng" algn="ctr">
+                      <a:solidFill>
+                        <a:srgbClr val="2A3441"/>
+                      </a:solidFill>
+                      <a:prstDash val="solid"/>
+                      <a:round/>
+                      <a:headEnd type="none" w="med" len="med"/>
+                      <a:tailEnd type="none" w="med" len="med"/>
+                    </a:lnB>
+                    <a:solidFill>
+                      <a:srgbClr val="141B24"/>
+                    </a:solidFill>
+                  </a:tcPr>
+                </a:tc>
+                <a:tc>
+                  <a:txBody>
+                    <a:bodyPr/>
+                    <a:lstStyle/>
+                    <a:p>
+                      <a:pPr indent="0" marL="0">
+                        <a:buNone/>
+                      </a:pPr>
+                      <a:r>
+                        <a:rPr lang="en-US" sz="1300" dirty="0">
+                          <a:solidFill>
+                            <a:srgbClr val="E6EDF3"/>
+                          </a:solidFill>
+                          <a:latin typeface="Calibri" pitchFamily="34" charset="0"/>
+                          <a:ea typeface="Calibri" pitchFamily="34" charset="-122"/>
+                          <a:cs typeface="Calibri" pitchFamily="34" charset="-120"/>
+                        </a:rPr>
+                        <a:t>167</a:t>
+                      </a:r>
+                      <a:endParaRPr lang="en-US" sz="1300" dirty="0">
+                        <a:latin typeface="Calibri" charset="0"/>
+                        <a:ea typeface="Calibri" charset="0"/>
+                        <a:cs typeface="Calibri" charset="0"/>
+                      </a:endParaRPr>
+                    </a:p>
+                  </a:txBody>
+                  <a:tcPr marL="91440" marR="91440" marT="45720" marB="45720">
+                    <a:lnL w="12700" cap="flat" cmpd="sng" algn="ctr">
+                      <a:solidFill>
+                        <a:srgbClr val="2A3441"/>
+                      </a:solidFill>
+                      <a:prstDash val="solid"/>
+                      <a:round/>
+                      <a:headEnd type="none" w="med" len="med"/>
+                      <a:tailEnd type="none" w="med" len="med"/>
+                    </a:lnL>
+                    <a:lnR w="12700" cap="flat" cmpd="sng" algn="ctr">
+                      <a:solidFill>
+                        <a:srgbClr val="2A3441"/>
+                      </a:solidFill>
+                      <a:prstDash val="solid"/>
+                      <a:round/>
+                      <a:headEnd type="none" w="med" len="med"/>
+                      <a:tailEnd type="none" w="med" len="med"/>
+                    </a:lnR>
+                    <a:lnT w="12700" cap="flat" cmpd="sng" algn="ctr">
+                      <a:solidFill>
+                        <a:srgbClr val="2A3441"/>
+                      </a:solidFill>
+                      <a:prstDash val="solid"/>
+                      <a:round/>
+                      <a:headEnd type="none" w="med" len="med"/>
+                      <a:tailEnd type="none" w="med" len="med"/>
+                    </a:lnT>
+                    <a:lnB w="12700" cap="flat" cmpd="sng" algn="ctr">
+                      <a:solidFill>
+                        <a:srgbClr val="2A3441"/>
+                      </a:solidFill>
+                      <a:prstDash val="solid"/>
+                      <a:round/>
+                      <a:headEnd type="none" w="med" len="med"/>
+                      <a:tailEnd type="none" w="med" len="med"/>
+                    </a:lnB>
+                    <a:solidFill>
+                      <a:srgbClr val="141B24"/>
+                    </a:solidFill>
+                  </a:tcPr>
+                </a:tc>
+                <a:tc>
+                  <a:txBody>
+                    <a:bodyPr/>
+                    <a:lstStyle/>
+                    <a:p>
+                      <a:pPr indent="0" marL="0">
+                        <a:buNone/>
+                      </a:pPr>
+                      <a:r>
+                        <a:rPr lang="en-US" sz="1300" dirty="0">
+                          <a:solidFill>
+                            <a:srgbClr val="E6EDF3"/>
+                          </a:solidFill>
+                          <a:latin typeface="Calibri" pitchFamily="34" charset="0"/>
+                          <a:ea typeface="Calibri" pitchFamily="34" charset="-122"/>
+                          <a:cs typeface="Calibri" pitchFamily="34" charset="-120"/>
+                        </a:rPr>
+                        <a:t>44</a:t>
+                      </a:r>
+                      <a:endParaRPr lang="en-US" sz="1300" dirty="0">
+                        <a:latin typeface="Calibri" charset="0"/>
+                        <a:ea typeface="Calibri" charset="0"/>
+                        <a:cs typeface="Calibri" charset="0"/>
+                      </a:endParaRPr>
+                    </a:p>
+                  </a:txBody>
+                  <a:tcPr marL="91440" marR="91440" marT="45720" marB="45720">
+                    <a:lnL w="12700" cap="flat" cmpd="sng" algn="ctr">
+                      <a:solidFill>
+                        <a:srgbClr val="2A3441"/>
+                      </a:solidFill>
+                      <a:prstDash val="solid"/>
+                      <a:round/>
+                      <a:headEnd type="none" w="med" len="med"/>
+                      <a:tailEnd type="none" w="med" len="med"/>
+                    </a:lnL>
+                    <a:lnR w="12700" cap="flat" cmpd="sng" algn="ctr">
+                      <a:solidFill>
+                        <a:srgbClr val="2A3441"/>
+                      </a:solidFill>
+                      <a:prstDash val="solid"/>
+                      <a:round/>
+                      <a:headEnd type="none" w="med" len="med"/>
+                      <a:tailEnd type="none" w="med" len="med"/>
+                    </a:lnR>
+                    <a:lnT w="12700" cap="flat" cmpd="sng" algn="ctr">
+                      <a:solidFill>
+                        <a:srgbClr val="2A3441"/>
+                      </a:solidFill>
+                      <a:prstDash val="solid"/>
+                      <a:round/>
+                      <a:headEnd type="none" w="med" len="med"/>
+                      <a:tailEnd type="none" w="med" len="med"/>
+                    </a:lnT>
+                    <a:lnB w="12700" cap="flat" cmpd="sng" algn="ctr">
+                      <a:solidFill>
+                        <a:srgbClr val="2A3441"/>
+                      </a:solidFill>
+                      <a:prstDash val="solid"/>
+                      <a:round/>
+                      <a:headEnd type="none" w="med" len="med"/>
+                      <a:tailEnd type="none" w="med" len="med"/>
+                    </a:lnB>
+                    <a:solidFill>
+                      <a:srgbClr val="141B24"/>
+                    </a:solidFill>
+                  </a:tcPr>
+                </a:tc>
+                <a:tc>
+                  <a:txBody>
+                    <a:bodyPr/>
+                    <a:lstStyle/>
+                    <a:p>
+                      <a:pPr indent="0" marL="0">
+                        <a:buNone/>
+                      </a:pPr>
+                      <a:r>
+                        <a:rPr lang="en-US" sz="1300" dirty="0">
+                          <a:solidFill>
+                            <a:srgbClr val="E6EDF3"/>
+                          </a:solidFill>
+                          <a:latin typeface="Calibri" pitchFamily="34" charset="0"/>
+                          <a:ea typeface="Calibri" pitchFamily="34" charset="-122"/>
+                          <a:cs typeface="Calibri" pitchFamily="34" charset="-120"/>
+                        </a:rPr>
+                        <a:t>32</a:t>
+                      </a:r>
+                      <a:endParaRPr lang="en-US" sz="1300" dirty="0">
+                        <a:latin typeface="Calibri" charset="0"/>
+                        <a:ea typeface="Calibri" charset="0"/>
+                        <a:cs typeface="Calibri" charset="0"/>
+                      </a:endParaRPr>
+                    </a:p>
+                  </a:txBody>
+                  <a:tcPr marL="91440" marR="91440" marT="45720" marB="45720">
+                    <a:lnL w="12700" cap="flat" cmpd="sng" algn="ctr">
+                      <a:solidFill>
+                        <a:srgbClr val="2A3441"/>
+                      </a:solidFill>
+                      <a:prstDash val="solid"/>
+                      <a:round/>
+                      <a:headEnd type="none" w="med" len="med"/>
+                      <a:tailEnd type="none" w="med" len="med"/>
+                    </a:lnL>
+                    <a:lnR w="12700" cap="flat" cmpd="sng" algn="ctr">
+                      <a:solidFill>
+                        <a:srgbClr val="2A3441"/>
+                      </a:solidFill>
+                      <a:prstDash val="solid"/>
+                      <a:round/>
+                      <a:headEnd type="none" w="med" len="med"/>
+                      <a:tailEnd type="none" w="med" len="med"/>
+                    </a:lnR>
+                    <a:lnT w="12700" cap="flat" cmpd="sng" algn="ctr">
+                      <a:solidFill>
+                        <a:srgbClr val="2A3441"/>
+                      </a:solidFill>
+                      <a:prstDash val="solid"/>
+                      <a:round/>
+                      <a:headEnd type="none" w="med" len="med"/>
+                      <a:tailEnd type="none" w="med" len="med"/>
+                    </a:lnT>
+                    <a:lnB w="12700" cap="flat" cmpd="sng" algn="ctr">
+                      <a:solidFill>
+                        <a:srgbClr val="2A3441"/>
+                      </a:solidFill>
+                      <a:prstDash val="solid"/>
+                      <a:round/>
+                      <a:headEnd type="none" w="med" len="med"/>
+                      <a:tailEnd type="none" w="med" len="med"/>
+                    </a:lnB>
+                    <a:solidFill>
+                      <a:srgbClr val="141B24"/>
+                    </a:solidFill>
+                  </a:tcPr>
+                </a:tc>
+              </a:tr>
+            </a:tbl>
+          </a:graphicData>
+        </a:graphic>
+      </p:graphicFrame>
+      <p:sp>
+        <p:nvSpPr>
+          <p:cNvPr id="5" name="Text 2"/>
+          <p:cNvSpPr/>
+          <p:nvPr/>
+        </p:nvSpPr>
+        <p:spPr>
+          <a:xfrm>
+            <a:off x="548640" y="3931920"/>
+            <a:ext cx="11064240" cy="2377440"/>
+          </a:xfrm>
+          <a:prstGeom prst="rect">
+            <a:avLst/>
+          </a:prstGeom>
+          <a:noFill/>
+          <a:ln/>
+        </p:spPr>
+        <p:txBody>
+          <a:bodyPr wrap="square" lIns="0" tIns="0" rIns="0" bIns="0" rtlCol="0" anchor="t"/>
+          <a:lstStyle/>
+          <a:p>
+            <a:pPr marL="342900" indent="-342900">
+              <a:spcAft>
+                <a:spcPts val="800"/>
+              </a:spcAft>
+              <a:buSzPct val="100000"/>
+              <a:buChar char="•"/>
+            </a:pPr>
+            <a:r>
+              <a:rPr lang="en-US" sz="1500" dirty="0">
+                <a:solidFill>
+                  <a:srgbClr val="E6EDF3"/>
+                </a:solidFill>
+                <a:latin typeface="Calibri" pitchFamily="34" charset="0"/>
+                <a:ea typeface="Calibri" pitchFamily="34" charset="-122"/>
+                <a:cs typeface="Calibri" pitchFamily="34" charset="-120"/>
+              </a:rPr>
+              <a:t>Two laptops, different networks, Tailscale relay (about 79 ms RTT); 2 MB per transfer, 5 repetitions</a:t>
+            </a:r>
+            <a:endParaRPr lang="en-US" sz="1500" dirty="0"/>
+          </a:p>
+          <a:p>
+            <a:pPr marL="342900" indent="-342900">
+              <a:spcAft>
+                <a:spcPts val="800"/>
+              </a:spcAft>
+              <a:buSzPct val="100000"/>
+              <a:buChar char="•"/>
+            </a:pPr>
+            <a:r>
+              <a:rPr lang="en-US" sz="1500" dirty="0">
+                <a:solidFill>
+                  <a:srgbClr val="E6EDF3"/>
+                </a:solidFill>
+                <a:latin typeface="Calibri" pitchFamily="34" charset="0"/>
+                <a:ea typeface="Calibri" pitchFamily="34" charset="-122"/>
+                <a:cs typeface="Calibri" pitchFamily="34" charset="-120"/>
+              </a:rPr>
+              <a:t>RUDP works between real machines: every completed run delivered 4,000 of 4,000 packets</a:t>
+            </a:r>
+            <a:endParaRPr lang="en-US" sz="1500" dirty="0"/>
+          </a:p>
+          <a:p>
+            <a:pPr marL="342900" indent="-342900">
+              <a:spcAft>
+                <a:spcPts val="800"/>
+              </a:spcAft>
+              <a:buSzPct val="100000"/>
+              <a:buChar char="•"/>
+            </a:pPr>
+            <a:r>
+              <a:rPr lang="en-US" sz="1500" dirty="0">
+                <a:solidFill>
+                  <a:srgbClr val="E6EDF3"/>
+                </a:solidFill>
+                <a:latin typeface="Calibri" pitchFamily="34" charset="0"/>
+                <a:ea typeface="Calibri" pitchFamily="34" charset="-122"/>
+                <a:cs typeface="Calibri" pitchFamily="34" charset="-120"/>
+              </a:rPr>
+              <a:t>The path drifted (TCP alone 2 s to 51 s) and 4 of 20 RUDP runs timed out, so this is a demonstration, not a ranking</a:t>
+            </a:r>
+            <a:endParaRPr lang="en-US" sz="1500" dirty="0"/>
+          </a:p>
+          <a:p>
+            <a:pPr marL="342900" indent="-342900">
+              <a:spcAft>
+                <a:spcPts val="800"/>
+              </a:spcAft>
+              <a:buSzPct val="100000"/>
+              <a:buChar char="•"/>
+            </a:pPr>
+            <a:r>
+              <a:rPr lang="en-US" sz="1500" dirty="0">
+                <a:solidFill>
+                  <a:srgbClr val="E6EDF3"/>
+                </a:solidFill>
+                <a:latin typeface="Calibri" pitchFamily="34" charset="0"/>
+                <a:ea typeface="Calibri" pitchFamily="34" charset="-122"/>
+                <a:cs typeface="Calibri" pitchFamily="34" charset="-120"/>
+              </a:rPr>
+              <a:t>Clean reps: kernel TCP 2x to 6x faster; rep 1 the neural agent beat AIMD (4.7 s vs 14.2 s)</a:t>
+            </a:r>
+            <a:endParaRPr lang="en-US" sz="1500" dirty="0"/>
+          </a:p>
+          <a:p>
+            <a:pPr marL="342900" indent="-342900">
+              <a:spcAft>
+                <a:spcPts val="800"/>
+              </a:spcAft>
+              <a:buSzPct val="100000"/>
+              <a:buChar char="•"/>
+            </a:pPr>
+            <a:r>
+              <a:rPr lang="en-US" sz="1500" dirty="0">
+                <a:solidFill>
+                  <a:srgbClr val="E6EDF3"/>
+                </a:solidFill>
+                <a:latin typeface="Calibri" pitchFamily="34" charset="0"/>
+                <a:ea typeface="Calibri" pitchFamily="34" charset="-122"/>
+                <a:cs typeface="Calibri" pitchFamily="34" charset="-120"/>
+              </a:rPr>
+              <a:t>Next: repeat on a direct local network with more reps</a:t>
+            </a:r>
+            <a:endParaRPr lang="en-US" sz="1500" dirty="0"/>
+          </a:p>
+        </p:txBody>
+      </p:sp>
+    </p:spTree>
+  </p:cSld>
+  <p:clrMapOvr>
+    <a:masterClrMapping/>
+  </p:clrMapOvr>
+</p:sld>
+</file>
+
+<file path=ppt/slides/slide36.xml><?xml version="1.0" encoding="utf-8"?>
+<p:sld xmlns:a="http://schemas.openxmlformats.org/drawingml/2006/main" xmlns:r="http://schemas.openxmlformats.org/officeDocument/2006/relationships" xmlns:p="http://schemas.openxmlformats.org/presentationml/2006/main">
+  <p:cSld name="Slide 36">
+    <p:bg>
+      <p:bgPr>
+        <a:solidFill>
+          <a:srgbClr val="0B0F14"/>
+        </a:solidFill>
+      </p:bgPr>
+    </p:bg>
+    <p:spTree>
+      <p:nvGrpSpPr>
+        <p:cNvPr id="1" name=""/>
+        <p:cNvGrpSpPr/>
+        <p:nvPr/>
+      </p:nvGrpSpPr>
+      <p:grpSpPr>
+        <a:xfrm>
+          <a:off x="0" y="0"/>
+          <a:ext cx="0" cy="0"/>
+          <a:chOff x="0" y="0"/>
+          <a:chExt cx="0" cy="0"/>
+        </a:xfrm>
+      </p:grpSpPr>
+      <p:sp>
+        <p:nvSpPr>
+          <p:cNvPr id="2" name="Text 0"/>
+          <p:cNvSpPr/>
+          <p:nvPr/>
+        </p:nvSpPr>
+        <p:spPr>
+          <a:xfrm>
+            <a:off x="548640" y="320040"/>
+            <a:ext cx="11064240" cy="731520"/>
+          </a:xfrm>
+          <a:prstGeom prst="rect">
+            <a:avLst/>
+          </a:prstGeom>
+          <a:noFill/>
+          <a:ln/>
+        </p:spPr>
+        <p:txBody>
+          <a:bodyPr wrap="square" lIns="0" tIns="0" rIns="0" bIns="0" rtlCol="0" anchor="ctr"/>
+          <a:lstStyle/>
+          <a:p>
+            <a:pPr indent="0" marL="0">
+              <a:buNone/>
+            </a:pPr>
+            <a:r>
+              <a:rPr lang="en-US" sz="3000" b="1" dirty="0">
+                <a:solidFill>
+                  <a:srgbClr val="39FF88"/>
+                </a:solidFill>
+                <a:latin typeface="Courier New" pitchFamily="34" charset="0"/>
+                <a:ea typeface="Courier New" pitchFamily="34" charset="-122"/>
+                <a:cs typeface="Courier New" pitchFamily="34" charset="-120"/>
+              </a:rPr>
               <a:t>Learnings and future work</a:t>
             </a:r>
             <a:endParaRPr lang="en-US" sz="3000" dirty="0"/>
@@ -31641,7 +34461,7 @@
                 <a:ea typeface="Courier New" pitchFamily="34" charset="-122"/>
                 <a:cs typeface="Courier New" pitchFamily="34" charset="-120"/>
               </a:rPr>
-              <a:t>35 / 37   Smart-RUDP</a:t>
+              <a:t>36 / 38   Smart-RUDP</a:t>
             </a:r>
             <a:endParaRPr lang="en-US" sz="1000" dirty="0"/>
           </a:p>
@@ -31915,7 +34735,7 @@
                 <a:ea typeface="Calibri" pitchFamily="34" charset="-122"/>
                 <a:cs typeface="Calibri" pitchFamily="34" charset="-120"/>
               </a:rPr>
-              <a:t>Close the gap to kernel TCP; real multi-machine tests</a:t>
+              <a:t>Close the gap to kernel TCP; controlled multi-machine tests</a:t>
             </a:r>
             <a:endParaRPr lang="en-US" sz="2000" dirty="0"/>
           </a:p>
@@ -31954,7 +34774,7 @@
                 <a:ea typeface="Calibri" pitchFamily="34" charset="-122"/>
                 <a:cs typeface="Calibri" pitchFamily="34" charset="-120"/>
               </a:rPr>
-              <a:t>Limits: kernel TCP is 1.5x to 1.7x faster; no multi-machine test; polite mode is a hand-made rule that costs speed; level with CUBIC under bursty cross traffic; no gain at 10% random loss; BBR-style baseline is faster on the 2% lossy path; coexistence with kernel TCP measured with only 3 runs per cell.</a:t>
+              <a:t>Limits: kernel TCP is 1.5x to 1.7x faster; one noisy two-machine run only; polite mode is a hand-made rule that costs speed; level with CUBIC under bursty cross traffic; no gain at 10% random loss; BBR-style baseline is faster on the 2% lossy path; coexistence with kernel TCP measured with only 3 runs per cell.</a:t>
             </a:r>
             <a:endParaRPr lang="en-US" sz="1400" dirty="0"/>
           </a:p>
@@ -31968,9 +34788,9 @@
 </p:sld>
 </file>
 
-<file path=ppt/slides/slide36.xml><?xml version="1.0" encoding="utf-8"?>
+<file path=ppt/slides/slide37.xml><?xml version="1.0" encoding="utf-8"?>
 <p:sld xmlns:a="http://schemas.openxmlformats.org/drawingml/2006/main" xmlns:r="http://schemas.openxmlformats.org/officeDocument/2006/relationships" xmlns:p="http://schemas.openxmlformats.org/presentationml/2006/main">
-  <p:cSld name="Slide 36">
+  <p:cSld name="Slide 37">
     <p:bg>
       <p:bgPr>
         <a:solidFill>
@@ -32117,9 +34937,9 @@
 </p:sld>
 </file>
 
-<file path=ppt/slides/slide37.xml><?xml version="1.0" encoding="utf-8"?>
+<file path=ppt/slides/slide38.xml><?xml version="1.0" encoding="utf-8"?>
 <p:sld xmlns:a="http://schemas.openxmlformats.org/drawingml/2006/main" xmlns:r="http://schemas.openxmlformats.org/officeDocument/2006/relationships" xmlns:p="http://schemas.openxmlformats.org/presentationml/2006/main">
-  <p:cSld name="Slide 37">
+  <p:cSld name="Slide 38">
     <p:bg>
       <p:bgPr>
         <a:solidFill>
@@ -32453,7 +35273,7 @@
                 <a:ea typeface="Courier New" pitchFamily="34" charset="-122"/>
                 <a:cs typeface="Courier New" pitchFamily="34" charset="-120"/>
               </a:rPr>
-              <a:t>4 / 37   Smart-RUDP</a:t>
+              <a:t>4 / 38   Smart-RUDP</a:t>
             </a:r>
             <a:endParaRPr lang="en-US" sz="1000" dirty="0"/>
           </a:p>
@@ -33014,7 +35834,7 @@
                 <a:ea typeface="Courier New" pitchFamily="34" charset="-122"/>
                 <a:cs typeface="Courier New" pitchFamily="34" charset="-120"/>
               </a:rPr>
-              <a:t>5 / 37   Smart-RUDP</a:t>
+              <a:t>5 / 38   Smart-RUDP</a:t>
             </a:r>
             <a:endParaRPr lang="en-US" sz="1000" dirty="0"/>
           </a:p>
@@ -34453,7 +37273,7 @@
                 <a:ea typeface="Courier New" pitchFamily="34" charset="-122"/>
                 <a:cs typeface="Courier New" pitchFamily="34" charset="-120"/>
               </a:rPr>
-              <a:t>6 / 37   Smart-RUDP</a:t>
+              <a:t>6 / 38   Smart-RUDP</a:t>
             </a:r>
             <a:endParaRPr lang="en-US" sz="1000" dirty="0"/>
           </a:p>
@@ -35688,7 +38508,7 @@
                 <a:ea typeface="Courier New" pitchFamily="34" charset="-122"/>
                 <a:cs typeface="Courier New" pitchFamily="34" charset="-120"/>
               </a:rPr>
-              <a:t>7 / 37   Smart-RUDP</a:t>
+              <a:t>7 / 38   Smart-RUDP</a:t>
             </a:r>
             <a:endParaRPr lang="en-US" sz="1000" dirty="0"/>
           </a:p>
@@ -36131,7 +38951,7 @@
                 <a:ea typeface="Courier New" pitchFamily="34" charset="-122"/>
                 <a:cs typeface="Courier New" pitchFamily="34" charset="-120"/>
               </a:rPr>
-              <a:t>8 / 37   Smart-RUDP</a:t>
+              <a:t>8 / 38   Smart-RUDP</a:t>
             </a:r>
             <a:endParaRPr lang="en-US" sz="1000" dirty="0"/>
           </a:p>
@@ -36431,7 +39251,7 @@
                 <a:ea typeface="Courier New" pitchFamily="34" charset="-122"/>
                 <a:cs typeface="Courier New" pitchFamily="34" charset="-120"/>
               </a:rPr>
-              <a:t>9 / 37   Smart-RUDP</a:t>
+              <a:t>9 / 38   Smart-RUDP</a:t>
             </a:r>
             <a:endParaRPr lang="en-US" sz="1000" dirty="0"/>
           </a:p>

--- a/docs/final/RUDP_Presentation.pptx
+++ b/docs/final/RUDP_Presentation.pptx
@@ -43,9 +43,10 @@
     <p:sldId id="291" r:id="rId37"/>
     <p:sldId id="292" r:id="rId38"/>
     <p:sldId id="293" r:id="rId39"/>
+    <p:sldId id="294" r:id="rId40"/>
   </p:sldIdLst>
   <p:notesMasterIdLst>
-    <p:notesMasterId r:id="rId40"/>
+    <p:notesMasterId r:id="rId41"/>
   </p:notesMasterIdLst>
   <p:sldSz cx="12192000" cy="6858000"/>
   <p:notesSz cx="6858000" cy="12192000"/>
@@ -3592,6 +3593,94 @@
             <a:fld id="{F7021451-1387-4CA6-816F-3879F97B5CBC}" type="slidenum">
               <a:rPr lang="en-US"/>
               <a:t>38</a:t>
+            </a:fld>
+            <a:endParaRPr lang="en-US"/>
+          </a:p>
+        </p:txBody>
+      </p:sp>
+    </p:spTree>
+    <p:extLst>
+      <p:ext uri="{BB962C8B-B14F-4D97-AF65-F5344CB8AC3E}">
+        <p14:creationId xmlns:p14="http://schemas.microsoft.com/office/powerpoint/2010/main" val="1024086991"/>
+      </p:ext>
+    </p:extLst>
+  </p:cSld>
+  <p:clrMapOvr>
+    <a:masterClrMapping/>
+  </p:clrMapOvr>
+</p:notes>
+</file>
+
+<file path=ppt/notesSlides/notesSlide39.xml><?xml version="1.0" encoding="utf-8"?>
+<p:notes xmlns:a="http://schemas.openxmlformats.org/drawingml/2006/main" xmlns:r="http://schemas.openxmlformats.org/officeDocument/2006/relationships" xmlns:p="http://schemas.openxmlformats.org/presentationml/2006/main">
+  <p:cSld>
+    <p:spTree>
+      <p:nvGrpSpPr>
+        <p:cNvPr id="1" name=""/>
+        <p:cNvGrpSpPr/>
+        <p:nvPr/>
+      </p:nvGrpSpPr>
+      <p:grpSpPr>
+        <a:xfrm>
+          <a:off x="0" y="0"/>
+          <a:ext cx="0" cy="0"/>
+          <a:chOff x="0" y="0"/>
+          <a:chExt cx="0" cy="0"/>
+        </a:xfrm>
+      </p:grpSpPr>
+      <p:sp>
+        <p:nvSpPr>
+          <p:cNvPr id="2" name="Slide Image Placeholder 1"/>
+          <p:cNvSpPr>
+            <a:spLocks noGrp="1" noRot="1" noChangeAspect="1"/>
+          </p:cNvSpPr>
+          <p:nvPr>
+            <p:ph type="sldImg"/>
+          </p:nvPr>
+        </p:nvSpPr>
+        <p:spPr/>
+      </p:sp>
+      <p:sp>
+        <p:nvSpPr>
+          <p:cNvPr id="3" name="Notes Placeholder 2"/>
+          <p:cNvSpPr>
+            <a:spLocks noGrp="1"/>
+          </p:cNvSpPr>
+          <p:nvPr>
+            <p:ph type="body" idx="1"/>
+          </p:nvPr>
+        </p:nvSpPr>
+        <p:spPr/>
+        <p:txBody>
+          <a:bodyPr/>
+          <a:lstStyle/>
+          <a:p>
+            <a:r>
+              <a:rPr lang="en-US" dirty="0"/>
+              <a:t/>
+            </a:r>
+            <a:endParaRPr lang="en-US" dirty="0"/>
+          </a:p>
+        </p:txBody>
+      </p:sp>
+      <p:sp>
+        <p:nvSpPr>
+          <p:cNvPr id="4" name="Slide Number Placeholder 3"/>
+          <p:cNvSpPr>
+            <a:spLocks noGrp="1"/>
+          </p:cNvSpPr>
+          <p:nvPr>
+            <p:ph type="sldNum" sz="quarter" idx="10"/>
+          </p:nvPr>
+        </p:nvSpPr>
+        <p:spPr/>
+        <p:txBody>
+          <a:bodyPr/>
+          <a:lstStyle/>
+          <a:p>
+            <a:fld id="{F7021451-1387-4CA6-816F-3879F97B5CBC}" type="slidenum">
+              <a:rPr lang="en-US"/>
+              <a:t>39</a:t>
             </a:fld>
             <a:endParaRPr lang="en-US"/>
           </a:p>
@@ -4729,7 +4818,7 @@
                 <a:ea typeface="Courier New" pitchFamily="34" charset="-122"/>
                 <a:cs typeface="Courier New" pitchFamily="34" charset="-120"/>
               </a:rPr>
-              <a:t>10 / 38   Smart-RUDP</a:t>
+              <a:t>10 / 39   Smart-RUDP</a:t>
             </a:r>
             <a:endParaRPr lang="en-US" sz="1000" dirty="0"/>
           </a:p>
@@ -4926,7 +5015,7 @@
                 <a:ea typeface="Courier New" pitchFamily="34" charset="-122"/>
                 <a:cs typeface="Courier New" pitchFamily="34" charset="-120"/>
               </a:rPr>
-              <a:t>11 / 38   Smart-RUDP</a:t>
+              <a:t>11 / 39   Smart-RUDP</a:t>
             </a:r>
             <a:endParaRPr lang="en-US" sz="1000" dirty="0"/>
           </a:p>
@@ -5756,7 +5845,7 @@
                 <a:ea typeface="Courier New" pitchFamily="34" charset="-122"/>
                 <a:cs typeface="Courier New" pitchFamily="34" charset="-120"/>
               </a:rPr>
-              <a:t>12 / 38   Smart-RUDP</a:t>
+              <a:t>12 / 39   Smart-RUDP</a:t>
             </a:r>
             <a:endParaRPr lang="en-US" sz="1000" dirty="0"/>
           </a:p>
@@ -6053,7 +6142,7 @@
                 <a:ea typeface="Courier New" pitchFamily="34" charset="-122"/>
                 <a:cs typeface="Courier New" pitchFamily="34" charset="-120"/>
               </a:rPr>
-              <a:t>13 / 38   Smart-RUDP</a:t>
+              <a:t>13 / 39   Smart-RUDP</a:t>
             </a:r>
             <a:endParaRPr lang="en-US" sz="1000" dirty="0"/>
           </a:p>
@@ -6353,7 +6442,7 @@
                 <a:ea typeface="Courier New" pitchFamily="34" charset="-122"/>
                 <a:cs typeface="Courier New" pitchFamily="34" charset="-120"/>
               </a:rPr>
-              <a:t>14 / 38   Smart-RUDP</a:t>
+              <a:t>14 / 39   Smart-RUDP</a:t>
             </a:r>
             <a:endParaRPr lang="en-US" sz="1000" dirty="0"/>
           </a:p>
@@ -6737,7 +6826,7 @@
                 <a:ea typeface="Courier New" pitchFamily="34" charset="-122"/>
                 <a:cs typeface="Courier New" pitchFamily="34" charset="-120"/>
               </a:rPr>
-              <a:t>15 / 38   Smart-RUDP</a:t>
+              <a:t>15 / 39   Smart-RUDP</a:t>
             </a:r>
             <a:endParaRPr lang="en-US" sz="1000" dirty="0"/>
           </a:p>
@@ -7195,7 +7284,7 @@
                 <a:ea typeface="Courier New" pitchFamily="34" charset="-122"/>
                 <a:cs typeface="Courier New" pitchFamily="34" charset="-120"/>
               </a:rPr>
-              <a:t>16 / 38   Smart-RUDP</a:t>
+              <a:t>16 / 39   Smart-RUDP</a:t>
             </a:r>
             <a:endParaRPr lang="en-US" sz="1000" dirty="0"/>
           </a:p>
@@ -7880,7 +7969,7 @@
                 <a:ea typeface="Courier New" pitchFamily="34" charset="-122"/>
                 <a:cs typeface="Courier New" pitchFamily="34" charset="-120"/>
               </a:rPr>
-              <a:t>17 / 38   Smart-RUDP</a:t>
+              <a:t>17 / 39   Smart-RUDP</a:t>
             </a:r>
             <a:endParaRPr lang="en-US" sz="1000" dirty="0"/>
           </a:p>
@@ -8120,7 +8209,7 @@
                 <a:ea typeface="Courier New" pitchFamily="34" charset="-122"/>
                 <a:cs typeface="Courier New" pitchFamily="34" charset="-120"/>
               </a:rPr>
-              <a:t>18 / 38   Smart-RUDP</a:t>
+              <a:t>18 / 39   Smart-RUDP</a:t>
             </a:r>
             <a:endParaRPr lang="en-US" sz="1000" dirty="0"/>
           </a:p>
@@ -8360,7 +8449,7 @@
                 <a:ea typeface="Courier New" pitchFamily="34" charset="-122"/>
                 <a:cs typeface="Courier New" pitchFamily="34" charset="-120"/>
               </a:rPr>
-              <a:t>19 / 38   Smart-RUDP</a:t>
+              <a:t>19 / 39   Smart-RUDP</a:t>
             </a:r>
             <a:endParaRPr lang="en-US" sz="1000" dirty="0"/>
           </a:p>
@@ -8582,7 +8671,7 @@
                 <a:ea typeface="Courier New" pitchFamily="34" charset="-122"/>
                 <a:cs typeface="Courier New" pitchFamily="34" charset="-120"/>
               </a:rPr>
-              <a:t>2 / 38   Smart-RUDP</a:t>
+              <a:t>2 / 39   Smart-RUDP</a:t>
             </a:r>
             <a:endParaRPr lang="en-US" sz="1000" dirty="0"/>
           </a:p>
@@ -8976,7 +9065,7 @@
                 <a:ea typeface="Courier New" pitchFamily="34" charset="-122"/>
                 <a:cs typeface="Courier New" pitchFamily="34" charset="-120"/>
               </a:rPr>
-              <a:t>20 / 38   Smart-RUDP</a:t>
+              <a:t>20 / 39   Smart-RUDP</a:t>
             </a:r>
             <a:endParaRPr lang="en-US" sz="1000" dirty="0"/>
           </a:p>
@@ -9300,7 +9389,7 @@
                 <a:ea typeface="Courier New" pitchFamily="34" charset="-122"/>
                 <a:cs typeface="Courier New" pitchFamily="34" charset="-120"/>
               </a:rPr>
-              <a:t>21 / 38   Smart-RUDP</a:t>
+              <a:t>21 / 39   Smart-RUDP</a:t>
             </a:r>
             <a:endParaRPr lang="en-US" sz="1000" dirty="0"/>
           </a:p>
@@ -11007,7 +11096,7 @@
                 <a:ea typeface="Courier New" pitchFamily="34" charset="-122"/>
                 <a:cs typeface="Courier New" pitchFamily="34" charset="-120"/>
               </a:rPr>
-              <a:t>22 / 38   Smart-RUDP</a:t>
+              <a:t>22 / 39   Smart-RUDP</a:t>
             </a:r>
             <a:endParaRPr lang="en-US" sz="1000" dirty="0"/>
           </a:p>
@@ -12390,7 +12479,7 @@
                 <a:ea typeface="Courier New" pitchFamily="34" charset="-122"/>
                 <a:cs typeface="Courier New" pitchFamily="34" charset="-120"/>
               </a:rPr>
-              <a:t>23 / 38   Smart-RUDP</a:t>
+              <a:t>23 / 39   Smart-RUDP</a:t>
             </a:r>
             <a:endParaRPr lang="en-US" sz="1000" dirty="0"/>
           </a:p>
@@ -13933,7 +14022,7 @@
                 <a:ea typeface="Courier New" pitchFamily="34" charset="-122"/>
                 <a:cs typeface="Courier New" pitchFamily="34" charset="-120"/>
               </a:rPr>
-              <a:t>24 / 38   Smart-RUDP</a:t>
+              <a:t>24 / 39   Smart-RUDP</a:t>
             </a:r>
             <a:endParaRPr lang="en-US" sz="1000" dirty="0"/>
           </a:p>
@@ -15611,7 +15700,7 @@
                 <a:ea typeface="Courier New" pitchFamily="34" charset="-122"/>
                 <a:cs typeface="Courier New" pitchFamily="34" charset="-120"/>
               </a:rPr>
-              <a:t>25 / 38   Smart-RUDP</a:t>
+              <a:t>25 / 39   Smart-RUDP</a:t>
             </a:r>
             <a:endParaRPr lang="en-US" sz="1000" dirty="0"/>
           </a:p>
@@ -17289,7 +17378,7 @@
                 <a:ea typeface="Courier New" pitchFamily="34" charset="-122"/>
                 <a:cs typeface="Courier New" pitchFamily="34" charset="-120"/>
               </a:rPr>
-              <a:t>26 / 38   Smart-RUDP</a:t>
+              <a:t>26 / 39   Smart-RUDP</a:t>
             </a:r>
             <a:endParaRPr lang="en-US" sz="1000" dirty="0"/>
           </a:p>
@@ -19629,7 +19718,7 @@
                 <a:ea typeface="Courier New" pitchFamily="34" charset="-122"/>
                 <a:cs typeface="Courier New" pitchFamily="34" charset="-120"/>
               </a:rPr>
-              <a:t>27 / 38   Smart-RUDP</a:t>
+              <a:t>27 / 39   Smart-RUDP</a:t>
             </a:r>
             <a:endParaRPr lang="en-US" sz="1000" dirty="0"/>
           </a:p>
@@ -20087,7 +20176,7 @@
                 <a:ea typeface="Courier New" pitchFamily="34" charset="-122"/>
                 <a:cs typeface="Courier New" pitchFamily="34" charset="-120"/>
               </a:rPr>
-              <a:t>28 / 38   Smart-RUDP</a:t>
+              <a:t>28 / 39   Smart-RUDP</a:t>
             </a:r>
             <a:endParaRPr lang="en-US" sz="1000" dirty="0"/>
           </a:p>
@@ -20319,7 +20408,7 @@
                 <a:ea typeface="Courier New" pitchFamily="34" charset="-122"/>
                 <a:cs typeface="Courier New" pitchFamily="34" charset="-120"/>
               </a:rPr>
-              <a:t>29 / 38   Smart-RUDP</a:t>
+              <a:t>29 / 39   Smart-RUDP</a:t>
             </a:r>
             <a:endParaRPr lang="en-US" sz="1000" dirty="0"/>
           </a:p>
@@ -23065,7 +23154,7 @@
                 <a:ea typeface="Courier New" pitchFamily="34" charset="-122"/>
                 <a:cs typeface="Courier New" pitchFamily="34" charset="-120"/>
               </a:rPr>
-              <a:t>3 / 38   Smart-RUDP</a:t>
+              <a:t>3 / 39   Smart-RUDP</a:t>
             </a:r>
             <a:endParaRPr lang="en-US" sz="1000" dirty="0"/>
           </a:p>
@@ -23459,7 +23548,7 @@
                 <a:ea typeface="Courier New" pitchFamily="34" charset="-122"/>
                 <a:cs typeface="Courier New" pitchFamily="34" charset="-120"/>
               </a:rPr>
-              <a:t>30 / 38   Smart-RUDP</a:t>
+              <a:t>30 / 39   Smart-RUDP</a:t>
             </a:r>
             <a:endParaRPr lang="en-US" sz="1000" dirty="0"/>
           </a:p>
@@ -23699,7 +23788,7 @@
                 <a:ea typeface="Courier New" pitchFamily="34" charset="-122"/>
                 <a:cs typeface="Courier New" pitchFamily="34" charset="-120"/>
               </a:rPr>
-              <a:t>31 / 38   Smart-RUDP</a:t>
+              <a:t>31 / 39   Smart-RUDP</a:t>
             </a:r>
             <a:endParaRPr lang="en-US" sz="1000" dirty="0"/>
           </a:p>
@@ -25977,7 +26066,7 @@
                 <a:ea typeface="Courier New" pitchFamily="34" charset="-122"/>
                 <a:cs typeface="Courier New" pitchFamily="34" charset="-120"/>
               </a:rPr>
-              <a:t>Reality check: real kernel (tc/netem)</a:t>
+              <a:t>How it was tested</a:t>
             </a:r>
             <a:endParaRPr lang="en-US" sz="3000" dirty="0"/>
           </a:p>
@@ -26016,7 +26105,244 @@
                 <a:ea typeface="Courier New" pitchFamily="34" charset="-122"/>
                 <a:cs typeface="Courier New" pitchFamily="34" charset="-120"/>
               </a:rPr>
-              <a:t>32 / 38   Smart-RUDP</a:t>
+              <a:t>32 / 39   Smart-RUDP</a:t>
+            </a:r>
+            <a:endParaRPr lang="en-US" sz="1000" dirty="0"/>
+          </a:p>
+        </p:txBody>
+      </p:sp>
+      <p:sp>
+        <p:nvSpPr>
+          <p:cNvPr id="4" name="Text 2"/>
+          <p:cNvSpPr/>
+          <p:nvPr/>
+        </p:nvSpPr>
+        <p:spPr>
+          <a:xfrm>
+            <a:off x="548640" y="1371600"/>
+            <a:ext cx="11064240" cy="4572000"/>
+          </a:xfrm>
+          <a:prstGeom prst="rect">
+            <a:avLst/>
+          </a:prstGeom>
+          <a:noFill/>
+          <a:ln/>
+        </p:spPr>
+        <p:txBody>
+          <a:bodyPr wrap="square" lIns="0" tIns="0" rIns="0" bIns="0" rtlCol="0" anchor="t"/>
+          <a:lstStyle/>
+          <a:p>
+            <a:pPr marL="342900" indent="-342900">
+              <a:spcAft>
+                <a:spcPts val="800"/>
+              </a:spcAft>
+              <a:buSzPct val="100000"/>
+              <a:buChar char="•"/>
+            </a:pPr>
+            <a:r>
+              <a:rPr lang="en-US" sz="1800" dirty="0">
+                <a:solidFill>
+                  <a:srgbClr val="E6EDF3"/>
+                </a:solidFill>
+                <a:latin typeface="Calibri" pitchFamily="34" charset="0"/>
+                <a:ea typeface="Calibri" pitchFamily="34" charset="-122"/>
+                <a:cs typeface="Calibri" pitchFamily="34" charset="-120"/>
+              </a:rPr>
+              <a:t>Correctness: unit, end-to-end, handshake, file-integrity, chat and simulator tests (make test); packet parser fuzzed under AddressSanitizer and UBSan (make fuzz)</a:t>
+            </a:r>
+            <a:endParaRPr lang="en-US" sz="1800" dirty="0"/>
+          </a:p>
+          <a:p>
+            <a:pPr marL="342900" indent="-342900">
+              <a:spcAft>
+                <a:spcPts val="800"/>
+              </a:spcAft>
+              <a:buSzPct val="100000"/>
+              <a:buChar char="•"/>
+            </a:pPr>
+            <a:r>
+              <a:rPr lang="en-US" sz="1800" dirty="0">
+                <a:solidFill>
+                  <a:srgbClr val="E6EDF3"/>
+                </a:solidFill>
+                <a:latin typeface="Calibri" pitchFamily="34" charset="0"/>
+                <a:ea typeface="Calibri" pitchFamily="34" charset="-122"/>
+                <a:cs typeface="Calibri" pitchFamily="34" charset="-120"/>
+              </a:rPr>
+              <a:t>Speed: virtual time, same C sender, checked against the real clock in 15 of 15 cells; paired seeds, 95% intervals, tuning seeds kept apart from test seeds</a:t>
+            </a:r>
+            <a:endParaRPr lang="en-US" sz="1800" dirty="0"/>
+          </a:p>
+          <a:p>
+            <a:pPr marL="342900" indent="-342900">
+              <a:spcAft>
+                <a:spcPts val="800"/>
+              </a:spcAft>
+              <a:buSzPct val="100000"/>
+              <a:buChar char="•"/>
+            </a:pPr>
+            <a:r>
+              <a:rPr lang="en-US" sz="1800" dirty="0">
+                <a:solidFill>
+                  <a:srgbClr val="E6EDF3"/>
+                </a:solidFill>
+                <a:latin typeface="Calibri" pitchFamily="34" charset="0"/>
+                <a:ea typeface="Calibri" pitchFamily="34" charset="-122"/>
+                <a:cs typeface="Calibri" pitchFamily="34" charset="-120"/>
+              </a:rPr>
+              <a:t>Realism, in four steps: emulation in the client, a separate impairment proxy on real sockets, Linux kernel netem, and two laptops over the internet</a:t>
+            </a:r>
+            <a:endParaRPr lang="en-US" sz="1800" dirty="0"/>
+          </a:p>
+          <a:p>
+            <a:pPr marL="342900" indent="-342900">
+              <a:spcAft>
+                <a:spcPts val="800"/>
+              </a:spcAft>
+              <a:buSzPct val="100000"/>
+              <a:buChar char="•"/>
+            </a:pPr>
+            <a:r>
+              <a:rPr lang="en-US" sz="1800" dirty="0">
+                <a:solidFill>
+                  <a:srgbClr val="E6EDF3"/>
+                </a:solidFill>
+                <a:latin typeface="Calibri" pitchFamily="34" charset="0"/>
+                <a:ea typeface="Calibri" pitchFamily="34" charset="-122"/>
+                <a:cs typeface="Calibri" pitchFamily="34" charset="-120"/>
+              </a:rPr>
+              <a:t>Every result in the report has the command that produced it (docs/RUNNING_ALL_TESTS.md)</a:t>
+            </a:r>
+            <a:endParaRPr lang="en-US" sz="1800" dirty="0"/>
+          </a:p>
+          <a:p>
+            <a:pPr marL="342900" indent="-342900">
+              <a:spcAft>
+                <a:spcPts val="800"/>
+              </a:spcAft>
+              <a:buSzPct val="100000"/>
+              <a:buChar char="•"/>
+            </a:pPr>
+            <a:r>
+              <a:rPr lang="en-US" sz="1800" dirty="0">
+                <a:solidFill>
+                  <a:srgbClr val="E6EDF3"/>
+                </a:solidFill>
+                <a:latin typeface="Calibri" pitchFamily="34" charset="0"/>
+                <a:ea typeface="Calibri" pitchFamily="34" charset="-122"/>
+                <a:cs typeface="Calibri" pitchFamily="34" charset="-120"/>
+              </a:rPr>
+              <a:t>We also record our own mistakes: untuned baselines, unequal payloads and synthetic 40-byte packets were each caught, fixed and re-run</a:t>
+            </a:r>
+            <a:endParaRPr lang="en-US" sz="1800" dirty="0"/>
+          </a:p>
+        </p:txBody>
+      </p:sp>
+    </p:spTree>
+  </p:cSld>
+  <p:clrMapOvr>
+    <a:masterClrMapping/>
+  </p:clrMapOvr>
+</p:sld>
+</file>
+
+<file path=ppt/slides/slide33.xml><?xml version="1.0" encoding="utf-8"?>
+<p:sld xmlns:a="http://schemas.openxmlformats.org/drawingml/2006/main" xmlns:r="http://schemas.openxmlformats.org/officeDocument/2006/relationships" xmlns:p="http://schemas.openxmlformats.org/presentationml/2006/main">
+  <p:cSld name="Slide 33">
+    <p:bg>
+      <p:bgPr>
+        <a:solidFill>
+          <a:srgbClr val="0B0F14"/>
+        </a:solidFill>
+      </p:bgPr>
+    </p:bg>
+    <p:spTree>
+      <p:nvGrpSpPr>
+        <p:cNvPr id="1" name=""/>
+        <p:cNvGrpSpPr/>
+        <p:nvPr/>
+      </p:nvGrpSpPr>
+      <p:grpSpPr>
+        <a:xfrm>
+          <a:off x="0" y="0"/>
+          <a:ext cx="0" cy="0"/>
+          <a:chOff x="0" y="0"/>
+          <a:chExt cx="0" cy="0"/>
+        </a:xfrm>
+      </p:grpSpPr>
+      <p:sp>
+        <p:nvSpPr>
+          <p:cNvPr id="2" name="Text 0"/>
+          <p:cNvSpPr/>
+          <p:nvPr/>
+        </p:nvSpPr>
+        <p:spPr>
+          <a:xfrm>
+            <a:off x="548640" y="320040"/>
+            <a:ext cx="11064240" cy="731520"/>
+          </a:xfrm>
+          <a:prstGeom prst="rect">
+            <a:avLst/>
+          </a:prstGeom>
+          <a:noFill/>
+          <a:ln/>
+        </p:spPr>
+        <p:txBody>
+          <a:bodyPr wrap="square" lIns="0" tIns="0" rIns="0" bIns="0" rtlCol="0" anchor="ctr"/>
+          <a:lstStyle/>
+          <a:p>
+            <a:pPr indent="0" marL="0">
+              <a:buNone/>
+            </a:pPr>
+            <a:r>
+              <a:rPr lang="en-US" sz="3000" b="1" dirty="0">
+                <a:solidFill>
+                  <a:srgbClr val="39FF88"/>
+                </a:solidFill>
+                <a:latin typeface="Courier New" pitchFamily="34" charset="0"/>
+                <a:ea typeface="Courier New" pitchFamily="34" charset="-122"/>
+                <a:cs typeface="Courier New" pitchFamily="34" charset="-120"/>
+              </a:rPr>
+              <a:t>Reality check: real kernel (tc/netem)</a:t>
+            </a:r>
+            <a:endParaRPr lang="en-US" sz="3000" dirty="0"/>
+          </a:p>
+        </p:txBody>
+      </p:sp>
+      <p:sp>
+        <p:nvSpPr>
+          <p:cNvPr id="3" name="Text 1"/>
+          <p:cNvSpPr/>
+          <p:nvPr/>
+        </p:nvSpPr>
+        <p:spPr>
+          <a:xfrm>
+            <a:off x="9418320" y="6446520"/>
+            <a:ext cx="2377440" cy="274320"/>
+          </a:xfrm>
+          <a:prstGeom prst="rect">
+            <a:avLst/>
+          </a:prstGeom>
+          <a:noFill/>
+          <a:ln/>
+        </p:spPr>
+        <p:txBody>
+          <a:bodyPr wrap="square" lIns="0" tIns="0" rIns="0" bIns="0" rtlCol="0" anchor="ctr"/>
+          <a:lstStyle/>
+          <a:p>
+            <a:pPr algn="r" indent="0" marL="0">
+              <a:buNone/>
+            </a:pPr>
+            <a:r>
+              <a:rPr lang="en-US" sz="1000" dirty="0">
+                <a:solidFill>
+                  <a:srgbClr val="8B98A5"/>
+                </a:solidFill>
+                <a:latin typeface="Courier New" pitchFamily="34" charset="0"/>
+                <a:ea typeface="Courier New" pitchFamily="34" charset="-122"/>
+                <a:cs typeface="Courier New" pitchFamily="34" charset="-120"/>
+              </a:rPr>
+              <a:t>33 / 39   Smart-RUDP</a:t>
             </a:r>
             <a:endParaRPr lang="en-US" sz="1000" dirty="0"/>
           </a:p>
@@ -26024,7 +26350,7 @@
       </p:sp>
       <p:graphicFrame>
         <p:nvGraphicFramePr>
-          <p:cNvPr id="33" name="Table 0"/>
+          <p:cNvPr id="34" name="Table 0"/>
           <p:cNvGraphicFramePr>
             <a:graphicFrameLocks noGrp="1"/>
           </p:cNvGraphicFramePr>
@@ -27900,9 +28226,9 @@
 </p:sld>
 </file>
 
-<file path=ppt/slides/slide33.xml><?xml version="1.0" encoding="utf-8"?>
+<file path=ppt/slides/slide34.xml><?xml version="1.0" encoding="utf-8"?>
 <p:sld xmlns:a="http://schemas.openxmlformats.org/drawingml/2006/main" xmlns:r="http://schemas.openxmlformats.org/officeDocument/2006/relationships" xmlns:p="http://schemas.openxmlformats.org/presentationml/2006/main">
-  <p:cSld name="Slide 33">
+  <p:cSld name="Slide 34">
     <p:bg>
       <p:bgPr>
         <a:solidFill>
@@ -27996,7 +28322,7 @@
                 <a:ea typeface="Courier New" pitchFamily="34" charset="-122"/>
                 <a:cs typeface="Courier New" pitchFamily="34" charset="-120"/>
               </a:rPr>
-              <a:t>33 / 38   Smart-RUDP</a:t>
+              <a:t>34 / 39   Smart-RUDP</a:t>
             </a:r>
             <a:endParaRPr lang="en-US" sz="1000" dirty="0"/>
           </a:p>
@@ -28004,7 +28330,7 @@
       </p:sp>
       <p:graphicFrame>
         <p:nvGraphicFramePr>
-          <p:cNvPr id="34" name="Table 0"/>
+          <p:cNvPr id="35" name="Table 0"/>
           <p:cNvGraphicFramePr>
             <a:graphicFrameLocks noGrp="1"/>
           </p:cNvGraphicFramePr>
@@ -30543,9 +30869,9 @@
 </p:sld>
 </file>
 
-<file path=ppt/slides/slide34.xml><?xml version="1.0" encoding="utf-8"?>
+<file path=ppt/slides/slide35.xml><?xml version="1.0" encoding="utf-8"?>
 <p:sld xmlns:a="http://schemas.openxmlformats.org/drawingml/2006/main" xmlns:r="http://schemas.openxmlformats.org/officeDocument/2006/relationships" xmlns:p="http://schemas.openxmlformats.org/presentationml/2006/main">
-  <p:cSld name="Slide 34">
+  <p:cSld name="Slide 35">
     <p:bg>
       <p:bgPr>
         <a:solidFill>
@@ -30639,7 +30965,7 @@
                 <a:ea typeface="Courier New" pitchFamily="34" charset="-122"/>
                 <a:cs typeface="Courier New" pitchFamily="34" charset="-120"/>
               </a:rPr>
-              <a:t>34 / 38   Smart-RUDP</a:t>
+              <a:t>35 / 39   Smart-RUDP</a:t>
             </a:r>
             <a:endParaRPr lang="en-US" sz="1000" dirty="0"/>
           </a:p>
@@ -30647,7 +30973,7 @@
       </p:sp>
       <p:graphicFrame>
         <p:nvGraphicFramePr>
-          <p:cNvPr id="35" name="Table 0"/>
+          <p:cNvPr id="36" name="Table 0"/>
           <p:cNvGraphicFramePr>
             <a:graphicFrameLocks noGrp="1"/>
           </p:cNvGraphicFramePr>
@@ -31634,9 +31960,9 @@
 </p:sld>
 </file>
 
-<file path=ppt/slides/slide35.xml><?xml version="1.0" encoding="utf-8"?>
+<file path=ppt/slides/slide36.xml><?xml version="1.0" encoding="utf-8"?>
 <p:sld xmlns:a="http://schemas.openxmlformats.org/drawingml/2006/main" xmlns:r="http://schemas.openxmlformats.org/officeDocument/2006/relationships" xmlns:p="http://schemas.openxmlformats.org/presentationml/2006/main">
-  <p:cSld name="Slide 35">
+  <p:cSld name="Slide 36">
     <p:bg>
       <p:bgPr>
         <a:solidFill>
@@ -31730,7 +32056,7 @@
                 <a:ea typeface="Courier New" pitchFamily="34" charset="-122"/>
                 <a:cs typeface="Courier New" pitchFamily="34" charset="-120"/>
               </a:rPr>
-              <a:t>35 / 38   Smart-RUDP</a:t>
+              <a:t>36 / 39   Smart-RUDP</a:t>
             </a:r>
             <a:endParaRPr lang="en-US" sz="1000" dirty="0"/>
           </a:p>
@@ -31738,7 +32064,7 @@
       </p:sp>
       <p:graphicFrame>
         <p:nvGraphicFramePr>
-          <p:cNvPr id="36" name="Table 0"/>
+          <p:cNvPr id="37" name="Table 0"/>
           <p:cNvGraphicFramePr>
             <a:graphicFrameLocks noGrp="1"/>
           </p:cNvGraphicFramePr>
@@ -34365,9 +34691,9 @@
 </p:sld>
 </file>
 
-<file path=ppt/slides/slide36.xml><?xml version="1.0" encoding="utf-8"?>
+<file path=ppt/slides/slide37.xml><?xml version="1.0" encoding="utf-8"?>
 <p:sld xmlns:a="http://schemas.openxmlformats.org/drawingml/2006/main" xmlns:r="http://schemas.openxmlformats.org/officeDocument/2006/relationships" xmlns:p="http://schemas.openxmlformats.org/presentationml/2006/main">
-  <p:cSld name="Slide 36">
+  <p:cSld name="Slide 37">
     <p:bg>
       <p:bgPr>
         <a:solidFill>
@@ -34461,7 +34787,7 @@
                 <a:ea typeface="Courier New" pitchFamily="34" charset="-122"/>
                 <a:cs typeface="Courier New" pitchFamily="34" charset="-120"/>
               </a:rPr>
-              <a:t>36 / 38   Smart-RUDP</a:t>
+              <a:t>37 / 39   Smart-RUDP</a:t>
             </a:r>
             <a:endParaRPr lang="en-US" sz="1000" dirty="0"/>
           </a:p>
@@ -34788,9 +35114,9 @@
 </p:sld>
 </file>
 
-<file path=ppt/slides/slide37.xml><?xml version="1.0" encoding="utf-8"?>
+<file path=ppt/slides/slide38.xml><?xml version="1.0" encoding="utf-8"?>
 <p:sld xmlns:a="http://schemas.openxmlformats.org/drawingml/2006/main" xmlns:r="http://schemas.openxmlformats.org/officeDocument/2006/relationships" xmlns:p="http://schemas.openxmlformats.org/presentationml/2006/main">
-  <p:cSld name="Slide 37">
+  <p:cSld name="Slide 38">
     <p:bg>
       <p:bgPr>
         <a:solidFill>
@@ -34937,9 +35263,9 @@
 </p:sld>
 </file>
 
-<file path=ppt/slides/slide38.xml><?xml version="1.0" encoding="utf-8"?>
+<file path=ppt/slides/slide39.xml><?xml version="1.0" encoding="utf-8"?>
 <p:sld xmlns:a="http://schemas.openxmlformats.org/drawingml/2006/main" xmlns:r="http://schemas.openxmlformats.org/officeDocument/2006/relationships" xmlns:p="http://schemas.openxmlformats.org/presentationml/2006/main">
-  <p:cSld name="Slide 38">
+  <p:cSld name="Slide 39">
     <p:bg>
       <p:bgPr>
         <a:solidFill>
@@ -35273,7 +35599,7 @@
                 <a:ea typeface="Courier New" pitchFamily="34" charset="-122"/>
                 <a:cs typeface="Courier New" pitchFamily="34" charset="-120"/>
               </a:rPr>
-              <a:t>4 / 38   Smart-RUDP</a:t>
+              <a:t>4 / 39   Smart-RUDP</a:t>
             </a:r>
             <a:endParaRPr lang="en-US" sz="1000" dirty="0"/>
           </a:p>
@@ -35834,7 +36160,7 @@
                 <a:ea typeface="Courier New" pitchFamily="34" charset="-122"/>
                 <a:cs typeface="Courier New" pitchFamily="34" charset="-120"/>
               </a:rPr>
-              <a:t>5 / 38   Smart-RUDP</a:t>
+              <a:t>5 / 39   Smart-RUDP</a:t>
             </a:r>
             <a:endParaRPr lang="en-US" sz="1000" dirty="0"/>
           </a:p>
@@ -37273,7 +37599,7 @@
                 <a:ea typeface="Courier New" pitchFamily="34" charset="-122"/>
                 <a:cs typeface="Courier New" pitchFamily="34" charset="-120"/>
               </a:rPr>
-              <a:t>6 / 38   Smart-RUDP</a:t>
+              <a:t>6 / 39   Smart-RUDP</a:t>
             </a:r>
             <a:endParaRPr lang="en-US" sz="1000" dirty="0"/>
           </a:p>
@@ -38508,7 +38834,7 @@
                 <a:ea typeface="Courier New" pitchFamily="34" charset="-122"/>
                 <a:cs typeface="Courier New" pitchFamily="34" charset="-120"/>
               </a:rPr>
-              <a:t>7 / 38   Smart-RUDP</a:t>
+              <a:t>7 / 39   Smart-RUDP</a:t>
             </a:r>
             <a:endParaRPr lang="en-US" sz="1000" dirty="0"/>
           </a:p>
@@ -38951,7 +39277,7 @@
                 <a:ea typeface="Courier New" pitchFamily="34" charset="-122"/>
                 <a:cs typeface="Courier New" pitchFamily="34" charset="-120"/>
               </a:rPr>
-              <a:t>8 / 38   Smart-RUDP</a:t>
+              <a:t>8 / 39   Smart-RUDP</a:t>
             </a:r>
             <a:endParaRPr lang="en-US" sz="1000" dirty="0"/>
           </a:p>
@@ -39251,7 +39577,7 @@
                 <a:ea typeface="Courier New" pitchFamily="34" charset="-122"/>
                 <a:cs typeface="Courier New" pitchFamily="34" charset="-120"/>
               </a:rPr>
-              <a:t>9 / 38   Smart-RUDP</a:t>
+              <a:t>9 / 39   Smart-RUDP</a:t>
             </a:r>
             <a:endParaRPr lang="en-US" sz="1000" dirty="0"/>
           </a:p>

--- a/docs/final/RUDP_Presentation.pptx
+++ b/docs/final/RUDP_Presentation.pptx
@@ -48,9 +48,10 @@
     <p:sldId id="296" r:id="rId42"/>
     <p:sldId id="297" r:id="rId43"/>
     <p:sldId id="298" r:id="rId44"/>
+    <p:sldId id="299" r:id="rId45"/>
   </p:sldIdLst>
   <p:notesMasterIdLst>
-    <p:notesMasterId r:id="rId45"/>
+    <p:notesMasterId r:id="rId46"/>
   </p:notesMasterIdLst>
   <p:sldSz cx="12192000" cy="6858000"/>
   <p:notesSz cx="6858000" cy="12192000"/>
@@ -4515,6 +4516,94 @@
 </p:notes>
 </file>
 
+<file path=ppt/notesSlides/notesSlide44.xml><?xml version="1.0" encoding="utf-8"?>
+<p:notes xmlns:a="http://schemas.openxmlformats.org/drawingml/2006/main" xmlns:r="http://schemas.openxmlformats.org/officeDocument/2006/relationships" xmlns:p="http://schemas.openxmlformats.org/presentationml/2006/main">
+  <p:cSld>
+    <p:spTree>
+      <p:nvGrpSpPr>
+        <p:cNvPr id="1" name=""/>
+        <p:cNvGrpSpPr/>
+        <p:nvPr/>
+      </p:nvGrpSpPr>
+      <p:grpSpPr>
+        <a:xfrm>
+          <a:off x="0" y="0"/>
+          <a:ext cx="0" cy="0"/>
+          <a:chOff x="0" y="0"/>
+          <a:chExt cx="0" cy="0"/>
+        </a:xfrm>
+      </p:grpSpPr>
+      <p:sp>
+        <p:nvSpPr>
+          <p:cNvPr id="2" name="Slide Image Placeholder 1"/>
+          <p:cNvSpPr>
+            <a:spLocks noGrp="1" noRot="1" noChangeAspect="1"/>
+          </p:cNvSpPr>
+          <p:nvPr>
+            <p:ph type="sldImg"/>
+          </p:nvPr>
+        </p:nvSpPr>
+        <p:spPr/>
+      </p:sp>
+      <p:sp>
+        <p:nvSpPr>
+          <p:cNvPr id="3" name="Notes Placeholder 2"/>
+          <p:cNvSpPr>
+            <a:spLocks noGrp="1"/>
+          </p:cNvSpPr>
+          <p:nvPr>
+            <p:ph type="body" idx="1"/>
+          </p:nvPr>
+        </p:nvSpPr>
+        <p:spPr/>
+        <p:txBody>
+          <a:bodyPr/>
+          <a:lstStyle/>
+          <a:p>
+            <a:r>
+              <a:rPr lang="en-US" dirty="0"/>
+              <a:t/>
+            </a:r>
+            <a:endParaRPr lang="en-US" dirty="0"/>
+          </a:p>
+        </p:txBody>
+      </p:sp>
+      <p:sp>
+        <p:nvSpPr>
+          <p:cNvPr id="4" name="Slide Number Placeholder 3"/>
+          <p:cNvSpPr>
+            <a:spLocks noGrp="1"/>
+          </p:cNvSpPr>
+          <p:nvPr>
+            <p:ph type="sldNum" sz="quarter" idx="10"/>
+          </p:nvPr>
+        </p:nvSpPr>
+        <p:spPr/>
+        <p:txBody>
+          <a:bodyPr/>
+          <a:lstStyle/>
+          <a:p>
+            <a:fld id="{F7021451-1387-4CA6-816F-3879F97B5CBC}" type="slidenum">
+              <a:rPr lang="en-US"/>
+              <a:t>44</a:t>
+            </a:fld>
+            <a:endParaRPr lang="en-US"/>
+          </a:p>
+        </p:txBody>
+      </p:sp>
+    </p:spTree>
+    <p:extLst>
+      <p:ext uri="{BB962C8B-B14F-4D97-AF65-F5344CB8AC3E}">
+        <p14:creationId xmlns:p14="http://schemas.microsoft.com/office/powerpoint/2010/main" val="1024086991"/>
+      </p:ext>
+    </p:extLst>
+  </p:cSld>
+  <p:clrMapOvr>
+    <a:masterClrMapping/>
+  </p:clrMapOvr>
+</p:notes>
+</file>
+
 <file path=ppt/notesSlides/notesSlide5.xml><?xml version="1.0" encoding="utf-8"?>
 <p:notes xmlns:a="http://schemas.openxmlformats.org/drawingml/2006/main" xmlns:r="http://schemas.openxmlformats.org/officeDocument/2006/relationships" xmlns:p="http://schemas.openxmlformats.org/presentationml/2006/main">
   <p:cSld>
@@ -5546,7 +5635,7 @@
                 <a:ea typeface="Courier New" pitchFamily="34" charset="-122"/>
                 <a:cs typeface="Courier New" pitchFamily="34" charset="-120"/>
               </a:rPr>
-              <a:t>10 / 41   Smart-RUDP</a:t>
+              <a:t>10 / 42   Smart-RUDP</a:t>
             </a:r>
             <a:endParaRPr lang="en-US" sz="1000" dirty="0"/>
           </a:p>
@@ -8189,7 +8278,7 @@
                 <a:ea typeface="Courier New" pitchFamily="34" charset="-122"/>
                 <a:cs typeface="Courier New" pitchFamily="34" charset="-120"/>
               </a:rPr>
-              <a:t>11 / 41   Smart-RUDP</a:t>
+              <a:t>11 / 42   Smart-RUDP</a:t>
             </a:r>
             <a:endParaRPr lang="en-US" sz="1000" dirty="0"/>
           </a:p>
@@ -9259,7 +9348,7 @@
                 <a:ea typeface="Courier New" pitchFamily="34" charset="-122"/>
                 <a:cs typeface="Courier New" pitchFamily="34" charset="-120"/>
               </a:rPr>
-              <a:t>12 / 41   Smart-RUDP</a:t>
+              <a:t>12 / 42   Smart-RUDP</a:t>
             </a:r>
             <a:endParaRPr lang="en-US" sz="1000" dirty="0"/>
           </a:p>
@@ -11990,7 +12079,7 @@
                 <a:ea typeface="Courier New" pitchFamily="34" charset="-122"/>
                 <a:cs typeface="Courier New" pitchFamily="34" charset="-120"/>
               </a:rPr>
-              <a:t>13 / 41   Smart-RUDP</a:t>
+              <a:t>13 / 42   Smart-RUDP</a:t>
             </a:r>
             <a:endParaRPr lang="en-US" sz="1000" dirty="0"/>
           </a:p>
@@ -12290,7 +12379,7 @@
                 <a:ea typeface="Courier New" pitchFamily="34" charset="-122"/>
                 <a:cs typeface="Courier New" pitchFamily="34" charset="-120"/>
               </a:rPr>
-              <a:t>14 / 41   Smart-RUDP</a:t>
+              <a:t>14 / 42   Smart-RUDP</a:t>
             </a:r>
             <a:endParaRPr lang="en-US" sz="1000" dirty="0"/>
           </a:p>
@@ -12674,7 +12763,7 @@
                 <a:ea typeface="Courier New" pitchFamily="34" charset="-122"/>
                 <a:cs typeface="Courier New" pitchFamily="34" charset="-120"/>
               </a:rPr>
-              <a:t>15 / 41   Smart-RUDP</a:t>
+              <a:t>15 / 42   Smart-RUDP</a:t>
             </a:r>
             <a:endParaRPr lang="en-US" sz="1000" dirty="0"/>
           </a:p>
@@ -12914,7 +13003,7 @@
                 <a:ea typeface="Courier New" pitchFamily="34" charset="-122"/>
                 <a:cs typeface="Courier New" pitchFamily="34" charset="-120"/>
               </a:rPr>
-              <a:t>16 / 41   Smart-RUDP</a:t>
+              <a:t>16 / 42   Smart-RUDP</a:t>
             </a:r>
             <a:endParaRPr lang="en-US" sz="1000" dirty="0"/>
           </a:p>
@@ -13136,7 +13225,7 @@
                 <a:ea typeface="Courier New" pitchFamily="34" charset="-122"/>
                 <a:cs typeface="Courier New" pitchFamily="34" charset="-120"/>
               </a:rPr>
-              <a:t>17 / 41   Smart-RUDP</a:t>
+              <a:t>17 / 42   Smart-RUDP</a:t>
             </a:r>
             <a:endParaRPr lang="en-US" sz="1000" dirty="0"/>
           </a:p>
@@ -13421,6 +13510,267 @@
                 <a:ea typeface="Courier New" pitchFamily="34" charset="-122"/>
                 <a:cs typeface="Courier New" pitchFamily="34" charset="-120"/>
               </a:rPr>
+              <a:t>RUDP Drop: race the policies on any file</a:t>
+            </a:r>
+            <a:endParaRPr lang="en-US" sz="3000" dirty="0"/>
+          </a:p>
+        </p:txBody>
+      </p:sp>
+      <p:sp>
+        <p:nvSpPr>
+          <p:cNvPr id="3" name="Text 1"/>
+          <p:cNvSpPr/>
+          <p:nvPr/>
+        </p:nvSpPr>
+        <p:spPr>
+          <a:xfrm>
+            <a:off x="9418320" y="6446520"/>
+            <a:ext cx="2377440" cy="274320"/>
+          </a:xfrm>
+          <a:prstGeom prst="rect">
+            <a:avLst/>
+          </a:prstGeom>
+          <a:noFill/>
+          <a:ln/>
+        </p:spPr>
+        <p:txBody>
+          <a:bodyPr wrap="square" lIns="0" tIns="0" rIns="0" bIns="0" rtlCol="0" anchor="ctr"/>
+          <a:lstStyle/>
+          <a:p>
+            <a:pPr algn="r" indent="0" marL="0">
+              <a:buNone/>
+            </a:pPr>
+            <a:r>
+              <a:rPr lang="en-US" sz="1000" dirty="0">
+                <a:solidFill>
+                  <a:srgbClr val="8B98A5"/>
+                </a:solidFill>
+                <a:latin typeface="Courier New" pitchFamily="34" charset="0"/>
+                <a:ea typeface="Courier New" pitchFamily="34" charset="-122"/>
+                <a:cs typeface="Courier New" pitchFamily="34" charset="-120"/>
+              </a:rPr>
+              <a:t>18 / 42   Smart-RUDP</a:t>
+            </a:r>
+            <a:endParaRPr lang="en-US" sz="1000" dirty="0"/>
+          </a:p>
+        </p:txBody>
+      </p:sp>
+      <p:pic>
+        <p:nvPicPr>
+          <p:cNvPr id="4" name="Image 0" descr="drop_race.png">    </p:cNvPr>
+          <p:cNvPicPr>
+            <a:picLocks noChangeAspect="1"/>
+          </p:cNvPicPr>
+          <p:nvPr/>
+        </p:nvPicPr>
+        <p:blipFill>
+          <a:blip r:embed="rId1"/>
+          <a:stretch>
+            <a:fillRect/>
+          </a:stretch>
+        </p:blipFill>
+        <p:spPr>
+          <a:xfrm>
+            <a:off x="548640" y="1097280"/>
+            <a:ext cx="3569419" cy="5212080"/>
+          </a:xfrm>
+          <a:prstGeom prst="rect">
+            <a:avLst/>
+          </a:prstGeom>
+        </p:spPr>
+      </p:pic>
+      <p:sp>
+        <p:nvSpPr>
+          <p:cNvPr id="5" name="Text 2"/>
+          <p:cNvSpPr/>
+          <p:nvPr/>
+        </p:nvSpPr>
+        <p:spPr>
+          <a:xfrm>
+            <a:off x="4846320" y="1371600"/>
+            <a:ext cx="6949440" cy="4754880"/>
+          </a:xfrm>
+          <a:prstGeom prst="rect">
+            <a:avLst/>
+          </a:prstGeom>
+          <a:noFill/>
+          <a:ln/>
+        </p:spPr>
+        <p:txBody>
+          <a:bodyPr wrap="square" lIns="0" tIns="0" rIns="0" bIns="0" rtlCol="0" anchor="t"/>
+          <a:lstStyle/>
+          <a:p>
+            <a:pPr marL="342900" indent="-342900">
+              <a:spcAft>
+                <a:spcPts val="800"/>
+              </a:spcAft>
+              <a:buSzPct val="100000"/>
+              <a:buChar char="•"/>
+            </a:pPr>
+            <a:r>
+              <a:rPr lang="en-US" sz="1800" dirty="0">
+                <a:solidFill>
+                  <a:srgbClr val="E6EDF3"/>
+                </a:solidFill>
+                <a:latin typeface="Calibri" pitchFamily="34" charset="0"/>
+                <a:ea typeface="Calibri" pitchFamily="34" charset="-122"/>
+                <a:cs typeface="Calibri" pitchFamily="34" charset="-120"/>
+              </a:rPr>
+              <a:t>Drop in any file (up to 12 MB), pick a network, and race AIMD 32, tuned AIMD and the neural agent</a:t>
+            </a:r>
+            <a:endParaRPr lang="en-US" sz="1800" dirty="0"/>
+          </a:p>
+          <a:p>
+            <a:pPr marL="342900" indent="-342900">
+              <a:spcAft>
+                <a:spcPts val="800"/>
+              </a:spcAft>
+              <a:buSzPct val="100000"/>
+              <a:buChar char="•"/>
+            </a:pPr>
+            <a:r>
+              <a:rPr lang="en-US" sz="1800" dirty="0">
+                <a:solidFill>
+                  <a:srgbClr val="E6EDF3"/>
+                </a:solidFill>
+                <a:latin typeface="Calibri" pitchFamily="34" charset="0"/>
+                <a:ea typeface="Calibri" pitchFamily="34" charset="-122"/>
+                <a:cs typeface="Calibri" pitchFamily="34" charset="-120"/>
+              </a:rPr>
+              <a:t>Example, 2 MB on lossy Wi-Fi: neural 13.0 s, AIMD 26.7 s, tuned AIMD 29.5 s (one run each)</a:t>
+            </a:r>
+            <a:endParaRPr lang="en-US" sz="1800" dirty="0"/>
+          </a:p>
+          <a:p>
+            <a:pPr marL="342900" indent="-342900">
+              <a:spcAft>
+                <a:spcPts val="800"/>
+              </a:spcAft>
+              <a:buSzPct val="100000"/>
+              <a:buChar char="•"/>
+            </a:pPr>
+            <a:r>
+              <a:rPr lang="en-US" sz="1800" dirty="0">
+                <a:solidFill>
+                  <a:srgbClr val="E6EDF3"/>
+                </a:solidFill>
+                <a:latin typeface="Calibri" pitchFamily="34" charset="0"/>
+                <a:ea typeface="Calibri" pitchFamily="34" charset="-122"/>
+                <a:cs typeface="Calibri" pitchFamily="34" charset="-120"/>
+              </a:rPr>
+              <a:t>Every received copy is checked byte for byte (SHA-256) and can be downloaded</a:t>
+            </a:r>
+            <a:endParaRPr lang="en-US" sz="1800" dirty="0"/>
+          </a:p>
+          <a:p>
+            <a:pPr marL="342900" indent="-342900">
+              <a:spcAft>
+                <a:spcPts val="800"/>
+              </a:spcAft>
+              <a:buSzPct val="100000"/>
+              <a:buChar char="•"/>
+            </a:pPr>
+            <a:r>
+              <a:rPr lang="en-US" sz="1800" dirty="0">
+                <a:solidFill>
+                  <a:srgbClr val="E6EDF3"/>
+                </a:solidFill>
+                <a:latin typeface="Calibri" pitchFamily="34" charset="0"/>
+                <a:ea typeface="Calibri" pitchFamily="34" charset="-122"/>
+                <a:cs typeface="Calibri" pitchFamily="34" charset="-120"/>
+              </a:rPr>
+              <a:t>Real C stack: librudp sender, bin/server and the bin/impair proxy; make drop starts it at localhost:8800</a:t>
+            </a:r>
+            <a:endParaRPr lang="en-US" sz="1800" dirty="0"/>
+          </a:p>
+          <a:p>
+            <a:pPr marL="342900" indent="-342900">
+              <a:spcAft>
+                <a:spcPts val="800"/>
+              </a:spcAft>
+              <a:buSzPct val="100000"/>
+              <a:buChar char="•"/>
+            </a:pPr>
+            <a:r>
+              <a:rPr lang="en-US" sz="1800" dirty="0">
+                <a:solidFill>
+                  <a:srgbClr val="E6EDF3"/>
+                </a:solidFill>
+                <a:latin typeface="Calibri" pitchFamily="34" charset="0"/>
+                <a:ea typeface="Calibri" pitchFamily="34" charset="-122"/>
+                <a:cs typeface="Calibri" pitchFamily="34" charset="-120"/>
+              </a:rPr>
+              <a:t>One run per policy, so small gaps are noise</a:t>
+            </a:r>
+            <a:endParaRPr lang="en-US" sz="1800" dirty="0"/>
+          </a:p>
+        </p:txBody>
+      </p:sp>
+    </p:spTree>
+  </p:cSld>
+  <p:clrMapOvr>
+    <a:masterClrMapping/>
+  </p:clrMapOvr>
+</p:sld>
+</file>
+
+<file path=ppt/slides/slide19.xml><?xml version="1.0" encoding="utf-8"?>
+<p:sld xmlns:a="http://schemas.openxmlformats.org/drawingml/2006/main" xmlns:r="http://schemas.openxmlformats.org/officeDocument/2006/relationships" xmlns:p="http://schemas.openxmlformats.org/presentationml/2006/main">
+  <p:cSld name="Slide 19">
+    <p:bg>
+      <p:bgPr>
+        <a:solidFill>
+          <a:srgbClr val="0B0F14"/>
+        </a:solidFill>
+      </p:bgPr>
+    </p:bg>
+    <p:spTree>
+      <p:nvGrpSpPr>
+        <p:cNvPr id="1" name=""/>
+        <p:cNvGrpSpPr/>
+        <p:nvPr/>
+      </p:nvGrpSpPr>
+      <p:grpSpPr>
+        <a:xfrm>
+          <a:off x="0" y="0"/>
+          <a:ext cx="0" cy="0"/>
+          <a:chOff x="0" y="0"/>
+          <a:chExt cx="0" cy="0"/>
+        </a:xfrm>
+      </p:grpSpPr>
+      <p:sp>
+        <p:nvSpPr>
+          <p:cNvPr id="2" name="Text 0"/>
+          <p:cNvSpPr/>
+          <p:nvPr/>
+        </p:nvSpPr>
+        <p:spPr>
+          <a:xfrm>
+            <a:off x="548640" y="320040"/>
+            <a:ext cx="11064240" cy="731520"/>
+          </a:xfrm>
+          <a:prstGeom prst="rect">
+            <a:avLst/>
+          </a:prstGeom>
+          <a:noFill/>
+          <a:ln/>
+        </p:spPr>
+        <p:txBody>
+          <a:bodyPr wrap="square" lIns="0" tIns="0" rIns="0" bIns="0" rtlCol="0" anchor="ctr"/>
+          <a:lstStyle/>
+          <a:p>
+            <a:pPr indent="0" marL="0">
+              <a:buNone/>
+            </a:pPr>
+            <a:r>
+              <a:rPr lang="en-US" sz="3000" b="1" dirty="0">
+                <a:solidFill>
+                  <a:srgbClr val="39FF88"/>
+                </a:solidFill>
+                <a:latin typeface="Courier New" pitchFamily="34" charset="0"/>
+                <a:ea typeface="Courier New" pitchFamily="34" charset="-122"/>
+                <a:cs typeface="Courier New" pitchFamily="34" charset="-120"/>
+              </a:rPr>
               <a:t>The RUDP packet header: 13 bytes</a:t>
             </a:r>
             <a:endParaRPr lang="en-US" sz="3000" dirty="0"/>
@@ -13460,7 +13810,7 @@
                 <a:ea typeface="Courier New" pitchFamily="34" charset="-122"/>
                 <a:cs typeface="Courier New" pitchFamily="34" charset="-120"/>
               </a:rPr>
-              <a:t>18 / 41   Smart-RUDP</a:t>
+              <a:t>19 / 42   Smart-RUDP</a:t>
             </a:r>
             <a:endParaRPr lang="en-US" sz="1000" dirty="0"/>
           </a:p>
@@ -13468,7 +13818,7 @@
       </p:sp>
       <p:graphicFrame>
         <p:nvGraphicFramePr>
-          <p:cNvPr id="19" name="Table 0"/>
+          <p:cNvPr id="20" name="Table 0"/>
           <p:cNvGraphicFramePr>
             <a:graphicFrameLocks noGrp="1"/>
           </p:cNvGraphicFramePr>
@@ -14803,9 +15153,403 @@
 </p:sld>
 </file>
 
-<file path=ppt/slides/slide19.xml><?xml version="1.0" encoding="utf-8"?>
+<file path=ppt/slides/slide2.xml><?xml version="1.0" encoding="utf-8"?>
 <p:sld xmlns:a="http://schemas.openxmlformats.org/drawingml/2006/main" xmlns:r="http://schemas.openxmlformats.org/officeDocument/2006/relationships" xmlns:p="http://schemas.openxmlformats.org/presentationml/2006/main">
-  <p:cSld name="Slide 19">
+  <p:cSld name="Slide 2">
+    <p:bg>
+      <p:bgPr>
+        <a:solidFill>
+          <a:srgbClr val="0B0F14"/>
+        </a:solidFill>
+      </p:bgPr>
+    </p:bg>
+    <p:spTree>
+      <p:nvGrpSpPr>
+        <p:cNvPr id="1" name=""/>
+        <p:cNvGrpSpPr/>
+        <p:nvPr/>
+      </p:nvGrpSpPr>
+      <p:grpSpPr>
+        <a:xfrm>
+          <a:off x="0" y="0"/>
+          <a:ext cx="0" cy="0"/>
+          <a:chOff x="0" y="0"/>
+          <a:chExt cx="0" cy="0"/>
+        </a:xfrm>
+      </p:grpSpPr>
+      <p:sp>
+        <p:nvSpPr>
+          <p:cNvPr id="2" name="Text 0"/>
+          <p:cNvSpPr/>
+          <p:nvPr/>
+        </p:nvSpPr>
+        <p:spPr>
+          <a:xfrm>
+            <a:off x="548640" y="320040"/>
+            <a:ext cx="11064240" cy="731520"/>
+          </a:xfrm>
+          <a:prstGeom prst="rect">
+            <a:avLst/>
+          </a:prstGeom>
+          <a:noFill/>
+          <a:ln/>
+        </p:spPr>
+        <p:txBody>
+          <a:bodyPr wrap="square" lIns="0" tIns="0" rIns="0" bIns="0" rtlCol="0" anchor="ctr"/>
+          <a:lstStyle/>
+          <a:p>
+            <a:pPr indent="0" marL="0">
+              <a:buNone/>
+            </a:pPr>
+            <a:r>
+              <a:rPr lang="en-US" sz="3000" b="1" dirty="0">
+                <a:solidFill>
+                  <a:srgbClr val="39FF88"/>
+                </a:solidFill>
+                <a:latin typeface="Courier New" pitchFamily="34" charset="0"/>
+                <a:ea typeface="Courier New" pitchFamily="34" charset="-122"/>
+                <a:cs typeface="Courier New" pitchFamily="34" charset="-120"/>
+              </a:rPr>
+              <a:t>The problem</a:t>
+            </a:r>
+            <a:endParaRPr lang="en-US" sz="3000" dirty="0"/>
+          </a:p>
+        </p:txBody>
+      </p:sp>
+      <p:sp>
+        <p:nvSpPr>
+          <p:cNvPr id="3" name="Text 1"/>
+          <p:cNvSpPr/>
+          <p:nvPr/>
+        </p:nvSpPr>
+        <p:spPr>
+          <a:xfrm>
+            <a:off x="9418320" y="6446520"/>
+            <a:ext cx="2377440" cy="274320"/>
+          </a:xfrm>
+          <a:prstGeom prst="rect">
+            <a:avLst/>
+          </a:prstGeom>
+          <a:noFill/>
+          <a:ln/>
+        </p:spPr>
+        <p:txBody>
+          <a:bodyPr wrap="square" lIns="0" tIns="0" rIns="0" bIns="0" rtlCol="0" anchor="ctr"/>
+          <a:lstStyle/>
+          <a:p>
+            <a:pPr algn="r" indent="0" marL="0">
+              <a:buNone/>
+            </a:pPr>
+            <a:r>
+              <a:rPr lang="en-US" sz="1000" dirty="0">
+                <a:solidFill>
+                  <a:srgbClr val="8B98A5"/>
+                </a:solidFill>
+                <a:latin typeface="Courier New" pitchFamily="34" charset="0"/>
+                <a:ea typeface="Courier New" pitchFamily="34" charset="-122"/>
+                <a:cs typeface="Courier New" pitchFamily="34" charset="-120"/>
+              </a:rPr>
+              <a:t>2 / 42   Smart-RUDP</a:t>
+            </a:r>
+            <a:endParaRPr lang="en-US" sz="1000" dirty="0"/>
+          </a:p>
+        </p:txBody>
+      </p:sp>
+      <p:sp>
+        <p:nvSpPr>
+          <p:cNvPr id="4" name="Shape 2"/>
+          <p:cNvSpPr/>
+          <p:nvPr/>
+        </p:nvSpPr>
+        <p:spPr>
+          <a:xfrm>
+            <a:off x="548640" y="1371600"/>
+            <a:ext cx="5394960" cy="2377440"/>
+          </a:xfrm>
+          <a:prstGeom prst="rect">
+            <a:avLst/>
+          </a:prstGeom>
+          <a:solidFill>
+            <a:srgbClr val="141B24"/>
+          </a:solidFill>
+          <a:ln w="12700">
+            <a:solidFill>
+              <a:srgbClr val="FFB000"/>
+            </a:solidFill>
+            <a:prstDash val="solid"/>
+          </a:ln>
+        </p:spPr>
+      </p:sp>
+      <p:sp>
+        <p:nvSpPr>
+          <p:cNvPr id="5" name="Text 3"/>
+          <p:cNvSpPr/>
+          <p:nvPr/>
+        </p:nvSpPr>
+        <p:spPr>
+          <a:xfrm>
+            <a:off x="731520" y="1508760"/>
+            <a:ext cx="5029200" cy="457200"/>
+          </a:xfrm>
+          <a:prstGeom prst="rect">
+            <a:avLst/>
+          </a:prstGeom>
+          <a:noFill/>
+          <a:ln/>
+        </p:spPr>
+        <p:txBody>
+          <a:bodyPr wrap="square" lIns="0" tIns="0" rIns="0" bIns="0" rtlCol="0" anchor="ctr"/>
+          <a:lstStyle/>
+          <a:p>
+            <a:pPr indent="0" marL="0">
+              <a:buNone/>
+            </a:pPr>
+            <a:r>
+              <a:rPr lang="en-US" sz="2000" b="1" dirty="0">
+                <a:solidFill>
+                  <a:srgbClr val="FFB000"/>
+                </a:solidFill>
+                <a:latin typeface="Courier New" pitchFamily="34" charset="0"/>
+                <a:ea typeface="Courier New" pitchFamily="34" charset="-122"/>
+                <a:cs typeface="Courier New" pitchFamily="34" charset="-120"/>
+              </a:rPr>
+              <a:t>UDP</a:t>
+            </a:r>
+            <a:endParaRPr lang="en-US" sz="2000" dirty="0"/>
+          </a:p>
+        </p:txBody>
+      </p:sp>
+      <p:sp>
+        <p:nvSpPr>
+          <p:cNvPr id="6" name="Text 4"/>
+          <p:cNvSpPr/>
+          <p:nvPr/>
+        </p:nvSpPr>
+        <p:spPr>
+          <a:xfrm>
+            <a:off x="731520" y="2011680"/>
+            <a:ext cx="5029200" cy="1600200"/>
+          </a:xfrm>
+          <a:prstGeom prst="rect">
+            <a:avLst/>
+          </a:prstGeom>
+          <a:noFill/>
+          <a:ln/>
+        </p:spPr>
+        <p:txBody>
+          <a:bodyPr wrap="square" lIns="0" tIns="0" rIns="0" bIns="0" rtlCol="0" anchor="t"/>
+          <a:lstStyle/>
+          <a:p>
+            <a:pPr indent="0" marL="0">
+              <a:buNone/>
+            </a:pPr>
+            <a:r>
+              <a:rPr lang="en-US" sz="2000" dirty="0">
+                <a:solidFill>
+                  <a:srgbClr val="E6EDF3"/>
+                </a:solidFill>
+                <a:latin typeface="Calibri" pitchFamily="34" charset="0"/>
+                <a:ea typeface="Calibri" pitchFamily="34" charset="-122"/>
+                <a:cs typeface="Calibri" pitchFamily="34" charset="-120"/>
+              </a:rPr>
+              <a:t>Fast and simple, but no guarantees: packets can be lost, duplicated or reordered.</a:t>
+            </a:r>
+            <a:endParaRPr lang="en-US" sz="2000" dirty="0"/>
+          </a:p>
+        </p:txBody>
+      </p:sp>
+      <p:sp>
+        <p:nvSpPr>
+          <p:cNvPr id="7" name="Shape 5"/>
+          <p:cNvSpPr/>
+          <p:nvPr/>
+        </p:nvSpPr>
+        <p:spPr>
+          <a:xfrm>
+            <a:off x="6217920" y="1371600"/>
+            <a:ext cx="5394960" cy="2377440"/>
+          </a:xfrm>
+          <a:prstGeom prst="rect">
+            <a:avLst/>
+          </a:prstGeom>
+          <a:solidFill>
+            <a:srgbClr val="141B24"/>
+          </a:solidFill>
+          <a:ln w="12700">
+            <a:solidFill>
+              <a:srgbClr val="FFB000"/>
+            </a:solidFill>
+            <a:prstDash val="solid"/>
+          </a:ln>
+        </p:spPr>
+      </p:sp>
+      <p:sp>
+        <p:nvSpPr>
+          <p:cNvPr id="8" name="Text 6"/>
+          <p:cNvSpPr/>
+          <p:nvPr/>
+        </p:nvSpPr>
+        <p:spPr>
+          <a:xfrm>
+            <a:off x="6400800" y="1508760"/>
+            <a:ext cx="5029200" cy="457200"/>
+          </a:xfrm>
+          <a:prstGeom prst="rect">
+            <a:avLst/>
+          </a:prstGeom>
+          <a:noFill/>
+          <a:ln/>
+        </p:spPr>
+        <p:txBody>
+          <a:bodyPr wrap="square" lIns="0" tIns="0" rIns="0" bIns="0" rtlCol="0" anchor="ctr"/>
+          <a:lstStyle/>
+          <a:p>
+            <a:pPr indent="0" marL="0">
+              <a:buNone/>
+            </a:pPr>
+            <a:r>
+              <a:rPr lang="en-US" sz="2000" b="1" dirty="0">
+                <a:solidFill>
+                  <a:srgbClr val="FFB000"/>
+                </a:solidFill>
+                <a:latin typeface="Courier New" pitchFamily="34" charset="0"/>
+                <a:ea typeface="Courier New" pitchFamily="34" charset="-122"/>
+                <a:cs typeface="Courier New" pitchFamily="34" charset="-120"/>
+              </a:rPr>
+              <a:t>TCP</a:t>
+            </a:r>
+            <a:endParaRPr lang="en-US" sz="2000" dirty="0"/>
+          </a:p>
+        </p:txBody>
+      </p:sp>
+      <p:sp>
+        <p:nvSpPr>
+          <p:cNvPr id="9" name="Text 7"/>
+          <p:cNvSpPr/>
+          <p:nvPr/>
+        </p:nvSpPr>
+        <p:spPr>
+          <a:xfrm>
+            <a:off x="6400800" y="2011680"/>
+            <a:ext cx="5029200" cy="1600200"/>
+          </a:xfrm>
+          <a:prstGeom prst="rect">
+            <a:avLst/>
+          </a:prstGeom>
+          <a:noFill/>
+          <a:ln/>
+        </p:spPr>
+        <p:txBody>
+          <a:bodyPr wrap="square" lIns="0" tIns="0" rIns="0" bIns="0" rtlCol="0" anchor="t"/>
+          <a:lstStyle/>
+          <a:p>
+            <a:pPr indent="0" marL="0">
+              <a:buNone/>
+            </a:pPr>
+            <a:r>
+              <a:rPr lang="en-US" sz="2000" dirty="0">
+                <a:solidFill>
+                  <a:srgbClr val="E6EDF3"/>
+                </a:solidFill>
+                <a:latin typeface="Calibri" pitchFamily="34" charset="0"/>
+                <a:ea typeface="Calibri" pitchFamily="34" charset="-122"/>
+                <a:cs typeface="Calibri" pitchFamily="34" charset="-120"/>
+              </a:rPr>
+              <a:t>Reliable, but lives inside the OS kernel. Hard to see, hard to change, hard to learn from.</a:t>
+            </a:r>
+            <a:endParaRPr lang="en-US" sz="2000" dirty="0"/>
+          </a:p>
+        </p:txBody>
+      </p:sp>
+      <p:sp>
+        <p:nvSpPr>
+          <p:cNvPr id="10" name="Text 8"/>
+          <p:cNvSpPr/>
+          <p:nvPr/>
+        </p:nvSpPr>
+        <p:spPr>
+          <a:xfrm>
+            <a:off x="548640" y="4114800"/>
+            <a:ext cx="10972800" cy="1097280"/>
+          </a:xfrm>
+          <a:prstGeom prst="rect">
+            <a:avLst/>
+          </a:prstGeom>
+          <a:noFill/>
+          <a:ln/>
+        </p:spPr>
+        <p:txBody>
+          <a:bodyPr wrap="square" lIns="0" tIns="0" rIns="0" bIns="0" rtlCol="0" anchor="ctr"/>
+          <a:lstStyle/>
+          <a:p>
+            <a:pPr indent="0" marL="0">
+              <a:buNone/>
+            </a:pPr>
+            <a:r>
+              <a:rPr lang="en-US" sz="2000" dirty="0">
+                <a:solidFill>
+                  <a:srgbClr val="E6EDF3"/>
+                </a:solidFill>
+                <a:latin typeface="Calibri" pitchFamily="34" charset="0"/>
+                <a:ea typeface="Calibri" pitchFamily="34" charset="-122"/>
+                <a:cs typeface="Calibri" pitchFamily="34" charset="-120"/>
+              </a:rPr>
+              <a:t>In 1986 the early Internet suffered congestion collapse: throughput fell from 32 Kbps to 40 bps. TCP congestion control was invented to fix it.</a:t>
+            </a:r>
+            <a:endParaRPr lang="en-US" sz="2000" dirty="0"/>
+          </a:p>
+        </p:txBody>
+      </p:sp>
+      <p:sp>
+        <p:nvSpPr>
+          <p:cNvPr id="11" name="Text 9"/>
+          <p:cNvSpPr/>
+          <p:nvPr/>
+        </p:nvSpPr>
+        <p:spPr>
+          <a:xfrm>
+            <a:off x="548640" y="5394960"/>
+            <a:ext cx="10972800" cy="548640"/>
+          </a:xfrm>
+          <a:prstGeom prst="rect">
+            <a:avLst/>
+          </a:prstGeom>
+          <a:noFill/>
+          <a:ln/>
+        </p:spPr>
+        <p:txBody>
+          <a:bodyPr wrap="square" lIns="0" tIns="0" rIns="0" bIns="0" rtlCol="0" anchor="ctr"/>
+          <a:lstStyle/>
+          <a:p>
+            <a:pPr indent="0" marL="0">
+              <a:buNone/>
+            </a:pPr>
+            <a:r>
+              <a:rPr lang="en-US" sz="1800" b="1" dirty="0">
+                <a:solidFill>
+                  <a:srgbClr val="39FF88"/>
+                </a:solidFill>
+                <a:latin typeface="Courier New" pitchFamily="34" charset="0"/>
+                <a:ea typeface="Courier New" pitchFamily="34" charset="-122"/>
+                <a:cs typeface="Courier New" pitchFamily="34" charset="-120"/>
+              </a:rPr>
+              <a:t>Our question: can we rebuild TCP's core ideas ourselves, on top of UDP?</a:t>
+            </a:r>
+            <a:endParaRPr lang="en-US" sz="1800" dirty="0"/>
+          </a:p>
+        </p:txBody>
+      </p:sp>
+    </p:spTree>
+  </p:cSld>
+  <p:clrMapOvr>
+    <a:masterClrMapping/>
+  </p:clrMapOvr>
+</p:sld>
+</file>
+
+<file path=ppt/slides/slide20.xml><?xml version="1.0" encoding="utf-8"?>
+<p:sld xmlns:a="http://schemas.openxmlformats.org/drawingml/2006/main" xmlns:r="http://schemas.openxmlformats.org/officeDocument/2006/relationships" xmlns:p="http://schemas.openxmlformats.org/presentationml/2006/main">
+  <p:cSld name="Slide 20">
     <p:bg>
       <p:bgPr>
         <a:solidFill>
@@ -14899,7 +15643,7 @@
                 <a:ea typeface="Courier New" pitchFamily="34" charset="-122"/>
                 <a:cs typeface="Courier New" pitchFamily="34" charset="-120"/>
               </a:rPr>
-              <a:t>19 / 41   Smart-RUDP</a:t>
+              <a:t>20 / 42   Smart-RUDP</a:t>
             </a:r>
             <a:endParaRPr lang="en-US" sz="1000" dirty="0"/>
           </a:p>
@@ -16038,403 +16782,9 @@
 </p:sld>
 </file>
 
-<file path=ppt/slides/slide2.xml><?xml version="1.0" encoding="utf-8"?>
+<file path=ppt/slides/slide21.xml><?xml version="1.0" encoding="utf-8"?>
 <p:sld xmlns:a="http://schemas.openxmlformats.org/drawingml/2006/main" xmlns:r="http://schemas.openxmlformats.org/officeDocument/2006/relationships" xmlns:p="http://schemas.openxmlformats.org/presentationml/2006/main">
-  <p:cSld name="Slide 2">
-    <p:bg>
-      <p:bgPr>
-        <a:solidFill>
-          <a:srgbClr val="0B0F14"/>
-        </a:solidFill>
-      </p:bgPr>
-    </p:bg>
-    <p:spTree>
-      <p:nvGrpSpPr>
-        <p:cNvPr id="1" name=""/>
-        <p:cNvGrpSpPr/>
-        <p:nvPr/>
-      </p:nvGrpSpPr>
-      <p:grpSpPr>
-        <a:xfrm>
-          <a:off x="0" y="0"/>
-          <a:ext cx="0" cy="0"/>
-          <a:chOff x="0" y="0"/>
-          <a:chExt cx="0" cy="0"/>
-        </a:xfrm>
-      </p:grpSpPr>
-      <p:sp>
-        <p:nvSpPr>
-          <p:cNvPr id="2" name="Text 0"/>
-          <p:cNvSpPr/>
-          <p:nvPr/>
-        </p:nvSpPr>
-        <p:spPr>
-          <a:xfrm>
-            <a:off x="548640" y="320040"/>
-            <a:ext cx="11064240" cy="731520"/>
-          </a:xfrm>
-          <a:prstGeom prst="rect">
-            <a:avLst/>
-          </a:prstGeom>
-          <a:noFill/>
-          <a:ln/>
-        </p:spPr>
-        <p:txBody>
-          <a:bodyPr wrap="square" lIns="0" tIns="0" rIns="0" bIns="0" rtlCol="0" anchor="ctr"/>
-          <a:lstStyle/>
-          <a:p>
-            <a:pPr indent="0" marL="0">
-              <a:buNone/>
-            </a:pPr>
-            <a:r>
-              <a:rPr lang="en-US" sz="3000" b="1" dirty="0">
-                <a:solidFill>
-                  <a:srgbClr val="39FF88"/>
-                </a:solidFill>
-                <a:latin typeface="Courier New" pitchFamily="34" charset="0"/>
-                <a:ea typeface="Courier New" pitchFamily="34" charset="-122"/>
-                <a:cs typeface="Courier New" pitchFamily="34" charset="-120"/>
-              </a:rPr>
-              <a:t>The problem</a:t>
-            </a:r>
-            <a:endParaRPr lang="en-US" sz="3000" dirty="0"/>
-          </a:p>
-        </p:txBody>
-      </p:sp>
-      <p:sp>
-        <p:nvSpPr>
-          <p:cNvPr id="3" name="Text 1"/>
-          <p:cNvSpPr/>
-          <p:nvPr/>
-        </p:nvSpPr>
-        <p:spPr>
-          <a:xfrm>
-            <a:off x="9418320" y="6446520"/>
-            <a:ext cx="2377440" cy="274320"/>
-          </a:xfrm>
-          <a:prstGeom prst="rect">
-            <a:avLst/>
-          </a:prstGeom>
-          <a:noFill/>
-          <a:ln/>
-        </p:spPr>
-        <p:txBody>
-          <a:bodyPr wrap="square" lIns="0" tIns="0" rIns="0" bIns="0" rtlCol="0" anchor="ctr"/>
-          <a:lstStyle/>
-          <a:p>
-            <a:pPr algn="r" indent="0" marL="0">
-              <a:buNone/>
-            </a:pPr>
-            <a:r>
-              <a:rPr lang="en-US" sz="1000" dirty="0">
-                <a:solidFill>
-                  <a:srgbClr val="8B98A5"/>
-                </a:solidFill>
-                <a:latin typeface="Courier New" pitchFamily="34" charset="0"/>
-                <a:ea typeface="Courier New" pitchFamily="34" charset="-122"/>
-                <a:cs typeface="Courier New" pitchFamily="34" charset="-120"/>
-              </a:rPr>
-              <a:t>2 / 41   Smart-RUDP</a:t>
-            </a:r>
-            <a:endParaRPr lang="en-US" sz="1000" dirty="0"/>
-          </a:p>
-        </p:txBody>
-      </p:sp>
-      <p:sp>
-        <p:nvSpPr>
-          <p:cNvPr id="4" name="Shape 2"/>
-          <p:cNvSpPr/>
-          <p:nvPr/>
-        </p:nvSpPr>
-        <p:spPr>
-          <a:xfrm>
-            <a:off x="548640" y="1371600"/>
-            <a:ext cx="5394960" cy="2377440"/>
-          </a:xfrm>
-          <a:prstGeom prst="rect">
-            <a:avLst/>
-          </a:prstGeom>
-          <a:solidFill>
-            <a:srgbClr val="141B24"/>
-          </a:solidFill>
-          <a:ln w="12700">
-            <a:solidFill>
-              <a:srgbClr val="FFB000"/>
-            </a:solidFill>
-            <a:prstDash val="solid"/>
-          </a:ln>
-        </p:spPr>
-      </p:sp>
-      <p:sp>
-        <p:nvSpPr>
-          <p:cNvPr id="5" name="Text 3"/>
-          <p:cNvSpPr/>
-          <p:nvPr/>
-        </p:nvSpPr>
-        <p:spPr>
-          <a:xfrm>
-            <a:off x="731520" y="1508760"/>
-            <a:ext cx="5029200" cy="457200"/>
-          </a:xfrm>
-          <a:prstGeom prst="rect">
-            <a:avLst/>
-          </a:prstGeom>
-          <a:noFill/>
-          <a:ln/>
-        </p:spPr>
-        <p:txBody>
-          <a:bodyPr wrap="square" lIns="0" tIns="0" rIns="0" bIns="0" rtlCol="0" anchor="ctr"/>
-          <a:lstStyle/>
-          <a:p>
-            <a:pPr indent="0" marL="0">
-              <a:buNone/>
-            </a:pPr>
-            <a:r>
-              <a:rPr lang="en-US" sz="2000" b="1" dirty="0">
-                <a:solidFill>
-                  <a:srgbClr val="FFB000"/>
-                </a:solidFill>
-                <a:latin typeface="Courier New" pitchFamily="34" charset="0"/>
-                <a:ea typeface="Courier New" pitchFamily="34" charset="-122"/>
-                <a:cs typeface="Courier New" pitchFamily="34" charset="-120"/>
-              </a:rPr>
-              <a:t>UDP</a:t>
-            </a:r>
-            <a:endParaRPr lang="en-US" sz="2000" dirty="0"/>
-          </a:p>
-        </p:txBody>
-      </p:sp>
-      <p:sp>
-        <p:nvSpPr>
-          <p:cNvPr id="6" name="Text 4"/>
-          <p:cNvSpPr/>
-          <p:nvPr/>
-        </p:nvSpPr>
-        <p:spPr>
-          <a:xfrm>
-            <a:off x="731520" y="2011680"/>
-            <a:ext cx="5029200" cy="1600200"/>
-          </a:xfrm>
-          <a:prstGeom prst="rect">
-            <a:avLst/>
-          </a:prstGeom>
-          <a:noFill/>
-          <a:ln/>
-        </p:spPr>
-        <p:txBody>
-          <a:bodyPr wrap="square" lIns="0" tIns="0" rIns="0" bIns="0" rtlCol="0" anchor="t"/>
-          <a:lstStyle/>
-          <a:p>
-            <a:pPr indent="0" marL="0">
-              <a:buNone/>
-            </a:pPr>
-            <a:r>
-              <a:rPr lang="en-US" sz="2000" dirty="0">
-                <a:solidFill>
-                  <a:srgbClr val="E6EDF3"/>
-                </a:solidFill>
-                <a:latin typeface="Calibri" pitchFamily="34" charset="0"/>
-                <a:ea typeface="Calibri" pitchFamily="34" charset="-122"/>
-                <a:cs typeface="Calibri" pitchFamily="34" charset="-120"/>
-              </a:rPr>
-              <a:t>Fast and simple, but no guarantees: packets can be lost, duplicated or reordered.</a:t>
-            </a:r>
-            <a:endParaRPr lang="en-US" sz="2000" dirty="0"/>
-          </a:p>
-        </p:txBody>
-      </p:sp>
-      <p:sp>
-        <p:nvSpPr>
-          <p:cNvPr id="7" name="Shape 5"/>
-          <p:cNvSpPr/>
-          <p:nvPr/>
-        </p:nvSpPr>
-        <p:spPr>
-          <a:xfrm>
-            <a:off x="6217920" y="1371600"/>
-            <a:ext cx="5394960" cy="2377440"/>
-          </a:xfrm>
-          <a:prstGeom prst="rect">
-            <a:avLst/>
-          </a:prstGeom>
-          <a:solidFill>
-            <a:srgbClr val="141B24"/>
-          </a:solidFill>
-          <a:ln w="12700">
-            <a:solidFill>
-              <a:srgbClr val="FFB000"/>
-            </a:solidFill>
-            <a:prstDash val="solid"/>
-          </a:ln>
-        </p:spPr>
-      </p:sp>
-      <p:sp>
-        <p:nvSpPr>
-          <p:cNvPr id="8" name="Text 6"/>
-          <p:cNvSpPr/>
-          <p:nvPr/>
-        </p:nvSpPr>
-        <p:spPr>
-          <a:xfrm>
-            <a:off x="6400800" y="1508760"/>
-            <a:ext cx="5029200" cy="457200"/>
-          </a:xfrm>
-          <a:prstGeom prst="rect">
-            <a:avLst/>
-          </a:prstGeom>
-          <a:noFill/>
-          <a:ln/>
-        </p:spPr>
-        <p:txBody>
-          <a:bodyPr wrap="square" lIns="0" tIns="0" rIns="0" bIns="0" rtlCol="0" anchor="ctr"/>
-          <a:lstStyle/>
-          <a:p>
-            <a:pPr indent="0" marL="0">
-              <a:buNone/>
-            </a:pPr>
-            <a:r>
-              <a:rPr lang="en-US" sz="2000" b="1" dirty="0">
-                <a:solidFill>
-                  <a:srgbClr val="FFB000"/>
-                </a:solidFill>
-                <a:latin typeface="Courier New" pitchFamily="34" charset="0"/>
-                <a:ea typeface="Courier New" pitchFamily="34" charset="-122"/>
-                <a:cs typeface="Courier New" pitchFamily="34" charset="-120"/>
-              </a:rPr>
-              <a:t>TCP</a:t>
-            </a:r>
-            <a:endParaRPr lang="en-US" sz="2000" dirty="0"/>
-          </a:p>
-        </p:txBody>
-      </p:sp>
-      <p:sp>
-        <p:nvSpPr>
-          <p:cNvPr id="9" name="Text 7"/>
-          <p:cNvSpPr/>
-          <p:nvPr/>
-        </p:nvSpPr>
-        <p:spPr>
-          <a:xfrm>
-            <a:off x="6400800" y="2011680"/>
-            <a:ext cx="5029200" cy="1600200"/>
-          </a:xfrm>
-          <a:prstGeom prst="rect">
-            <a:avLst/>
-          </a:prstGeom>
-          <a:noFill/>
-          <a:ln/>
-        </p:spPr>
-        <p:txBody>
-          <a:bodyPr wrap="square" lIns="0" tIns="0" rIns="0" bIns="0" rtlCol="0" anchor="t"/>
-          <a:lstStyle/>
-          <a:p>
-            <a:pPr indent="0" marL="0">
-              <a:buNone/>
-            </a:pPr>
-            <a:r>
-              <a:rPr lang="en-US" sz="2000" dirty="0">
-                <a:solidFill>
-                  <a:srgbClr val="E6EDF3"/>
-                </a:solidFill>
-                <a:latin typeface="Calibri" pitchFamily="34" charset="0"/>
-                <a:ea typeface="Calibri" pitchFamily="34" charset="-122"/>
-                <a:cs typeface="Calibri" pitchFamily="34" charset="-120"/>
-              </a:rPr>
-              <a:t>Reliable, but lives inside the OS kernel. Hard to see, hard to change, hard to learn from.</a:t>
-            </a:r>
-            <a:endParaRPr lang="en-US" sz="2000" dirty="0"/>
-          </a:p>
-        </p:txBody>
-      </p:sp>
-      <p:sp>
-        <p:nvSpPr>
-          <p:cNvPr id="10" name="Text 8"/>
-          <p:cNvSpPr/>
-          <p:nvPr/>
-        </p:nvSpPr>
-        <p:spPr>
-          <a:xfrm>
-            <a:off x="548640" y="4114800"/>
-            <a:ext cx="10972800" cy="1097280"/>
-          </a:xfrm>
-          <a:prstGeom prst="rect">
-            <a:avLst/>
-          </a:prstGeom>
-          <a:noFill/>
-          <a:ln/>
-        </p:spPr>
-        <p:txBody>
-          <a:bodyPr wrap="square" lIns="0" tIns="0" rIns="0" bIns="0" rtlCol="0" anchor="ctr"/>
-          <a:lstStyle/>
-          <a:p>
-            <a:pPr indent="0" marL="0">
-              <a:buNone/>
-            </a:pPr>
-            <a:r>
-              <a:rPr lang="en-US" sz="2000" dirty="0">
-                <a:solidFill>
-                  <a:srgbClr val="E6EDF3"/>
-                </a:solidFill>
-                <a:latin typeface="Calibri" pitchFamily="34" charset="0"/>
-                <a:ea typeface="Calibri" pitchFamily="34" charset="-122"/>
-                <a:cs typeface="Calibri" pitchFamily="34" charset="-120"/>
-              </a:rPr>
-              <a:t>In 1986 the early Internet suffered congestion collapse: throughput fell from 32 Kbps to 40 bps. TCP congestion control was invented to fix it.</a:t>
-            </a:r>
-            <a:endParaRPr lang="en-US" sz="2000" dirty="0"/>
-          </a:p>
-        </p:txBody>
-      </p:sp>
-      <p:sp>
-        <p:nvSpPr>
-          <p:cNvPr id="11" name="Text 9"/>
-          <p:cNvSpPr/>
-          <p:nvPr/>
-        </p:nvSpPr>
-        <p:spPr>
-          <a:xfrm>
-            <a:off x="548640" y="5394960"/>
-            <a:ext cx="10972800" cy="548640"/>
-          </a:xfrm>
-          <a:prstGeom prst="rect">
-            <a:avLst/>
-          </a:prstGeom>
-          <a:noFill/>
-          <a:ln/>
-        </p:spPr>
-        <p:txBody>
-          <a:bodyPr wrap="square" lIns="0" tIns="0" rIns="0" bIns="0" rtlCol="0" anchor="ctr"/>
-          <a:lstStyle/>
-          <a:p>
-            <a:pPr indent="0" marL="0">
-              <a:buNone/>
-            </a:pPr>
-            <a:r>
-              <a:rPr lang="en-US" sz="1800" b="1" dirty="0">
-                <a:solidFill>
-                  <a:srgbClr val="39FF88"/>
-                </a:solidFill>
-                <a:latin typeface="Courier New" pitchFamily="34" charset="0"/>
-                <a:ea typeface="Courier New" pitchFamily="34" charset="-122"/>
-                <a:cs typeface="Courier New" pitchFamily="34" charset="-120"/>
-              </a:rPr>
-              <a:t>Our question: can we rebuild TCP's core ideas ourselves, on top of UDP?</a:t>
-            </a:r>
-            <a:endParaRPr lang="en-US" sz="1800" dirty="0"/>
-          </a:p>
-        </p:txBody>
-      </p:sp>
-    </p:spTree>
-  </p:cSld>
-  <p:clrMapOvr>
-    <a:masterClrMapping/>
-  </p:clrMapOvr>
-</p:sld>
-</file>
-
-<file path=ppt/slides/slide20.xml><?xml version="1.0" encoding="utf-8"?>
-<p:sld xmlns:a="http://schemas.openxmlformats.org/drawingml/2006/main" xmlns:r="http://schemas.openxmlformats.org/officeDocument/2006/relationships" xmlns:p="http://schemas.openxmlformats.org/presentationml/2006/main">
-  <p:cSld name="Slide 20">
+  <p:cSld name="Slide 21">
     <p:bg>
       <p:bgPr>
         <a:solidFill>
@@ -16528,7 +16878,7 @@
                 <a:ea typeface="Courier New" pitchFamily="34" charset="-122"/>
                 <a:cs typeface="Courier New" pitchFamily="34" charset="-120"/>
               </a:rPr>
-              <a:t>20 / 41   Smart-RUDP</a:t>
+              <a:t>21 / 42   Smart-RUDP</a:t>
             </a:r>
             <a:endParaRPr lang="en-US" sz="1000" dirty="0"/>
           </a:p>
@@ -16875,9 +17225,9 @@
 </p:sld>
 </file>
 
-<file path=ppt/slides/slide21.xml><?xml version="1.0" encoding="utf-8"?>
+<file path=ppt/slides/slide22.xml><?xml version="1.0" encoding="utf-8"?>
 <p:sld xmlns:a="http://schemas.openxmlformats.org/drawingml/2006/main" xmlns:r="http://schemas.openxmlformats.org/officeDocument/2006/relationships" xmlns:p="http://schemas.openxmlformats.org/presentationml/2006/main">
-  <p:cSld name="Slide 21">
+  <p:cSld name="Slide 22">
     <p:bg>
       <p:bgPr>
         <a:solidFill>
@@ -16971,7 +17321,7 @@
                 <a:ea typeface="Courier New" pitchFamily="34" charset="-122"/>
                 <a:cs typeface="Courier New" pitchFamily="34" charset="-120"/>
               </a:rPr>
-              <a:t>21 / 41   Smart-RUDP</a:t>
+              <a:t>22 / 42   Smart-RUDP</a:t>
             </a:r>
             <a:endParaRPr lang="en-US" sz="1000" dirty="0"/>
           </a:p>
@@ -16979,7 +17329,7 @@
       </p:sp>
       <p:graphicFrame>
         <p:nvGraphicFramePr>
-          <p:cNvPr id="22" name="Table 0"/>
+          <p:cNvPr id="23" name="Table 0"/>
           <p:cNvGraphicFramePr>
             <a:graphicFrameLocks noGrp="1"/>
           </p:cNvGraphicFramePr>
@@ -18553,9 +18903,9 @@
 </p:sld>
 </file>
 
-<file path=ppt/slides/slide22.xml><?xml version="1.0" encoding="utf-8"?>
+<file path=ppt/slides/slide23.xml><?xml version="1.0" encoding="utf-8"?>
 <p:sld xmlns:a="http://schemas.openxmlformats.org/drawingml/2006/main" xmlns:r="http://schemas.openxmlformats.org/officeDocument/2006/relationships" xmlns:p="http://schemas.openxmlformats.org/presentationml/2006/main">
-  <p:cSld name="Slide 22">
+  <p:cSld name="Slide 23">
     <p:bg>
       <p:bgPr>
         <a:solidFill>
@@ -18649,7 +18999,7 @@
                 <a:ea typeface="Courier New" pitchFamily="34" charset="-122"/>
                 <a:cs typeface="Courier New" pitchFamily="34" charset="-120"/>
               </a:rPr>
-              <a:t>22 / 41   Smart-RUDP</a:t>
+              <a:t>23 / 42   Smart-RUDP</a:t>
             </a:r>
             <a:endParaRPr lang="en-US" sz="1000" dirty="0"/>
           </a:p>
@@ -18853,9 +19203,9 @@
 </p:sld>
 </file>
 
-<file path=ppt/slides/slide23.xml><?xml version="1.0" encoding="utf-8"?>
+<file path=ppt/slides/slide24.xml><?xml version="1.0" encoding="utf-8"?>
 <p:sld xmlns:a="http://schemas.openxmlformats.org/drawingml/2006/main" xmlns:r="http://schemas.openxmlformats.org/officeDocument/2006/relationships" xmlns:p="http://schemas.openxmlformats.org/presentationml/2006/main">
-  <p:cSld name="Slide 23">
+  <p:cSld name="Slide 24">
     <p:bg>
       <p:bgPr>
         <a:solidFill>
@@ -18949,7 +19299,7 @@
                 <a:ea typeface="Courier New" pitchFamily="34" charset="-122"/>
                 <a:cs typeface="Courier New" pitchFamily="34" charset="-120"/>
               </a:rPr>
-              <a:t>23 / 41   Smart-RUDP</a:t>
+              <a:t>24 / 42   Smart-RUDP</a:t>
             </a:r>
             <a:endParaRPr lang="en-US" sz="1000" dirty="0"/>
           </a:p>
@@ -19311,9 +19661,9 @@
 </p:sld>
 </file>
 
-<file path=ppt/slides/slide24.xml><?xml version="1.0" encoding="utf-8"?>
+<file path=ppt/slides/slide25.xml><?xml version="1.0" encoding="utf-8"?>
 <p:sld xmlns:a="http://schemas.openxmlformats.org/drawingml/2006/main" xmlns:r="http://schemas.openxmlformats.org/officeDocument/2006/relationships" xmlns:p="http://schemas.openxmlformats.org/presentationml/2006/main">
-  <p:cSld name="Slide 24">
+  <p:cSld name="Slide 25">
     <p:bg>
       <p:bgPr>
         <a:solidFill>
@@ -19407,7 +19757,7 @@
                 <a:ea typeface="Courier New" pitchFamily="34" charset="-122"/>
                 <a:cs typeface="Courier New" pitchFamily="34" charset="-120"/>
               </a:rPr>
-              <a:t>24 / 41   Smart-RUDP</a:t>
+              <a:t>25 / 42   Smart-RUDP</a:t>
             </a:r>
             <a:endParaRPr lang="en-US" sz="1000" dirty="0"/>
           </a:p>
@@ -19996,9 +20346,9 @@
 </p:sld>
 </file>
 
-<file path=ppt/slides/slide25.xml><?xml version="1.0" encoding="utf-8"?>
+<file path=ppt/slides/slide26.xml><?xml version="1.0" encoding="utf-8"?>
 <p:sld xmlns:a="http://schemas.openxmlformats.org/drawingml/2006/main" xmlns:r="http://schemas.openxmlformats.org/officeDocument/2006/relationships" xmlns:p="http://schemas.openxmlformats.org/presentationml/2006/main">
-  <p:cSld name="Slide 25">
+  <p:cSld name="Slide 26">
     <p:bg>
       <p:bgPr>
         <a:solidFill>
@@ -20092,7 +20442,7 @@
                 <a:ea typeface="Courier New" pitchFamily="34" charset="-122"/>
                 <a:cs typeface="Courier New" pitchFamily="34" charset="-120"/>
               </a:rPr>
-              <a:t>25 / 41   Smart-RUDP</a:t>
+              <a:t>26 / 42   Smart-RUDP</a:t>
             </a:r>
             <a:endParaRPr lang="en-US" sz="1000" dirty="0"/>
           </a:p>
@@ -20100,7 +20450,7 @@
       </p:sp>
       <p:graphicFrame>
         <p:nvGraphicFramePr>
-          <p:cNvPr id="26" name="Table 0"/>
+          <p:cNvPr id="27" name="Table 0"/>
           <p:cNvGraphicFramePr>
             <a:graphicFrameLocks noGrp="1"/>
           </p:cNvGraphicFramePr>
@@ -21379,9 +21729,9 @@
 </p:sld>
 </file>
 
-<file path=ppt/slides/slide26.xml><?xml version="1.0" encoding="utf-8"?>
+<file path=ppt/slides/slide27.xml><?xml version="1.0" encoding="utf-8"?>
 <p:sld xmlns:a="http://schemas.openxmlformats.org/drawingml/2006/main" xmlns:r="http://schemas.openxmlformats.org/officeDocument/2006/relationships" xmlns:p="http://schemas.openxmlformats.org/presentationml/2006/main">
-  <p:cSld name="Slide 26">
+  <p:cSld name="Slide 27">
     <p:bg>
       <p:bgPr>
         <a:solidFill>
@@ -21475,7 +21825,7 @@
                 <a:ea typeface="Courier New" pitchFamily="34" charset="-122"/>
                 <a:cs typeface="Courier New" pitchFamily="34" charset="-120"/>
               </a:rPr>
-              <a:t>26 / 41   Smart-RUDP</a:t>
+              <a:t>27 / 42   Smart-RUDP</a:t>
             </a:r>
             <a:endParaRPr lang="en-US" sz="1000" dirty="0"/>
           </a:p>
@@ -21676,9 +22026,9 @@
 </p:sld>
 </file>
 
-<file path=ppt/slides/slide27.xml><?xml version="1.0" encoding="utf-8"?>
+<file path=ppt/slides/slide28.xml><?xml version="1.0" encoding="utf-8"?>
 <p:sld xmlns:a="http://schemas.openxmlformats.org/drawingml/2006/main" xmlns:r="http://schemas.openxmlformats.org/officeDocument/2006/relationships" xmlns:p="http://schemas.openxmlformats.org/presentationml/2006/main">
-  <p:cSld name="Slide 27">
+  <p:cSld name="Slide 28">
     <p:bg>
       <p:bgPr>
         <a:solidFill>
@@ -21772,7 +22122,7 @@
                 <a:ea typeface="Courier New" pitchFamily="34" charset="-122"/>
                 <a:cs typeface="Courier New" pitchFamily="34" charset="-120"/>
               </a:rPr>
-              <a:t>27 / 41   Smart-RUDP</a:t>
+              <a:t>28 / 42   Smart-RUDP</a:t>
             </a:r>
             <a:endParaRPr lang="en-US" sz="1000" dirty="0"/>
           </a:p>
@@ -21913,9 +22263,9 @@
 </p:sld>
 </file>
 
-<file path=ppt/slides/slide28.xml><?xml version="1.0" encoding="utf-8"?>
+<file path=ppt/slides/slide29.xml><?xml version="1.0" encoding="utf-8"?>
 <p:sld xmlns:a="http://schemas.openxmlformats.org/drawingml/2006/main" xmlns:r="http://schemas.openxmlformats.org/officeDocument/2006/relationships" xmlns:p="http://schemas.openxmlformats.org/presentationml/2006/main">
-  <p:cSld name="Slide 28">
+  <p:cSld name="Slide 29">
     <p:bg>
       <p:bgPr>
         <a:solidFill>
@@ -22009,7 +22359,7 @@
                 <a:ea typeface="Courier New" pitchFamily="34" charset="-122"/>
                 <a:cs typeface="Courier New" pitchFamily="34" charset="-120"/>
               </a:rPr>
-              <a:t>28 / 41   Smart-RUDP</a:t>
+              <a:t>29 / 42   Smart-RUDP</a:t>
             </a:r>
             <a:endParaRPr lang="en-US" sz="1000" dirty="0"/>
           </a:p>
@@ -22145,285 +22495,6 @@
 </p:sld>
 </file>
 
-<file path=ppt/slides/slide29.xml><?xml version="1.0" encoding="utf-8"?>
-<p:sld xmlns:a="http://schemas.openxmlformats.org/drawingml/2006/main" xmlns:r="http://schemas.openxmlformats.org/officeDocument/2006/relationships" xmlns:p="http://schemas.openxmlformats.org/presentationml/2006/main">
-  <p:cSld name="Slide 29">
-    <p:bg>
-      <p:bgPr>
-        <a:solidFill>
-          <a:srgbClr val="0B0F14"/>
-        </a:solidFill>
-      </p:bgPr>
-    </p:bg>
-    <p:spTree>
-      <p:nvGrpSpPr>
-        <p:cNvPr id="1" name=""/>
-        <p:cNvGrpSpPr/>
-        <p:nvPr/>
-      </p:nvGrpSpPr>
-      <p:grpSpPr>
-        <a:xfrm>
-          <a:off x="0" y="0"/>
-          <a:ext cx="0" cy="0"/>
-          <a:chOff x="0" y="0"/>
-          <a:chExt cx="0" cy="0"/>
-        </a:xfrm>
-      </p:grpSpPr>
-      <p:sp>
-        <p:nvSpPr>
-          <p:cNvPr id="2" name="Text 0"/>
-          <p:cNvSpPr/>
-          <p:nvPr/>
-        </p:nvSpPr>
-        <p:spPr>
-          <a:xfrm>
-            <a:off x="548640" y="320040"/>
-            <a:ext cx="11064240" cy="731520"/>
-          </a:xfrm>
-          <a:prstGeom prst="rect">
-            <a:avLst/>
-          </a:prstGeom>
-          <a:noFill/>
-          <a:ln/>
-        </p:spPr>
-        <p:txBody>
-          <a:bodyPr wrap="square" lIns="0" tIns="0" rIns="0" bIns="0" rtlCol="0" anchor="ctr"/>
-          <a:lstStyle/>
-          <a:p>
-            <a:pPr indent="0" marL="0">
-              <a:buNone/>
-            </a:pPr>
-            <a:r>
-              <a:rPr lang="en-US" sz="3000" b="1" dirty="0">
-                <a:solidFill>
-                  <a:srgbClr val="39FF88"/>
-                </a:solidFill>
-                <a:latin typeface="Courier New" pitchFamily="34" charset="0"/>
-                <a:ea typeface="Courier New" pitchFamily="34" charset="-122"/>
-                <a:cs typeface="Courier New" pitchFamily="34" charset="-120"/>
-              </a:rPr>
-              <a:t>Issues we found along the way</a:t>
-            </a:r>
-            <a:endParaRPr lang="en-US" sz="3000" dirty="0"/>
-          </a:p>
-        </p:txBody>
-      </p:sp>
-      <p:sp>
-        <p:nvSpPr>
-          <p:cNvPr id="3" name="Text 1"/>
-          <p:cNvSpPr/>
-          <p:nvPr/>
-        </p:nvSpPr>
-        <p:spPr>
-          <a:xfrm>
-            <a:off x="9418320" y="6446520"/>
-            <a:ext cx="2377440" cy="274320"/>
-          </a:xfrm>
-          <a:prstGeom prst="rect">
-            <a:avLst/>
-          </a:prstGeom>
-          <a:noFill/>
-          <a:ln/>
-        </p:spPr>
-        <p:txBody>
-          <a:bodyPr wrap="square" lIns="0" tIns="0" rIns="0" bIns="0" rtlCol="0" anchor="ctr"/>
-          <a:lstStyle/>
-          <a:p>
-            <a:pPr algn="r" indent="0" marL="0">
-              <a:buNone/>
-            </a:pPr>
-            <a:r>
-              <a:rPr lang="en-US" sz="1000" dirty="0">
-                <a:solidFill>
-                  <a:srgbClr val="8B98A5"/>
-                </a:solidFill>
-                <a:latin typeface="Courier New" pitchFamily="34" charset="0"/>
-                <a:ea typeface="Courier New" pitchFamily="34" charset="-122"/>
-                <a:cs typeface="Courier New" pitchFamily="34" charset="-120"/>
-              </a:rPr>
-              <a:t>29 / 41   Smart-RUDP</a:t>
-            </a:r>
-            <a:endParaRPr lang="en-US" sz="1000" dirty="0"/>
-          </a:p>
-        </p:txBody>
-      </p:sp>
-      <p:sp>
-        <p:nvSpPr>
-          <p:cNvPr id="4" name="Text 2"/>
-          <p:cNvSpPr/>
-          <p:nvPr/>
-        </p:nvSpPr>
-        <p:spPr>
-          <a:xfrm>
-            <a:off x="548640" y="1371600"/>
-            <a:ext cx="11064240" cy="4754880"/>
-          </a:xfrm>
-          <a:prstGeom prst="rect">
-            <a:avLst/>
-          </a:prstGeom>
-          <a:noFill/>
-          <a:ln/>
-        </p:spPr>
-        <p:txBody>
-          <a:bodyPr wrap="square" lIns="0" tIns="0" rIns="0" bIns="0" rtlCol="0" anchor="t"/>
-          <a:lstStyle/>
-          <a:p>
-            <a:pPr marL="342900" indent="-342900">
-              <a:spcAft>
-                <a:spcPts val="800"/>
-              </a:spcAft>
-              <a:buSzPct val="100000"/>
-              <a:buChar char="•"/>
-            </a:pPr>
-            <a:r>
-              <a:rPr lang="en-US" sz="1900" dirty="0">
-                <a:solidFill>
-                  <a:srgbClr val="E6EDF3"/>
-                </a:solidFill>
-                <a:latin typeface="Calibri" pitchFamily="34" charset="0"/>
-                <a:ea typeface="Calibri" pitchFamily="34" charset="-122"/>
-                <a:cs typeface="Calibri" pitchFamily="34" charset="-120"/>
-              </a:rPr>
-              <a:t>The first learned controller (a Q-table) was not faster than AIMD</a:t>
-            </a:r>
-            <a:endParaRPr lang="en-US" sz="1900" dirty="0"/>
-          </a:p>
-          <a:p>
-            <a:pPr marL="342900" indent="-342900">
-              <a:spcAft>
-                <a:spcPts val="800"/>
-              </a:spcAft>
-              <a:buSzPct val="100000"/>
-              <a:buChar char="•"/>
-            </a:pPr>
-            <a:r>
-              <a:rPr lang="en-US" sz="1900" dirty="0">
-                <a:solidFill>
-                  <a:srgbClr val="E6EDF3"/>
-                </a:solidFill>
-                <a:latin typeface="Calibri" pitchFamily="34" charset="0"/>
-                <a:ea typeface="Calibri" pitchFamily="34" charset="-122"/>
-                <a:cs typeface="Calibri" pitchFamily="34" charset="-120"/>
-              </a:rPr>
-              <a:t>At 10% random loss the neural agent was 7x slower than AIMD (85 s against 11 s)</a:t>
-            </a:r>
-            <a:endParaRPr lang="en-US" sz="1900" dirty="0"/>
-          </a:p>
-          <a:p>
-            <a:pPr marL="342900" indent="-342900">
-              <a:spcAft>
-                <a:spcPts val="800"/>
-              </a:spcAft>
-              <a:buSzPct val="100000"/>
-              <a:buChar char="•"/>
-            </a:pPr>
-            <a:r>
-              <a:rPr lang="en-US" sz="1900" dirty="0">
-                <a:solidFill>
-                  <a:srgbClr val="E6EDF3"/>
-                </a:solidFill>
-                <a:latin typeface="Calibri" pitchFamily="34" charset="0"/>
-                <a:ea typeface="Calibri" pitchFamily="34" charset="-122"/>
-                <a:cs typeface="Calibri" pitchFamily="34" charset="-120"/>
-              </a:rPr>
-              <a:t>Real sockets exposed a lost-handshake hang, spurious timeouts (262 retransmissions for about 3 losses) and a weak checksum</a:t>
-            </a:r>
-            <a:endParaRPr lang="en-US" sz="1900" dirty="0"/>
-          </a:p>
-          <a:p>
-            <a:pPr marL="342900" indent="-342900">
-              <a:spcAft>
-                <a:spcPts val="800"/>
-              </a:spcAft>
-              <a:buSzPct val="100000"/>
-              <a:buChar char="•"/>
-            </a:pPr>
-            <a:r>
-              <a:rPr lang="en-US" sz="1900" dirty="0">
-                <a:solidFill>
-                  <a:srgbClr val="E6EDF3"/>
-                </a:solidFill>
-                <a:latin typeface="Calibri" pitchFamily="34" charset="0"/>
-                <a:ea typeface="Calibri" pitchFamily="34" charset="-122"/>
-                <a:cs typeface="Calibri" pitchFamily="34" charset="-120"/>
-              </a:rPr>
-              <a:t>Our baselines were weak: untuned AIMD (window cap 32) made early wins look bigger than they are</a:t>
-            </a:r>
-            <a:endParaRPr lang="en-US" sz="1900" dirty="0"/>
-          </a:p>
-          <a:p>
-            <a:pPr marL="342900" indent="-342900">
-              <a:spcAft>
-                <a:spcPts val="800"/>
-              </a:spcAft>
-              <a:buSzPct val="100000"/>
-              <a:buChar char="•"/>
-            </a:pPr>
-            <a:r>
-              <a:rPr lang="en-US" sz="1900" dirty="0">
-                <a:solidFill>
-                  <a:srgbClr val="E6EDF3"/>
-                </a:solidFill>
-                <a:latin typeface="Calibri" pitchFamily="34" charset="0"/>
-                <a:ea typeface="Calibri" pitchFamily="34" charset="-122"/>
-                <a:cs typeface="Calibri" pitchFamily="34" charset="-120"/>
-              </a:rPr>
-              <a:t>Our own kernel tests were wrong four times: netem limit, untuned baseline, unequal payloads, synthetic 40-byte packets</a:t>
-            </a:r>
-            <a:endParaRPr lang="en-US" sz="1900" dirty="0"/>
-          </a:p>
-          <a:p>
-            <a:pPr marL="342900" indent="-342900">
-              <a:spcAft>
-                <a:spcPts val="800"/>
-              </a:spcAft>
-              <a:buSzPct val="100000"/>
-              <a:buChar char="•"/>
-            </a:pPr>
-            <a:r>
-              <a:rPr lang="en-US" sz="1900" dirty="0">
-                <a:solidFill>
-                  <a:srgbClr val="E6EDF3"/>
-                </a:solidFill>
-                <a:latin typeface="Calibri" pitchFamily="34" charset="0"/>
-                <a:ea typeface="Calibri" pitchFamily="34" charset="-122"/>
-                <a:cs typeface="Calibri" pitchFamily="34" charset="-120"/>
-              </a:rPr>
-              <a:t>The first BBR-style baseline stalled at 10% loss and took 163 s after a delay jump</a:t>
-            </a:r>
-            <a:endParaRPr lang="en-US" sz="1900" dirty="0"/>
-          </a:p>
-          <a:p>
-            <a:pPr marL="342900" indent="-342900">
-              <a:spcAft>
-                <a:spcPts val="800"/>
-              </a:spcAft>
-              <a:buSzPct val="100000"/>
-              <a:buChar char="•"/>
-            </a:pPr>
-            <a:r>
-              <a:rPr lang="en-US" sz="1900" dirty="0">
-                <a:solidFill>
-                  <a:srgbClr val="E6EDF3"/>
-                </a:solidFill>
-                <a:latin typeface="Calibri" pitchFamily="34" charset="0"/>
-                <a:ea typeface="Calibri" pitchFamily="34" charset="-122"/>
-                <a:cs typeface="Calibri" pitchFamily="34" charset="-120"/>
-              </a:rPr>
-              <a:t>The agent is a pushier neighbour than AIMD or CUBIC, and results vary with the training seed</a:t>
-            </a:r>
-            <a:endParaRPr lang="en-US" sz="1900" dirty="0"/>
-          </a:p>
-        </p:txBody>
-      </p:sp>
-    </p:spTree>
-  </p:cSld>
-  <p:clrMapOvr>
-    <a:masterClrMapping/>
-  </p:clrMapOvr>
-</p:sld>
-</file>
-
 <file path=ppt/slides/slide3.xml><?xml version="1.0" encoding="utf-8"?>
 <p:sld xmlns:a="http://schemas.openxmlformats.org/drawingml/2006/main" xmlns:r="http://schemas.openxmlformats.org/officeDocument/2006/relationships" xmlns:p="http://schemas.openxmlformats.org/presentationml/2006/main">
   <p:cSld name="Slide 3">
@@ -22520,7 +22591,7 @@
                 <a:ea typeface="Courier New" pitchFamily="34" charset="-122"/>
                 <a:cs typeface="Courier New" pitchFamily="34" charset="-120"/>
               </a:rPr>
-              <a:t>3 / 41   Smart-RUDP</a:t>
+              <a:t>3 / 42   Smart-RUDP</a:t>
             </a:r>
             <a:endParaRPr lang="en-US" sz="1000" dirty="0"/>
           </a:p>
@@ -22875,6 +22946,285 @@
                 <a:ea typeface="Courier New" pitchFamily="34" charset="-122"/>
                 <a:cs typeface="Courier New" pitchFamily="34" charset="-120"/>
               </a:rPr>
+              <a:t>Issues we found along the way</a:t>
+            </a:r>
+            <a:endParaRPr lang="en-US" sz="3000" dirty="0"/>
+          </a:p>
+        </p:txBody>
+      </p:sp>
+      <p:sp>
+        <p:nvSpPr>
+          <p:cNvPr id="3" name="Text 1"/>
+          <p:cNvSpPr/>
+          <p:nvPr/>
+        </p:nvSpPr>
+        <p:spPr>
+          <a:xfrm>
+            <a:off x="9418320" y="6446520"/>
+            <a:ext cx="2377440" cy="274320"/>
+          </a:xfrm>
+          <a:prstGeom prst="rect">
+            <a:avLst/>
+          </a:prstGeom>
+          <a:noFill/>
+          <a:ln/>
+        </p:spPr>
+        <p:txBody>
+          <a:bodyPr wrap="square" lIns="0" tIns="0" rIns="0" bIns="0" rtlCol="0" anchor="ctr"/>
+          <a:lstStyle/>
+          <a:p>
+            <a:pPr algn="r" indent="0" marL="0">
+              <a:buNone/>
+            </a:pPr>
+            <a:r>
+              <a:rPr lang="en-US" sz="1000" dirty="0">
+                <a:solidFill>
+                  <a:srgbClr val="8B98A5"/>
+                </a:solidFill>
+                <a:latin typeface="Courier New" pitchFamily="34" charset="0"/>
+                <a:ea typeface="Courier New" pitchFamily="34" charset="-122"/>
+                <a:cs typeface="Courier New" pitchFamily="34" charset="-120"/>
+              </a:rPr>
+              <a:t>30 / 42   Smart-RUDP</a:t>
+            </a:r>
+            <a:endParaRPr lang="en-US" sz="1000" dirty="0"/>
+          </a:p>
+        </p:txBody>
+      </p:sp>
+      <p:sp>
+        <p:nvSpPr>
+          <p:cNvPr id="4" name="Text 2"/>
+          <p:cNvSpPr/>
+          <p:nvPr/>
+        </p:nvSpPr>
+        <p:spPr>
+          <a:xfrm>
+            <a:off x="548640" y="1371600"/>
+            <a:ext cx="11064240" cy="4754880"/>
+          </a:xfrm>
+          <a:prstGeom prst="rect">
+            <a:avLst/>
+          </a:prstGeom>
+          <a:noFill/>
+          <a:ln/>
+        </p:spPr>
+        <p:txBody>
+          <a:bodyPr wrap="square" lIns="0" tIns="0" rIns="0" bIns="0" rtlCol="0" anchor="t"/>
+          <a:lstStyle/>
+          <a:p>
+            <a:pPr marL="342900" indent="-342900">
+              <a:spcAft>
+                <a:spcPts val="800"/>
+              </a:spcAft>
+              <a:buSzPct val="100000"/>
+              <a:buChar char="•"/>
+            </a:pPr>
+            <a:r>
+              <a:rPr lang="en-US" sz="1900" dirty="0">
+                <a:solidFill>
+                  <a:srgbClr val="E6EDF3"/>
+                </a:solidFill>
+                <a:latin typeface="Calibri" pitchFamily="34" charset="0"/>
+                <a:ea typeface="Calibri" pitchFamily="34" charset="-122"/>
+                <a:cs typeface="Calibri" pitchFamily="34" charset="-120"/>
+              </a:rPr>
+              <a:t>The first learned controller (a Q-table) was not faster than AIMD</a:t>
+            </a:r>
+            <a:endParaRPr lang="en-US" sz="1900" dirty="0"/>
+          </a:p>
+          <a:p>
+            <a:pPr marL="342900" indent="-342900">
+              <a:spcAft>
+                <a:spcPts val="800"/>
+              </a:spcAft>
+              <a:buSzPct val="100000"/>
+              <a:buChar char="•"/>
+            </a:pPr>
+            <a:r>
+              <a:rPr lang="en-US" sz="1900" dirty="0">
+                <a:solidFill>
+                  <a:srgbClr val="E6EDF3"/>
+                </a:solidFill>
+                <a:latin typeface="Calibri" pitchFamily="34" charset="0"/>
+                <a:ea typeface="Calibri" pitchFamily="34" charset="-122"/>
+                <a:cs typeface="Calibri" pitchFamily="34" charset="-120"/>
+              </a:rPr>
+              <a:t>At 10% random loss the neural agent was 7x slower than AIMD (85 s against 11 s)</a:t>
+            </a:r>
+            <a:endParaRPr lang="en-US" sz="1900" dirty="0"/>
+          </a:p>
+          <a:p>
+            <a:pPr marL="342900" indent="-342900">
+              <a:spcAft>
+                <a:spcPts val="800"/>
+              </a:spcAft>
+              <a:buSzPct val="100000"/>
+              <a:buChar char="•"/>
+            </a:pPr>
+            <a:r>
+              <a:rPr lang="en-US" sz="1900" dirty="0">
+                <a:solidFill>
+                  <a:srgbClr val="E6EDF3"/>
+                </a:solidFill>
+                <a:latin typeface="Calibri" pitchFamily="34" charset="0"/>
+                <a:ea typeface="Calibri" pitchFamily="34" charset="-122"/>
+                <a:cs typeface="Calibri" pitchFamily="34" charset="-120"/>
+              </a:rPr>
+              <a:t>Real sockets exposed a lost-handshake hang, spurious timeouts (262 retransmissions for about 3 losses) and a weak checksum</a:t>
+            </a:r>
+            <a:endParaRPr lang="en-US" sz="1900" dirty="0"/>
+          </a:p>
+          <a:p>
+            <a:pPr marL="342900" indent="-342900">
+              <a:spcAft>
+                <a:spcPts val="800"/>
+              </a:spcAft>
+              <a:buSzPct val="100000"/>
+              <a:buChar char="•"/>
+            </a:pPr>
+            <a:r>
+              <a:rPr lang="en-US" sz="1900" dirty="0">
+                <a:solidFill>
+                  <a:srgbClr val="E6EDF3"/>
+                </a:solidFill>
+                <a:latin typeface="Calibri" pitchFamily="34" charset="0"/>
+                <a:ea typeface="Calibri" pitchFamily="34" charset="-122"/>
+                <a:cs typeface="Calibri" pitchFamily="34" charset="-120"/>
+              </a:rPr>
+              <a:t>Our baselines were weak: untuned AIMD (window cap 32) made early wins look bigger than they are</a:t>
+            </a:r>
+            <a:endParaRPr lang="en-US" sz="1900" dirty="0"/>
+          </a:p>
+          <a:p>
+            <a:pPr marL="342900" indent="-342900">
+              <a:spcAft>
+                <a:spcPts val="800"/>
+              </a:spcAft>
+              <a:buSzPct val="100000"/>
+              <a:buChar char="•"/>
+            </a:pPr>
+            <a:r>
+              <a:rPr lang="en-US" sz="1900" dirty="0">
+                <a:solidFill>
+                  <a:srgbClr val="E6EDF3"/>
+                </a:solidFill>
+                <a:latin typeface="Calibri" pitchFamily="34" charset="0"/>
+                <a:ea typeface="Calibri" pitchFamily="34" charset="-122"/>
+                <a:cs typeface="Calibri" pitchFamily="34" charset="-120"/>
+              </a:rPr>
+              <a:t>Our own kernel tests were wrong four times: netem limit, untuned baseline, unequal payloads, synthetic 40-byte packets</a:t>
+            </a:r>
+            <a:endParaRPr lang="en-US" sz="1900" dirty="0"/>
+          </a:p>
+          <a:p>
+            <a:pPr marL="342900" indent="-342900">
+              <a:spcAft>
+                <a:spcPts val="800"/>
+              </a:spcAft>
+              <a:buSzPct val="100000"/>
+              <a:buChar char="•"/>
+            </a:pPr>
+            <a:r>
+              <a:rPr lang="en-US" sz="1900" dirty="0">
+                <a:solidFill>
+                  <a:srgbClr val="E6EDF3"/>
+                </a:solidFill>
+                <a:latin typeface="Calibri" pitchFamily="34" charset="0"/>
+                <a:ea typeface="Calibri" pitchFamily="34" charset="-122"/>
+                <a:cs typeface="Calibri" pitchFamily="34" charset="-120"/>
+              </a:rPr>
+              <a:t>The first BBR-style baseline stalled at 10% loss and took 163 s after a delay jump</a:t>
+            </a:r>
+            <a:endParaRPr lang="en-US" sz="1900" dirty="0"/>
+          </a:p>
+          <a:p>
+            <a:pPr marL="342900" indent="-342900">
+              <a:spcAft>
+                <a:spcPts val="800"/>
+              </a:spcAft>
+              <a:buSzPct val="100000"/>
+              <a:buChar char="•"/>
+            </a:pPr>
+            <a:r>
+              <a:rPr lang="en-US" sz="1900" dirty="0">
+                <a:solidFill>
+                  <a:srgbClr val="E6EDF3"/>
+                </a:solidFill>
+                <a:latin typeface="Calibri" pitchFamily="34" charset="0"/>
+                <a:ea typeface="Calibri" pitchFamily="34" charset="-122"/>
+                <a:cs typeface="Calibri" pitchFamily="34" charset="-120"/>
+              </a:rPr>
+              <a:t>The agent is a pushier neighbour than AIMD or CUBIC, and results vary with the training seed</a:t>
+            </a:r>
+            <a:endParaRPr lang="en-US" sz="1900" dirty="0"/>
+          </a:p>
+        </p:txBody>
+      </p:sp>
+    </p:spTree>
+  </p:cSld>
+  <p:clrMapOvr>
+    <a:masterClrMapping/>
+  </p:clrMapOvr>
+</p:sld>
+</file>
+
+<file path=ppt/slides/slide31.xml><?xml version="1.0" encoding="utf-8"?>
+<p:sld xmlns:a="http://schemas.openxmlformats.org/drawingml/2006/main" xmlns:r="http://schemas.openxmlformats.org/officeDocument/2006/relationships" xmlns:p="http://schemas.openxmlformats.org/presentationml/2006/main">
+  <p:cSld name="Slide 31">
+    <p:bg>
+      <p:bgPr>
+        <a:solidFill>
+          <a:srgbClr val="0B0F14"/>
+        </a:solidFill>
+      </p:bgPr>
+    </p:bg>
+    <p:spTree>
+      <p:nvGrpSpPr>
+        <p:cNvPr id="1" name=""/>
+        <p:cNvGrpSpPr/>
+        <p:nvPr/>
+      </p:nvGrpSpPr>
+      <p:grpSpPr>
+        <a:xfrm>
+          <a:off x="0" y="0"/>
+          <a:ext cx="0" cy="0"/>
+          <a:chOff x="0" y="0"/>
+          <a:chExt cx="0" cy="0"/>
+        </a:xfrm>
+      </p:grpSpPr>
+      <p:sp>
+        <p:nvSpPr>
+          <p:cNvPr id="2" name="Text 0"/>
+          <p:cNvSpPr/>
+          <p:nvPr/>
+        </p:nvSpPr>
+        <p:spPr>
+          <a:xfrm>
+            <a:off x="548640" y="320040"/>
+            <a:ext cx="11064240" cy="731520"/>
+          </a:xfrm>
+          <a:prstGeom prst="rect">
+            <a:avLst/>
+          </a:prstGeom>
+          <a:noFill/>
+          <a:ln/>
+        </p:spPr>
+        <p:txBody>
+          <a:bodyPr wrap="square" lIns="0" tIns="0" rIns="0" bIns="0" rtlCol="0" anchor="ctr"/>
+          <a:lstStyle/>
+          <a:p>
+            <a:pPr indent="0" marL="0">
+              <a:buNone/>
+            </a:pPr>
+            <a:r>
+              <a:rPr lang="en-US" sz="3000" b="1" dirty="0">
+                <a:solidFill>
+                  <a:srgbClr val="39FF88"/>
+                </a:solidFill>
+                <a:latin typeface="Courier New" pitchFamily="34" charset="0"/>
+                <a:ea typeface="Courier New" pitchFamily="34" charset="-122"/>
+                <a:cs typeface="Courier New" pitchFamily="34" charset="-120"/>
+              </a:rPr>
               <a:t>What we changed to make it better</a:t>
             </a:r>
             <a:endParaRPr lang="en-US" sz="3000" dirty="0"/>
@@ -22914,7 +23264,7 @@
                 <a:ea typeface="Courier New" pitchFamily="34" charset="-122"/>
                 <a:cs typeface="Courier New" pitchFamily="34" charset="-120"/>
               </a:rPr>
-              <a:t>30 / 41   Smart-RUDP</a:t>
+              <a:t>31 / 42   Smart-RUDP</a:t>
             </a:r>
             <a:endParaRPr lang="en-US" sz="1000" dirty="0"/>
           </a:p>
@@ -22922,7 +23272,7 @@
       </p:sp>
       <p:graphicFrame>
         <p:nvGraphicFramePr>
-          <p:cNvPr id="31" name="Table 0"/>
+          <p:cNvPr id="32" name="Table 0"/>
           <p:cNvGraphicFramePr>
             <a:graphicFrameLocks noGrp="1"/>
           </p:cNvGraphicFramePr>
@@ -24062,9 +24412,9 @@
 </p:sld>
 </file>
 
-<file path=ppt/slides/slide31.xml><?xml version="1.0" encoding="utf-8"?>
+<file path=ppt/slides/slide32.xml><?xml version="1.0" encoding="utf-8"?>
 <p:sld xmlns:a="http://schemas.openxmlformats.org/drawingml/2006/main" xmlns:r="http://schemas.openxmlformats.org/officeDocument/2006/relationships" xmlns:p="http://schemas.openxmlformats.org/presentationml/2006/main">
-  <p:cSld name="Slide 31">
+  <p:cSld name="Slide 32">
     <p:bg>
       <p:bgPr>
         <a:solidFill>
@@ -24158,7 +24508,7 @@
                 <a:ea typeface="Courier New" pitchFamily="34" charset="-122"/>
                 <a:cs typeface="Courier New" pitchFamily="34" charset="-120"/>
               </a:rPr>
-              <a:t>31 / 41   Smart-RUDP</a:t>
+              <a:t>32 / 42   Smart-RUDP</a:t>
             </a:r>
             <a:endParaRPr lang="en-US" sz="1000" dirty="0"/>
           </a:p>
@@ -24259,9 +24609,9 @@
 </p:sld>
 </file>
 
-<file path=ppt/slides/slide32.xml><?xml version="1.0" encoding="utf-8"?>
+<file path=ppt/slides/slide33.xml><?xml version="1.0" encoding="utf-8"?>
 <p:sld xmlns:a="http://schemas.openxmlformats.org/drawingml/2006/main" xmlns:r="http://schemas.openxmlformats.org/officeDocument/2006/relationships" xmlns:p="http://schemas.openxmlformats.org/presentationml/2006/main">
-  <p:cSld name="Slide 32">
+  <p:cSld name="Slide 33">
     <p:bg>
       <p:bgPr>
         <a:solidFill>
@@ -24355,7 +24705,7 @@
                 <a:ea typeface="Courier New" pitchFamily="34" charset="-122"/>
                 <a:cs typeface="Courier New" pitchFamily="34" charset="-120"/>
               </a:rPr>
-              <a:t>32 / 41   Smart-RUDP</a:t>
+              <a:t>33 / 42   Smart-RUDP</a:t>
             </a:r>
             <a:endParaRPr lang="en-US" sz="1000" dirty="0"/>
           </a:p>
@@ -24363,7 +24713,7 @@
       </p:sp>
       <p:graphicFrame>
         <p:nvGraphicFramePr>
-          <p:cNvPr id="33" name="Table 0"/>
+          <p:cNvPr id="34" name="Table 0"/>
           <p:cNvGraphicFramePr>
             <a:graphicFrameLocks noGrp="1"/>
           </p:cNvGraphicFramePr>
@@ -25089,9 +25439,9 @@
 </p:sld>
 </file>
 
-<file path=ppt/slides/slide33.xml><?xml version="1.0" encoding="utf-8"?>
+<file path=ppt/slides/slide34.xml><?xml version="1.0" encoding="utf-8"?>
 <p:sld xmlns:a="http://schemas.openxmlformats.org/drawingml/2006/main" xmlns:r="http://schemas.openxmlformats.org/officeDocument/2006/relationships" xmlns:p="http://schemas.openxmlformats.org/presentationml/2006/main">
-  <p:cSld name="Slide 33">
+  <p:cSld name="Slide 34">
     <p:bg>
       <p:bgPr>
         <a:solidFill>
@@ -25185,7 +25535,7 @@
                 <a:ea typeface="Courier New" pitchFamily="34" charset="-122"/>
                 <a:cs typeface="Courier New" pitchFamily="34" charset="-120"/>
               </a:rPr>
-              <a:t>33 / 41   Smart-RUDP</a:t>
+              <a:t>34 / 42   Smart-RUDP</a:t>
             </a:r>
             <a:endParaRPr lang="en-US" sz="1000" dirty="0"/>
           </a:p>
@@ -25329,9 +25679,9 @@
 </p:sld>
 </file>
 
-<file path=ppt/slides/slide34.xml><?xml version="1.0" encoding="utf-8"?>
+<file path=ppt/slides/slide35.xml><?xml version="1.0" encoding="utf-8"?>
 <p:sld xmlns:a="http://schemas.openxmlformats.org/drawingml/2006/main" xmlns:r="http://schemas.openxmlformats.org/officeDocument/2006/relationships" xmlns:p="http://schemas.openxmlformats.org/presentationml/2006/main">
-  <p:cSld name="Slide 34">
+  <p:cSld name="Slide 35">
     <p:bg>
       <p:bgPr>
         <a:solidFill>
@@ -25425,7 +25775,7 @@
                 <a:ea typeface="Courier New" pitchFamily="34" charset="-122"/>
                 <a:cs typeface="Courier New" pitchFamily="34" charset="-120"/>
               </a:rPr>
-              <a:t>34 / 41   Smart-RUDP</a:t>
+              <a:t>35 / 42   Smart-RUDP</a:t>
             </a:r>
             <a:endParaRPr lang="en-US" sz="1000" dirty="0"/>
           </a:p>
@@ -25433,7 +25783,7 @@
       </p:sp>
       <p:graphicFrame>
         <p:nvGraphicFramePr>
-          <p:cNvPr id="35" name="Table 0"/>
+          <p:cNvPr id="36" name="Table 0"/>
           <p:cNvGraphicFramePr>
             <a:graphicFrameLocks noGrp="1"/>
           </p:cNvGraphicFramePr>
@@ -27036,9 +27386,9 @@
 </p:sld>
 </file>
 
-<file path=ppt/slides/slide35.xml><?xml version="1.0" encoding="utf-8"?>
+<file path=ppt/slides/slide36.xml><?xml version="1.0" encoding="utf-8"?>
 <p:sld xmlns:a="http://schemas.openxmlformats.org/drawingml/2006/main" xmlns:r="http://schemas.openxmlformats.org/officeDocument/2006/relationships" xmlns:p="http://schemas.openxmlformats.org/presentationml/2006/main">
-  <p:cSld name="Slide 35">
+  <p:cSld name="Slide 36">
     <p:bg>
       <p:bgPr>
         <a:solidFill>
@@ -27132,7 +27482,7 @@
                 <a:ea typeface="Courier New" pitchFamily="34" charset="-122"/>
                 <a:cs typeface="Courier New" pitchFamily="34" charset="-120"/>
               </a:rPr>
-              <a:t>35 / 41   Smart-RUDP</a:t>
+              <a:t>36 / 42   Smart-RUDP</a:t>
             </a:r>
             <a:endParaRPr lang="en-US" sz="1000" dirty="0"/>
           </a:p>
@@ -27494,9 +27844,9 @@
 </p:sld>
 </file>
 
-<file path=ppt/slides/slide36.xml><?xml version="1.0" encoding="utf-8"?>
+<file path=ppt/slides/slide37.xml><?xml version="1.0" encoding="utf-8"?>
 <p:sld xmlns:a="http://schemas.openxmlformats.org/drawingml/2006/main" xmlns:r="http://schemas.openxmlformats.org/officeDocument/2006/relationships" xmlns:p="http://schemas.openxmlformats.org/presentationml/2006/main">
-  <p:cSld name="Slide 36">
+  <p:cSld name="Slide 37">
     <p:bg>
       <p:bgPr>
         <a:solidFill>
@@ -27590,7 +27940,7 @@
                 <a:ea typeface="Courier New" pitchFamily="34" charset="-122"/>
                 <a:cs typeface="Courier New" pitchFamily="34" charset="-120"/>
               </a:rPr>
-              <a:t>36 / 41   Smart-RUDP</a:t>
+              <a:t>37 / 42   Smart-RUDP</a:t>
             </a:r>
             <a:endParaRPr lang="en-US" sz="1000" dirty="0"/>
           </a:p>
@@ -27598,7 +27948,7 @@
       </p:sp>
       <p:graphicFrame>
         <p:nvGraphicFramePr>
-          <p:cNvPr id="37" name="Table 0"/>
+          <p:cNvPr id="38" name="Table 0"/>
           <p:cNvGraphicFramePr>
             <a:graphicFrameLocks noGrp="1"/>
           </p:cNvGraphicFramePr>
@@ -29172,9 +29522,9 @@
 </p:sld>
 </file>
 
-<file path=ppt/slides/slide37.xml><?xml version="1.0" encoding="utf-8"?>
+<file path=ppt/slides/slide38.xml><?xml version="1.0" encoding="utf-8"?>
 <p:sld xmlns:a="http://schemas.openxmlformats.org/drawingml/2006/main" xmlns:r="http://schemas.openxmlformats.org/officeDocument/2006/relationships" xmlns:p="http://schemas.openxmlformats.org/presentationml/2006/main">
-  <p:cSld name="Slide 37">
+  <p:cSld name="Slide 38">
     <p:bg>
       <p:bgPr>
         <a:solidFill>
@@ -29268,7 +29618,7 @@
                 <a:ea typeface="Courier New" pitchFamily="34" charset="-122"/>
                 <a:cs typeface="Courier New" pitchFamily="34" charset="-120"/>
               </a:rPr>
-              <a:t>37 / 41   Smart-RUDP</a:t>
+              <a:t>38 / 42   Smart-RUDP</a:t>
             </a:r>
             <a:endParaRPr lang="en-US" sz="1000" dirty="0"/>
           </a:p>
@@ -29276,7 +29626,7 @@
       </p:sp>
       <p:graphicFrame>
         <p:nvGraphicFramePr>
-          <p:cNvPr id="38" name="Table 0"/>
+          <p:cNvPr id="39" name="Table 0"/>
           <p:cNvGraphicFramePr>
             <a:graphicFrameLocks noGrp="1"/>
           </p:cNvGraphicFramePr>
@@ -30715,9 +31065,9 @@
 </p:sld>
 </file>
 
-<file path=ppt/slides/slide38.xml><?xml version="1.0" encoding="utf-8"?>
+<file path=ppt/slides/slide39.xml><?xml version="1.0" encoding="utf-8"?>
 <p:sld xmlns:a="http://schemas.openxmlformats.org/drawingml/2006/main" xmlns:r="http://schemas.openxmlformats.org/officeDocument/2006/relationships" xmlns:p="http://schemas.openxmlformats.org/presentationml/2006/main">
-  <p:cSld name="Slide 38">
+  <p:cSld name="Slide 39">
     <p:bg>
       <p:bgPr>
         <a:solidFill>
@@ -30811,7 +31161,7 @@
                 <a:ea typeface="Courier New" pitchFamily="34" charset="-122"/>
                 <a:cs typeface="Courier New" pitchFamily="34" charset="-120"/>
               </a:rPr>
-              <a:t>38 / 41   Smart-RUDP</a:t>
+              <a:t>39 / 42   Smart-RUDP</a:t>
             </a:r>
             <a:endParaRPr lang="en-US" sz="1000" dirty="0"/>
           </a:p>
@@ -30819,7 +31169,7 @@
       </p:sp>
       <p:graphicFrame>
         <p:nvGraphicFramePr>
-          <p:cNvPr id="39" name="Table 0"/>
+          <p:cNvPr id="40" name="Table 0"/>
           <p:cNvGraphicFramePr>
             <a:graphicFrameLocks noGrp="1"/>
           </p:cNvGraphicFramePr>
@@ -32495,7 +32845,7 @@
       </p:graphicFrame>
       <p:graphicFrame>
         <p:nvGraphicFramePr>
-          <p:cNvPr id="77" name="Table 1"/>
+          <p:cNvPr id="79" name="Table 1"/>
           <p:cNvGraphicFramePr>
             <a:graphicFrameLocks noGrp="1"/>
           </p:cNvGraphicFramePr>
@@ -33461,2323 +33811,6 @@
 </p:sld>
 </file>
 
-<file path=ppt/slides/slide39.xml><?xml version="1.0" encoding="utf-8"?>
-<p:sld xmlns:a="http://schemas.openxmlformats.org/drawingml/2006/main" xmlns:r="http://schemas.openxmlformats.org/officeDocument/2006/relationships" xmlns:p="http://schemas.openxmlformats.org/presentationml/2006/main">
-  <p:cSld name="Slide 39">
-    <p:bg>
-      <p:bgPr>
-        <a:solidFill>
-          <a:srgbClr val="0B0F14"/>
-        </a:solidFill>
-      </p:bgPr>
-    </p:bg>
-    <p:spTree>
-      <p:nvGrpSpPr>
-        <p:cNvPr id="1" name=""/>
-        <p:cNvGrpSpPr/>
-        <p:nvPr/>
-      </p:nvGrpSpPr>
-      <p:grpSpPr>
-        <a:xfrm>
-          <a:off x="0" y="0"/>
-          <a:ext cx="0" cy="0"/>
-          <a:chOff x="0" y="0"/>
-          <a:chExt cx="0" cy="0"/>
-        </a:xfrm>
-      </p:grpSpPr>
-      <p:sp>
-        <p:nvSpPr>
-          <p:cNvPr id="2" name="Text 0"/>
-          <p:cNvSpPr/>
-          <p:nvPr/>
-        </p:nvSpPr>
-        <p:spPr>
-          <a:xfrm>
-            <a:off x="548640" y="320040"/>
-            <a:ext cx="11064240" cy="731520"/>
-          </a:xfrm>
-          <a:prstGeom prst="rect">
-            <a:avLst/>
-          </a:prstGeom>
-          <a:noFill/>
-          <a:ln/>
-        </p:spPr>
-        <p:txBody>
-          <a:bodyPr wrap="square" lIns="0" tIns="0" rIns="0" bIns="0" rtlCol="0" anchor="ctr"/>
-          <a:lstStyle/>
-          <a:p>
-            <a:pPr indent="0" marL="0">
-              <a:buNone/>
-            </a:pPr>
-            <a:r>
-              <a:rPr lang="en-US" sz="3000" b="1" dirty="0">
-                <a:solidFill>
-                  <a:srgbClr val="39FF88"/>
-                </a:solidFill>
-                <a:latin typeface="Courier New" pitchFamily="34" charset="0"/>
-                <a:ea typeface="Courier New" pitchFamily="34" charset="-122"/>
-                <a:cs typeface="Courier New" pitchFamily="34" charset="-120"/>
-              </a:rPr>
-              <a:t>Closing gaps: fairness and cross traffic</a:t>
-            </a:r>
-            <a:endParaRPr lang="en-US" sz="3000" dirty="0"/>
-          </a:p>
-        </p:txBody>
-      </p:sp>
-      <p:sp>
-        <p:nvSpPr>
-          <p:cNvPr id="3" name="Text 1"/>
-          <p:cNvSpPr/>
-          <p:nvPr/>
-        </p:nvSpPr>
-        <p:spPr>
-          <a:xfrm>
-            <a:off x="9418320" y="6446520"/>
-            <a:ext cx="2377440" cy="274320"/>
-          </a:xfrm>
-          <a:prstGeom prst="rect">
-            <a:avLst/>
-          </a:prstGeom>
-          <a:noFill/>
-          <a:ln/>
-        </p:spPr>
-        <p:txBody>
-          <a:bodyPr wrap="square" lIns="0" tIns="0" rIns="0" bIns="0" rtlCol="0" anchor="ctr"/>
-          <a:lstStyle/>
-          <a:p>
-            <a:pPr algn="r" indent="0" marL="0">
-              <a:buNone/>
-            </a:pPr>
-            <a:r>
-              <a:rPr lang="en-US" sz="1000" dirty="0">
-                <a:solidFill>
-                  <a:srgbClr val="8B98A5"/>
-                </a:solidFill>
-                <a:latin typeface="Courier New" pitchFamily="34" charset="0"/>
-                <a:ea typeface="Courier New" pitchFamily="34" charset="-122"/>
-                <a:cs typeface="Courier New" pitchFamily="34" charset="-120"/>
-              </a:rPr>
-              <a:t>39 / 41   Smart-RUDP</a:t>
-            </a:r>
-            <a:endParaRPr lang="en-US" sz="1000" dirty="0"/>
-          </a:p>
-        </p:txBody>
-      </p:sp>
-      <p:graphicFrame>
-        <p:nvGraphicFramePr>
-          <p:cNvPr id="40" name="Table 0"/>
-          <p:cNvGraphicFramePr>
-            <a:graphicFrameLocks noGrp="1"/>
-          </p:cNvGraphicFramePr>
-          <p:nvPr>
-            <p:extLst>
-              <p:ext uri="{D42A27DB-BD31-4B8C-83A1-F6EECF244321}">
-                <p14:modId xmlns:p14="http://schemas.microsoft.com/office/powerpoint/2010/main" val="1579011935"/>
-              </p:ext>
-            </p:extLst>
-          </p:nvPr>
-        </p:nvGraphicFramePr>
-        <p:xfrm>
-          <a:off x="548640" y="1188720"/>
-          <a:ext cx="5394960" cy="914400"/>
-        </p:xfrm>
-        <a:graphic>
-          <a:graphicData uri="http://schemas.openxmlformats.org/drawingml/2006/table">
-            <a:tbl>
-              <a:tblPr/>
-              <a:tblGrid>
-                <a:gridCol w="2651760"/>
-                <a:gridCol w="1463040"/>
-                <a:gridCol w="1280160"/>
-              </a:tblGrid>
-              <a:tr h="384048">
-                <a:tc>
-                  <a:txBody>
-                    <a:bodyPr/>
-                    <a:lstStyle/>
-                    <a:p>
-                      <a:pPr indent="0" marL="0">
-                        <a:buNone/>
-                      </a:pPr>
-                      <a:r>
-                        <a:rPr lang="en-US" sz="1300" b="1" dirty="0">
-                          <a:solidFill>
-                            <a:srgbClr val="0B0F14"/>
-                          </a:solidFill>
-                          <a:latin typeface="Courier New" pitchFamily="34" charset="0"/>
-                          <a:ea typeface="Courier New" pitchFamily="34" charset="-122"/>
-                          <a:cs typeface="Courier New" pitchFamily="34" charset="-120"/>
-                        </a:rPr>
-                        <a:t>Neural vs tuned AIMD</a:t>
-                      </a:r>
-                      <a:endParaRPr lang="en-US" sz="1300" dirty="0">
-                        <a:latin typeface="Courier New" charset="0"/>
-                        <a:ea typeface="Courier New" charset="0"/>
-                        <a:cs typeface="Courier New" charset="0"/>
-                      </a:endParaRPr>
-                    </a:p>
-                  </a:txBody>
-                  <a:tcPr marL="91440" marR="91440" marT="45720" marB="45720">
-                    <a:lnL w="12700" cap="flat" cmpd="sng" algn="ctr">
-                      <a:solidFill>
-                        <a:srgbClr val="2A3441"/>
-                      </a:solidFill>
-                      <a:prstDash val="solid"/>
-                      <a:round/>
-                      <a:headEnd type="none" w="med" len="med"/>
-                      <a:tailEnd type="none" w="med" len="med"/>
-                    </a:lnL>
-                    <a:lnR w="12700" cap="flat" cmpd="sng" algn="ctr">
-                      <a:solidFill>
-                        <a:srgbClr val="2A3441"/>
-                      </a:solidFill>
-                      <a:prstDash val="solid"/>
-                      <a:round/>
-                      <a:headEnd type="none" w="med" len="med"/>
-                      <a:tailEnd type="none" w="med" len="med"/>
-                    </a:lnR>
-                    <a:lnT w="12700" cap="flat" cmpd="sng" algn="ctr">
-                      <a:solidFill>
-                        <a:srgbClr val="2A3441"/>
-                      </a:solidFill>
-                      <a:prstDash val="solid"/>
-                      <a:round/>
-                      <a:headEnd type="none" w="med" len="med"/>
-                      <a:tailEnd type="none" w="med" len="med"/>
-                    </a:lnT>
-                    <a:lnB w="12700" cap="flat" cmpd="sng" algn="ctr">
-                      <a:solidFill>
-                        <a:srgbClr val="2A3441"/>
-                      </a:solidFill>
-                      <a:prstDash val="solid"/>
-                      <a:round/>
-                      <a:headEnd type="none" w="med" len="med"/>
-                      <a:tailEnd type="none" w="med" len="med"/>
-                    </a:lnB>
-                    <a:solidFill>
-                      <a:srgbClr val="39FF88"/>
-                    </a:solidFill>
-                  </a:tcPr>
-                </a:tc>
-                <a:tc>
-                  <a:txBody>
-                    <a:bodyPr/>
-                    <a:lstStyle/>
-                    <a:p>
-                      <a:pPr indent="0" marL="0">
-                        <a:buNone/>
-                      </a:pPr>
-                      <a:r>
-                        <a:rPr lang="en-US" sz="1300" b="1" dirty="0">
-                          <a:solidFill>
-                            <a:srgbClr val="0B0F14"/>
-                          </a:solidFill>
-                          <a:latin typeface="Courier New" pitchFamily="34" charset="0"/>
-                          <a:ea typeface="Courier New" pitchFamily="34" charset="-122"/>
-                          <a:cs typeface="Courier New" pitchFamily="34" charset="-120"/>
-                        </a:rPr>
-                        <a:t>Agent share</a:t>
-                      </a:r>
-                      <a:endParaRPr lang="en-US" sz="1300" dirty="0">
-                        <a:latin typeface="Courier New" charset="0"/>
-                        <a:ea typeface="Courier New" charset="0"/>
-                        <a:cs typeface="Courier New" charset="0"/>
-                      </a:endParaRPr>
-                    </a:p>
-                  </a:txBody>
-                  <a:tcPr marL="91440" marR="91440" marT="45720" marB="45720">
-                    <a:lnL w="12700" cap="flat" cmpd="sng" algn="ctr">
-                      <a:solidFill>
-                        <a:srgbClr val="2A3441"/>
-                      </a:solidFill>
-                      <a:prstDash val="solid"/>
-                      <a:round/>
-                      <a:headEnd type="none" w="med" len="med"/>
-                      <a:tailEnd type="none" w="med" len="med"/>
-                    </a:lnL>
-                    <a:lnR w="12700" cap="flat" cmpd="sng" algn="ctr">
-                      <a:solidFill>
-                        <a:srgbClr val="2A3441"/>
-                      </a:solidFill>
-                      <a:prstDash val="solid"/>
-                      <a:round/>
-                      <a:headEnd type="none" w="med" len="med"/>
-                      <a:tailEnd type="none" w="med" len="med"/>
-                    </a:lnR>
-                    <a:lnT w="12700" cap="flat" cmpd="sng" algn="ctr">
-                      <a:solidFill>
-                        <a:srgbClr val="2A3441"/>
-                      </a:solidFill>
-                      <a:prstDash val="solid"/>
-                      <a:round/>
-                      <a:headEnd type="none" w="med" len="med"/>
-                      <a:tailEnd type="none" w="med" len="med"/>
-                    </a:lnT>
-                    <a:lnB w="12700" cap="flat" cmpd="sng" algn="ctr">
-                      <a:solidFill>
-                        <a:srgbClr val="2A3441"/>
-                      </a:solidFill>
-                      <a:prstDash val="solid"/>
-                      <a:round/>
-                      <a:headEnd type="none" w="med" len="med"/>
-                      <a:tailEnd type="none" w="med" len="med"/>
-                    </a:lnB>
-                    <a:solidFill>
-                      <a:srgbClr val="39FF88"/>
-                    </a:solidFill>
-                  </a:tcPr>
-                </a:tc>
-                <a:tc>
-                  <a:txBody>
-                    <a:bodyPr/>
-                    <a:lstStyle/>
-                    <a:p>
-                      <a:pPr indent="0" marL="0">
-                        <a:buNone/>
-                      </a:pPr>
-                      <a:r>
-                        <a:rPr lang="en-US" sz="1300" b="1" dirty="0">
-                          <a:solidFill>
-                            <a:srgbClr val="0B0F14"/>
-                          </a:solidFill>
-                          <a:latin typeface="Courier New" pitchFamily="34" charset="0"/>
-                          <a:ea typeface="Courier New" pitchFamily="34" charset="-122"/>
-                          <a:cs typeface="Courier New" pitchFamily="34" charset="-120"/>
-                        </a:rPr>
-                        <a:t>Jain</a:t>
-                      </a:r>
-                      <a:endParaRPr lang="en-US" sz="1300" dirty="0">
-                        <a:latin typeface="Courier New" charset="0"/>
-                        <a:ea typeface="Courier New" charset="0"/>
-                        <a:cs typeface="Courier New" charset="0"/>
-                      </a:endParaRPr>
-                    </a:p>
-                  </a:txBody>
-                  <a:tcPr marL="91440" marR="91440" marT="45720" marB="45720">
-                    <a:lnL w="12700" cap="flat" cmpd="sng" algn="ctr">
-                      <a:solidFill>
-                        <a:srgbClr val="2A3441"/>
-                      </a:solidFill>
-                      <a:prstDash val="solid"/>
-                      <a:round/>
-                      <a:headEnd type="none" w="med" len="med"/>
-                      <a:tailEnd type="none" w="med" len="med"/>
-                    </a:lnL>
-                    <a:lnR w="12700" cap="flat" cmpd="sng" algn="ctr">
-                      <a:solidFill>
-                        <a:srgbClr val="2A3441"/>
-                      </a:solidFill>
-                      <a:prstDash val="solid"/>
-                      <a:round/>
-                      <a:headEnd type="none" w="med" len="med"/>
-                      <a:tailEnd type="none" w="med" len="med"/>
-                    </a:lnR>
-                    <a:lnT w="12700" cap="flat" cmpd="sng" algn="ctr">
-                      <a:solidFill>
-                        <a:srgbClr val="2A3441"/>
-                      </a:solidFill>
-                      <a:prstDash val="solid"/>
-                      <a:round/>
-                      <a:headEnd type="none" w="med" len="med"/>
-                      <a:tailEnd type="none" w="med" len="med"/>
-                    </a:lnT>
-                    <a:lnB w="12700" cap="flat" cmpd="sng" algn="ctr">
-                      <a:solidFill>
-                        <a:srgbClr val="2A3441"/>
-                      </a:solidFill>
-                      <a:prstDash val="solid"/>
-                      <a:round/>
-                      <a:headEnd type="none" w="med" len="med"/>
-                      <a:tailEnd type="none" w="med" len="med"/>
-                    </a:lnB>
-                    <a:solidFill>
-                      <a:srgbClr val="39FF88"/>
-                    </a:solidFill>
-                  </a:tcPr>
-                </a:tc>
-              </a:tr>
-              <a:tr h="384048">
-                <a:tc>
-                  <a:txBody>
-                    <a:bodyPr/>
-                    <a:lstStyle/>
-                    <a:p>
-                      <a:pPr indent="0" marL="0">
-                        <a:buNone/>
-                      </a:pPr>
-                      <a:r>
-                        <a:rPr lang="en-US" sz="1300" dirty="0">
-                          <a:solidFill>
-                            <a:srgbClr val="E6EDF3"/>
-                          </a:solidFill>
-                          <a:latin typeface="Calibri" pitchFamily="34" charset="0"/>
-                          <a:ea typeface="Calibri" pitchFamily="34" charset="-122"/>
-                          <a:cs typeface="Calibri" pitchFamily="34" charset="-120"/>
-                        </a:rPr>
-                        <a:t>Default</a:t>
-                      </a:r>
-                      <a:endParaRPr lang="en-US" sz="1300" dirty="0">
-                        <a:latin typeface="Calibri" charset="0"/>
-                        <a:ea typeface="Calibri" charset="0"/>
-                        <a:cs typeface="Calibri" charset="0"/>
-                      </a:endParaRPr>
-                    </a:p>
-                  </a:txBody>
-                  <a:tcPr marL="91440" marR="91440" marT="45720" marB="45720">
-                    <a:lnL w="12700" cap="flat" cmpd="sng" algn="ctr">
-                      <a:solidFill>
-                        <a:srgbClr val="2A3441"/>
-                      </a:solidFill>
-                      <a:prstDash val="solid"/>
-                      <a:round/>
-                      <a:headEnd type="none" w="med" len="med"/>
-                      <a:tailEnd type="none" w="med" len="med"/>
-                    </a:lnL>
-                    <a:lnR w="12700" cap="flat" cmpd="sng" algn="ctr">
-                      <a:solidFill>
-                        <a:srgbClr val="2A3441"/>
-                      </a:solidFill>
-                      <a:prstDash val="solid"/>
-                      <a:round/>
-                      <a:headEnd type="none" w="med" len="med"/>
-                      <a:tailEnd type="none" w="med" len="med"/>
-                    </a:lnR>
-                    <a:lnT w="12700" cap="flat" cmpd="sng" algn="ctr">
-                      <a:solidFill>
-                        <a:srgbClr val="2A3441"/>
-                      </a:solidFill>
-                      <a:prstDash val="solid"/>
-                      <a:round/>
-                      <a:headEnd type="none" w="med" len="med"/>
-                      <a:tailEnd type="none" w="med" len="med"/>
-                    </a:lnT>
-                    <a:lnB w="12700" cap="flat" cmpd="sng" algn="ctr">
-                      <a:solidFill>
-                        <a:srgbClr val="2A3441"/>
-                      </a:solidFill>
-                      <a:prstDash val="solid"/>
-                      <a:round/>
-                      <a:headEnd type="none" w="med" len="med"/>
-                      <a:tailEnd type="none" w="med" len="med"/>
-                    </a:lnB>
-                    <a:solidFill>
-                      <a:srgbClr val="141B24"/>
-                    </a:solidFill>
-                  </a:tcPr>
-                </a:tc>
-                <a:tc>
-                  <a:txBody>
-                    <a:bodyPr/>
-                    <a:lstStyle/>
-                    <a:p>
-                      <a:pPr indent="0" marL="0">
-                        <a:buNone/>
-                      </a:pPr>
-                      <a:r>
-                        <a:rPr lang="en-US" sz="1300" dirty="0">
-                          <a:solidFill>
-                            <a:srgbClr val="E6EDF3"/>
-                          </a:solidFill>
-                          <a:latin typeface="Calibri" pitchFamily="34" charset="0"/>
-                          <a:ea typeface="Calibri" pitchFamily="34" charset="-122"/>
-                          <a:cs typeface="Calibri" pitchFamily="34" charset="-120"/>
-                        </a:rPr>
-                        <a:t>70%</a:t>
-                      </a:r>
-                      <a:endParaRPr lang="en-US" sz="1300" dirty="0">
-                        <a:latin typeface="Calibri" charset="0"/>
-                        <a:ea typeface="Calibri" charset="0"/>
-                        <a:cs typeface="Calibri" charset="0"/>
-                      </a:endParaRPr>
-                    </a:p>
-                  </a:txBody>
-                  <a:tcPr marL="91440" marR="91440" marT="45720" marB="45720">
-                    <a:lnL w="12700" cap="flat" cmpd="sng" algn="ctr">
-                      <a:solidFill>
-                        <a:srgbClr val="2A3441"/>
-                      </a:solidFill>
-                      <a:prstDash val="solid"/>
-                      <a:round/>
-                      <a:headEnd type="none" w="med" len="med"/>
-                      <a:tailEnd type="none" w="med" len="med"/>
-                    </a:lnL>
-                    <a:lnR w="12700" cap="flat" cmpd="sng" algn="ctr">
-                      <a:solidFill>
-                        <a:srgbClr val="2A3441"/>
-                      </a:solidFill>
-                      <a:prstDash val="solid"/>
-                      <a:round/>
-                      <a:headEnd type="none" w="med" len="med"/>
-                      <a:tailEnd type="none" w="med" len="med"/>
-                    </a:lnR>
-                    <a:lnT w="12700" cap="flat" cmpd="sng" algn="ctr">
-                      <a:solidFill>
-                        <a:srgbClr val="2A3441"/>
-                      </a:solidFill>
-                      <a:prstDash val="solid"/>
-                      <a:round/>
-                      <a:headEnd type="none" w="med" len="med"/>
-                      <a:tailEnd type="none" w="med" len="med"/>
-                    </a:lnT>
-                    <a:lnB w="12700" cap="flat" cmpd="sng" algn="ctr">
-                      <a:solidFill>
-                        <a:srgbClr val="2A3441"/>
-                      </a:solidFill>
-                      <a:prstDash val="solid"/>
-                      <a:round/>
-                      <a:headEnd type="none" w="med" len="med"/>
-                      <a:tailEnd type="none" w="med" len="med"/>
-                    </a:lnB>
-                    <a:solidFill>
-                      <a:srgbClr val="141B24"/>
-                    </a:solidFill>
-                  </a:tcPr>
-                </a:tc>
-                <a:tc>
-                  <a:txBody>
-                    <a:bodyPr/>
-                    <a:lstStyle/>
-                    <a:p>
-                      <a:pPr indent="0" marL="0">
-                        <a:buNone/>
-                      </a:pPr>
-                      <a:r>
-                        <a:rPr lang="en-US" sz="1300" dirty="0">
-                          <a:solidFill>
-                            <a:srgbClr val="E6EDF3"/>
-                          </a:solidFill>
-                          <a:latin typeface="Calibri" pitchFamily="34" charset="0"/>
-                          <a:ea typeface="Calibri" pitchFamily="34" charset="-122"/>
-                          <a:cs typeface="Calibri" pitchFamily="34" charset="-120"/>
-                        </a:rPr>
-                        <a:t>0.86</a:t>
-                      </a:r>
-                      <a:endParaRPr lang="en-US" sz="1300" dirty="0">
-                        <a:latin typeface="Calibri" charset="0"/>
-                        <a:ea typeface="Calibri" charset="0"/>
-                        <a:cs typeface="Calibri" charset="0"/>
-                      </a:endParaRPr>
-                    </a:p>
-                  </a:txBody>
-                  <a:tcPr marL="91440" marR="91440" marT="45720" marB="45720">
-                    <a:lnL w="12700" cap="flat" cmpd="sng" algn="ctr">
-                      <a:solidFill>
-                        <a:srgbClr val="2A3441"/>
-                      </a:solidFill>
-                      <a:prstDash val="solid"/>
-                      <a:round/>
-                      <a:headEnd type="none" w="med" len="med"/>
-                      <a:tailEnd type="none" w="med" len="med"/>
-                    </a:lnL>
-                    <a:lnR w="12700" cap="flat" cmpd="sng" algn="ctr">
-                      <a:solidFill>
-                        <a:srgbClr val="2A3441"/>
-                      </a:solidFill>
-                      <a:prstDash val="solid"/>
-                      <a:round/>
-                      <a:headEnd type="none" w="med" len="med"/>
-                      <a:tailEnd type="none" w="med" len="med"/>
-                    </a:lnR>
-                    <a:lnT w="12700" cap="flat" cmpd="sng" algn="ctr">
-                      <a:solidFill>
-                        <a:srgbClr val="2A3441"/>
-                      </a:solidFill>
-                      <a:prstDash val="solid"/>
-                      <a:round/>
-                      <a:headEnd type="none" w="med" len="med"/>
-                      <a:tailEnd type="none" w="med" len="med"/>
-                    </a:lnT>
-                    <a:lnB w="12700" cap="flat" cmpd="sng" algn="ctr">
-                      <a:solidFill>
-                        <a:srgbClr val="2A3441"/>
-                      </a:solidFill>
-                      <a:prstDash val="solid"/>
-                      <a:round/>
-                      <a:headEnd type="none" w="med" len="med"/>
-                      <a:tailEnd type="none" w="med" len="med"/>
-                    </a:lnB>
-                    <a:solidFill>
-                      <a:srgbClr val="141B24"/>
-                    </a:solidFill>
-                  </a:tcPr>
-                </a:tc>
-              </a:tr>
-              <a:tr h="384048">
-                <a:tc>
-                  <a:txBody>
-                    <a:bodyPr/>
-                    <a:lstStyle/>
-                    <a:p>
-                      <a:pPr indent="0" marL="0">
-                        <a:buNone/>
-                      </a:pPr>
-                      <a:r>
-                        <a:rPr lang="en-US" sz="1300" dirty="0">
-                          <a:solidFill>
-                            <a:srgbClr val="E6EDF3"/>
-                          </a:solidFill>
-                          <a:latin typeface="Calibri" pitchFamily="34" charset="0"/>
-                          <a:ea typeface="Calibri" pitchFamily="34" charset="-122"/>
-                          <a:cs typeface="Calibri" pitchFamily="34" charset="-120"/>
-                        </a:rPr>
-                        <a:t>--polite 1.2</a:t>
-                      </a:r>
-                      <a:endParaRPr lang="en-US" sz="1300" dirty="0">
-                        <a:latin typeface="Calibri" charset="0"/>
-                        <a:ea typeface="Calibri" charset="0"/>
-                        <a:cs typeface="Calibri" charset="0"/>
-                      </a:endParaRPr>
-                    </a:p>
-                  </a:txBody>
-                  <a:tcPr marL="91440" marR="91440" marT="45720" marB="45720">
-                    <a:lnL w="12700" cap="flat" cmpd="sng" algn="ctr">
-                      <a:solidFill>
-                        <a:srgbClr val="2A3441"/>
-                      </a:solidFill>
-                      <a:prstDash val="solid"/>
-                      <a:round/>
-                      <a:headEnd type="none" w="med" len="med"/>
-                      <a:tailEnd type="none" w="med" len="med"/>
-                    </a:lnL>
-                    <a:lnR w="12700" cap="flat" cmpd="sng" algn="ctr">
-                      <a:solidFill>
-                        <a:srgbClr val="2A3441"/>
-                      </a:solidFill>
-                      <a:prstDash val="solid"/>
-                      <a:round/>
-                      <a:headEnd type="none" w="med" len="med"/>
-                      <a:tailEnd type="none" w="med" len="med"/>
-                    </a:lnR>
-                    <a:lnT w="12700" cap="flat" cmpd="sng" algn="ctr">
-                      <a:solidFill>
-                        <a:srgbClr val="2A3441"/>
-                      </a:solidFill>
-                      <a:prstDash val="solid"/>
-                      <a:round/>
-                      <a:headEnd type="none" w="med" len="med"/>
-                      <a:tailEnd type="none" w="med" len="med"/>
-                    </a:lnT>
-                    <a:lnB w="12700" cap="flat" cmpd="sng" algn="ctr">
-                      <a:solidFill>
-                        <a:srgbClr val="2A3441"/>
-                      </a:solidFill>
-                      <a:prstDash val="solid"/>
-                      <a:round/>
-                      <a:headEnd type="none" w="med" len="med"/>
-                      <a:tailEnd type="none" w="med" len="med"/>
-                    </a:lnB>
-                    <a:solidFill>
-                      <a:srgbClr val="141B24"/>
-                    </a:solidFill>
-                  </a:tcPr>
-                </a:tc>
-                <a:tc>
-                  <a:txBody>
-                    <a:bodyPr/>
-                    <a:lstStyle/>
-                    <a:p>
-                      <a:pPr indent="0" marL="0">
-                        <a:buNone/>
-                      </a:pPr>
-                      <a:r>
-                        <a:rPr lang="en-US" sz="1300" dirty="0">
-                          <a:solidFill>
-                            <a:srgbClr val="E6EDF3"/>
-                          </a:solidFill>
-                          <a:latin typeface="Calibri" pitchFamily="34" charset="0"/>
-                          <a:ea typeface="Calibri" pitchFamily="34" charset="-122"/>
-                          <a:cs typeface="Calibri" pitchFamily="34" charset="-120"/>
-                        </a:rPr>
-                        <a:t>49%</a:t>
-                      </a:r>
-                      <a:endParaRPr lang="en-US" sz="1300" dirty="0">
-                        <a:latin typeface="Calibri" charset="0"/>
-                        <a:ea typeface="Calibri" charset="0"/>
-                        <a:cs typeface="Calibri" charset="0"/>
-                      </a:endParaRPr>
-                    </a:p>
-                  </a:txBody>
-                  <a:tcPr marL="91440" marR="91440" marT="45720" marB="45720">
-                    <a:lnL w="12700" cap="flat" cmpd="sng" algn="ctr">
-                      <a:solidFill>
-                        <a:srgbClr val="2A3441"/>
-                      </a:solidFill>
-                      <a:prstDash val="solid"/>
-                      <a:round/>
-                      <a:headEnd type="none" w="med" len="med"/>
-                      <a:tailEnd type="none" w="med" len="med"/>
-                    </a:lnL>
-                    <a:lnR w="12700" cap="flat" cmpd="sng" algn="ctr">
-                      <a:solidFill>
-                        <a:srgbClr val="2A3441"/>
-                      </a:solidFill>
-                      <a:prstDash val="solid"/>
-                      <a:round/>
-                      <a:headEnd type="none" w="med" len="med"/>
-                      <a:tailEnd type="none" w="med" len="med"/>
-                    </a:lnR>
-                    <a:lnT w="12700" cap="flat" cmpd="sng" algn="ctr">
-                      <a:solidFill>
-                        <a:srgbClr val="2A3441"/>
-                      </a:solidFill>
-                      <a:prstDash val="solid"/>
-                      <a:round/>
-                      <a:headEnd type="none" w="med" len="med"/>
-                      <a:tailEnd type="none" w="med" len="med"/>
-                    </a:lnT>
-                    <a:lnB w="12700" cap="flat" cmpd="sng" algn="ctr">
-                      <a:solidFill>
-                        <a:srgbClr val="2A3441"/>
-                      </a:solidFill>
-                      <a:prstDash val="solid"/>
-                      <a:round/>
-                      <a:headEnd type="none" w="med" len="med"/>
-                      <a:tailEnd type="none" w="med" len="med"/>
-                    </a:lnB>
-                    <a:solidFill>
-                      <a:srgbClr val="141B24"/>
-                    </a:solidFill>
-                  </a:tcPr>
-                </a:tc>
-                <a:tc>
-                  <a:txBody>
-                    <a:bodyPr/>
-                    <a:lstStyle/>
-                    <a:p>
-                      <a:pPr indent="0" marL="0">
-                        <a:buNone/>
-                      </a:pPr>
-                      <a:r>
-                        <a:rPr lang="en-US" sz="1300" dirty="0">
-                          <a:solidFill>
-                            <a:srgbClr val="E6EDF3"/>
-                          </a:solidFill>
-                          <a:latin typeface="Calibri" pitchFamily="34" charset="0"/>
-                          <a:ea typeface="Calibri" pitchFamily="34" charset="-122"/>
-                          <a:cs typeface="Calibri" pitchFamily="34" charset="-120"/>
-                        </a:rPr>
-                        <a:t>0.95</a:t>
-                      </a:r>
-                      <a:endParaRPr lang="en-US" sz="1300" dirty="0">
-                        <a:latin typeface="Calibri" charset="0"/>
-                        <a:ea typeface="Calibri" charset="0"/>
-                        <a:cs typeface="Calibri" charset="0"/>
-                      </a:endParaRPr>
-                    </a:p>
-                  </a:txBody>
-                  <a:tcPr marL="91440" marR="91440" marT="45720" marB="45720">
-                    <a:lnL w="12700" cap="flat" cmpd="sng" algn="ctr">
-                      <a:solidFill>
-                        <a:srgbClr val="2A3441"/>
-                      </a:solidFill>
-                      <a:prstDash val="solid"/>
-                      <a:round/>
-                      <a:headEnd type="none" w="med" len="med"/>
-                      <a:tailEnd type="none" w="med" len="med"/>
-                    </a:lnL>
-                    <a:lnR w="12700" cap="flat" cmpd="sng" algn="ctr">
-                      <a:solidFill>
-                        <a:srgbClr val="2A3441"/>
-                      </a:solidFill>
-                      <a:prstDash val="solid"/>
-                      <a:round/>
-                      <a:headEnd type="none" w="med" len="med"/>
-                      <a:tailEnd type="none" w="med" len="med"/>
-                    </a:lnR>
-                    <a:lnT w="12700" cap="flat" cmpd="sng" algn="ctr">
-                      <a:solidFill>
-                        <a:srgbClr val="2A3441"/>
-                      </a:solidFill>
-                      <a:prstDash val="solid"/>
-                      <a:round/>
-                      <a:headEnd type="none" w="med" len="med"/>
-                      <a:tailEnd type="none" w="med" len="med"/>
-                    </a:lnT>
-                    <a:lnB w="12700" cap="flat" cmpd="sng" algn="ctr">
-                      <a:solidFill>
-                        <a:srgbClr val="2A3441"/>
-                      </a:solidFill>
-                      <a:prstDash val="solid"/>
-                      <a:round/>
-                      <a:headEnd type="none" w="med" len="med"/>
-                      <a:tailEnd type="none" w="med" len="med"/>
-                    </a:lnB>
-                    <a:solidFill>
-                      <a:srgbClr val="141B24"/>
-                    </a:solidFill>
-                  </a:tcPr>
-                </a:tc>
-              </a:tr>
-              <a:tr h="384048">
-                <a:tc>
-                  <a:txBody>
-                    <a:bodyPr/>
-                    <a:lstStyle/>
-                    <a:p>
-                      <a:pPr indent="0" marL="0">
-                        <a:buNone/>
-                      </a:pPr>
-                      <a:r>
-                        <a:rPr lang="en-US" sz="1300" dirty="0">
-                          <a:solidFill>
-                            <a:srgbClr val="E6EDF3"/>
-                          </a:solidFill>
-                          <a:latin typeface="Calibri" pitchFamily="34" charset="0"/>
-                          <a:ea typeface="Calibri" pitchFamily="34" charset="-122"/>
-                          <a:cs typeface="Calibri" pitchFamily="34" charset="-120"/>
-                        </a:rPr>
-                        <a:t>--polite 1.3</a:t>
-                      </a:r>
-                      <a:endParaRPr lang="en-US" sz="1300" dirty="0">
-                        <a:latin typeface="Calibri" charset="0"/>
-                        <a:ea typeface="Calibri" charset="0"/>
-                        <a:cs typeface="Calibri" charset="0"/>
-                      </a:endParaRPr>
-                    </a:p>
-                  </a:txBody>
-                  <a:tcPr marL="91440" marR="91440" marT="45720" marB="45720">
-                    <a:lnL w="12700" cap="flat" cmpd="sng" algn="ctr">
-                      <a:solidFill>
-                        <a:srgbClr val="2A3441"/>
-                      </a:solidFill>
-                      <a:prstDash val="solid"/>
-                      <a:round/>
-                      <a:headEnd type="none" w="med" len="med"/>
-                      <a:tailEnd type="none" w="med" len="med"/>
-                    </a:lnL>
-                    <a:lnR w="12700" cap="flat" cmpd="sng" algn="ctr">
-                      <a:solidFill>
-                        <a:srgbClr val="2A3441"/>
-                      </a:solidFill>
-                      <a:prstDash val="solid"/>
-                      <a:round/>
-                      <a:headEnd type="none" w="med" len="med"/>
-                      <a:tailEnd type="none" w="med" len="med"/>
-                    </a:lnR>
-                    <a:lnT w="12700" cap="flat" cmpd="sng" algn="ctr">
-                      <a:solidFill>
-                        <a:srgbClr val="2A3441"/>
-                      </a:solidFill>
-                      <a:prstDash val="solid"/>
-                      <a:round/>
-                      <a:headEnd type="none" w="med" len="med"/>
-                      <a:tailEnd type="none" w="med" len="med"/>
-                    </a:lnT>
-                    <a:lnB w="12700" cap="flat" cmpd="sng" algn="ctr">
-                      <a:solidFill>
-                        <a:srgbClr val="2A3441"/>
-                      </a:solidFill>
-                      <a:prstDash val="solid"/>
-                      <a:round/>
-                      <a:headEnd type="none" w="med" len="med"/>
-                      <a:tailEnd type="none" w="med" len="med"/>
-                    </a:lnB>
-                    <a:solidFill>
-                      <a:srgbClr val="141B24"/>
-                    </a:solidFill>
-                  </a:tcPr>
-                </a:tc>
-                <a:tc>
-                  <a:txBody>
-                    <a:bodyPr/>
-                    <a:lstStyle/>
-                    <a:p>
-                      <a:pPr indent="0" marL="0">
-                        <a:buNone/>
-                      </a:pPr>
-                      <a:r>
-                        <a:rPr lang="en-US" sz="1300" dirty="0">
-                          <a:solidFill>
-                            <a:srgbClr val="E6EDF3"/>
-                          </a:solidFill>
-                          <a:latin typeface="Calibri" pitchFamily="34" charset="0"/>
-                          <a:ea typeface="Calibri" pitchFamily="34" charset="-122"/>
-                          <a:cs typeface="Calibri" pitchFamily="34" charset="-120"/>
-                        </a:rPr>
-                        <a:t>52%</a:t>
-                      </a:r>
-                      <a:endParaRPr lang="en-US" sz="1300" dirty="0">
-                        <a:latin typeface="Calibri" charset="0"/>
-                        <a:ea typeface="Calibri" charset="0"/>
-                        <a:cs typeface="Calibri" charset="0"/>
-                      </a:endParaRPr>
-                    </a:p>
-                  </a:txBody>
-                  <a:tcPr marL="91440" marR="91440" marT="45720" marB="45720">
-                    <a:lnL w="12700" cap="flat" cmpd="sng" algn="ctr">
-                      <a:solidFill>
-                        <a:srgbClr val="2A3441"/>
-                      </a:solidFill>
-                      <a:prstDash val="solid"/>
-                      <a:round/>
-                      <a:headEnd type="none" w="med" len="med"/>
-                      <a:tailEnd type="none" w="med" len="med"/>
-                    </a:lnL>
-                    <a:lnR w="12700" cap="flat" cmpd="sng" algn="ctr">
-                      <a:solidFill>
-                        <a:srgbClr val="2A3441"/>
-                      </a:solidFill>
-                      <a:prstDash val="solid"/>
-                      <a:round/>
-                      <a:headEnd type="none" w="med" len="med"/>
-                      <a:tailEnd type="none" w="med" len="med"/>
-                    </a:lnR>
-                    <a:lnT w="12700" cap="flat" cmpd="sng" algn="ctr">
-                      <a:solidFill>
-                        <a:srgbClr val="2A3441"/>
-                      </a:solidFill>
-                      <a:prstDash val="solid"/>
-                      <a:round/>
-                      <a:headEnd type="none" w="med" len="med"/>
-                      <a:tailEnd type="none" w="med" len="med"/>
-                    </a:lnT>
-                    <a:lnB w="12700" cap="flat" cmpd="sng" algn="ctr">
-                      <a:solidFill>
-                        <a:srgbClr val="2A3441"/>
-                      </a:solidFill>
-                      <a:prstDash val="solid"/>
-                      <a:round/>
-                      <a:headEnd type="none" w="med" len="med"/>
-                      <a:tailEnd type="none" w="med" len="med"/>
-                    </a:lnB>
-                    <a:solidFill>
-                      <a:srgbClr val="141B24"/>
-                    </a:solidFill>
-                  </a:tcPr>
-                </a:tc>
-                <a:tc>
-                  <a:txBody>
-                    <a:bodyPr/>
-                    <a:lstStyle/>
-                    <a:p>
-                      <a:pPr indent="0" marL="0">
-                        <a:buNone/>
-                      </a:pPr>
-                      <a:r>
-                        <a:rPr lang="en-US" sz="1300" dirty="0">
-                          <a:solidFill>
-                            <a:srgbClr val="E6EDF3"/>
-                          </a:solidFill>
-                          <a:latin typeface="Calibri" pitchFamily="34" charset="0"/>
-                          <a:ea typeface="Calibri" pitchFamily="34" charset="-122"/>
-                          <a:cs typeface="Calibri" pitchFamily="34" charset="-120"/>
-                        </a:rPr>
-                        <a:t>0.94</a:t>
-                      </a:r>
-                      <a:endParaRPr lang="en-US" sz="1300" dirty="0">
-                        <a:latin typeface="Calibri" charset="0"/>
-                        <a:ea typeface="Calibri" charset="0"/>
-                        <a:cs typeface="Calibri" charset="0"/>
-                      </a:endParaRPr>
-                    </a:p>
-                  </a:txBody>
-                  <a:tcPr marL="91440" marR="91440" marT="45720" marB="45720">
-                    <a:lnL w="12700" cap="flat" cmpd="sng" algn="ctr">
-                      <a:solidFill>
-                        <a:srgbClr val="2A3441"/>
-                      </a:solidFill>
-                      <a:prstDash val="solid"/>
-                      <a:round/>
-                      <a:headEnd type="none" w="med" len="med"/>
-                      <a:tailEnd type="none" w="med" len="med"/>
-                    </a:lnL>
-                    <a:lnR w="12700" cap="flat" cmpd="sng" algn="ctr">
-                      <a:solidFill>
-                        <a:srgbClr val="2A3441"/>
-                      </a:solidFill>
-                      <a:prstDash val="solid"/>
-                      <a:round/>
-                      <a:headEnd type="none" w="med" len="med"/>
-                      <a:tailEnd type="none" w="med" len="med"/>
-                    </a:lnR>
-                    <a:lnT w="12700" cap="flat" cmpd="sng" algn="ctr">
-                      <a:solidFill>
-                        <a:srgbClr val="2A3441"/>
-                      </a:solidFill>
-                      <a:prstDash val="solid"/>
-                      <a:round/>
-                      <a:headEnd type="none" w="med" len="med"/>
-                      <a:tailEnd type="none" w="med" len="med"/>
-                    </a:lnT>
-                    <a:lnB w="12700" cap="flat" cmpd="sng" algn="ctr">
-                      <a:solidFill>
-                        <a:srgbClr val="2A3441"/>
-                      </a:solidFill>
-                      <a:prstDash val="solid"/>
-                      <a:round/>
-                      <a:headEnd type="none" w="med" len="med"/>
-                      <a:tailEnd type="none" w="med" len="med"/>
-                    </a:lnB>
-                    <a:solidFill>
-                      <a:srgbClr val="141B24"/>
-                    </a:solidFill>
-                  </a:tcPr>
-                </a:tc>
-              </a:tr>
-              <a:tr h="384048">
-                <a:tc>
-                  <a:txBody>
-                    <a:bodyPr/>
-                    <a:lstStyle/>
-                    <a:p>
-                      <a:pPr indent="0" marL="0">
-                        <a:buNone/>
-                      </a:pPr>
-                      <a:r>
-                        <a:rPr lang="en-US" sz="1300" dirty="0">
-                          <a:solidFill>
-                            <a:srgbClr val="E6EDF3"/>
-                          </a:solidFill>
-                          <a:latin typeface="Calibri" pitchFamily="34" charset="0"/>
-                          <a:ea typeface="Calibri" pitchFamily="34" charset="-122"/>
-                          <a:cs typeface="Calibri" pitchFamily="34" charset="-120"/>
-                        </a:rPr>
-                        <a:t>--polite 1.5</a:t>
-                      </a:r>
-                      <a:endParaRPr lang="en-US" sz="1300" dirty="0">
-                        <a:latin typeface="Calibri" charset="0"/>
-                        <a:ea typeface="Calibri" charset="0"/>
-                        <a:cs typeface="Calibri" charset="0"/>
-                      </a:endParaRPr>
-                    </a:p>
-                  </a:txBody>
-                  <a:tcPr marL="91440" marR="91440" marT="45720" marB="45720">
-                    <a:lnL w="12700" cap="flat" cmpd="sng" algn="ctr">
-                      <a:solidFill>
-                        <a:srgbClr val="2A3441"/>
-                      </a:solidFill>
-                      <a:prstDash val="solid"/>
-                      <a:round/>
-                      <a:headEnd type="none" w="med" len="med"/>
-                      <a:tailEnd type="none" w="med" len="med"/>
-                    </a:lnL>
-                    <a:lnR w="12700" cap="flat" cmpd="sng" algn="ctr">
-                      <a:solidFill>
-                        <a:srgbClr val="2A3441"/>
-                      </a:solidFill>
-                      <a:prstDash val="solid"/>
-                      <a:round/>
-                      <a:headEnd type="none" w="med" len="med"/>
-                      <a:tailEnd type="none" w="med" len="med"/>
-                    </a:lnR>
-                    <a:lnT w="12700" cap="flat" cmpd="sng" algn="ctr">
-                      <a:solidFill>
-                        <a:srgbClr val="2A3441"/>
-                      </a:solidFill>
-                      <a:prstDash val="solid"/>
-                      <a:round/>
-                      <a:headEnd type="none" w="med" len="med"/>
-                      <a:tailEnd type="none" w="med" len="med"/>
-                    </a:lnT>
-                    <a:lnB w="12700" cap="flat" cmpd="sng" algn="ctr">
-                      <a:solidFill>
-                        <a:srgbClr val="2A3441"/>
-                      </a:solidFill>
-                      <a:prstDash val="solid"/>
-                      <a:round/>
-                      <a:headEnd type="none" w="med" len="med"/>
-                      <a:tailEnd type="none" w="med" len="med"/>
-                    </a:lnB>
-                    <a:solidFill>
-                      <a:srgbClr val="141B24"/>
-                    </a:solidFill>
-                  </a:tcPr>
-                </a:tc>
-                <a:tc>
-                  <a:txBody>
-                    <a:bodyPr/>
-                    <a:lstStyle/>
-                    <a:p>
-                      <a:pPr indent="0" marL="0">
-                        <a:buNone/>
-                      </a:pPr>
-                      <a:r>
-                        <a:rPr lang="en-US" sz="1300" dirty="0">
-                          <a:solidFill>
-                            <a:srgbClr val="E6EDF3"/>
-                          </a:solidFill>
-                          <a:latin typeface="Calibri" pitchFamily="34" charset="0"/>
-                          <a:ea typeface="Calibri" pitchFamily="34" charset="-122"/>
-                          <a:cs typeface="Calibri" pitchFamily="34" charset="-120"/>
-                        </a:rPr>
-                        <a:t>59%</a:t>
-                      </a:r>
-                      <a:endParaRPr lang="en-US" sz="1300" dirty="0">
-                        <a:latin typeface="Calibri" charset="0"/>
-                        <a:ea typeface="Calibri" charset="0"/>
-                        <a:cs typeface="Calibri" charset="0"/>
-                      </a:endParaRPr>
-                    </a:p>
-                  </a:txBody>
-                  <a:tcPr marL="91440" marR="91440" marT="45720" marB="45720">
-                    <a:lnL w="12700" cap="flat" cmpd="sng" algn="ctr">
-                      <a:solidFill>
-                        <a:srgbClr val="2A3441"/>
-                      </a:solidFill>
-                      <a:prstDash val="solid"/>
-                      <a:round/>
-                      <a:headEnd type="none" w="med" len="med"/>
-                      <a:tailEnd type="none" w="med" len="med"/>
-                    </a:lnL>
-                    <a:lnR w="12700" cap="flat" cmpd="sng" algn="ctr">
-                      <a:solidFill>
-                        <a:srgbClr val="2A3441"/>
-                      </a:solidFill>
-                      <a:prstDash val="solid"/>
-                      <a:round/>
-                      <a:headEnd type="none" w="med" len="med"/>
-                      <a:tailEnd type="none" w="med" len="med"/>
-                    </a:lnR>
-                    <a:lnT w="12700" cap="flat" cmpd="sng" algn="ctr">
-                      <a:solidFill>
-                        <a:srgbClr val="2A3441"/>
-                      </a:solidFill>
-                      <a:prstDash val="solid"/>
-                      <a:round/>
-                      <a:headEnd type="none" w="med" len="med"/>
-                      <a:tailEnd type="none" w="med" len="med"/>
-                    </a:lnT>
-                    <a:lnB w="12700" cap="flat" cmpd="sng" algn="ctr">
-                      <a:solidFill>
-                        <a:srgbClr val="2A3441"/>
-                      </a:solidFill>
-                      <a:prstDash val="solid"/>
-                      <a:round/>
-                      <a:headEnd type="none" w="med" len="med"/>
-                      <a:tailEnd type="none" w="med" len="med"/>
-                    </a:lnB>
-                    <a:solidFill>
-                      <a:srgbClr val="141B24"/>
-                    </a:solidFill>
-                  </a:tcPr>
-                </a:tc>
-                <a:tc>
-                  <a:txBody>
-                    <a:bodyPr/>
-                    <a:lstStyle/>
-                    <a:p>
-                      <a:pPr indent="0" marL="0">
-                        <a:buNone/>
-                      </a:pPr>
-                      <a:r>
-                        <a:rPr lang="en-US" sz="1300" dirty="0">
-                          <a:solidFill>
-                            <a:srgbClr val="E6EDF3"/>
-                          </a:solidFill>
-                          <a:latin typeface="Calibri" pitchFamily="34" charset="0"/>
-                          <a:ea typeface="Calibri" pitchFamily="34" charset="-122"/>
-                          <a:cs typeface="Calibri" pitchFamily="34" charset="-120"/>
-                        </a:rPr>
-                        <a:t>0.90</a:t>
-                      </a:r>
-                      <a:endParaRPr lang="en-US" sz="1300" dirty="0">
-                        <a:latin typeface="Calibri" charset="0"/>
-                        <a:ea typeface="Calibri" charset="0"/>
-                        <a:cs typeface="Calibri" charset="0"/>
-                      </a:endParaRPr>
-                    </a:p>
-                  </a:txBody>
-                  <a:tcPr marL="91440" marR="91440" marT="45720" marB="45720">
-                    <a:lnL w="12700" cap="flat" cmpd="sng" algn="ctr">
-                      <a:solidFill>
-                        <a:srgbClr val="2A3441"/>
-                      </a:solidFill>
-                      <a:prstDash val="solid"/>
-                      <a:round/>
-                      <a:headEnd type="none" w="med" len="med"/>
-                      <a:tailEnd type="none" w="med" len="med"/>
-                    </a:lnL>
-                    <a:lnR w="12700" cap="flat" cmpd="sng" algn="ctr">
-                      <a:solidFill>
-                        <a:srgbClr val="2A3441"/>
-                      </a:solidFill>
-                      <a:prstDash val="solid"/>
-                      <a:round/>
-                      <a:headEnd type="none" w="med" len="med"/>
-                      <a:tailEnd type="none" w="med" len="med"/>
-                    </a:lnR>
-                    <a:lnT w="12700" cap="flat" cmpd="sng" algn="ctr">
-                      <a:solidFill>
-                        <a:srgbClr val="2A3441"/>
-                      </a:solidFill>
-                      <a:prstDash val="solid"/>
-                      <a:round/>
-                      <a:headEnd type="none" w="med" len="med"/>
-                      <a:tailEnd type="none" w="med" len="med"/>
-                    </a:lnT>
-                    <a:lnB w="12700" cap="flat" cmpd="sng" algn="ctr">
-                      <a:solidFill>
-                        <a:srgbClr val="2A3441"/>
-                      </a:solidFill>
-                      <a:prstDash val="solid"/>
-                      <a:round/>
-                      <a:headEnd type="none" w="med" len="med"/>
-                      <a:tailEnd type="none" w="med" len="med"/>
-                    </a:lnB>
-                    <a:solidFill>
-                      <a:srgbClr val="141B24"/>
-                    </a:solidFill>
-                  </a:tcPr>
-                </a:tc>
-              </a:tr>
-            </a:tbl>
-          </a:graphicData>
-        </a:graphic>
-      </p:graphicFrame>
-      <p:graphicFrame>
-        <p:nvGraphicFramePr>
-          <p:cNvPr id="79" name="Table 1"/>
-          <p:cNvGraphicFramePr>
-            <a:graphicFrameLocks noGrp="1"/>
-          </p:cNvGraphicFramePr>
-          <p:nvPr>
-            <p:extLst>
-              <p:ext uri="{D42A27DB-BD31-4B8C-83A1-F6EECF244321}">
-                <p14:modId xmlns:p14="http://schemas.microsoft.com/office/powerpoint/2010/main" val="1579011935"/>
-              </p:ext>
-            </p:extLst>
-          </p:nvPr>
-        </p:nvGraphicFramePr>
-        <p:xfrm>
-          <a:off x="6309360" y="1188720"/>
-          <a:ext cx="5394960" cy="914400"/>
-        </p:xfrm>
-        <a:graphic>
-          <a:graphicData uri="http://schemas.openxmlformats.org/drawingml/2006/table">
-            <a:tbl>
-              <a:tblPr/>
-              <a:tblGrid>
-                <a:gridCol w="2651760"/>
-                <a:gridCol w="1371600"/>
-                <a:gridCol w="1371600"/>
-              </a:tblGrid>
-              <a:tr h="384048">
-                <a:tc>
-                  <a:txBody>
-                    <a:bodyPr/>
-                    <a:lstStyle/>
-                    <a:p>
-                      <a:pPr indent="0" marL="0">
-                        <a:buNone/>
-                      </a:pPr>
-                      <a:r>
-                        <a:rPr lang="en-US" sz="1300" b="1" dirty="0">
-                          <a:solidFill>
-                            <a:srgbClr val="0B0F14"/>
-                          </a:solidFill>
-                          <a:latin typeface="Courier New" pitchFamily="34" charset="0"/>
-                          <a:ea typeface="Courier New" pitchFamily="34" charset="-122"/>
-                          <a:cs typeface="Courier New" pitchFamily="34" charset="-120"/>
-                        </a:rPr>
-                        <a:t>Bursty cross traffic</a:t>
-                      </a:r>
-                      <a:endParaRPr lang="en-US" sz="1300" dirty="0">
-                        <a:latin typeface="Courier New" charset="0"/>
-                        <a:ea typeface="Courier New" charset="0"/>
-                        <a:cs typeface="Courier New" charset="0"/>
-                      </a:endParaRPr>
-                    </a:p>
-                  </a:txBody>
-                  <a:tcPr marL="91440" marR="91440" marT="45720" marB="45720">
-                    <a:lnL w="12700" cap="flat" cmpd="sng" algn="ctr">
-                      <a:solidFill>
-                        <a:srgbClr val="2A3441"/>
-                      </a:solidFill>
-                      <a:prstDash val="solid"/>
-                      <a:round/>
-                      <a:headEnd type="none" w="med" len="med"/>
-                      <a:tailEnd type="none" w="med" len="med"/>
-                    </a:lnL>
-                    <a:lnR w="12700" cap="flat" cmpd="sng" algn="ctr">
-                      <a:solidFill>
-                        <a:srgbClr val="2A3441"/>
-                      </a:solidFill>
-                      <a:prstDash val="solid"/>
-                      <a:round/>
-                      <a:headEnd type="none" w="med" len="med"/>
-                      <a:tailEnd type="none" w="med" len="med"/>
-                    </a:lnR>
-                    <a:lnT w="12700" cap="flat" cmpd="sng" algn="ctr">
-                      <a:solidFill>
-                        <a:srgbClr val="2A3441"/>
-                      </a:solidFill>
-                      <a:prstDash val="solid"/>
-                      <a:round/>
-                      <a:headEnd type="none" w="med" len="med"/>
-                      <a:tailEnd type="none" w="med" len="med"/>
-                    </a:lnT>
-                    <a:lnB w="12700" cap="flat" cmpd="sng" algn="ctr">
-                      <a:solidFill>
-                        <a:srgbClr val="2A3441"/>
-                      </a:solidFill>
-                      <a:prstDash val="solid"/>
-                      <a:round/>
-                      <a:headEnd type="none" w="med" len="med"/>
-                      <a:tailEnd type="none" w="med" len="med"/>
-                    </a:lnB>
-                    <a:solidFill>
-                      <a:srgbClr val="39FF88"/>
-                    </a:solidFill>
-                  </a:tcPr>
-                </a:tc>
-                <a:tc>
-                  <a:txBody>
-                    <a:bodyPr/>
-                    <a:lstStyle/>
-                    <a:p>
-                      <a:pPr indent="0" marL="0">
-                        <a:buNone/>
-                      </a:pPr>
-                      <a:r>
-                        <a:rPr lang="en-US" sz="1300" b="1" dirty="0">
-                          <a:solidFill>
-                            <a:srgbClr val="0B0F14"/>
-                          </a:solidFill>
-                          <a:latin typeface="Courier New" pitchFamily="34" charset="0"/>
-                          <a:ea typeface="Courier New" pitchFamily="34" charset="-122"/>
-                          <a:cs typeface="Courier New" pitchFamily="34" charset="-120"/>
-                        </a:rPr>
-                        <a:t>Time</a:t>
-                      </a:r>
-                      <a:endParaRPr lang="en-US" sz="1300" dirty="0">
-                        <a:latin typeface="Courier New" charset="0"/>
-                        <a:ea typeface="Courier New" charset="0"/>
-                        <a:cs typeface="Courier New" charset="0"/>
-                      </a:endParaRPr>
-                    </a:p>
-                  </a:txBody>
-                  <a:tcPr marL="91440" marR="91440" marT="45720" marB="45720">
-                    <a:lnL w="12700" cap="flat" cmpd="sng" algn="ctr">
-                      <a:solidFill>
-                        <a:srgbClr val="2A3441"/>
-                      </a:solidFill>
-                      <a:prstDash val="solid"/>
-                      <a:round/>
-                      <a:headEnd type="none" w="med" len="med"/>
-                      <a:tailEnd type="none" w="med" len="med"/>
-                    </a:lnL>
-                    <a:lnR w="12700" cap="flat" cmpd="sng" algn="ctr">
-                      <a:solidFill>
-                        <a:srgbClr val="2A3441"/>
-                      </a:solidFill>
-                      <a:prstDash val="solid"/>
-                      <a:round/>
-                      <a:headEnd type="none" w="med" len="med"/>
-                      <a:tailEnd type="none" w="med" len="med"/>
-                    </a:lnR>
-                    <a:lnT w="12700" cap="flat" cmpd="sng" algn="ctr">
-                      <a:solidFill>
-                        <a:srgbClr val="2A3441"/>
-                      </a:solidFill>
-                      <a:prstDash val="solid"/>
-                      <a:round/>
-                      <a:headEnd type="none" w="med" len="med"/>
-                      <a:tailEnd type="none" w="med" len="med"/>
-                    </a:lnT>
-                    <a:lnB w="12700" cap="flat" cmpd="sng" algn="ctr">
-                      <a:solidFill>
-                        <a:srgbClr val="2A3441"/>
-                      </a:solidFill>
-                      <a:prstDash val="solid"/>
-                      <a:round/>
-                      <a:headEnd type="none" w="med" len="med"/>
-                      <a:tailEnd type="none" w="med" len="med"/>
-                    </a:lnB>
-                    <a:solidFill>
-                      <a:srgbClr val="39FF88"/>
-                    </a:solidFill>
-                  </a:tcPr>
-                </a:tc>
-                <a:tc>
-                  <a:txBody>
-                    <a:bodyPr/>
-                    <a:lstStyle/>
-                    <a:p>
-                      <a:pPr indent="0" marL="0">
-                        <a:buNone/>
-                      </a:pPr>
-                      <a:r>
-                        <a:rPr lang="en-US" sz="1300" b="1" dirty="0">
-                          <a:solidFill>
-                            <a:srgbClr val="0B0F14"/>
-                          </a:solidFill>
-                          <a:latin typeface="Courier New" pitchFamily="34" charset="0"/>
-                          <a:ea typeface="Courier New" pitchFamily="34" charset="-122"/>
-                          <a:cs typeface="Courier New" pitchFamily="34" charset="-120"/>
-                        </a:rPr>
-                        <a:t>vs AIMD</a:t>
-                      </a:r>
-                      <a:endParaRPr lang="en-US" sz="1300" dirty="0">
-                        <a:latin typeface="Courier New" charset="0"/>
-                        <a:ea typeface="Courier New" charset="0"/>
-                        <a:cs typeface="Courier New" charset="0"/>
-                      </a:endParaRPr>
-                    </a:p>
-                  </a:txBody>
-                  <a:tcPr marL="91440" marR="91440" marT="45720" marB="45720">
-                    <a:lnL w="12700" cap="flat" cmpd="sng" algn="ctr">
-                      <a:solidFill>
-                        <a:srgbClr val="2A3441"/>
-                      </a:solidFill>
-                      <a:prstDash val="solid"/>
-                      <a:round/>
-                      <a:headEnd type="none" w="med" len="med"/>
-                      <a:tailEnd type="none" w="med" len="med"/>
-                    </a:lnL>
-                    <a:lnR w="12700" cap="flat" cmpd="sng" algn="ctr">
-                      <a:solidFill>
-                        <a:srgbClr val="2A3441"/>
-                      </a:solidFill>
-                      <a:prstDash val="solid"/>
-                      <a:round/>
-                      <a:headEnd type="none" w="med" len="med"/>
-                      <a:tailEnd type="none" w="med" len="med"/>
-                    </a:lnR>
-                    <a:lnT w="12700" cap="flat" cmpd="sng" algn="ctr">
-                      <a:solidFill>
-                        <a:srgbClr val="2A3441"/>
-                      </a:solidFill>
-                      <a:prstDash val="solid"/>
-                      <a:round/>
-                      <a:headEnd type="none" w="med" len="med"/>
-                      <a:tailEnd type="none" w="med" len="med"/>
-                    </a:lnT>
-                    <a:lnB w="12700" cap="flat" cmpd="sng" algn="ctr">
-                      <a:solidFill>
-                        <a:srgbClr val="2A3441"/>
-                      </a:solidFill>
-                      <a:prstDash val="solid"/>
-                      <a:round/>
-                      <a:headEnd type="none" w="med" len="med"/>
-                      <a:tailEnd type="none" w="med" len="med"/>
-                    </a:lnB>
-                    <a:solidFill>
-                      <a:srgbClr val="39FF88"/>
-                    </a:solidFill>
-                  </a:tcPr>
-                </a:tc>
-              </a:tr>
-              <a:tr h="384048">
-                <a:tc>
-                  <a:txBody>
-                    <a:bodyPr/>
-                    <a:lstStyle/>
-                    <a:p>
-                      <a:pPr indent="0" marL="0">
-                        <a:buNone/>
-                      </a:pPr>
-                      <a:r>
-                        <a:rPr lang="en-US" sz="1300" dirty="0">
-                          <a:solidFill>
-                            <a:srgbClr val="E6EDF3"/>
-                          </a:solidFill>
-                          <a:latin typeface="Calibri" pitchFamily="34" charset="0"/>
-                          <a:ea typeface="Calibri" pitchFamily="34" charset="-122"/>
-                          <a:cs typeface="Calibri" pitchFamily="34" charset="-120"/>
-                        </a:rPr>
-                        <a:t>AIMD tuned</a:t>
-                      </a:r>
-                      <a:endParaRPr lang="en-US" sz="1300" dirty="0">
-                        <a:latin typeface="Calibri" charset="0"/>
-                        <a:ea typeface="Calibri" charset="0"/>
-                        <a:cs typeface="Calibri" charset="0"/>
-                      </a:endParaRPr>
-                    </a:p>
-                  </a:txBody>
-                  <a:tcPr marL="91440" marR="91440" marT="45720" marB="45720">
-                    <a:lnL w="12700" cap="flat" cmpd="sng" algn="ctr">
-                      <a:solidFill>
-                        <a:srgbClr val="2A3441"/>
-                      </a:solidFill>
-                      <a:prstDash val="solid"/>
-                      <a:round/>
-                      <a:headEnd type="none" w="med" len="med"/>
-                      <a:tailEnd type="none" w="med" len="med"/>
-                    </a:lnL>
-                    <a:lnR w="12700" cap="flat" cmpd="sng" algn="ctr">
-                      <a:solidFill>
-                        <a:srgbClr val="2A3441"/>
-                      </a:solidFill>
-                      <a:prstDash val="solid"/>
-                      <a:round/>
-                      <a:headEnd type="none" w="med" len="med"/>
-                      <a:tailEnd type="none" w="med" len="med"/>
-                    </a:lnR>
-                    <a:lnT w="12700" cap="flat" cmpd="sng" algn="ctr">
-                      <a:solidFill>
-                        <a:srgbClr val="2A3441"/>
-                      </a:solidFill>
-                      <a:prstDash val="solid"/>
-                      <a:round/>
-                      <a:headEnd type="none" w="med" len="med"/>
-                      <a:tailEnd type="none" w="med" len="med"/>
-                    </a:lnT>
-                    <a:lnB w="12700" cap="flat" cmpd="sng" algn="ctr">
-                      <a:solidFill>
-                        <a:srgbClr val="2A3441"/>
-                      </a:solidFill>
-                      <a:prstDash val="solid"/>
-                      <a:round/>
-                      <a:headEnd type="none" w="med" len="med"/>
-                      <a:tailEnd type="none" w="med" len="med"/>
-                    </a:lnB>
-                    <a:solidFill>
-                      <a:srgbClr val="141B24"/>
-                    </a:solidFill>
-                  </a:tcPr>
-                </a:tc>
-                <a:tc>
-                  <a:txBody>
-                    <a:bodyPr/>
-                    <a:lstStyle/>
-                    <a:p>
-                      <a:pPr indent="0" marL="0">
-                        <a:buNone/>
-                      </a:pPr>
-                      <a:r>
-                        <a:rPr lang="en-US" sz="1300" dirty="0">
-                          <a:solidFill>
-                            <a:srgbClr val="E6EDF3"/>
-                          </a:solidFill>
-                          <a:latin typeface="Calibri" pitchFamily="34" charset="0"/>
-                          <a:ea typeface="Calibri" pitchFamily="34" charset="-122"/>
-                          <a:cs typeface="Calibri" pitchFamily="34" charset="-120"/>
-                        </a:rPr>
-                        <a:t>5.73 s</a:t>
-                      </a:r>
-                      <a:endParaRPr lang="en-US" sz="1300" dirty="0">
-                        <a:latin typeface="Calibri" charset="0"/>
-                        <a:ea typeface="Calibri" charset="0"/>
-                        <a:cs typeface="Calibri" charset="0"/>
-                      </a:endParaRPr>
-                    </a:p>
-                  </a:txBody>
-                  <a:tcPr marL="91440" marR="91440" marT="45720" marB="45720">
-                    <a:lnL w="12700" cap="flat" cmpd="sng" algn="ctr">
-                      <a:solidFill>
-                        <a:srgbClr val="2A3441"/>
-                      </a:solidFill>
-                      <a:prstDash val="solid"/>
-                      <a:round/>
-                      <a:headEnd type="none" w="med" len="med"/>
-                      <a:tailEnd type="none" w="med" len="med"/>
-                    </a:lnL>
-                    <a:lnR w="12700" cap="flat" cmpd="sng" algn="ctr">
-                      <a:solidFill>
-                        <a:srgbClr val="2A3441"/>
-                      </a:solidFill>
-                      <a:prstDash val="solid"/>
-                      <a:round/>
-                      <a:headEnd type="none" w="med" len="med"/>
-                      <a:tailEnd type="none" w="med" len="med"/>
-                    </a:lnR>
-                    <a:lnT w="12700" cap="flat" cmpd="sng" algn="ctr">
-                      <a:solidFill>
-                        <a:srgbClr val="2A3441"/>
-                      </a:solidFill>
-                      <a:prstDash val="solid"/>
-                      <a:round/>
-                      <a:headEnd type="none" w="med" len="med"/>
-                      <a:tailEnd type="none" w="med" len="med"/>
-                    </a:lnT>
-                    <a:lnB w="12700" cap="flat" cmpd="sng" algn="ctr">
-                      <a:solidFill>
-                        <a:srgbClr val="2A3441"/>
-                      </a:solidFill>
-                      <a:prstDash val="solid"/>
-                      <a:round/>
-                      <a:headEnd type="none" w="med" len="med"/>
-                      <a:tailEnd type="none" w="med" len="med"/>
-                    </a:lnB>
-                    <a:solidFill>
-                      <a:srgbClr val="141B24"/>
-                    </a:solidFill>
-                  </a:tcPr>
-                </a:tc>
-                <a:tc>
-                  <a:txBody>
-                    <a:bodyPr/>
-                    <a:lstStyle/>
-                    <a:p>
-                      <a:pPr indent="0" marL="0">
-                        <a:buNone/>
-                      </a:pPr>
-                      <a:r>
-                        <a:rPr lang="en-US" sz="1300" dirty="0">
-                          <a:solidFill>
-                            <a:srgbClr val="E6EDF3"/>
-                          </a:solidFill>
-                          <a:latin typeface="Calibri" pitchFamily="34" charset="0"/>
-                          <a:ea typeface="Calibri" pitchFamily="34" charset="-122"/>
-                          <a:cs typeface="Calibri" pitchFamily="34" charset="-120"/>
-                        </a:rPr>
-                        <a:t>1.00</a:t>
-                      </a:r>
-                      <a:endParaRPr lang="en-US" sz="1300" dirty="0">
-                        <a:latin typeface="Calibri" charset="0"/>
-                        <a:ea typeface="Calibri" charset="0"/>
-                        <a:cs typeface="Calibri" charset="0"/>
-                      </a:endParaRPr>
-                    </a:p>
-                  </a:txBody>
-                  <a:tcPr marL="91440" marR="91440" marT="45720" marB="45720">
-                    <a:lnL w="12700" cap="flat" cmpd="sng" algn="ctr">
-                      <a:solidFill>
-                        <a:srgbClr val="2A3441"/>
-                      </a:solidFill>
-                      <a:prstDash val="solid"/>
-                      <a:round/>
-                      <a:headEnd type="none" w="med" len="med"/>
-                      <a:tailEnd type="none" w="med" len="med"/>
-                    </a:lnL>
-                    <a:lnR w="12700" cap="flat" cmpd="sng" algn="ctr">
-                      <a:solidFill>
-                        <a:srgbClr val="2A3441"/>
-                      </a:solidFill>
-                      <a:prstDash val="solid"/>
-                      <a:round/>
-                      <a:headEnd type="none" w="med" len="med"/>
-                      <a:tailEnd type="none" w="med" len="med"/>
-                    </a:lnR>
-                    <a:lnT w="12700" cap="flat" cmpd="sng" algn="ctr">
-                      <a:solidFill>
-                        <a:srgbClr val="2A3441"/>
-                      </a:solidFill>
-                      <a:prstDash val="solid"/>
-                      <a:round/>
-                      <a:headEnd type="none" w="med" len="med"/>
-                      <a:tailEnd type="none" w="med" len="med"/>
-                    </a:lnT>
-                    <a:lnB w="12700" cap="flat" cmpd="sng" algn="ctr">
-                      <a:solidFill>
-                        <a:srgbClr val="2A3441"/>
-                      </a:solidFill>
-                      <a:prstDash val="solid"/>
-                      <a:round/>
-                      <a:headEnd type="none" w="med" len="med"/>
-                      <a:tailEnd type="none" w="med" len="med"/>
-                    </a:lnB>
-                    <a:solidFill>
-                      <a:srgbClr val="141B24"/>
-                    </a:solidFill>
-                  </a:tcPr>
-                </a:tc>
-              </a:tr>
-              <a:tr h="384048">
-                <a:tc>
-                  <a:txBody>
-                    <a:bodyPr/>
-                    <a:lstStyle/>
-                    <a:p>
-                      <a:pPr indent="0" marL="0">
-                        <a:buNone/>
-                      </a:pPr>
-                      <a:r>
-                        <a:rPr lang="en-US" sz="1300" dirty="0">
-                          <a:solidFill>
-                            <a:srgbClr val="E6EDF3"/>
-                          </a:solidFill>
-                          <a:latin typeface="Calibri" pitchFamily="34" charset="0"/>
-                          <a:ea typeface="Calibri" pitchFamily="34" charset="-122"/>
-                          <a:cs typeface="Calibri" pitchFamily="34" charset="-120"/>
-                        </a:rPr>
-                        <a:t>CUBIC tuned</a:t>
-                      </a:r>
-                      <a:endParaRPr lang="en-US" sz="1300" dirty="0">
-                        <a:latin typeface="Calibri" charset="0"/>
-                        <a:ea typeface="Calibri" charset="0"/>
-                        <a:cs typeface="Calibri" charset="0"/>
-                      </a:endParaRPr>
-                    </a:p>
-                  </a:txBody>
-                  <a:tcPr marL="91440" marR="91440" marT="45720" marB="45720">
-                    <a:lnL w="12700" cap="flat" cmpd="sng" algn="ctr">
-                      <a:solidFill>
-                        <a:srgbClr val="2A3441"/>
-                      </a:solidFill>
-                      <a:prstDash val="solid"/>
-                      <a:round/>
-                      <a:headEnd type="none" w="med" len="med"/>
-                      <a:tailEnd type="none" w="med" len="med"/>
-                    </a:lnL>
-                    <a:lnR w="12700" cap="flat" cmpd="sng" algn="ctr">
-                      <a:solidFill>
-                        <a:srgbClr val="2A3441"/>
-                      </a:solidFill>
-                      <a:prstDash val="solid"/>
-                      <a:round/>
-                      <a:headEnd type="none" w="med" len="med"/>
-                      <a:tailEnd type="none" w="med" len="med"/>
-                    </a:lnR>
-                    <a:lnT w="12700" cap="flat" cmpd="sng" algn="ctr">
-                      <a:solidFill>
-                        <a:srgbClr val="2A3441"/>
-                      </a:solidFill>
-                      <a:prstDash val="solid"/>
-                      <a:round/>
-                      <a:headEnd type="none" w="med" len="med"/>
-                      <a:tailEnd type="none" w="med" len="med"/>
-                    </a:lnT>
-                    <a:lnB w="12700" cap="flat" cmpd="sng" algn="ctr">
-                      <a:solidFill>
-                        <a:srgbClr val="2A3441"/>
-                      </a:solidFill>
-                      <a:prstDash val="solid"/>
-                      <a:round/>
-                      <a:headEnd type="none" w="med" len="med"/>
-                      <a:tailEnd type="none" w="med" len="med"/>
-                    </a:lnB>
-                    <a:solidFill>
-                      <a:srgbClr val="141B24"/>
-                    </a:solidFill>
-                  </a:tcPr>
-                </a:tc>
-                <a:tc>
-                  <a:txBody>
-                    <a:bodyPr/>
-                    <a:lstStyle/>
-                    <a:p>
-                      <a:pPr indent="0" marL="0">
-                        <a:buNone/>
-                      </a:pPr>
-                      <a:r>
-                        <a:rPr lang="en-US" sz="1300" dirty="0">
-                          <a:solidFill>
-                            <a:srgbClr val="E6EDF3"/>
-                          </a:solidFill>
-                          <a:latin typeface="Calibri" pitchFamily="34" charset="0"/>
-                          <a:ea typeface="Calibri" pitchFamily="34" charset="-122"/>
-                          <a:cs typeface="Calibri" pitchFamily="34" charset="-120"/>
-                        </a:rPr>
-                        <a:t>4.55 s</a:t>
-                      </a:r>
-                      <a:endParaRPr lang="en-US" sz="1300" dirty="0">
-                        <a:latin typeface="Calibri" charset="0"/>
-                        <a:ea typeface="Calibri" charset="0"/>
-                        <a:cs typeface="Calibri" charset="0"/>
-                      </a:endParaRPr>
-                    </a:p>
-                  </a:txBody>
-                  <a:tcPr marL="91440" marR="91440" marT="45720" marB="45720">
-                    <a:lnL w="12700" cap="flat" cmpd="sng" algn="ctr">
-                      <a:solidFill>
-                        <a:srgbClr val="2A3441"/>
-                      </a:solidFill>
-                      <a:prstDash val="solid"/>
-                      <a:round/>
-                      <a:headEnd type="none" w="med" len="med"/>
-                      <a:tailEnd type="none" w="med" len="med"/>
-                    </a:lnL>
-                    <a:lnR w="12700" cap="flat" cmpd="sng" algn="ctr">
-                      <a:solidFill>
-                        <a:srgbClr val="2A3441"/>
-                      </a:solidFill>
-                      <a:prstDash val="solid"/>
-                      <a:round/>
-                      <a:headEnd type="none" w="med" len="med"/>
-                      <a:tailEnd type="none" w="med" len="med"/>
-                    </a:lnR>
-                    <a:lnT w="12700" cap="flat" cmpd="sng" algn="ctr">
-                      <a:solidFill>
-                        <a:srgbClr val="2A3441"/>
-                      </a:solidFill>
-                      <a:prstDash val="solid"/>
-                      <a:round/>
-                      <a:headEnd type="none" w="med" len="med"/>
-                      <a:tailEnd type="none" w="med" len="med"/>
-                    </a:lnT>
-                    <a:lnB w="12700" cap="flat" cmpd="sng" algn="ctr">
-                      <a:solidFill>
-                        <a:srgbClr val="2A3441"/>
-                      </a:solidFill>
-                      <a:prstDash val="solid"/>
-                      <a:round/>
-                      <a:headEnd type="none" w="med" len="med"/>
-                      <a:tailEnd type="none" w="med" len="med"/>
-                    </a:lnB>
-                    <a:solidFill>
-                      <a:srgbClr val="141B24"/>
-                    </a:solidFill>
-                  </a:tcPr>
-                </a:tc>
-                <a:tc>
-                  <a:txBody>
-                    <a:bodyPr/>
-                    <a:lstStyle/>
-                    <a:p>
-                      <a:pPr indent="0" marL="0">
-                        <a:buNone/>
-                      </a:pPr>
-                      <a:r>
-                        <a:rPr lang="en-US" sz="1300" dirty="0">
-                          <a:solidFill>
-                            <a:srgbClr val="E6EDF3"/>
-                          </a:solidFill>
-                          <a:latin typeface="Calibri" pitchFamily="34" charset="0"/>
-                          <a:ea typeface="Calibri" pitchFamily="34" charset="-122"/>
-                          <a:cs typeface="Calibri" pitchFamily="34" charset="-120"/>
-                        </a:rPr>
-                        <a:t>0.79</a:t>
-                      </a:r>
-                      <a:endParaRPr lang="en-US" sz="1300" dirty="0">
-                        <a:latin typeface="Calibri" charset="0"/>
-                        <a:ea typeface="Calibri" charset="0"/>
-                        <a:cs typeface="Calibri" charset="0"/>
-                      </a:endParaRPr>
-                    </a:p>
-                  </a:txBody>
-                  <a:tcPr marL="91440" marR="91440" marT="45720" marB="45720">
-                    <a:lnL w="12700" cap="flat" cmpd="sng" algn="ctr">
-                      <a:solidFill>
-                        <a:srgbClr val="2A3441"/>
-                      </a:solidFill>
-                      <a:prstDash val="solid"/>
-                      <a:round/>
-                      <a:headEnd type="none" w="med" len="med"/>
-                      <a:tailEnd type="none" w="med" len="med"/>
-                    </a:lnL>
-                    <a:lnR w="12700" cap="flat" cmpd="sng" algn="ctr">
-                      <a:solidFill>
-                        <a:srgbClr val="2A3441"/>
-                      </a:solidFill>
-                      <a:prstDash val="solid"/>
-                      <a:round/>
-                      <a:headEnd type="none" w="med" len="med"/>
-                      <a:tailEnd type="none" w="med" len="med"/>
-                    </a:lnR>
-                    <a:lnT w="12700" cap="flat" cmpd="sng" algn="ctr">
-                      <a:solidFill>
-                        <a:srgbClr val="2A3441"/>
-                      </a:solidFill>
-                      <a:prstDash val="solid"/>
-                      <a:round/>
-                      <a:headEnd type="none" w="med" len="med"/>
-                      <a:tailEnd type="none" w="med" len="med"/>
-                    </a:lnT>
-                    <a:lnB w="12700" cap="flat" cmpd="sng" algn="ctr">
-                      <a:solidFill>
-                        <a:srgbClr val="2A3441"/>
-                      </a:solidFill>
-                      <a:prstDash val="solid"/>
-                      <a:round/>
-                      <a:headEnd type="none" w="med" len="med"/>
-                      <a:tailEnd type="none" w="med" len="med"/>
-                    </a:lnB>
-                    <a:solidFill>
-                      <a:srgbClr val="141B24"/>
-                    </a:solidFill>
-                  </a:tcPr>
-                </a:tc>
-              </a:tr>
-              <a:tr h="384048">
-                <a:tc>
-                  <a:txBody>
-                    <a:bodyPr/>
-                    <a:lstStyle/>
-                    <a:p>
-                      <a:pPr indent="0" marL="0">
-                        <a:buNone/>
-                      </a:pPr>
-                      <a:r>
-                        <a:rPr lang="en-US" sz="1300" dirty="0">
-                          <a:solidFill>
-                            <a:srgbClr val="E6EDF3"/>
-                          </a:solidFill>
-                          <a:latin typeface="Calibri" pitchFamily="34" charset="0"/>
-                          <a:ea typeface="Calibri" pitchFamily="34" charset="-122"/>
-                          <a:cs typeface="Calibri" pitchFamily="34" charset="-120"/>
-                        </a:rPr>
-                        <a:t>Neural agent</a:t>
-                      </a:r>
-                      <a:endParaRPr lang="en-US" sz="1300" dirty="0">
-                        <a:latin typeface="Calibri" charset="0"/>
-                        <a:ea typeface="Calibri" charset="0"/>
-                        <a:cs typeface="Calibri" charset="0"/>
-                      </a:endParaRPr>
-                    </a:p>
-                  </a:txBody>
-                  <a:tcPr marL="91440" marR="91440" marT="45720" marB="45720">
-                    <a:lnL w="12700" cap="flat" cmpd="sng" algn="ctr">
-                      <a:solidFill>
-                        <a:srgbClr val="2A3441"/>
-                      </a:solidFill>
-                      <a:prstDash val="solid"/>
-                      <a:round/>
-                      <a:headEnd type="none" w="med" len="med"/>
-                      <a:tailEnd type="none" w="med" len="med"/>
-                    </a:lnL>
-                    <a:lnR w="12700" cap="flat" cmpd="sng" algn="ctr">
-                      <a:solidFill>
-                        <a:srgbClr val="2A3441"/>
-                      </a:solidFill>
-                      <a:prstDash val="solid"/>
-                      <a:round/>
-                      <a:headEnd type="none" w="med" len="med"/>
-                      <a:tailEnd type="none" w="med" len="med"/>
-                    </a:lnR>
-                    <a:lnT w="12700" cap="flat" cmpd="sng" algn="ctr">
-                      <a:solidFill>
-                        <a:srgbClr val="2A3441"/>
-                      </a:solidFill>
-                      <a:prstDash val="solid"/>
-                      <a:round/>
-                      <a:headEnd type="none" w="med" len="med"/>
-                      <a:tailEnd type="none" w="med" len="med"/>
-                    </a:lnT>
-                    <a:lnB w="12700" cap="flat" cmpd="sng" algn="ctr">
-                      <a:solidFill>
-                        <a:srgbClr val="2A3441"/>
-                      </a:solidFill>
-                      <a:prstDash val="solid"/>
-                      <a:round/>
-                      <a:headEnd type="none" w="med" len="med"/>
-                      <a:tailEnd type="none" w="med" len="med"/>
-                    </a:lnB>
-                    <a:solidFill>
-                      <a:srgbClr val="141B24"/>
-                    </a:solidFill>
-                  </a:tcPr>
-                </a:tc>
-                <a:tc>
-                  <a:txBody>
-                    <a:bodyPr/>
-                    <a:lstStyle/>
-                    <a:p>
-                      <a:pPr indent="0" marL="0">
-                        <a:buNone/>
-                      </a:pPr>
-                      <a:r>
-                        <a:rPr lang="en-US" sz="1300" dirty="0">
-                          <a:solidFill>
-                            <a:srgbClr val="E6EDF3"/>
-                          </a:solidFill>
-                          <a:latin typeface="Calibri" pitchFamily="34" charset="0"/>
-                          <a:ea typeface="Calibri" pitchFamily="34" charset="-122"/>
-                          <a:cs typeface="Calibri" pitchFamily="34" charset="-120"/>
-                        </a:rPr>
-                        <a:t>4.87 s</a:t>
-                      </a:r>
-                      <a:endParaRPr lang="en-US" sz="1300" dirty="0">
-                        <a:latin typeface="Calibri" charset="0"/>
-                        <a:ea typeface="Calibri" charset="0"/>
-                        <a:cs typeface="Calibri" charset="0"/>
-                      </a:endParaRPr>
-                    </a:p>
-                  </a:txBody>
-                  <a:tcPr marL="91440" marR="91440" marT="45720" marB="45720">
-                    <a:lnL w="12700" cap="flat" cmpd="sng" algn="ctr">
-                      <a:solidFill>
-                        <a:srgbClr val="2A3441"/>
-                      </a:solidFill>
-                      <a:prstDash val="solid"/>
-                      <a:round/>
-                      <a:headEnd type="none" w="med" len="med"/>
-                      <a:tailEnd type="none" w="med" len="med"/>
-                    </a:lnL>
-                    <a:lnR w="12700" cap="flat" cmpd="sng" algn="ctr">
-                      <a:solidFill>
-                        <a:srgbClr val="2A3441"/>
-                      </a:solidFill>
-                      <a:prstDash val="solid"/>
-                      <a:round/>
-                      <a:headEnd type="none" w="med" len="med"/>
-                      <a:tailEnd type="none" w="med" len="med"/>
-                    </a:lnR>
-                    <a:lnT w="12700" cap="flat" cmpd="sng" algn="ctr">
-                      <a:solidFill>
-                        <a:srgbClr val="2A3441"/>
-                      </a:solidFill>
-                      <a:prstDash val="solid"/>
-                      <a:round/>
-                      <a:headEnd type="none" w="med" len="med"/>
-                      <a:tailEnd type="none" w="med" len="med"/>
-                    </a:lnT>
-                    <a:lnB w="12700" cap="flat" cmpd="sng" algn="ctr">
-                      <a:solidFill>
-                        <a:srgbClr val="2A3441"/>
-                      </a:solidFill>
-                      <a:prstDash val="solid"/>
-                      <a:round/>
-                      <a:headEnd type="none" w="med" len="med"/>
-                      <a:tailEnd type="none" w="med" len="med"/>
-                    </a:lnB>
-                    <a:solidFill>
-                      <a:srgbClr val="141B24"/>
-                    </a:solidFill>
-                  </a:tcPr>
-                </a:tc>
-                <a:tc>
-                  <a:txBody>
-                    <a:bodyPr/>
-                    <a:lstStyle/>
-                    <a:p>
-                      <a:pPr indent="0" marL="0">
-                        <a:buNone/>
-                      </a:pPr>
-                      <a:r>
-                        <a:rPr lang="en-US" sz="1300" dirty="0">
-                          <a:solidFill>
-                            <a:srgbClr val="E6EDF3"/>
-                          </a:solidFill>
-                          <a:latin typeface="Calibri" pitchFamily="34" charset="0"/>
-                          <a:ea typeface="Calibri" pitchFamily="34" charset="-122"/>
-                          <a:cs typeface="Calibri" pitchFamily="34" charset="-120"/>
-                        </a:rPr>
-                        <a:t>0.85</a:t>
-                      </a:r>
-                      <a:endParaRPr lang="en-US" sz="1300" dirty="0">
-                        <a:latin typeface="Calibri" charset="0"/>
-                        <a:ea typeface="Calibri" charset="0"/>
-                        <a:cs typeface="Calibri" charset="0"/>
-                      </a:endParaRPr>
-                    </a:p>
-                  </a:txBody>
-                  <a:tcPr marL="91440" marR="91440" marT="45720" marB="45720">
-                    <a:lnL w="12700" cap="flat" cmpd="sng" algn="ctr">
-                      <a:solidFill>
-                        <a:srgbClr val="2A3441"/>
-                      </a:solidFill>
-                      <a:prstDash val="solid"/>
-                      <a:round/>
-                      <a:headEnd type="none" w="med" len="med"/>
-                      <a:tailEnd type="none" w="med" len="med"/>
-                    </a:lnL>
-                    <a:lnR w="12700" cap="flat" cmpd="sng" algn="ctr">
-                      <a:solidFill>
-                        <a:srgbClr val="2A3441"/>
-                      </a:solidFill>
-                      <a:prstDash val="solid"/>
-                      <a:round/>
-                      <a:headEnd type="none" w="med" len="med"/>
-                      <a:tailEnd type="none" w="med" len="med"/>
-                    </a:lnR>
-                    <a:lnT w="12700" cap="flat" cmpd="sng" algn="ctr">
-                      <a:solidFill>
-                        <a:srgbClr val="2A3441"/>
-                      </a:solidFill>
-                      <a:prstDash val="solid"/>
-                      <a:round/>
-                      <a:headEnd type="none" w="med" len="med"/>
-                      <a:tailEnd type="none" w="med" len="med"/>
-                    </a:lnT>
-                    <a:lnB w="12700" cap="flat" cmpd="sng" algn="ctr">
-                      <a:solidFill>
-                        <a:srgbClr val="2A3441"/>
-                      </a:solidFill>
-                      <a:prstDash val="solid"/>
-                      <a:round/>
-                      <a:headEnd type="none" w="med" len="med"/>
-                      <a:tailEnd type="none" w="med" len="med"/>
-                    </a:lnB>
-                    <a:solidFill>
-                      <a:srgbClr val="141B24"/>
-                    </a:solidFill>
-                  </a:tcPr>
-                </a:tc>
-              </a:tr>
-              <a:tr h="384048">
-                <a:tc>
-                  <a:txBody>
-                    <a:bodyPr/>
-                    <a:lstStyle/>
-                    <a:p>
-                      <a:pPr indent="0" marL="0">
-                        <a:buNone/>
-                      </a:pPr>
-                      <a:r>
-                        <a:rPr lang="en-US" sz="1300" dirty="0">
-                          <a:solidFill>
-                            <a:srgbClr val="E6EDF3"/>
-                          </a:solidFill>
-                          <a:latin typeface="Calibri" pitchFamily="34" charset="0"/>
-                          <a:ea typeface="Calibri" pitchFamily="34" charset="-122"/>
-                          <a:cs typeface="Calibri" pitchFamily="34" charset="-120"/>
-                        </a:rPr>
-                        <a:t>Neural, polite 1.3</a:t>
-                      </a:r>
-                      <a:endParaRPr lang="en-US" sz="1300" dirty="0">
-                        <a:latin typeface="Calibri" charset="0"/>
-                        <a:ea typeface="Calibri" charset="0"/>
-                        <a:cs typeface="Calibri" charset="0"/>
-                      </a:endParaRPr>
-                    </a:p>
-                  </a:txBody>
-                  <a:tcPr marL="91440" marR="91440" marT="45720" marB="45720">
-                    <a:lnL w="12700" cap="flat" cmpd="sng" algn="ctr">
-                      <a:solidFill>
-                        <a:srgbClr val="2A3441"/>
-                      </a:solidFill>
-                      <a:prstDash val="solid"/>
-                      <a:round/>
-                      <a:headEnd type="none" w="med" len="med"/>
-                      <a:tailEnd type="none" w="med" len="med"/>
-                    </a:lnL>
-                    <a:lnR w="12700" cap="flat" cmpd="sng" algn="ctr">
-                      <a:solidFill>
-                        <a:srgbClr val="2A3441"/>
-                      </a:solidFill>
-                      <a:prstDash val="solid"/>
-                      <a:round/>
-                      <a:headEnd type="none" w="med" len="med"/>
-                      <a:tailEnd type="none" w="med" len="med"/>
-                    </a:lnR>
-                    <a:lnT w="12700" cap="flat" cmpd="sng" algn="ctr">
-                      <a:solidFill>
-                        <a:srgbClr val="2A3441"/>
-                      </a:solidFill>
-                      <a:prstDash val="solid"/>
-                      <a:round/>
-                      <a:headEnd type="none" w="med" len="med"/>
-                      <a:tailEnd type="none" w="med" len="med"/>
-                    </a:lnT>
-                    <a:lnB w="12700" cap="flat" cmpd="sng" algn="ctr">
-                      <a:solidFill>
-                        <a:srgbClr val="2A3441"/>
-                      </a:solidFill>
-                      <a:prstDash val="solid"/>
-                      <a:round/>
-                      <a:headEnd type="none" w="med" len="med"/>
-                      <a:tailEnd type="none" w="med" len="med"/>
-                    </a:lnB>
-                    <a:solidFill>
-                      <a:srgbClr val="141B24"/>
-                    </a:solidFill>
-                  </a:tcPr>
-                </a:tc>
-                <a:tc>
-                  <a:txBody>
-                    <a:bodyPr/>
-                    <a:lstStyle/>
-                    <a:p>
-                      <a:pPr indent="0" marL="0">
-                        <a:buNone/>
-                      </a:pPr>
-                      <a:r>
-                        <a:rPr lang="en-US" sz="1300" dirty="0">
-                          <a:solidFill>
-                            <a:srgbClr val="E6EDF3"/>
-                          </a:solidFill>
-                          <a:latin typeface="Calibri" pitchFamily="34" charset="0"/>
-                          <a:ea typeface="Calibri" pitchFamily="34" charset="-122"/>
-                          <a:cs typeface="Calibri" pitchFamily="34" charset="-120"/>
-                        </a:rPr>
-                        <a:t>4.92 s</a:t>
-                      </a:r>
-                      <a:endParaRPr lang="en-US" sz="1300" dirty="0">
-                        <a:latin typeface="Calibri" charset="0"/>
-                        <a:ea typeface="Calibri" charset="0"/>
-                        <a:cs typeface="Calibri" charset="0"/>
-                      </a:endParaRPr>
-                    </a:p>
-                  </a:txBody>
-                  <a:tcPr marL="91440" marR="91440" marT="45720" marB="45720">
-                    <a:lnL w="12700" cap="flat" cmpd="sng" algn="ctr">
-                      <a:solidFill>
-                        <a:srgbClr val="2A3441"/>
-                      </a:solidFill>
-                      <a:prstDash val="solid"/>
-                      <a:round/>
-                      <a:headEnd type="none" w="med" len="med"/>
-                      <a:tailEnd type="none" w="med" len="med"/>
-                    </a:lnL>
-                    <a:lnR w="12700" cap="flat" cmpd="sng" algn="ctr">
-                      <a:solidFill>
-                        <a:srgbClr val="2A3441"/>
-                      </a:solidFill>
-                      <a:prstDash val="solid"/>
-                      <a:round/>
-                      <a:headEnd type="none" w="med" len="med"/>
-                      <a:tailEnd type="none" w="med" len="med"/>
-                    </a:lnR>
-                    <a:lnT w="12700" cap="flat" cmpd="sng" algn="ctr">
-                      <a:solidFill>
-                        <a:srgbClr val="2A3441"/>
-                      </a:solidFill>
-                      <a:prstDash val="solid"/>
-                      <a:round/>
-                      <a:headEnd type="none" w="med" len="med"/>
-                      <a:tailEnd type="none" w="med" len="med"/>
-                    </a:lnT>
-                    <a:lnB w="12700" cap="flat" cmpd="sng" algn="ctr">
-                      <a:solidFill>
-                        <a:srgbClr val="2A3441"/>
-                      </a:solidFill>
-                      <a:prstDash val="solid"/>
-                      <a:round/>
-                      <a:headEnd type="none" w="med" len="med"/>
-                      <a:tailEnd type="none" w="med" len="med"/>
-                    </a:lnB>
-                    <a:solidFill>
-                      <a:srgbClr val="141B24"/>
-                    </a:solidFill>
-                  </a:tcPr>
-                </a:tc>
-                <a:tc>
-                  <a:txBody>
-                    <a:bodyPr/>
-                    <a:lstStyle/>
-                    <a:p>
-                      <a:pPr indent="0" marL="0">
-                        <a:buNone/>
-                      </a:pPr>
-                      <a:r>
-                        <a:rPr lang="en-US" sz="1300" dirty="0">
-                          <a:solidFill>
-                            <a:srgbClr val="E6EDF3"/>
-                          </a:solidFill>
-                          <a:latin typeface="Calibri" pitchFamily="34" charset="0"/>
-                          <a:ea typeface="Calibri" pitchFamily="34" charset="-122"/>
-                          <a:cs typeface="Calibri" pitchFamily="34" charset="-120"/>
-                        </a:rPr>
-                        <a:t>0.86</a:t>
-                      </a:r>
-                      <a:endParaRPr lang="en-US" sz="1300" dirty="0">
-                        <a:latin typeface="Calibri" charset="0"/>
-                        <a:ea typeface="Calibri" charset="0"/>
-                        <a:cs typeface="Calibri" charset="0"/>
-                      </a:endParaRPr>
-                    </a:p>
-                  </a:txBody>
-                  <a:tcPr marL="91440" marR="91440" marT="45720" marB="45720">
-                    <a:lnL w="12700" cap="flat" cmpd="sng" algn="ctr">
-                      <a:solidFill>
-                        <a:srgbClr val="2A3441"/>
-                      </a:solidFill>
-                      <a:prstDash val="solid"/>
-                      <a:round/>
-                      <a:headEnd type="none" w="med" len="med"/>
-                      <a:tailEnd type="none" w="med" len="med"/>
-                    </a:lnL>
-                    <a:lnR w="12700" cap="flat" cmpd="sng" algn="ctr">
-                      <a:solidFill>
-                        <a:srgbClr val="2A3441"/>
-                      </a:solidFill>
-                      <a:prstDash val="solid"/>
-                      <a:round/>
-                      <a:headEnd type="none" w="med" len="med"/>
-                      <a:tailEnd type="none" w="med" len="med"/>
-                    </a:lnR>
-                    <a:lnT w="12700" cap="flat" cmpd="sng" algn="ctr">
-                      <a:solidFill>
-                        <a:srgbClr val="2A3441"/>
-                      </a:solidFill>
-                      <a:prstDash val="solid"/>
-                      <a:round/>
-                      <a:headEnd type="none" w="med" len="med"/>
-                      <a:tailEnd type="none" w="med" len="med"/>
-                    </a:lnT>
-                    <a:lnB w="12700" cap="flat" cmpd="sng" algn="ctr">
-                      <a:solidFill>
-                        <a:srgbClr val="2A3441"/>
-                      </a:solidFill>
-                      <a:prstDash val="solid"/>
-                      <a:round/>
-                      <a:headEnd type="none" w="med" len="med"/>
-                      <a:tailEnd type="none" w="med" len="med"/>
-                    </a:lnB>
-                    <a:solidFill>
-                      <a:srgbClr val="141B24"/>
-                    </a:solidFill>
-                  </a:tcPr>
-                </a:tc>
-              </a:tr>
-            </a:tbl>
-          </a:graphicData>
-        </a:graphic>
-      </p:graphicFrame>
-      <p:sp>
-        <p:nvSpPr>
-          <p:cNvPr id="6" name="Text 2"/>
-          <p:cNvSpPr/>
-          <p:nvPr/>
-        </p:nvSpPr>
-        <p:spPr>
-          <a:xfrm>
-            <a:off x="548640" y="3474720"/>
-            <a:ext cx="11064240" cy="2743200"/>
-          </a:xfrm>
-          <a:prstGeom prst="rect">
-            <a:avLst/>
-          </a:prstGeom>
-          <a:noFill/>
-          <a:ln/>
-        </p:spPr>
-        <p:txBody>
-          <a:bodyPr wrap="square" lIns="0" tIns="0" rIns="0" bIns="0" rtlCol="0" anchor="t"/>
-          <a:lstStyle/>
-          <a:p>
-            <a:pPr marL="342900" indent="-342900">
-              <a:spcAft>
-                <a:spcPts val="800"/>
-              </a:spcAft>
-              <a:buSzPct val="100000"/>
-              <a:buChar char="•"/>
-            </a:pPr>
-            <a:r>
-              <a:rPr lang="en-US" sz="1600" dirty="0">
-                <a:solidFill>
-                  <a:srgbClr val="E6EDF3"/>
-                </a:solidFill>
-                <a:latin typeface="Calibri" pitchFamily="34" charset="0"/>
-                <a:ea typeface="Calibri" pitchFamily="34" charset="-122"/>
-                <a:cs typeface="Calibri" pitchFamily="34" charset="-120"/>
-              </a:rPr>
-              <a:t>Polite mode: back off when a standing queue builds (jitter-aware). Share 70% to 52%; costs speed (0.53x to 0.58x of AIMD time on 100 paths, worst path 2.95x slower), so it is off by default</a:t>
-            </a:r>
-            <a:endParaRPr lang="en-US" sz="1600" dirty="0"/>
-          </a:p>
-          <a:p>
-            <a:pPr marL="342900" indent="-342900">
-              <a:spcAft>
-                <a:spcPts val="800"/>
-              </a:spcAft>
-              <a:buSzPct val="100000"/>
-              <a:buChar char="•"/>
-            </a:pPr>
-            <a:r>
-              <a:rPr lang="en-US" sz="1600" dirty="0">
-                <a:solidFill>
-                  <a:srgbClr val="E6EDF3"/>
-                </a:solidFill>
-                <a:latin typeface="Calibri" pitchFamily="34" charset="0"/>
-                <a:ea typeface="Calibri" pitchFamily="34" charset="-122"/>
-                <a:cs typeface="Calibri" pitchFamily="34" charset="-120"/>
-              </a:rPr>
-              <a:t>Bursty cross traffic (new proxy option, 8 runs): neural is 15% faster than tuned AIMD but level with CUBIC; three tweaks to fix its extra retransmissions did not help</a:t>
-            </a:r>
-            <a:endParaRPr lang="en-US" sz="1600" dirty="0"/>
-          </a:p>
-          <a:p>
-            <a:pPr marL="342900" indent="-342900">
-              <a:spcAft>
-                <a:spcPts val="800"/>
-              </a:spcAft>
-              <a:buSzPct val="100000"/>
-              <a:buChar char="•"/>
-            </a:pPr>
-            <a:r>
-              <a:rPr lang="en-US" sz="1600" dirty="0">
-                <a:solidFill>
-                  <a:srgbClr val="E6EDF3"/>
-                </a:solidFill>
-                <a:latin typeface="Calibri" pitchFamily="34" charset="0"/>
-                <a:ea typeface="Calibri" pitchFamily="34" charset="-122"/>
-                <a:cs typeface="Calibri" pitchFamily="34" charset="-120"/>
-              </a:rPr>
-              <a:t>Server now handles up to 16 clients at once; a test sends two files simultaneously and checks both byte-for-byte</a:t>
-            </a:r>
-            <a:endParaRPr lang="en-US" sz="1600" dirty="0"/>
-          </a:p>
-        </p:txBody>
-      </p:sp>
-    </p:spTree>
-  </p:cSld>
-  <p:clrMapOvr>
-    <a:masterClrMapping/>
-  </p:clrMapOvr>
-</p:sld>
-</file>
-
 <file path=ppt/slides/slide4.xml><?xml version="1.0" encoding="utf-8"?>
 <p:sld xmlns:a="http://schemas.openxmlformats.org/drawingml/2006/main" xmlns:r="http://schemas.openxmlformats.org/officeDocument/2006/relationships" xmlns:p="http://schemas.openxmlformats.org/presentationml/2006/main">
   <p:cSld name="Slide 4">
@@ -35874,7 +33907,7 @@
                 <a:ea typeface="Courier New" pitchFamily="34" charset="-122"/>
                 <a:cs typeface="Courier New" pitchFamily="34" charset="-120"/>
               </a:rPr>
-              <a:t>4 / 41   Smart-RUDP</a:t>
+              <a:t>4 / 42   Smart-RUDP</a:t>
             </a:r>
             <a:endParaRPr lang="en-US" sz="1000" dirty="0"/>
           </a:p>
@@ -36396,6 +34429,2323 @@
                 <a:ea typeface="Courier New" pitchFamily="34" charset="-122"/>
                 <a:cs typeface="Courier New" pitchFamily="34" charset="-120"/>
               </a:rPr>
+              <a:t>Closing gaps: fairness and cross traffic</a:t>
+            </a:r>
+            <a:endParaRPr lang="en-US" sz="3000" dirty="0"/>
+          </a:p>
+        </p:txBody>
+      </p:sp>
+      <p:sp>
+        <p:nvSpPr>
+          <p:cNvPr id="3" name="Text 1"/>
+          <p:cNvSpPr/>
+          <p:nvPr/>
+        </p:nvSpPr>
+        <p:spPr>
+          <a:xfrm>
+            <a:off x="9418320" y="6446520"/>
+            <a:ext cx="2377440" cy="274320"/>
+          </a:xfrm>
+          <a:prstGeom prst="rect">
+            <a:avLst/>
+          </a:prstGeom>
+          <a:noFill/>
+          <a:ln/>
+        </p:spPr>
+        <p:txBody>
+          <a:bodyPr wrap="square" lIns="0" tIns="0" rIns="0" bIns="0" rtlCol="0" anchor="ctr"/>
+          <a:lstStyle/>
+          <a:p>
+            <a:pPr algn="r" indent="0" marL="0">
+              <a:buNone/>
+            </a:pPr>
+            <a:r>
+              <a:rPr lang="en-US" sz="1000" dirty="0">
+                <a:solidFill>
+                  <a:srgbClr val="8B98A5"/>
+                </a:solidFill>
+                <a:latin typeface="Courier New" pitchFamily="34" charset="0"/>
+                <a:ea typeface="Courier New" pitchFamily="34" charset="-122"/>
+                <a:cs typeface="Courier New" pitchFamily="34" charset="-120"/>
+              </a:rPr>
+              <a:t>40 / 42   Smart-RUDP</a:t>
+            </a:r>
+            <a:endParaRPr lang="en-US" sz="1000" dirty="0"/>
+          </a:p>
+        </p:txBody>
+      </p:sp>
+      <p:graphicFrame>
+        <p:nvGraphicFramePr>
+          <p:cNvPr id="41" name="Table 0"/>
+          <p:cNvGraphicFramePr>
+            <a:graphicFrameLocks noGrp="1"/>
+          </p:cNvGraphicFramePr>
+          <p:nvPr>
+            <p:extLst>
+              <p:ext uri="{D42A27DB-BD31-4B8C-83A1-F6EECF244321}">
+                <p14:modId xmlns:p14="http://schemas.microsoft.com/office/powerpoint/2010/main" val="1579011935"/>
+              </p:ext>
+            </p:extLst>
+          </p:nvPr>
+        </p:nvGraphicFramePr>
+        <p:xfrm>
+          <a:off x="548640" y="1188720"/>
+          <a:ext cx="5394960" cy="914400"/>
+        </p:xfrm>
+        <a:graphic>
+          <a:graphicData uri="http://schemas.openxmlformats.org/drawingml/2006/table">
+            <a:tbl>
+              <a:tblPr/>
+              <a:tblGrid>
+                <a:gridCol w="2651760"/>
+                <a:gridCol w="1463040"/>
+                <a:gridCol w="1280160"/>
+              </a:tblGrid>
+              <a:tr h="384048">
+                <a:tc>
+                  <a:txBody>
+                    <a:bodyPr/>
+                    <a:lstStyle/>
+                    <a:p>
+                      <a:pPr indent="0" marL="0">
+                        <a:buNone/>
+                      </a:pPr>
+                      <a:r>
+                        <a:rPr lang="en-US" sz="1300" b="1" dirty="0">
+                          <a:solidFill>
+                            <a:srgbClr val="0B0F14"/>
+                          </a:solidFill>
+                          <a:latin typeface="Courier New" pitchFamily="34" charset="0"/>
+                          <a:ea typeface="Courier New" pitchFamily="34" charset="-122"/>
+                          <a:cs typeface="Courier New" pitchFamily="34" charset="-120"/>
+                        </a:rPr>
+                        <a:t>Neural vs tuned AIMD</a:t>
+                      </a:r>
+                      <a:endParaRPr lang="en-US" sz="1300" dirty="0">
+                        <a:latin typeface="Courier New" charset="0"/>
+                        <a:ea typeface="Courier New" charset="0"/>
+                        <a:cs typeface="Courier New" charset="0"/>
+                      </a:endParaRPr>
+                    </a:p>
+                  </a:txBody>
+                  <a:tcPr marL="91440" marR="91440" marT="45720" marB="45720">
+                    <a:lnL w="12700" cap="flat" cmpd="sng" algn="ctr">
+                      <a:solidFill>
+                        <a:srgbClr val="2A3441"/>
+                      </a:solidFill>
+                      <a:prstDash val="solid"/>
+                      <a:round/>
+                      <a:headEnd type="none" w="med" len="med"/>
+                      <a:tailEnd type="none" w="med" len="med"/>
+                    </a:lnL>
+                    <a:lnR w="12700" cap="flat" cmpd="sng" algn="ctr">
+                      <a:solidFill>
+                        <a:srgbClr val="2A3441"/>
+                      </a:solidFill>
+                      <a:prstDash val="solid"/>
+                      <a:round/>
+                      <a:headEnd type="none" w="med" len="med"/>
+                      <a:tailEnd type="none" w="med" len="med"/>
+                    </a:lnR>
+                    <a:lnT w="12700" cap="flat" cmpd="sng" algn="ctr">
+                      <a:solidFill>
+                        <a:srgbClr val="2A3441"/>
+                      </a:solidFill>
+                      <a:prstDash val="solid"/>
+                      <a:round/>
+                      <a:headEnd type="none" w="med" len="med"/>
+                      <a:tailEnd type="none" w="med" len="med"/>
+                    </a:lnT>
+                    <a:lnB w="12700" cap="flat" cmpd="sng" algn="ctr">
+                      <a:solidFill>
+                        <a:srgbClr val="2A3441"/>
+                      </a:solidFill>
+                      <a:prstDash val="solid"/>
+                      <a:round/>
+                      <a:headEnd type="none" w="med" len="med"/>
+                      <a:tailEnd type="none" w="med" len="med"/>
+                    </a:lnB>
+                    <a:solidFill>
+                      <a:srgbClr val="39FF88"/>
+                    </a:solidFill>
+                  </a:tcPr>
+                </a:tc>
+                <a:tc>
+                  <a:txBody>
+                    <a:bodyPr/>
+                    <a:lstStyle/>
+                    <a:p>
+                      <a:pPr indent="0" marL="0">
+                        <a:buNone/>
+                      </a:pPr>
+                      <a:r>
+                        <a:rPr lang="en-US" sz="1300" b="1" dirty="0">
+                          <a:solidFill>
+                            <a:srgbClr val="0B0F14"/>
+                          </a:solidFill>
+                          <a:latin typeface="Courier New" pitchFamily="34" charset="0"/>
+                          <a:ea typeface="Courier New" pitchFamily="34" charset="-122"/>
+                          <a:cs typeface="Courier New" pitchFamily="34" charset="-120"/>
+                        </a:rPr>
+                        <a:t>Agent share</a:t>
+                      </a:r>
+                      <a:endParaRPr lang="en-US" sz="1300" dirty="0">
+                        <a:latin typeface="Courier New" charset="0"/>
+                        <a:ea typeface="Courier New" charset="0"/>
+                        <a:cs typeface="Courier New" charset="0"/>
+                      </a:endParaRPr>
+                    </a:p>
+                  </a:txBody>
+                  <a:tcPr marL="91440" marR="91440" marT="45720" marB="45720">
+                    <a:lnL w="12700" cap="flat" cmpd="sng" algn="ctr">
+                      <a:solidFill>
+                        <a:srgbClr val="2A3441"/>
+                      </a:solidFill>
+                      <a:prstDash val="solid"/>
+                      <a:round/>
+                      <a:headEnd type="none" w="med" len="med"/>
+                      <a:tailEnd type="none" w="med" len="med"/>
+                    </a:lnL>
+                    <a:lnR w="12700" cap="flat" cmpd="sng" algn="ctr">
+                      <a:solidFill>
+                        <a:srgbClr val="2A3441"/>
+                      </a:solidFill>
+                      <a:prstDash val="solid"/>
+                      <a:round/>
+                      <a:headEnd type="none" w="med" len="med"/>
+                      <a:tailEnd type="none" w="med" len="med"/>
+                    </a:lnR>
+                    <a:lnT w="12700" cap="flat" cmpd="sng" algn="ctr">
+                      <a:solidFill>
+                        <a:srgbClr val="2A3441"/>
+                      </a:solidFill>
+                      <a:prstDash val="solid"/>
+                      <a:round/>
+                      <a:headEnd type="none" w="med" len="med"/>
+                      <a:tailEnd type="none" w="med" len="med"/>
+                    </a:lnT>
+                    <a:lnB w="12700" cap="flat" cmpd="sng" algn="ctr">
+                      <a:solidFill>
+                        <a:srgbClr val="2A3441"/>
+                      </a:solidFill>
+                      <a:prstDash val="solid"/>
+                      <a:round/>
+                      <a:headEnd type="none" w="med" len="med"/>
+                      <a:tailEnd type="none" w="med" len="med"/>
+                    </a:lnB>
+                    <a:solidFill>
+                      <a:srgbClr val="39FF88"/>
+                    </a:solidFill>
+                  </a:tcPr>
+                </a:tc>
+                <a:tc>
+                  <a:txBody>
+                    <a:bodyPr/>
+                    <a:lstStyle/>
+                    <a:p>
+                      <a:pPr indent="0" marL="0">
+                        <a:buNone/>
+                      </a:pPr>
+                      <a:r>
+                        <a:rPr lang="en-US" sz="1300" b="1" dirty="0">
+                          <a:solidFill>
+                            <a:srgbClr val="0B0F14"/>
+                          </a:solidFill>
+                          <a:latin typeface="Courier New" pitchFamily="34" charset="0"/>
+                          <a:ea typeface="Courier New" pitchFamily="34" charset="-122"/>
+                          <a:cs typeface="Courier New" pitchFamily="34" charset="-120"/>
+                        </a:rPr>
+                        <a:t>Jain</a:t>
+                      </a:r>
+                      <a:endParaRPr lang="en-US" sz="1300" dirty="0">
+                        <a:latin typeface="Courier New" charset="0"/>
+                        <a:ea typeface="Courier New" charset="0"/>
+                        <a:cs typeface="Courier New" charset="0"/>
+                      </a:endParaRPr>
+                    </a:p>
+                  </a:txBody>
+                  <a:tcPr marL="91440" marR="91440" marT="45720" marB="45720">
+                    <a:lnL w="12700" cap="flat" cmpd="sng" algn="ctr">
+                      <a:solidFill>
+                        <a:srgbClr val="2A3441"/>
+                      </a:solidFill>
+                      <a:prstDash val="solid"/>
+                      <a:round/>
+                      <a:headEnd type="none" w="med" len="med"/>
+                      <a:tailEnd type="none" w="med" len="med"/>
+                    </a:lnL>
+                    <a:lnR w="12700" cap="flat" cmpd="sng" algn="ctr">
+                      <a:solidFill>
+                        <a:srgbClr val="2A3441"/>
+                      </a:solidFill>
+                      <a:prstDash val="solid"/>
+                      <a:round/>
+                      <a:headEnd type="none" w="med" len="med"/>
+                      <a:tailEnd type="none" w="med" len="med"/>
+                    </a:lnR>
+                    <a:lnT w="12700" cap="flat" cmpd="sng" algn="ctr">
+                      <a:solidFill>
+                        <a:srgbClr val="2A3441"/>
+                      </a:solidFill>
+                      <a:prstDash val="solid"/>
+                      <a:round/>
+                      <a:headEnd type="none" w="med" len="med"/>
+                      <a:tailEnd type="none" w="med" len="med"/>
+                    </a:lnT>
+                    <a:lnB w="12700" cap="flat" cmpd="sng" algn="ctr">
+                      <a:solidFill>
+                        <a:srgbClr val="2A3441"/>
+                      </a:solidFill>
+                      <a:prstDash val="solid"/>
+                      <a:round/>
+                      <a:headEnd type="none" w="med" len="med"/>
+                      <a:tailEnd type="none" w="med" len="med"/>
+                    </a:lnB>
+                    <a:solidFill>
+                      <a:srgbClr val="39FF88"/>
+                    </a:solidFill>
+                  </a:tcPr>
+                </a:tc>
+              </a:tr>
+              <a:tr h="384048">
+                <a:tc>
+                  <a:txBody>
+                    <a:bodyPr/>
+                    <a:lstStyle/>
+                    <a:p>
+                      <a:pPr indent="0" marL="0">
+                        <a:buNone/>
+                      </a:pPr>
+                      <a:r>
+                        <a:rPr lang="en-US" sz="1300" dirty="0">
+                          <a:solidFill>
+                            <a:srgbClr val="E6EDF3"/>
+                          </a:solidFill>
+                          <a:latin typeface="Calibri" pitchFamily="34" charset="0"/>
+                          <a:ea typeface="Calibri" pitchFamily="34" charset="-122"/>
+                          <a:cs typeface="Calibri" pitchFamily="34" charset="-120"/>
+                        </a:rPr>
+                        <a:t>Default</a:t>
+                      </a:r>
+                      <a:endParaRPr lang="en-US" sz="1300" dirty="0">
+                        <a:latin typeface="Calibri" charset="0"/>
+                        <a:ea typeface="Calibri" charset="0"/>
+                        <a:cs typeface="Calibri" charset="0"/>
+                      </a:endParaRPr>
+                    </a:p>
+                  </a:txBody>
+                  <a:tcPr marL="91440" marR="91440" marT="45720" marB="45720">
+                    <a:lnL w="12700" cap="flat" cmpd="sng" algn="ctr">
+                      <a:solidFill>
+                        <a:srgbClr val="2A3441"/>
+                      </a:solidFill>
+                      <a:prstDash val="solid"/>
+                      <a:round/>
+                      <a:headEnd type="none" w="med" len="med"/>
+                      <a:tailEnd type="none" w="med" len="med"/>
+                    </a:lnL>
+                    <a:lnR w="12700" cap="flat" cmpd="sng" algn="ctr">
+                      <a:solidFill>
+                        <a:srgbClr val="2A3441"/>
+                      </a:solidFill>
+                      <a:prstDash val="solid"/>
+                      <a:round/>
+                      <a:headEnd type="none" w="med" len="med"/>
+                      <a:tailEnd type="none" w="med" len="med"/>
+                    </a:lnR>
+                    <a:lnT w="12700" cap="flat" cmpd="sng" algn="ctr">
+                      <a:solidFill>
+                        <a:srgbClr val="2A3441"/>
+                      </a:solidFill>
+                      <a:prstDash val="solid"/>
+                      <a:round/>
+                      <a:headEnd type="none" w="med" len="med"/>
+                      <a:tailEnd type="none" w="med" len="med"/>
+                    </a:lnT>
+                    <a:lnB w="12700" cap="flat" cmpd="sng" algn="ctr">
+                      <a:solidFill>
+                        <a:srgbClr val="2A3441"/>
+                      </a:solidFill>
+                      <a:prstDash val="solid"/>
+                      <a:round/>
+                      <a:headEnd type="none" w="med" len="med"/>
+                      <a:tailEnd type="none" w="med" len="med"/>
+                    </a:lnB>
+                    <a:solidFill>
+                      <a:srgbClr val="141B24"/>
+                    </a:solidFill>
+                  </a:tcPr>
+                </a:tc>
+                <a:tc>
+                  <a:txBody>
+                    <a:bodyPr/>
+                    <a:lstStyle/>
+                    <a:p>
+                      <a:pPr indent="0" marL="0">
+                        <a:buNone/>
+                      </a:pPr>
+                      <a:r>
+                        <a:rPr lang="en-US" sz="1300" dirty="0">
+                          <a:solidFill>
+                            <a:srgbClr val="E6EDF3"/>
+                          </a:solidFill>
+                          <a:latin typeface="Calibri" pitchFamily="34" charset="0"/>
+                          <a:ea typeface="Calibri" pitchFamily="34" charset="-122"/>
+                          <a:cs typeface="Calibri" pitchFamily="34" charset="-120"/>
+                        </a:rPr>
+                        <a:t>70%</a:t>
+                      </a:r>
+                      <a:endParaRPr lang="en-US" sz="1300" dirty="0">
+                        <a:latin typeface="Calibri" charset="0"/>
+                        <a:ea typeface="Calibri" charset="0"/>
+                        <a:cs typeface="Calibri" charset="0"/>
+                      </a:endParaRPr>
+                    </a:p>
+                  </a:txBody>
+                  <a:tcPr marL="91440" marR="91440" marT="45720" marB="45720">
+                    <a:lnL w="12700" cap="flat" cmpd="sng" algn="ctr">
+                      <a:solidFill>
+                        <a:srgbClr val="2A3441"/>
+                      </a:solidFill>
+                      <a:prstDash val="solid"/>
+                      <a:round/>
+                      <a:headEnd type="none" w="med" len="med"/>
+                      <a:tailEnd type="none" w="med" len="med"/>
+                    </a:lnL>
+                    <a:lnR w="12700" cap="flat" cmpd="sng" algn="ctr">
+                      <a:solidFill>
+                        <a:srgbClr val="2A3441"/>
+                      </a:solidFill>
+                      <a:prstDash val="solid"/>
+                      <a:round/>
+                      <a:headEnd type="none" w="med" len="med"/>
+                      <a:tailEnd type="none" w="med" len="med"/>
+                    </a:lnR>
+                    <a:lnT w="12700" cap="flat" cmpd="sng" algn="ctr">
+                      <a:solidFill>
+                        <a:srgbClr val="2A3441"/>
+                      </a:solidFill>
+                      <a:prstDash val="solid"/>
+                      <a:round/>
+                      <a:headEnd type="none" w="med" len="med"/>
+                      <a:tailEnd type="none" w="med" len="med"/>
+                    </a:lnT>
+                    <a:lnB w="12700" cap="flat" cmpd="sng" algn="ctr">
+                      <a:solidFill>
+                        <a:srgbClr val="2A3441"/>
+                      </a:solidFill>
+                      <a:prstDash val="solid"/>
+                      <a:round/>
+                      <a:headEnd type="none" w="med" len="med"/>
+                      <a:tailEnd type="none" w="med" len="med"/>
+                    </a:lnB>
+                    <a:solidFill>
+                      <a:srgbClr val="141B24"/>
+                    </a:solidFill>
+                  </a:tcPr>
+                </a:tc>
+                <a:tc>
+                  <a:txBody>
+                    <a:bodyPr/>
+                    <a:lstStyle/>
+                    <a:p>
+                      <a:pPr indent="0" marL="0">
+                        <a:buNone/>
+                      </a:pPr>
+                      <a:r>
+                        <a:rPr lang="en-US" sz="1300" dirty="0">
+                          <a:solidFill>
+                            <a:srgbClr val="E6EDF3"/>
+                          </a:solidFill>
+                          <a:latin typeface="Calibri" pitchFamily="34" charset="0"/>
+                          <a:ea typeface="Calibri" pitchFamily="34" charset="-122"/>
+                          <a:cs typeface="Calibri" pitchFamily="34" charset="-120"/>
+                        </a:rPr>
+                        <a:t>0.86</a:t>
+                      </a:r>
+                      <a:endParaRPr lang="en-US" sz="1300" dirty="0">
+                        <a:latin typeface="Calibri" charset="0"/>
+                        <a:ea typeface="Calibri" charset="0"/>
+                        <a:cs typeface="Calibri" charset="0"/>
+                      </a:endParaRPr>
+                    </a:p>
+                  </a:txBody>
+                  <a:tcPr marL="91440" marR="91440" marT="45720" marB="45720">
+                    <a:lnL w="12700" cap="flat" cmpd="sng" algn="ctr">
+                      <a:solidFill>
+                        <a:srgbClr val="2A3441"/>
+                      </a:solidFill>
+                      <a:prstDash val="solid"/>
+                      <a:round/>
+                      <a:headEnd type="none" w="med" len="med"/>
+                      <a:tailEnd type="none" w="med" len="med"/>
+                    </a:lnL>
+                    <a:lnR w="12700" cap="flat" cmpd="sng" algn="ctr">
+                      <a:solidFill>
+                        <a:srgbClr val="2A3441"/>
+                      </a:solidFill>
+                      <a:prstDash val="solid"/>
+                      <a:round/>
+                      <a:headEnd type="none" w="med" len="med"/>
+                      <a:tailEnd type="none" w="med" len="med"/>
+                    </a:lnR>
+                    <a:lnT w="12700" cap="flat" cmpd="sng" algn="ctr">
+                      <a:solidFill>
+                        <a:srgbClr val="2A3441"/>
+                      </a:solidFill>
+                      <a:prstDash val="solid"/>
+                      <a:round/>
+                      <a:headEnd type="none" w="med" len="med"/>
+                      <a:tailEnd type="none" w="med" len="med"/>
+                    </a:lnT>
+                    <a:lnB w="12700" cap="flat" cmpd="sng" algn="ctr">
+                      <a:solidFill>
+                        <a:srgbClr val="2A3441"/>
+                      </a:solidFill>
+                      <a:prstDash val="solid"/>
+                      <a:round/>
+                      <a:headEnd type="none" w="med" len="med"/>
+                      <a:tailEnd type="none" w="med" len="med"/>
+                    </a:lnB>
+                    <a:solidFill>
+                      <a:srgbClr val="141B24"/>
+                    </a:solidFill>
+                  </a:tcPr>
+                </a:tc>
+              </a:tr>
+              <a:tr h="384048">
+                <a:tc>
+                  <a:txBody>
+                    <a:bodyPr/>
+                    <a:lstStyle/>
+                    <a:p>
+                      <a:pPr indent="0" marL="0">
+                        <a:buNone/>
+                      </a:pPr>
+                      <a:r>
+                        <a:rPr lang="en-US" sz="1300" dirty="0">
+                          <a:solidFill>
+                            <a:srgbClr val="E6EDF3"/>
+                          </a:solidFill>
+                          <a:latin typeface="Calibri" pitchFamily="34" charset="0"/>
+                          <a:ea typeface="Calibri" pitchFamily="34" charset="-122"/>
+                          <a:cs typeface="Calibri" pitchFamily="34" charset="-120"/>
+                        </a:rPr>
+                        <a:t>--polite 1.2</a:t>
+                      </a:r>
+                      <a:endParaRPr lang="en-US" sz="1300" dirty="0">
+                        <a:latin typeface="Calibri" charset="0"/>
+                        <a:ea typeface="Calibri" charset="0"/>
+                        <a:cs typeface="Calibri" charset="0"/>
+                      </a:endParaRPr>
+                    </a:p>
+                  </a:txBody>
+                  <a:tcPr marL="91440" marR="91440" marT="45720" marB="45720">
+                    <a:lnL w="12700" cap="flat" cmpd="sng" algn="ctr">
+                      <a:solidFill>
+                        <a:srgbClr val="2A3441"/>
+                      </a:solidFill>
+                      <a:prstDash val="solid"/>
+                      <a:round/>
+                      <a:headEnd type="none" w="med" len="med"/>
+                      <a:tailEnd type="none" w="med" len="med"/>
+                    </a:lnL>
+                    <a:lnR w="12700" cap="flat" cmpd="sng" algn="ctr">
+                      <a:solidFill>
+                        <a:srgbClr val="2A3441"/>
+                      </a:solidFill>
+                      <a:prstDash val="solid"/>
+                      <a:round/>
+                      <a:headEnd type="none" w="med" len="med"/>
+                      <a:tailEnd type="none" w="med" len="med"/>
+                    </a:lnR>
+                    <a:lnT w="12700" cap="flat" cmpd="sng" algn="ctr">
+                      <a:solidFill>
+                        <a:srgbClr val="2A3441"/>
+                      </a:solidFill>
+                      <a:prstDash val="solid"/>
+                      <a:round/>
+                      <a:headEnd type="none" w="med" len="med"/>
+                      <a:tailEnd type="none" w="med" len="med"/>
+                    </a:lnT>
+                    <a:lnB w="12700" cap="flat" cmpd="sng" algn="ctr">
+                      <a:solidFill>
+                        <a:srgbClr val="2A3441"/>
+                      </a:solidFill>
+                      <a:prstDash val="solid"/>
+                      <a:round/>
+                      <a:headEnd type="none" w="med" len="med"/>
+                      <a:tailEnd type="none" w="med" len="med"/>
+                    </a:lnB>
+                    <a:solidFill>
+                      <a:srgbClr val="141B24"/>
+                    </a:solidFill>
+                  </a:tcPr>
+                </a:tc>
+                <a:tc>
+                  <a:txBody>
+                    <a:bodyPr/>
+                    <a:lstStyle/>
+                    <a:p>
+                      <a:pPr indent="0" marL="0">
+                        <a:buNone/>
+                      </a:pPr>
+                      <a:r>
+                        <a:rPr lang="en-US" sz="1300" dirty="0">
+                          <a:solidFill>
+                            <a:srgbClr val="E6EDF3"/>
+                          </a:solidFill>
+                          <a:latin typeface="Calibri" pitchFamily="34" charset="0"/>
+                          <a:ea typeface="Calibri" pitchFamily="34" charset="-122"/>
+                          <a:cs typeface="Calibri" pitchFamily="34" charset="-120"/>
+                        </a:rPr>
+                        <a:t>49%</a:t>
+                      </a:r>
+                      <a:endParaRPr lang="en-US" sz="1300" dirty="0">
+                        <a:latin typeface="Calibri" charset="0"/>
+                        <a:ea typeface="Calibri" charset="0"/>
+                        <a:cs typeface="Calibri" charset="0"/>
+                      </a:endParaRPr>
+                    </a:p>
+                  </a:txBody>
+                  <a:tcPr marL="91440" marR="91440" marT="45720" marB="45720">
+                    <a:lnL w="12700" cap="flat" cmpd="sng" algn="ctr">
+                      <a:solidFill>
+                        <a:srgbClr val="2A3441"/>
+                      </a:solidFill>
+                      <a:prstDash val="solid"/>
+                      <a:round/>
+                      <a:headEnd type="none" w="med" len="med"/>
+                      <a:tailEnd type="none" w="med" len="med"/>
+                    </a:lnL>
+                    <a:lnR w="12700" cap="flat" cmpd="sng" algn="ctr">
+                      <a:solidFill>
+                        <a:srgbClr val="2A3441"/>
+                      </a:solidFill>
+                      <a:prstDash val="solid"/>
+                      <a:round/>
+                      <a:headEnd type="none" w="med" len="med"/>
+                      <a:tailEnd type="none" w="med" len="med"/>
+                    </a:lnR>
+                    <a:lnT w="12700" cap="flat" cmpd="sng" algn="ctr">
+                      <a:solidFill>
+                        <a:srgbClr val="2A3441"/>
+                      </a:solidFill>
+                      <a:prstDash val="solid"/>
+                      <a:round/>
+                      <a:headEnd type="none" w="med" len="med"/>
+                      <a:tailEnd type="none" w="med" len="med"/>
+                    </a:lnT>
+                    <a:lnB w="12700" cap="flat" cmpd="sng" algn="ctr">
+                      <a:solidFill>
+                        <a:srgbClr val="2A3441"/>
+                      </a:solidFill>
+                      <a:prstDash val="solid"/>
+                      <a:round/>
+                      <a:headEnd type="none" w="med" len="med"/>
+                      <a:tailEnd type="none" w="med" len="med"/>
+                    </a:lnB>
+                    <a:solidFill>
+                      <a:srgbClr val="141B24"/>
+                    </a:solidFill>
+                  </a:tcPr>
+                </a:tc>
+                <a:tc>
+                  <a:txBody>
+                    <a:bodyPr/>
+                    <a:lstStyle/>
+                    <a:p>
+                      <a:pPr indent="0" marL="0">
+                        <a:buNone/>
+                      </a:pPr>
+                      <a:r>
+                        <a:rPr lang="en-US" sz="1300" dirty="0">
+                          <a:solidFill>
+                            <a:srgbClr val="E6EDF3"/>
+                          </a:solidFill>
+                          <a:latin typeface="Calibri" pitchFamily="34" charset="0"/>
+                          <a:ea typeface="Calibri" pitchFamily="34" charset="-122"/>
+                          <a:cs typeface="Calibri" pitchFamily="34" charset="-120"/>
+                        </a:rPr>
+                        <a:t>0.95</a:t>
+                      </a:r>
+                      <a:endParaRPr lang="en-US" sz="1300" dirty="0">
+                        <a:latin typeface="Calibri" charset="0"/>
+                        <a:ea typeface="Calibri" charset="0"/>
+                        <a:cs typeface="Calibri" charset="0"/>
+                      </a:endParaRPr>
+                    </a:p>
+                  </a:txBody>
+                  <a:tcPr marL="91440" marR="91440" marT="45720" marB="45720">
+                    <a:lnL w="12700" cap="flat" cmpd="sng" algn="ctr">
+                      <a:solidFill>
+                        <a:srgbClr val="2A3441"/>
+                      </a:solidFill>
+                      <a:prstDash val="solid"/>
+                      <a:round/>
+                      <a:headEnd type="none" w="med" len="med"/>
+                      <a:tailEnd type="none" w="med" len="med"/>
+                    </a:lnL>
+                    <a:lnR w="12700" cap="flat" cmpd="sng" algn="ctr">
+                      <a:solidFill>
+                        <a:srgbClr val="2A3441"/>
+                      </a:solidFill>
+                      <a:prstDash val="solid"/>
+                      <a:round/>
+                      <a:headEnd type="none" w="med" len="med"/>
+                      <a:tailEnd type="none" w="med" len="med"/>
+                    </a:lnR>
+                    <a:lnT w="12700" cap="flat" cmpd="sng" algn="ctr">
+                      <a:solidFill>
+                        <a:srgbClr val="2A3441"/>
+                      </a:solidFill>
+                      <a:prstDash val="solid"/>
+                      <a:round/>
+                      <a:headEnd type="none" w="med" len="med"/>
+                      <a:tailEnd type="none" w="med" len="med"/>
+                    </a:lnT>
+                    <a:lnB w="12700" cap="flat" cmpd="sng" algn="ctr">
+                      <a:solidFill>
+                        <a:srgbClr val="2A3441"/>
+                      </a:solidFill>
+                      <a:prstDash val="solid"/>
+                      <a:round/>
+                      <a:headEnd type="none" w="med" len="med"/>
+                      <a:tailEnd type="none" w="med" len="med"/>
+                    </a:lnB>
+                    <a:solidFill>
+                      <a:srgbClr val="141B24"/>
+                    </a:solidFill>
+                  </a:tcPr>
+                </a:tc>
+              </a:tr>
+              <a:tr h="384048">
+                <a:tc>
+                  <a:txBody>
+                    <a:bodyPr/>
+                    <a:lstStyle/>
+                    <a:p>
+                      <a:pPr indent="0" marL="0">
+                        <a:buNone/>
+                      </a:pPr>
+                      <a:r>
+                        <a:rPr lang="en-US" sz="1300" dirty="0">
+                          <a:solidFill>
+                            <a:srgbClr val="E6EDF3"/>
+                          </a:solidFill>
+                          <a:latin typeface="Calibri" pitchFamily="34" charset="0"/>
+                          <a:ea typeface="Calibri" pitchFamily="34" charset="-122"/>
+                          <a:cs typeface="Calibri" pitchFamily="34" charset="-120"/>
+                        </a:rPr>
+                        <a:t>--polite 1.3</a:t>
+                      </a:r>
+                      <a:endParaRPr lang="en-US" sz="1300" dirty="0">
+                        <a:latin typeface="Calibri" charset="0"/>
+                        <a:ea typeface="Calibri" charset="0"/>
+                        <a:cs typeface="Calibri" charset="0"/>
+                      </a:endParaRPr>
+                    </a:p>
+                  </a:txBody>
+                  <a:tcPr marL="91440" marR="91440" marT="45720" marB="45720">
+                    <a:lnL w="12700" cap="flat" cmpd="sng" algn="ctr">
+                      <a:solidFill>
+                        <a:srgbClr val="2A3441"/>
+                      </a:solidFill>
+                      <a:prstDash val="solid"/>
+                      <a:round/>
+                      <a:headEnd type="none" w="med" len="med"/>
+                      <a:tailEnd type="none" w="med" len="med"/>
+                    </a:lnL>
+                    <a:lnR w="12700" cap="flat" cmpd="sng" algn="ctr">
+                      <a:solidFill>
+                        <a:srgbClr val="2A3441"/>
+                      </a:solidFill>
+                      <a:prstDash val="solid"/>
+                      <a:round/>
+                      <a:headEnd type="none" w="med" len="med"/>
+                      <a:tailEnd type="none" w="med" len="med"/>
+                    </a:lnR>
+                    <a:lnT w="12700" cap="flat" cmpd="sng" algn="ctr">
+                      <a:solidFill>
+                        <a:srgbClr val="2A3441"/>
+                      </a:solidFill>
+                      <a:prstDash val="solid"/>
+                      <a:round/>
+                      <a:headEnd type="none" w="med" len="med"/>
+                      <a:tailEnd type="none" w="med" len="med"/>
+                    </a:lnT>
+                    <a:lnB w="12700" cap="flat" cmpd="sng" algn="ctr">
+                      <a:solidFill>
+                        <a:srgbClr val="2A3441"/>
+                      </a:solidFill>
+                      <a:prstDash val="solid"/>
+                      <a:round/>
+                      <a:headEnd type="none" w="med" len="med"/>
+                      <a:tailEnd type="none" w="med" len="med"/>
+                    </a:lnB>
+                    <a:solidFill>
+                      <a:srgbClr val="141B24"/>
+                    </a:solidFill>
+                  </a:tcPr>
+                </a:tc>
+                <a:tc>
+                  <a:txBody>
+                    <a:bodyPr/>
+                    <a:lstStyle/>
+                    <a:p>
+                      <a:pPr indent="0" marL="0">
+                        <a:buNone/>
+                      </a:pPr>
+                      <a:r>
+                        <a:rPr lang="en-US" sz="1300" dirty="0">
+                          <a:solidFill>
+                            <a:srgbClr val="E6EDF3"/>
+                          </a:solidFill>
+                          <a:latin typeface="Calibri" pitchFamily="34" charset="0"/>
+                          <a:ea typeface="Calibri" pitchFamily="34" charset="-122"/>
+                          <a:cs typeface="Calibri" pitchFamily="34" charset="-120"/>
+                        </a:rPr>
+                        <a:t>52%</a:t>
+                      </a:r>
+                      <a:endParaRPr lang="en-US" sz="1300" dirty="0">
+                        <a:latin typeface="Calibri" charset="0"/>
+                        <a:ea typeface="Calibri" charset="0"/>
+                        <a:cs typeface="Calibri" charset="0"/>
+                      </a:endParaRPr>
+                    </a:p>
+                  </a:txBody>
+                  <a:tcPr marL="91440" marR="91440" marT="45720" marB="45720">
+                    <a:lnL w="12700" cap="flat" cmpd="sng" algn="ctr">
+                      <a:solidFill>
+                        <a:srgbClr val="2A3441"/>
+                      </a:solidFill>
+                      <a:prstDash val="solid"/>
+                      <a:round/>
+                      <a:headEnd type="none" w="med" len="med"/>
+                      <a:tailEnd type="none" w="med" len="med"/>
+                    </a:lnL>
+                    <a:lnR w="12700" cap="flat" cmpd="sng" algn="ctr">
+                      <a:solidFill>
+                        <a:srgbClr val="2A3441"/>
+                      </a:solidFill>
+                      <a:prstDash val="solid"/>
+                      <a:round/>
+                      <a:headEnd type="none" w="med" len="med"/>
+                      <a:tailEnd type="none" w="med" len="med"/>
+                    </a:lnR>
+                    <a:lnT w="12700" cap="flat" cmpd="sng" algn="ctr">
+                      <a:solidFill>
+                        <a:srgbClr val="2A3441"/>
+                      </a:solidFill>
+                      <a:prstDash val="solid"/>
+                      <a:round/>
+                      <a:headEnd type="none" w="med" len="med"/>
+                      <a:tailEnd type="none" w="med" len="med"/>
+                    </a:lnT>
+                    <a:lnB w="12700" cap="flat" cmpd="sng" algn="ctr">
+                      <a:solidFill>
+                        <a:srgbClr val="2A3441"/>
+                      </a:solidFill>
+                      <a:prstDash val="solid"/>
+                      <a:round/>
+                      <a:headEnd type="none" w="med" len="med"/>
+                      <a:tailEnd type="none" w="med" len="med"/>
+                    </a:lnB>
+                    <a:solidFill>
+                      <a:srgbClr val="141B24"/>
+                    </a:solidFill>
+                  </a:tcPr>
+                </a:tc>
+                <a:tc>
+                  <a:txBody>
+                    <a:bodyPr/>
+                    <a:lstStyle/>
+                    <a:p>
+                      <a:pPr indent="0" marL="0">
+                        <a:buNone/>
+                      </a:pPr>
+                      <a:r>
+                        <a:rPr lang="en-US" sz="1300" dirty="0">
+                          <a:solidFill>
+                            <a:srgbClr val="E6EDF3"/>
+                          </a:solidFill>
+                          <a:latin typeface="Calibri" pitchFamily="34" charset="0"/>
+                          <a:ea typeface="Calibri" pitchFamily="34" charset="-122"/>
+                          <a:cs typeface="Calibri" pitchFamily="34" charset="-120"/>
+                        </a:rPr>
+                        <a:t>0.94</a:t>
+                      </a:r>
+                      <a:endParaRPr lang="en-US" sz="1300" dirty="0">
+                        <a:latin typeface="Calibri" charset="0"/>
+                        <a:ea typeface="Calibri" charset="0"/>
+                        <a:cs typeface="Calibri" charset="0"/>
+                      </a:endParaRPr>
+                    </a:p>
+                  </a:txBody>
+                  <a:tcPr marL="91440" marR="91440" marT="45720" marB="45720">
+                    <a:lnL w="12700" cap="flat" cmpd="sng" algn="ctr">
+                      <a:solidFill>
+                        <a:srgbClr val="2A3441"/>
+                      </a:solidFill>
+                      <a:prstDash val="solid"/>
+                      <a:round/>
+                      <a:headEnd type="none" w="med" len="med"/>
+                      <a:tailEnd type="none" w="med" len="med"/>
+                    </a:lnL>
+                    <a:lnR w="12700" cap="flat" cmpd="sng" algn="ctr">
+                      <a:solidFill>
+                        <a:srgbClr val="2A3441"/>
+                      </a:solidFill>
+                      <a:prstDash val="solid"/>
+                      <a:round/>
+                      <a:headEnd type="none" w="med" len="med"/>
+                      <a:tailEnd type="none" w="med" len="med"/>
+                    </a:lnR>
+                    <a:lnT w="12700" cap="flat" cmpd="sng" algn="ctr">
+                      <a:solidFill>
+                        <a:srgbClr val="2A3441"/>
+                      </a:solidFill>
+                      <a:prstDash val="solid"/>
+                      <a:round/>
+                      <a:headEnd type="none" w="med" len="med"/>
+                      <a:tailEnd type="none" w="med" len="med"/>
+                    </a:lnT>
+                    <a:lnB w="12700" cap="flat" cmpd="sng" algn="ctr">
+                      <a:solidFill>
+                        <a:srgbClr val="2A3441"/>
+                      </a:solidFill>
+                      <a:prstDash val="solid"/>
+                      <a:round/>
+                      <a:headEnd type="none" w="med" len="med"/>
+                      <a:tailEnd type="none" w="med" len="med"/>
+                    </a:lnB>
+                    <a:solidFill>
+                      <a:srgbClr val="141B24"/>
+                    </a:solidFill>
+                  </a:tcPr>
+                </a:tc>
+              </a:tr>
+              <a:tr h="384048">
+                <a:tc>
+                  <a:txBody>
+                    <a:bodyPr/>
+                    <a:lstStyle/>
+                    <a:p>
+                      <a:pPr indent="0" marL="0">
+                        <a:buNone/>
+                      </a:pPr>
+                      <a:r>
+                        <a:rPr lang="en-US" sz="1300" dirty="0">
+                          <a:solidFill>
+                            <a:srgbClr val="E6EDF3"/>
+                          </a:solidFill>
+                          <a:latin typeface="Calibri" pitchFamily="34" charset="0"/>
+                          <a:ea typeface="Calibri" pitchFamily="34" charset="-122"/>
+                          <a:cs typeface="Calibri" pitchFamily="34" charset="-120"/>
+                        </a:rPr>
+                        <a:t>--polite 1.5</a:t>
+                      </a:r>
+                      <a:endParaRPr lang="en-US" sz="1300" dirty="0">
+                        <a:latin typeface="Calibri" charset="0"/>
+                        <a:ea typeface="Calibri" charset="0"/>
+                        <a:cs typeface="Calibri" charset="0"/>
+                      </a:endParaRPr>
+                    </a:p>
+                  </a:txBody>
+                  <a:tcPr marL="91440" marR="91440" marT="45720" marB="45720">
+                    <a:lnL w="12700" cap="flat" cmpd="sng" algn="ctr">
+                      <a:solidFill>
+                        <a:srgbClr val="2A3441"/>
+                      </a:solidFill>
+                      <a:prstDash val="solid"/>
+                      <a:round/>
+                      <a:headEnd type="none" w="med" len="med"/>
+                      <a:tailEnd type="none" w="med" len="med"/>
+                    </a:lnL>
+                    <a:lnR w="12700" cap="flat" cmpd="sng" algn="ctr">
+                      <a:solidFill>
+                        <a:srgbClr val="2A3441"/>
+                      </a:solidFill>
+                      <a:prstDash val="solid"/>
+                      <a:round/>
+                      <a:headEnd type="none" w="med" len="med"/>
+                      <a:tailEnd type="none" w="med" len="med"/>
+                    </a:lnR>
+                    <a:lnT w="12700" cap="flat" cmpd="sng" algn="ctr">
+                      <a:solidFill>
+                        <a:srgbClr val="2A3441"/>
+                      </a:solidFill>
+                      <a:prstDash val="solid"/>
+                      <a:round/>
+                      <a:headEnd type="none" w="med" len="med"/>
+                      <a:tailEnd type="none" w="med" len="med"/>
+                    </a:lnT>
+                    <a:lnB w="12700" cap="flat" cmpd="sng" algn="ctr">
+                      <a:solidFill>
+                        <a:srgbClr val="2A3441"/>
+                      </a:solidFill>
+                      <a:prstDash val="solid"/>
+                      <a:round/>
+                      <a:headEnd type="none" w="med" len="med"/>
+                      <a:tailEnd type="none" w="med" len="med"/>
+                    </a:lnB>
+                    <a:solidFill>
+                      <a:srgbClr val="141B24"/>
+                    </a:solidFill>
+                  </a:tcPr>
+                </a:tc>
+                <a:tc>
+                  <a:txBody>
+                    <a:bodyPr/>
+                    <a:lstStyle/>
+                    <a:p>
+                      <a:pPr indent="0" marL="0">
+                        <a:buNone/>
+                      </a:pPr>
+                      <a:r>
+                        <a:rPr lang="en-US" sz="1300" dirty="0">
+                          <a:solidFill>
+                            <a:srgbClr val="E6EDF3"/>
+                          </a:solidFill>
+                          <a:latin typeface="Calibri" pitchFamily="34" charset="0"/>
+                          <a:ea typeface="Calibri" pitchFamily="34" charset="-122"/>
+                          <a:cs typeface="Calibri" pitchFamily="34" charset="-120"/>
+                        </a:rPr>
+                        <a:t>59%</a:t>
+                      </a:r>
+                      <a:endParaRPr lang="en-US" sz="1300" dirty="0">
+                        <a:latin typeface="Calibri" charset="0"/>
+                        <a:ea typeface="Calibri" charset="0"/>
+                        <a:cs typeface="Calibri" charset="0"/>
+                      </a:endParaRPr>
+                    </a:p>
+                  </a:txBody>
+                  <a:tcPr marL="91440" marR="91440" marT="45720" marB="45720">
+                    <a:lnL w="12700" cap="flat" cmpd="sng" algn="ctr">
+                      <a:solidFill>
+                        <a:srgbClr val="2A3441"/>
+                      </a:solidFill>
+                      <a:prstDash val="solid"/>
+                      <a:round/>
+                      <a:headEnd type="none" w="med" len="med"/>
+                      <a:tailEnd type="none" w="med" len="med"/>
+                    </a:lnL>
+                    <a:lnR w="12700" cap="flat" cmpd="sng" algn="ctr">
+                      <a:solidFill>
+                        <a:srgbClr val="2A3441"/>
+                      </a:solidFill>
+                      <a:prstDash val="solid"/>
+                      <a:round/>
+                      <a:headEnd type="none" w="med" len="med"/>
+                      <a:tailEnd type="none" w="med" len="med"/>
+                    </a:lnR>
+                    <a:lnT w="12700" cap="flat" cmpd="sng" algn="ctr">
+                      <a:solidFill>
+                        <a:srgbClr val="2A3441"/>
+                      </a:solidFill>
+                      <a:prstDash val="solid"/>
+                      <a:round/>
+                      <a:headEnd type="none" w="med" len="med"/>
+                      <a:tailEnd type="none" w="med" len="med"/>
+                    </a:lnT>
+                    <a:lnB w="12700" cap="flat" cmpd="sng" algn="ctr">
+                      <a:solidFill>
+                        <a:srgbClr val="2A3441"/>
+                      </a:solidFill>
+                      <a:prstDash val="solid"/>
+                      <a:round/>
+                      <a:headEnd type="none" w="med" len="med"/>
+                      <a:tailEnd type="none" w="med" len="med"/>
+                    </a:lnB>
+                    <a:solidFill>
+                      <a:srgbClr val="141B24"/>
+                    </a:solidFill>
+                  </a:tcPr>
+                </a:tc>
+                <a:tc>
+                  <a:txBody>
+                    <a:bodyPr/>
+                    <a:lstStyle/>
+                    <a:p>
+                      <a:pPr indent="0" marL="0">
+                        <a:buNone/>
+                      </a:pPr>
+                      <a:r>
+                        <a:rPr lang="en-US" sz="1300" dirty="0">
+                          <a:solidFill>
+                            <a:srgbClr val="E6EDF3"/>
+                          </a:solidFill>
+                          <a:latin typeface="Calibri" pitchFamily="34" charset="0"/>
+                          <a:ea typeface="Calibri" pitchFamily="34" charset="-122"/>
+                          <a:cs typeface="Calibri" pitchFamily="34" charset="-120"/>
+                        </a:rPr>
+                        <a:t>0.90</a:t>
+                      </a:r>
+                      <a:endParaRPr lang="en-US" sz="1300" dirty="0">
+                        <a:latin typeface="Calibri" charset="0"/>
+                        <a:ea typeface="Calibri" charset="0"/>
+                        <a:cs typeface="Calibri" charset="0"/>
+                      </a:endParaRPr>
+                    </a:p>
+                  </a:txBody>
+                  <a:tcPr marL="91440" marR="91440" marT="45720" marB="45720">
+                    <a:lnL w="12700" cap="flat" cmpd="sng" algn="ctr">
+                      <a:solidFill>
+                        <a:srgbClr val="2A3441"/>
+                      </a:solidFill>
+                      <a:prstDash val="solid"/>
+                      <a:round/>
+                      <a:headEnd type="none" w="med" len="med"/>
+                      <a:tailEnd type="none" w="med" len="med"/>
+                    </a:lnL>
+                    <a:lnR w="12700" cap="flat" cmpd="sng" algn="ctr">
+                      <a:solidFill>
+                        <a:srgbClr val="2A3441"/>
+                      </a:solidFill>
+                      <a:prstDash val="solid"/>
+                      <a:round/>
+                      <a:headEnd type="none" w="med" len="med"/>
+                      <a:tailEnd type="none" w="med" len="med"/>
+                    </a:lnR>
+                    <a:lnT w="12700" cap="flat" cmpd="sng" algn="ctr">
+                      <a:solidFill>
+                        <a:srgbClr val="2A3441"/>
+                      </a:solidFill>
+                      <a:prstDash val="solid"/>
+                      <a:round/>
+                      <a:headEnd type="none" w="med" len="med"/>
+                      <a:tailEnd type="none" w="med" len="med"/>
+                    </a:lnT>
+                    <a:lnB w="12700" cap="flat" cmpd="sng" algn="ctr">
+                      <a:solidFill>
+                        <a:srgbClr val="2A3441"/>
+                      </a:solidFill>
+                      <a:prstDash val="solid"/>
+                      <a:round/>
+                      <a:headEnd type="none" w="med" len="med"/>
+                      <a:tailEnd type="none" w="med" len="med"/>
+                    </a:lnB>
+                    <a:solidFill>
+                      <a:srgbClr val="141B24"/>
+                    </a:solidFill>
+                  </a:tcPr>
+                </a:tc>
+              </a:tr>
+            </a:tbl>
+          </a:graphicData>
+        </a:graphic>
+      </p:graphicFrame>
+      <p:graphicFrame>
+        <p:nvGraphicFramePr>
+          <p:cNvPr id="81" name="Table 1"/>
+          <p:cNvGraphicFramePr>
+            <a:graphicFrameLocks noGrp="1"/>
+          </p:cNvGraphicFramePr>
+          <p:nvPr>
+            <p:extLst>
+              <p:ext uri="{D42A27DB-BD31-4B8C-83A1-F6EECF244321}">
+                <p14:modId xmlns:p14="http://schemas.microsoft.com/office/powerpoint/2010/main" val="1579011935"/>
+              </p:ext>
+            </p:extLst>
+          </p:nvPr>
+        </p:nvGraphicFramePr>
+        <p:xfrm>
+          <a:off x="6309360" y="1188720"/>
+          <a:ext cx="5394960" cy="914400"/>
+        </p:xfrm>
+        <a:graphic>
+          <a:graphicData uri="http://schemas.openxmlformats.org/drawingml/2006/table">
+            <a:tbl>
+              <a:tblPr/>
+              <a:tblGrid>
+                <a:gridCol w="2651760"/>
+                <a:gridCol w="1371600"/>
+                <a:gridCol w="1371600"/>
+              </a:tblGrid>
+              <a:tr h="384048">
+                <a:tc>
+                  <a:txBody>
+                    <a:bodyPr/>
+                    <a:lstStyle/>
+                    <a:p>
+                      <a:pPr indent="0" marL="0">
+                        <a:buNone/>
+                      </a:pPr>
+                      <a:r>
+                        <a:rPr lang="en-US" sz="1300" b="1" dirty="0">
+                          <a:solidFill>
+                            <a:srgbClr val="0B0F14"/>
+                          </a:solidFill>
+                          <a:latin typeface="Courier New" pitchFamily="34" charset="0"/>
+                          <a:ea typeface="Courier New" pitchFamily="34" charset="-122"/>
+                          <a:cs typeface="Courier New" pitchFamily="34" charset="-120"/>
+                        </a:rPr>
+                        <a:t>Bursty cross traffic</a:t>
+                      </a:r>
+                      <a:endParaRPr lang="en-US" sz="1300" dirty="0">
+                        <a:latin typeface="Courier New" charset="0"/>
+                        <a:ea typeface="Courier New" charset="0"/>
+                        <a:cs typeface="Courier New" charset="0"/>
+                      </a:endParaRPr>
+                    </a:p>
+                  </a:txBody>
+                  <a:tcPr marL="91440" marR="91440" marT="45720" marB="45720">
+                    <a:lnL w="12700" cap="flat" cmpd="sng" algn="ctr">
+                      <a:solidFill>
+                        <a:srgbClr val="2A3441"/>
+                      </a:solidFill>
+                      <a:prstDash val="solid"/>
+                      <a:round/>
+                      <a:headEnd type="none" w="med" len="med"/>
+                      <a:tailEnd type="none" w="med" len="med"/>
+                    </a:lnL>
+                    <a:lnR w="12700" cap="flat" cmpd="sng" algn="ctr">
+                      <a:solidFill>
+                        <a:srgbClr val="2A3441"/>
+                      </a:solidFill>
+                      <a:prstDash val="solid"/>
+                      <a:round/>
+                      <a:headEnd type="none" w="med" len="med"/>
+                      <a:tailEnd type="none" w="med" len="med"/>
+                    </a:lnR>
+                    <a:lnT w="12700" cap="flat" cmpd="sng" algn="ctr">
+                      <a:solidFill>
+                        <a:srgbClr val="2A3441"/>
+                      </a:solidFill>
+                      <a:prstDash val="solid"/>
+                      <a:round/>
+                      <a:headEnd type="none" w="med" len="med"/>
+                      <a:tailEnd type="none" w="med" len="med"/>
+                    </a:lnT>
+                    <a:lnB w="12700" cap="flat" cmpd="sng" algn="ctr">
+                      <a:solidFill>
+                        <a:srgbClr val="2A3441"/>
+                      </a:solidFill>
+                      <a:prstDash val="solid"/>
+                      <a:round/>
+                      <a:headEnd type="none" w="med" len="med"/>
+                      <a:tailEnd type="none" w="med" len="med"/>
+                    </a:lnB>
+                    <a:solidFill>
+                      <a:srgbClr val="39FF88"/>
+                    </a:solidFill>
+                  </a:tcPr>
+                </a:tc>
+                <a:tc>
+                  <a:txBody>
+                    <a:bodyPr/>
+                    <a:lstStyle/>
+                    <a:p>
+                      <a:pPr indent="0" marL="0">
+                        <a:buNone/>
+                      </a:pPr>
+                      <a:r>
+                        <a:rPr lang="en-US" sz="1300" b="1" dirty="0">
+                          <a:solidFill>
+                            <a:srgbClr val="0B0F14"/>
+                          </a:solidFill>
+                          <a:latin typeface="Courier New" pitchFamily="34" charset="0"/>
+                          <a:ea typeface="Courier New" pitchFamily="34" charset="-122"/>
+                          <a:cs typeface="Courier New" pitchFamily="34" charset="-120"/>
+                        </a:rPr>
+                        <a:t>Time</a:t>
+                      </a:r>
+                      <a:endParaRPr lang="en-US" sz="1300" dirty="0">
+                        <a:latin typeface="Courier New" charset="0"/>
+                        <a:ea typeface="Courier New" charset="0"/>
+                        <a:cs typeface="Courier New" charset="0"/>
+                      </a:endParaRPr>
+                    </a:p>
+                  </a:txBody>
+                  <a:tcPr marL="91440" marR="91440" marT="45720" marB="45720">
+                    <a:lnL w="12700" cap="flat" cmpd="sng" algn="ctr">
+                      <a:solidFill>
+                        <a:srgbClr val="2A3441"/>
+                      </a:solidFill>
+                      <a:prstDash val="solid"/>
+                      <a:round/>
+                      <a:headEnd type="none" w="med" len="med"/>
+                      <a:tailEnd type="none" w="med" len="med"/>
+                    </a:lnL>
+                    <a:lnR w="12700" cap="flat" cmpd="sng" algn="ctr">
+                      <a:solidFill>
+                        <a:srgbClr val="2A3441"/>
+                      </a:solidFill>
+                      <a:prstDash val="solid"/>
+                      <a:round/>
+                      <a:headEnd type="none" w="med" len="med"/>
+                      <a:tailEnd type="none" w="med" len="med"/>
+                    </a:lnR>
+                    <a:lnT w="12700" cap="flat" cmpd="sng" algn="ctr">
+                      <a:solidFill>
+                        <a:srgbClr val="2A3441"/>
+                      </a:solidFill>
+                      <a:prstDash val="solid"/>
+                      <a:round/>
+                      <a:headEnd type="none" w="med" len="med"/>
+                      <a:tailEnd type="none" w="med" len="med"/>
+                    </a:lnT>
+                    <a:lnB w="12700" cap="flat" cmpd="sng" algn="ctr">
+                      <a:solidFill>
+                        <a:srgbClr val="2A3441"/>
+                      </a:solidFill>
+                      <a:prstDash val="solid"/>
+                      <a:round/>
+                      <a:headEnd type="none" w="med" len="med"/>
+                      <a:tailEnd type="none" w="med" len="med"/>
+                    </a:lnB>
+                    <a:solidFill>
+                      <a:srgbClr val="39FF88"/>
+                    </a:solidFill>
+                  </a:tcPr>
+                </a:tc>
+                <a:tc>
+                  <a:txBody>
+                    <a:bodyPr/>
+                    <a:lstStyle/>
+                    <a:p>
+                      <a:pPr indent="0" marL="0">
+                        <a:buNone/>
+                      </a:pPr>
+                      <a:r>
+                        <a:rPr lang="en-US" sz="1300" b="1" dirty="0">
+                          <a:solidFill>
+                            <a:srgbClr val="0B0F14"/>
+                          </a:solidFill>
+                          <a:latin typeface="Courier New" pitchFamily="34" charset="0"/>
+                          <a:ea typeface="Courier New" pitchFamily="34" charset="-122"/>
+                          <a:cs typeface="Courier New" pitchFamily="34" charset="-120"/>
+                        </a:rPr>
+                        <a:t>vs AIMD</a:t>
+                      </a:r>
+                      <a:endParaRPr lang="en-US" sz="1300" dirty="0">
+                        <a:latin typeface="Courier New" charset="0"/>
+                        <a:ea typeface="Courier New" charset="0"/>
+                        <a:cs typeface="Courier New" charset="0"/>
+                      </a:endParaRPr>
+                    </a:p>
+                  </a:txBody>
+                  <a:tcPr marL="91440" marR="91440" marT="45720" marB="45720">
+                    <a:lnL w="12700" cap="flat" cmpd="sng" algn="ctr">
+                      <a:solidFill>
+                        <a:srgbClr val="2A3441"/>
+                      </a:solidFill>
+                      <a:prstDash val="solid"/>
+                      <a:round/>
+                      <a:headEnd type="none" w="med" len="med"/>
+                      <a:tailEnd type="none" w="med" len="med"/>
+                    </a:lnL>
+                    <a:lnR w="12700" cap="flat" cmpd="sng" algn="ctr">
+                      <a:solidFill>
+                        <a:srgbClr val="2A3441"/>
+                      </a:solidFill>
+                      <a:prstDash val="solid"/>
+                      <a:round/>
+                      <a:headEnd type="none" w="med" len="med"/>
+                      <a:tailEnd type="none" w="med" len="med"/>
+                    </a:lnR>
+                    <a:lnT w="12700" cap="flat" cmpd="sng" algn="ctr">
+                      <a:solidFill>
+                        <a:srgbClr val="2A3441"/>
+                      </a:solidFill>
+                      <a:prstDash val="solid"/>
+                      <a:round/>
+                      <a:headEnd type="none" w="med" len="med"/>
+                      <a:tailEnd type="none" w="med" len="med"/>
+                    </a:lnT>
+                    <a:lnB w="12700" cap="flat" cmpd="sng" algn="ctr">
+                      <a:solidFill>
+                        <a:srgbClr val="2A3441"/>
+                      </a:solidFill>
+                      <a:prstDash val="solid"/>
+                      <a:round/>
+                      <a:headEnd type="none" w="med" len="med"/>
+                      <a:tailEnd type="none" w="med" len="med"/>
+                    </a:lnB>
+                    <a:solidFill>
+                      <a:srgbClr val="39FF88"/>
+                    </a:solidFill>
+                  </a:tcPr>
+                </a:tc>
+              </a:tr>
+              <a:tr h="384048">
+                <a:tc>
+                  <a:txBody>
+                    <a:bodyPr/>
+                    <a:lstStyle/>
+                    <a:p>
+                      <a:pPr indent="0" marL="0">
+                        <a:buNone/>
+                      </a:pPr>
+                      <a:r>
+                        <a:rPr lang="en-US" sz="1300" dirty="0">
+                          <a:solidFill>
+                            <a:srgbClr val="E6EDF3"/>
+                          </a:solidFill>
+                          <a:latin typeface="Calibri" pitchFamily="34" charset="0"/>
+                          <a:ea typeface="Calibri" pitchFamily="34" charset="-122"/>
+                          <a:cs typeface="Calibri" pitchFamily="34" charset="-120"/>
+                        </a:rPr>
+                        <a:t>AIMD tuned</a:t>
+                      </a:r>
+                      <a:endParaRPr lang="en-US" sz="1300" dirty="0">
+                        <a:latin typeface="Calibri" charset="0"/>
+                        <a:ea typeface="Calibri" charset="0"/>
+                        <a:cs typeface="Calibri" charset="0"/>
+                      </a:endParaRPr>
+                    </a:p>
+                  </a:txBody>
+                  <a:tcPr marL="91440" marR="91440" marT="45720" marB="45720">
+                    <a:lnL w="12700" cap="flat" cmpd="sng" algn="ctr">
+                      <a:solidFill>
+                        <a:srgbClr val="2A3441"/>
+                      </a:solidFill>
+                      <a:prstDash val="solid"/>
+                      <a:round/>
+                      <a:headEnd type="none" w="med" len="med"/>
+                      <a:tailEnd type="none" w="med" len="med"/>
+                    </a:lnL>
+                    <a:lnR w="12700" cap="flat" cmpd="sng" algn="ctr">
+                      <a:solidFill>
+                        <a:srgbClr val="2A3441"/>
+                      </a:solidFill>
+                      <a:prstDash val="solid"/>
+                      <a:round/>
+                      <a:headEnd type="none" w="med" len="med"/>
+                      <a:tailEnd type="none" w="med" len="med"/>
+                    </a:lnR>
+                    <a:lnT w="12700" cap="flat" cmpd="sng" algn="ctr">
+                      <a:solidFill>
+                        <a:srgbClr val="2A3441"/>
+                      </a:solidFill>
+                      <a:prstDash val="solid"/>
+                      <a:round/>
+                      <a:headEnd type="none" w="med" len="med"/>
+                      <a:tailEnd type="none" w="med" len="med"/>
+                    </a:lnT>
+                    <a:lnB w="12700" cap="flat" cmpd="sng" algn="ctr">
+                      <a:solidFill>
+                        <a:srgbClr val="2A3441"/>
+                      </a:solidFill>
+                      <a:prstDash val="solid"/>
+                      <a:round/>
+                      <a:headEnd type="none" w="med" len="med"/>
+                      <a:tailEnd type="none" w="med" len="med"/>
+                    </a:lnB>
+                    <a:solidFill>
+                      <a:srgbClr val="141B24"/>
+                    </a:solidFill>
+                  </a:tcPr>
+                </a:tc>
+                <a:tc>
+                  <a:txBody>
+                    <a:bodyPr/>
+                    <a:lstStyle/>
+                    <a:p>
+                      <a:pPr indent="0" marL="0">
+                        <a:buNone/>
+                      </a:pPr>
+                      <a:r>
+                        <a:rPr lang="en-US" sz="1300" dirty="0">
+                          <a:solidFill>
+                            <a:srgbClr val="E6EDF3"/>
+                          </a:solidFill>
+                          <a:latin typeface="Calibri" pitchFamily="34" charset="0"/>
+                          <a:ea typeface="Calibri" pitchFamily="34" charset="-122"/>
+                          <a:cs typeface="Calibri" pitchFamily="34" charset="-120"/>
+                        </a:rPr>
+                        <a:t>5.73 s</a:t>
+                      </a:r>
+                      <a:endParaRPr lang="en-US" sz="1300" dirty="0">
+                        <a:latin typeface="Calibri" charset="0"/>
+                        <a:ea typeface="Calibri" charset="0"/>
+                        <a:cs typeface="Calibri" charset="0"/>
+                      </a:endParaRPr>
+                    </a:p>
+                  </a:txBody>
+                  <a:tcPr marL="91440" marR="91440" marT="45720" marB="45720">
+                    <a:lnL w="12700" cap="flat" cmpd="sng" algn="ctr">
+                      <a:solidFill>
+                        <a:srgbClr val="2A3441"/>
+                      </a:solidFill>
+                      <a:prstDash val="solid"/>
+                      <a:round/>
+                      <a:headEnd type="none" w="med" len="med"/>
+                      <a:tailEnd type="none" w="med" len="med"/>
+                    </a:lnL>
+                    <a:lnR w="12700" cap="flat" cmpd="sng" algn="ctr">
+                      <a:solidFill>
+                        <a:srgbClr val="2A3441"/>
+                      </a:solidFill>
+                      <a:prstDash val="solid"/>
+                      <a:round/>
+                      <a:headEnd type="none" w="med" len="med"/>
+                      <a:tailEnd type="none" w="med" len="med"/>
+                    </a:lnR>
+                    <a:lnT w="12700" cap="flat" cmpd="sng" algn="ctr">
+                      <a:solidFill>
+                        <a:srgbClr val="2A3441"/>
+                      </a:solidFill>
+                      <a:prstDash val="solid"/>
+                      <a:round/>
+                      <a:headEnd type="none" w="med" len="med"/>
+                      <a:tailEnd type="none" w="med" len="med"/>
+                    </a:lnT>
+                    <a:lnB w="12700" cap="flat" cmpd="sng" algn="ctr">
+                      <a:solidFill>
+                        <a:srgbClr val="2A3441"/>
+                      </a:solidFill>
+                      <a:prstDash val="solid"/>
+                      <a:round/>
+                      <a:headEnd type="none" w="med" len="med"/>
+                      <a:tailEnd type="none" w="med" len="med"/>
+                    </a:lnB>
+                    <a:solidFill>
+                      <a:srgbClr val="141B24"/>
+                    </a:solidFill>
+                  </a:tcPr>
+                </a:tc>
+                <a:tc>
+                  <a:txBody>
+                    <a:bodyPr/>
+                    <a:lstStyle/>
+                    <a:p>
+                      <a:pPr indent="0" marL="0">
+                        <a:buNone/>
+                      </a:pPr>
+                      <a:r>
+                        <a:rPr lang="en-US" sz="1300" dirty="0">
+                          <a:solidFill>
+                            <a:srgbClr val="E6EDF3"/>
+                          </a:solidFill>
+                          <a:latin typeface="Calibri" pitchFamily="34" charset="0"/>
+                          <a:ea typeface="Calibri" pitchFamily="34" charset="-122"/>
+                          <a:cs typeface="Calibri" pitchFamily="34" charset="-120"/>
+                        </a:rPr>
+                        <a:t>1.00</a:t>
+                      </a:r>
+                      <a:endParaRPr lang="en-US" sz="1300" dirty="0">
+                        <a:latin typeface="Calibri" charset="0"/>
+                        <a:ea typeface="Calibri" charset="0"/>
+                        <a:cs typeface="Calibri" charset="0"/>
+                      </a:endParaRPr>
+                    </a:p>
+                  </a:txBody>
+                  <a:tcPr marL="91440" marR="91440" marT="45720" marB="45720">
+                    <a:lnL w="12700" cap="flat" cmpd="sng" algn="ctr">
+                      <a:solidFill>
+                        <a:srgbClr val="2A3441"/>
+                      </a:solidFill>
+                      <a:prstDash val="solid"/>
+                      <a:round/>
+                      <a:headEnd type="none" w="med" len="med"/>
+                      <a:tailEnd type="none" w="med" len="med"/>
+                    </a:lnL>
+                    <a:lnR w="12700" cap="flat" cmpd="sng" algn="ctr">
+                      <a:solidFill>
+                        <a:srgbClr val="2A3441"/>
+                      </a:solidFill>
+                      <a:prstDash val="solid"/>
+                      <a:round/>
+                      <a:headEnd type="none" w="med" len="med"/>
+                      <a:tailEnd type="none" w="med" len="med"/>
+                    </a:lnR>
+                    <a:lnT w="12700" cap="flat" cmpd="sng" algn="ctr">
+                      <a:solidFill>
+                        <a:srgbClr val="2A3441"/>
+                      </a:solidFill>
+                      <a:prstDash val="solid"/>
+                      <a:round/>
+                      <a:headEnd type="none" w="med" len="med"/>
+                      <a:tailEnd type="none" w="med" len="med"/>
+                    </a:lnT>
+                    <a:lnB w="12700" cap="flat" cmpd="sng" algn="ctr">
+                      <a:solidFill>
+                        <a:srgbClr val="2A3441"/>
+                      </a:solidFill>
+                      <a:prstDash val="solid"/>
+                      <a:round/>
+                      <a:headEnd type="none" w="med" len="med"/>
+                      <a:tailEnd type="none" w="med" len="med"/>
+                    </a:lnB>
+                    <a:solidFill>
+                      <a:srgbClr val="141B24"/>
+                    </a:solidFill>
+                  </a:tcPr>
+                </a:tc>
+              </a:tr>
+              <a:tr h="384048">
+                <a:tc>
+                  <a:txBody>
+                    <a:bodyPr/>
+                    <a:lstStyle/>
+                    <a:p>
+                      <a:pPr indent="0" marL="0">
+                        <a:buNone/>
+                      </a:pPr>
+                      <a:r>
+                        <a:rPr lang="en-US" sz="1300" dirty="0">
+                          <a:solidFill>
+                            <a:srgbClr val="E6EDF3"/>
+                          </a:solidFill>
+                          <a:latin typeface="Calibri" pitchFamily="34" charset="0"/>
+                          <a:ea typeface="Calibri" pitchFamily="34" charset="-122"/>
+                          <a:cs typeface="Calibri" pitchFamily="34" charset="-120"/>
+                        </a:rPr>
+                        <a:t>CUBIC tuned</a:t>
+                      </a:r>
+                      <a:endParaRPr lang="en-US" sz="1300" dirty="0">
+                        <a:latin typeface="Calibri" charset="0"/>
+                        <a:ea typeface="Calibri" charset="0"/>
+                        <a:cs typeface="Calibri" charset="0"/>
+                      </a:endParaRPr>
+                    </a:p>
+                  </a:txBody>
+                  <a:tcPr marL="91440" marR="91440" marT="45720" marB="45720">
+                    <a:lnL w="12700" cap="flat" cmpd="sng" algn="ctr">
+                      <a:solidFill>
+                        <a:srgbClr val="2A3441"/>
+                      </a:solidFill>
+                      <a:prstDash val="solid"/>
+                      <a:round/>
+                      <a:headEnd type="none" w="med" len="med"/>
+                      <a:tailEnd type="none" w="med" len="med"/>
+                    </a:lnL>
+                    <a:lnR w="12700" cap="flat" cmpd="sng" algn="ctr">
+                      <a:solidFill>
+                        <a:srgbClr val="2A3441"/>
+                      </a:solidFill>
+                      <a:prstDash val="solid"/>
+                      <a:round/>
+                      <a:headEnd type="none" w="med" len="med"/>
+                      <a:tailEnd type="none" w="med" len="med"/>
+                    </a:lnR>
+                    <a:lnT w="12700" cap="flat" cmpd="sng" algn="ctr">
+                      <a:solidFill>
+                        <a:srgbClr val="2A3441"/>
+                      </a:solidFill>
+                      <a:prstDash val="solid"/>
+                      <a:round/>
+                      <a:headEnd type="none" w="med" len="med"/>
+                      <a:tailEnd type="none" w="med" len="med"/>
+                    </a:lnT>
+                    <a:lnB w="12700" cap="flat" cmpd="sng" algn="ctr">
+                      <a:solidFill>
+                        <a:srgbClr val="2A3441"/>
+                      </a:solidFill>
+                      <a:prstDash val="solid"/>
+                      <a:round/>
+                      <a:headEnd type="none" w="med" len="med"/>
+                      <a:tailEnd type="none" w="med" len="med"/>
+                    </a:lnB>
+                    <a:solidFill>
+                      <a:srgbClr val="141B24"/>
+                    </a:solidFill>
+                  </a:tcPr>
+                </a:tc>
+                <a:tc>
+                  <a:txBody>
+                    <a:bodyPr/>
+                    <a:lstStyle/>
+                    <a:p>
+                      <a:pPr indent="0" marL="0">
+                        <a:buNone/>
+                      </a:pPr>
+                      <a:r>
+                        <a:rPr lang="en-US" sz="1300" dirty="0">
+                          <a:solidFill>
+                            <a:srgbClr val="E6EDF3"/>
+                          </a:solidFill>
+                          <a:latin typeface="Calibri" pitchFamily="34" charset="0"/>
+                          <a:ea typeface="Calibri" pitchFamily="34" charset="-122"/>
+                          <a:cs typeface="Calibri" pitchFamily="34" charset="-120"/>
+                        </a:rPr>
+                        <a:t>4.55 s</a:t>
+                      </a:r>
+                      <a:endParaRPr lang="en-US" sz="1300" dirty="0">
+                        <a:latin typeface="Calibri" charset="0"/>
+                        <a:ea typeface="Calibri" charset="0"/>
+                        <a:cs typeface="Calibri" charset="0"/>
+                      </a:endParaRPr>
+                    </a:p>
+                  </a:txBody>
+                  <a:tcPr marL="91440" marR="91440" marT="45720" marB="45720">
+                    <a:lnL w="12700" cap="flat" cmpd="sng" algn="ctr">
+                      <a:solidFill>
+                        <a:srgbClr val="2A3441"/>
+                      </a:solidFill>
+                      <a:prstDash val="solid"/>
+                      <a:round/>
+                      <a:headEnd type="none" w="med" len="med"/>
+                      <a:tailEnd type="none" w="med" len="med"/>
+                    </a:lnL>
+                    <a:lnR w="12700" cap="flat" cmpd="sng" algn="ctr">
+                      <a:solidFill>
+                        <a:srgbClr val="2A3441"/>
+                      </a:solidFill>
+                      <a:prstDash val="solid"/>
+                      <a:round/>
+                      <a:headEnd type="none" w="med" len="med"/>
+                      <a:tailEnd type="none" w="med" len="med"/>
+                    </a:lnR>
+                    <a:lnT w="12700" cap="flat" cmpd="sng" algn="ctr">
+                      <a:solidFill>
+                        <a:srgbClr val="2A3441"/>
+                      </a:solidFill>
+                      <a:prstDash val="solid"/>
+                      <a:round/>
+                      <a:headEnd type="none" w="med" len="med"/>
+                      <a:tailEnd type="none" w="med" len="med"/>
+                    </a:lnT>
+                    <a:lnB w="12700" cap="flat" cmpd="sng" algn="ctr">
+                      <a:solidFill>
+                        <a:srgbClr val="2A3441"/>
+                      </a:solidFill>
+                      <a:prstDash val="solid"/>
+                      <a:round/>
+                      <a:headEnd type="none" w="med" len="med"/>
+                      <a:tailEnd type="none" w="med" len="med"/>
+                    </a:lnB>
+                    <a:solidFill>
+                      <a:srgbClr val="141B24"/>
+                    </a:solidFill>
+                  </a:tcPr>
+                </a:tc>
+                <a:tc>
+                  <a:txBody>
+                    <a:bodyPr/>
+                    <a:lstStyle/>
+                    <a:p>
+                      <a:pPr indent="0" marL="0">
+                        <a:buNone/>
+                      </a:pPr>
+                      <a:r>
+                        <a:rPr lang="en-US" sz="1300" dirty="0">
+                          <a:solidFill>
+                            <a:srgbClr val="E6EDF3"/>
+                          </a:solidFill>
+                          <a:latin typeface="Calibri" pitchFamily="34" charset="0"/>
+                          <a:ea typeface="Calibri" pitchFamily="34" charset="-122"/>
+                          <a:cs typeface="Calibri" pitchFamily="34" charset="-120"/>
+                        </a:rPr>
+                        <a:t>0.79</a:t>
+                      </a:r>
+                      <a:endParaRPr lang="en-US" sz="1300" dirty="0">
+                        <a:latin typeface="Calibri" charset="0"/>
+                        <a:ea typeface="Calibri" charset="0"/>
+                        <a:cs typeface="Calibri" charset="0"/>
+                      </a:endParaRPr>
+                    </a:p>
+                  </a:txBody>
+                  <a:tcPr marL="91440" marR="91440" marT="45720" marB="45720">
+                    <a:lnL w="12700" cap="flat" cmpd="sng" algn="ctr">
+                      <a:solidFill>
+                        <a:srgbClr val="2A3441"/>
+                      </a:solidFill>
+                      <a:prstDash val="solid"/>
+                      <a:round/>
+                      <a:headEnd type="none" w="med" len="med"/>
+                      <a:tailEnd type="none" w="med" len="med"/>
+                    </a:lnL>
+                    <a:lnR w="12700" cap="flat" cmpd="sng" algn="ctr">
+                      <a:solidFill>
+                        <a:srgbClr val="2A3441"/>
+                      </a:solidFill>
+                      <a:prstDash val="solid"/>
+                      <a:round/>
+                      <a:headEnd type="none" w="med" len="med"/>
+                      <a:tailEnd type="none" w="med" len="med"/>
+                    </a:lnR>
+                    <a:lnT w="12700" cap="flat" cmpd="sng" algn="ctr">
+                      <a:solidFill>
+                        <a:srgbClr val="2A3441"/>
+                      </a:solidFill>
+                      <a:prstDash val="solid"/>
+                      <a:round/>
+                      <a:headEnd type="none" w="med" len="med"/>
+                      <a:tailEnd type="none" w="med" len="med"/>
+                    </a:lnT>
+                    <a:lnB w="12700" cap="flat" cmpd="sng" algn="ctr">
+                      <a:solidFill>
+                        <a:srgbClr val="2A3441"/>
+                      </a:solidFill>
+                      <a:prstDash val="solid"/>
+                      <a:round/>
+                      <a:headEnd type="none" w="med" len="med"/>
+                      <a:tailEnd type="none" w="med" len="med"/>
+                    </a:lnB>
+                    <a:solidFill>
+                      <a:srgbClr val="141B24"/>
+                    </a:solidFill>
+                  </a:tcPr>
+                </a:tc>
+              </a:tr>
+              <a:tr h="384048">
+                <a:tc>
+                  <a:txBody>
+                    <a:bodyPr/>
+                    <a:lstStyle/>
+                    <a:p>
+                      <a:pPr indent="0" marL="0">
+                        <a:buNone/>
+                      </a:pPr>
+                      <a:r>
+                        <a:rPr lang="en-US" sz="1300" dirty="0">
+                          <a:solidFill>
+                            <a:srgbClr val="E6EDF3"/>
+                          </a:solidFill>
+                          <a:latin typeface="Calibri" pitchFamily="34" charset="0"/>
+                          <a:ea typeface="Calibri" pitchFamily="34" charset="-122"/>
+                          <a:cs typeface="Calibri" pitchFamily="34" charset="-120"/>
+                        </a:rPr>
+                        <a:t>Neural agent</a:t>
+                      </a:r>
+                      <a:endParaRPr lang="en-US" sz="1300" dirty="0">
+                        <a:latin typeface="Calibri" charset="0"/>
+                        <a:ea typeface="Calibri" charset="0"/>
+                        <a:cs typeface="Calibri" charset="0"/>
+                      </a:endParaRPr>
+                    </a:p>
+                  </a:txBody>
+                  <a:tcPr marL="91440" marR="91440" marT="45720" marB="45720">
+                    <a:lnL w="12700" cap="flat" cmpd="sng" algn="ctr">
+                      <a:solidFill>
+                        <a:srgbClr val="2A3441"/>
+                      </a:solidFill>
+                      <a:prstDash val="solid"/>
+                      <a:round/>
+                      <a:headEnd type="none" w="med" len="med"/>
+                      <a:tailEnd type="none" w="med" len="med"/>
+                    </a:lnL>
+                    <a:lnR w="12700" cap="flat" cmpd="sng" algn="ctr">
+                      <a:solidFill>
+                        <a:srgbClr val="2A3441"/>
+                      </a:solidFill>
+                      <a:prstDash val="solid"/>
+                      <a:round/>
+                      <a:headEnd type="none" w="med" len="med"/>
+                      <a:tailEnd type="none" w="med" len="med"/>
+                    </a:lnR>
+                    <a:lnT w="12700" cap="flat" cmpd="sng" algn="ctr">
+                      <a:solidFill>
+                        <a:srgbClr val="2A3441"/>
+                      </a:solidFill>
+                      <a:prstDash val="solid"/>
+                      <a:round/>
+                      <a:headEnd type="none" w="med" len="med"/>
+                      <a:tailEnd type="none" w="med" len="med"/>
+                    </a:lnT>
+                    <a:lnB w="12700" cap="flat" cmpd="sng" algn="ctr">
+                      <a:solidFill>
+                        <a:srgbClr val="2A3441"/>
+                      </a:solidFill>
+                      <a:prstDash val="solid"/>
+                      <a:round/>
+                      <a:headEnd type="none" w="med" len="med"/>
+                      <a:tailEnd type="none" w="med" len="med"/>
+                    </a:lnB>
+                    <a:solidFill>
+                      <a:srgbClr val="141B24"/>
+                    </a:solidFill>
+                  </a:tcPr>
+                </a:tc>
+                <a:tc>
+                  <a:txBody>
+                    <a:bodyPr/>
+                    <a:lstStyle/>
+                    <a:p>
+                      <a:pPr indent="0" marL="0">
+                        <a:buNone/>
+                      </a:pPr>
+                      <a:r>
+                        <a:rPr lang="en-US" sz="1300" dirty="0">
+                          <a:solidFill>
+                            <a:srgbClr val="E6EDF3"/>
+                          </a:solidFill>
+                          <a:latin typeface="Calibri" pitchFamily="34" charset="0"/>
+                          <a:ea typeface="Calibri" pitchFamily="34" charset="-122"/>
+                          <a:cs typeface="Calibri" pitchFamily="34" charset="-120"/>
+                        </a:rPr>
+                        <a:t>4.87 s</a:t>
+                      </a:r>
+                      <a:endParaRPr lang="en-US" sz="1300" dirty="0">
+                        <a:latin typeface="Calibri" charset="0"/>
+                        <a:ea typeface="Calibri" charset="0"/>
+                        <a:cs typeface="Calibri" charset="0"/>
+                      </a:endParaRPr>
+                    </a:p>
+                  </a:txBody>
+                  <a:tcPr marL="91440" marR="91440" marT="45720" marB="45720">
+                    <a:lnL w="12700" cap="flat" cmpd="sng" algn="ctr">
+                      <a:solidFill>
+                        <a:srgbClr val="2A3441"/>
+                      </a:solidFill>
+                      <a:prstDash val="solid"/>
+                      <a:round/>
+                      <a:headEnd type="none" w="med" len="med"/>
+                      <a:tailEnd type="none" w="med" len="med"/>
+                    </a:lnL>
+                    <a:lnR w="12700" cap="flat" cmpd="sng" algn="ctr">
+                      <a:solidFill>
+                        <a:srgbClr val="2A3441"/>
+                      </a:solidFill>
+                      <a:prstDash val="solid"/>
+                      <a:round/>
+                      <a:headEnd type="none" w="med" len="med"/>
+                      <a:tailEnd type="none" w="med" len="med"/>
+                    </a:lnR>
+                    <a:lnT w="12700" cap="flat" cmpd="sng" algn="ctr">
+                      <a:solidFill>
+                        <a:srgbClr val="2A3441"/>
+                      </a:solidFill>
+                      <a:prstDash val="solid"/>
+                      <a:round/>
+                      <a:headEnd type="none" w="med" len="med"/>
+                      <a:tailEnd type="none" w="med" len="med"/>
+                    </a:lnT>
+                    <a:lnB w="12700" cap="flat" cmpd="sng" algn="ctr">
+                      <a:solidFill>
+                        <a:srgbClr val="2A3441"/>
+                      </a:solidFill>
+                      <a:prstDash val="solid"/>
+                      <a:round/>
+                      <a:headEnd type="none" w="med" len="med"/>
+                      <a:tailEnd type="none" w="med" len="med"/>
+                    </a:lnB>
+                    <a:solidFill>
+                      <a:srgbClr val="141B24"/>
+                    </a:solidFill>
+                  </a:tcPr>
+                </a:tc>
+                <a:tc>
+                  <a:txBody>
+                    <a:bodyPr/>
+                    <a:lstStyle/>
+                    <a:p>
+                      <a:pPr indent="0" marL="0">
+                        <a:buNone/>
+                      </a:pPr>
+                      <a:r>
+                        <a:rPr lang="en-US" sz="1300" dirty="0">
+                          <a:solidFill>
+                            <a:srgbClr val="E6EDF3"/>
+                          </a:solidFill>
+                          <a:latin typeface="Calibri" pitchFamily="34" charset="0"/>
+                          <a:ea typeface="Calibri" pitchFamily="34" charset="-122"/>
+                          <a:cs typeface="Calibri" pitchFamily="34" charset="-120"/>
+                        </a:rPr>
+                        <a:t>0.85</a:t>
+                      </a:r>
+                      <a:endParaRPr lang="en-US" sz="1300" dirty="0">
+                        <a:latin typeface="Calibri" charset="0"/>
+                        <a:ea typeface="Calibri" charset="0"/>
+                        <a:cs typeface="Calibri" charset="0"/>
+                      </a:endParaRPr>
+                    </a:p>
+                  </a:txBody>
+                  <a:tcPr marL="91440" marR="91440" marT="45720" marB="45720">
+                    <a:lnL w="12700" cap="flat" cmpd="sng" algn="ctr">
+                      <a:solidFill>
+                        <a:srgbClr val="2A3441"/>
+                      </a:solidFill>
+                      <a:prstDash val="solid"/>
+                      <a:round/>
+                      <a:headEnd type="none" w="med" len="med"/>
+                      <a:tailEnd type="none" w="med" len="med"/>
+                    </a:lnL>
+                    <a:lnR w="12700" cap="flat" cmpd="sng" algn="ctr">
+                      <a:solidFill>
+                        <a:srgbClr val="2A3441"/>
+                      </a:solidFill>
+                      <a:prstDash val="solid"/>
+                      <a:round/>
+                      <a:headEnd type="none" w="med" len="med"/>
+                      <a:tailEnd type="none" w="med" len="med"/>
+                    </a:lnR>
+                    <a:lnT w="12700" cap="flat" cmpd="sng" algn="ctr">
+                      <a:solidFill>
+                        <a:srgbClr val="2A3441"/>
+                      </a:solidFill>
+                      <a:prstDash val="solid"/>
+                      <a:round/>
+                      <a:headEnd type="none" w="med" len="med"/>
+                      <a:tailEnd type="none" w="med" len="med"/>
+                    </a:lnT>
+                    <a:lnB w="12700" cap="flat" cmpd="sng" algn="ctr">
+                      <a:solidFill>
+                        <a:srgbClr val="2A3441"/>
+                      </a:solidFill>
+                      <a:prstDash val="solid"/>
+                      <a:round/>
+                      <a:headEnd type="none" w="med" len="med"/>
+                      <a:tailEnd type="none" w="med" len="med"/>
+                    </a:lnB>
+                    <a:solidFill>
+                      <a:srgbClr val="141B24"/>
+                    </a:solidFill>
+                  </a:tcPr>
+                </a:tc>
+              </a:tr>
+              <a:tr h="384048">
+                <a:tc>
+                  <a:txBody>
+                    <a:bodyPr/>
+                    <a:lstStyle/>
+                    <a:p>
+                      <a:pPr indent="0" marL="0">
+                        <a:buNone/>
+                      </a:pPr>
+                      <a:r>
+                        <a:rPr lang="en-US" sz="1300" dirty="0">
+                          <a:solidFill>
+                            <a:srgbClr val="E6EDF3"/>
+                          </a:solidFill>
+                          <a:latin typeface="Calibri" pitchFamily="34" charset="0"/>
+                          <a:ea typeface="Calibri" pitchFamily="34" charset="-122"/>
+                          <a:cs typeface="Calibri" pitchFamily="34" charset="-120"/>
+                        </a:rPr>
+                        <a:t>Neural, polite 1.3</a:t>
+                      </a:r>
+                      <a:endParaRPr lang="en-US" sz="1300" dirty="0">
+                        <a:latin typeface="Calibri" charset="0"/>
+                        <a:ea typeface="Calibri" charset="0"/>
+                        <a:cs typeface="Calibri" charset="0"/>
+                      </a:endParaRPr>
+                    </a:p>
+                  </a:txBody>
+                  <a:tcPr marL="91440" marR="91440" marT="45720" marB="45720">
+                    <a:lnL w="12700" cap="flat" cmpd="sng" algn="ctr">
+                      <a:solidFill>
+                        <a:srgbClr val="2A3441"/>
+                      </a:solidFill>
+                      <a:prstDash val="solid"/>
+                      <a:round/>
+                      <a:headEnd type="none" w="med" len="med"/>
+                      <a:tailEnd type="none" w="med" len="med"/>
+                    </a:lnL>
+                    <a:lnR w="12700" cap="flat" cmpd="sng" algn="ctr">
+                      <a:solidFill>
+                        <a:srgbClr val="2A3441"/>
+                      </a:solidFill>
+                      <a:prstDash val="solid"/>
+                      <a:round/>
+                      <a:headEnd type="none" w="med" len="med"/>
+                      <a:tailEnd type="none" w="med" len="med"/>
+                    </a:lnR>
+                    <a:lnT w="12700" cap="flat" cmpd="sng" algn="ctr">
+                      <a:solidFill>
+                        <a:srgbClr val="2A3441"/>
+                      </a:solidFill>
+                      <a:prstDash val="solid"/>
+                      <a:round/>
+                      <a:headEnd type="none" w="med" len="med"/>
+                      <a:tailEnd type="none" w="med" len="med"/>
+                    </a:lnT>
+                    <a:lnB w="12700" cap="flat" cmpd="sng" algn="ctr">
+                      <a:solidFill>
+                        <a:srgbClr val="2A3441"/>
+                      </a:solidFill>
+                      <a:prstDash val="solid"/>
+                      <a:round/>
+                      <a:headEnd type="none" w="med" len="med"/>
+                      <a:tailEnd type="none" w="med" len="med"/>
+                    </a:lnB>
+                    <a:solidFill>
+                      <a:srgbClr val="141B24"/>
+                    </a:solidFill>
+                  </a:tcPr>
+                </a:tc>
+                <a:tc>
+                  <a:txBody>
+                    <a:bodyPr/>
+                    <a:lstStyle/>
+                    <a:p>
+                      <a:pPr indent="0" marL="0">
+                        <a:buNone/>
+                      </a:pPr>
+                      <a:r>
+                        <a:rPr lang="en-US" sz="1300" dirty="0">
+                          <a:solidFill>
+                            <a:srgbClr val="E6EDF3"/>
+                          </a:solidFill>
+                          <a:latin typeface="Calibri" pitchFamily="34" charset="0"/>
+                          <a:ea typeface="Calibri" pitchFamily="34" charset="-122"/>
+                          <a:cs typeface="Calibri" pitchFamily="34" charset="-120"/>
+                        </a:rPr>
+                        <a:t>4.92 s</a:t>
+                      </a:r>
+                      <a:endParaRPr lang="en-US" sz="1300" dirty="0">
+                        <a:latin typeface="Calibri" charset="0"/>
+                        <a:ea typeface="Calibri" charset="0"/>
+                        <a:cs typeface="Calibri" charset="0"/>
+                      </a:endParaRPr>
+                    </a:p>
+                  </a:txBody>
+                  <a:tcPr marL="91440" marR="91440" marT="45720" marB="45720">
+                    <a:lnL w="12700" cap="flat" cmpd="sng" algn="ctr">
+                      <a:solidFill>
+                        <a:srgbClr val="2A3441"/>
+                      </a:solidFill>
+                      <a:prstDash val="solid"/>
+                      <a:round/>
+                      <a:headEnd type="none" w="med" len="med"/>
+                      <a:tailEnd type="none" w="med" len="med"/>
+                    </a:lnL>
+                    <a:lnR w="12700" cap="flat" cmpd="sng" algn="ctr">
+                      <a:solidFill>
+                        <a:srgbClr val="2A3441"/>
+                      </a:solidFill>
+                      <a:prstDash val="solid"/>
+                      <a:round/>
+                      <a:headEnd type="none" w="med" len="med"/>
+                      <a:tailEnd type="none" w="med" len="med"/>
+                    </a:lnR>
+                    <a:lnT w="12700" cap="flat" cmpd="sng" algn="ctr">
+                      <a:solidFill>
+                        <a:srgbClr val="2A3441"/>
+                      </a:solidFill>
+                      <a:prstDash val="solid"/>
+                      <a:round/>
+                      <a:headEnd type="none" w="med" len="med"/>
+                      <a:tailEnd type="none" w="med" len="med"/>
+                    </a:lnT>
+                    <a:lnB w="12700" cap="flat" cmpd="sng" algn="ctr">
+                      <a:solidFill>
+                        <a:srgbClr val="2A3441"/>
+                      </a:solidFill>
+                      <a:prstDash val="solid"/>
+                      <a:round/>
+                      <a:headEnd type="none" w="med" len="med"/>
+                      <a:tailEnd type="none" w="med" len="med"/>
+                    </a:lnB>
+                    <a:solidFill>
+                      <a:srgbClr val="141B24"/>
+                    </a:solidFill>
+                  </a:tcPr>
+                </a:tc>
+                <a:tc>
+                  <a:txBody>
+                    <a:bodyPr/>
+                    <a:lstStyle/>
+                    <a:p>
+                      <a:pPr indent="0" marL="0">
+                        <a:buNone/>
+                      </a:pPr>
+                      <a:r>
+                        <a:rPr lang="en-US" sz="1300" dirty="0">
+                          <a:solidFill>
+                            <a:srgbClr val="E6EDF3"/>
+                          </a:solidFill>
+                          <a:latin typeface="Calibri" pitchFamily="34" charset="0"/>
+                          <a:ea typeface="Calibri" pitchFamily="34" charset="-122"/>
+                          <a:cs typeface="Calibri" pitchFamily="34" charset="-120"/>
+                        </a:rPr>
+                        <a:t>0.86</a:t>
+                      </a:r>
+                      <a:endParaRPr lang="en-US" sz="1300" dirty="0">
+                        <a:latin typeface="Calibri" charset="0"/>
+                        <a:ea typeface="Calibri" charset="0"/>
+                        <a:cs typeface="Calibri" charset="0"/>
+                      </a:endParaRPr>
+                    </a:p>
+                  </a:txBody>
+                  <a:tcPr marL="91440" marR="91440" marT="45720" marB="45720">
+                    <a:lnL w="12700" cap="flat" cmpd="sng" algn="ctr">
+                      <a:solidFill>
+                        <a:srgbClr val="2A3441"/>
+                      </a:solidFill>
+                      <a:prstDash val="solid"/>
+                      <a:round/>
+                      <a:headEnd type="none" w="med" len="med"/>
+                      <a:tailEnd type="none" w="med" len="med"/>
+                    </a:lnL>
+                    <a:lnR w="12700" cap="flat" cmpd="sng" algn="ctr">
+                      <a:solidFill>
+                        <a:srgbClr val="2A3441"/>
+                      </a:solidFill>
+                      <a:prstDash val="solid"/>
+                      <a:round/>
+                      <a:headEnd type="none" w="med" len="med"/>
+                      <a:tailEnd type="none" w="med" len="med"/>
+                    </a:lnR>
+                    <a:lnT w="12700" cap="flat" cmpd="sng" algn="ctr">
+                      <a:solidFill>
+                        <a:srgbClr val="2A3441"/>
+                      </a:solidFill>
+                      <a:prstDash val="solid"/>
+                      <a:round/>
+                      <a:headEnd type="none" w="med" len="med"/>
+                      <a:tailEnd type="none" w="med" len="med"/>
+                    </a:lnT>
+                    <a:lnB w="12700" cap="flat" cmpd="sng" algn="ctr">
+                      <a:solidFill>
+                        <a:srgbClr val="2A3441"/>
+                      </a:solidFill>
+                      <a:prstDash val="solid"/>
+                      <a:round/>
+                      <a:headEnd type="none" w="med" len="med"/>
+                      <a:tailEnd type="none" w="med" len="med"/>
+                    </a:lnB>
+                    <a:solidFill>
+                      <a:srgbClr val="141B24"/>
+                    </a:solidFill>
+                  </a:tcPr>
+                </a:tc>
+              </a:tr>
+            </a:tbl>
+          </a:graphicData>
+        </a:graphic>
+      </p:graphicFrame>
+      <p:sp>
+        <p:nvSpPr>
+          <p:cNvPr id="6" name="Text 2"/>
+          <p:cNvSpPr/>
+          <p:nvPr/>
+        </p:nvSpPr>
+        <p:spPr>
+          <a:xfrm>
+            <a:off x="548640" y="3474720"/>
+            <a:ext cx="11064240" cy="2743200"/>
+          </a:xfrm>
+          <a:prstGeom prst="rect">
+            <a:avLst/>
+          </a:prstGeom>
+          <a:noFill/>
+          <a:ln/>
+        </p:spPr>
+        <p:txBody>
+          <a:bodyPr wrap="square" lIns="0" tIns="0" rIns="0" bIns="0" rtlCol="0" anchor="t"/>
+          <a:lstStyle/>
+          <a:p>
+            <a:pPr marL="342900" indent="-342900">
+              <a:spcAft>
+                <a:spcPts val="800"/>
+              </a:spcAft>
+              <a:buSzPct val="100000"/>
+              <a:buChar char="•"/>
+            </a:pPr>
+            <a:r>
+              <a:rPr lang="en-US" sz="1600" dirty="0">
+                <a:solidFill>
+                  <a:srgbClr val="E6EDF3"/>
+                </a:solidFill>
+                <a:latin typeface="Calibri" pitchFamily="34" charset="0"/>
+                <a:ea typeface="Calibri" pitchFamily="34" charset="-122"/>
+                <a:cs typeface="Calibri" pitchFamily="34" charset="-120"/>
+              </a:rPr>
+              <a:t>Polite mode: back off when a standing queue builds (jitter-aware). Share 70% to 52%; costs speed (0.53x to 0.58x of AIMD time on 100 paths, worst path 2.95x slower), so it is off by default</a:t>
+            </a:r>
+            <a:endParaRPr lang="en-US" sz="1600" dirty="0"/>
+          </a:p>
+          <a:p>
+            <a:pPr marL="342900" indent="-342900">
+              <a:spcAft>
+                <a:spcPts val="800"/>
+              </a:spcAft>
+              <a:buSzPct val="100000"/>
+              <a:buChar char="•"/>
+            </a:pPr>
+            <a:r>
+              <a:rPr lang="en-US" sz="1600" dirty="0">
+                <a:solidFill>
+                  <a:srgbClr val="E6EDF3"/>
+                </a:solidFill>
+                <a:latin typeface="Calibri" pitchFamily="34" charset="0"/>
+                <a:ea typeface="Calibri" pitchFamily="34" charset="-122"/>
+                <a:cs typeface="Calibri" pitchFamily="34" charset="-120"/>
+              </a:rPr>
+              <a:t>Bursty cross traffic (new proxy option, 8 runs): neural is 15% faster than tuned AIMD but level with CUBIC; three tweaks to fix its extra retransmissions did not help</a:t>
+            </a:r>
+            <a:endParaRPr lang="en-US" sz="1600" dirty="0"/>
+          </a:p>
+          <a:p>
+            <a:pPr marL="342900" indent="-342900">
+              <a:spcAft>
+                <a:spcPts val="800"/>
+              </a:spcAft>
+              <a:buSzPct val="100000"/>
+              <a:buChar char="•"/>
+            </a:pPr>
+            <a:r>
+              <a:rPr lang="en-US" sz="1600" dirty="0">
+                <a:solidFill>
+                  <a:srgbClr val="E6EDF3"/>
+                </a:solidFill>
+                <a:latin typeface="Calibri" pitchFamily="34" charset="0"/>
+                <a:ea typeface="Calibri" pitchFamily="34" charset="-122"/>
+                <a:cs typeface="Calibri" pitchFamily="34" charset="-120"/>
+              </a:rPr>
+              <a:t>Server now handles up to 16 clients at once; a test sends two files simultaneously and checks both byte-for-byte</a:t>
+            </a:r>
+            <a:endParaRPr lang="en-US" sz="1600" dirty="0"/>
+          </a:p>
+        </p:txBody>
+      </p:sp>
+    </p:spTree>
+  </p:cSld>
+  <p:clrMapOvr>
+    <a:masterClrMapping/>
+  </p:clrMapOvr>
+</p:sld>
+</file>
+
+<file path=ppt/slides/slide41.xml><?xml version="1.0" encoding="utf-8"?>
+<p:sld xmlns:a="http://schemas.openxmlformats.org/drawingml/2006/main" xmlns:r="http://schemas.openxmlformats.org/officeDocument/2006/relationships" xmlns:p="http://schemas.openxmlformats.org/presentationml/2006/main">
+  <p:cSld name="Slide 41">
+    <p:bg>
+      <p:bgPr>
+        <a:solidFill>
+          <a:srgbClr val="0B0F14"/>
+        </a:solidFill>
+      </p:bgPr>
+    </p:bg>
+    <p:spTree>
+      <p:nvGrpSpPr>
+        <p:cNvPr id="1" name=""/>
+        <p:cNvGrpSpPr/>
+        <p:nvPr/>
+      </p:nvGrpSpPr>
+      <p:grpSpPr>
+        <a:xfrm>
+          <a:off x="0" y="0"/>
+          <a:ext cx="0" cy="0"/>
+          <a:chOff x="0" y="0"/>
+          <a:chExt cx="0" cy="0"/>
+        </a:xfrm>
+      </p:grpSpPr>
+      <p:sp>
+        <p:nvSpPr>
+          <p:cNvPr id="2" name="Text 0"/>
+          <p:cNvSpPr/>
+          <p:nvPr/>
+        </p:nvSpPr>
+        <p:spPr>
+          <a:xfrm>
+            <a:off x="548640" y="320040"/>
+            <a:ext cx="11064240" cy="731520"/>
+          </a:xfrm>
+          <a:prstGeom prst="rect">
+            <a:avLst/>
+          </a:prstGeom>
+          <a:noFill/>
+          <a:ln/>
+        </p:spPr>
+        <p:txBody>
+          <a:bodyPr wrap="square" lIns="0" tIns="0" rIns="0" bIns="0" rtlCol="0" anchor="ctr"/>
+          <a:lstStyle/>
+          <a:p>
+            <a:pPr indent="0" marL="0">
+              <a:buNone/>
+            </a:pPr>
+            <a:r>
+              <a:rPr lang="en-US" sz="3000" b="1" dirty="0">
+                <a:solidFill>
+                  <a:srgbClr val="39FF88"/>
+                </a:solidFill>
+                <a:latin typeface="Courier New" pitchFamily="34" charset="0"/>
+                <a:ea typeface="Courier New" pitchFamily="34" charset="-122"/>
+                <a:cs typeface="Courier New" pitchFamily="34" charset="-120"/>
+              </a:rPr>
               <a:t>Limits we state openly</a:t>
             </a:r>
             <a:endParaRPr lang="en-US" sz="3000" dirty="0"/>
@@ -36435,7 +36785,7 @@
                 <a:ea typeface="Courier New" pitchFamily="34" charset="-122"/>
                 <a:cs typeface="Courier New" pitchFamily="34" charset="-120"/>
               </a:rPr>
-              <a:t>40 / 41   Smart-RUDP</a:t>
+              <a:t>41 / 42   Smart-RUDP</a:t>
             </a:r>
             <a:endParaRPr lang="en-US" sz="1000" dirty="0"/>
           </a:p>
@@ -36597,9 +36947,9 @@
 </p:sld>
 </file>
 
-<file path=ppt/slides/slide41.xml><?xml version="1.0" encoding="utf-8"?>
+<file path=ppt/slides/slide42.xml><?xml version="1.0" encoding="utf-8"?>
 <p:sld xmlns:a="http://schemas.openxmlformats.org/drawingml/2006/main" xmlns:r="http://schemas.openxmlformats.org/officeDocument/2006/relationships" xmlns:p="http://schemas.openxmlformats.org/presentationml/2006/main">
-  <p:cSld name="Slide 41">
+  <p:cSld name="Slide 42">
     <p:bg>
       <p:bgPr>
         <a:solidFill>
@@ -36693,7 +37043,7 @@
                 <a:ea typeface="Courier New" pitchFamily="34" charset="-122"/>
                 <a:cs typeface="Courier New" pitchFamily="34" charset="-120"/>
               </a:rPr>
-              <a:t>41 / 41   Smart-RUDP</a:t>
+              <a:t>42 / 42   Smart-RUDP</a:t>
             </a:r>
             <a:endParaRPr lang="en-US" sz="1000" dirty="0"/>
           </a:p>
@@ -36981,9 +37331,9 @@
 </p:sld>
 </file>
 
-<file path=ppt/slides/slide42.xml><?xml version="1.0" encoding="utf-8"?>
+<file path=ppt/slides/slide43.xml><?xml version="1.0" encoding="utf-8"?>
 <p:sld xmlns:a="http://schemas.openxmlformats.org/drawingml/2006/main" xmlns:r="http://schemas.openxmlformats.org/officeDocument/2006/relationships" xmlns:p="http://schemas.openxmlformats.org/presentationml/2006/main">
-  <p:cSld name="Slide 42">
+  <p:cSld name="Slide 43">
     <p:bg>
       <p:bgPr>
         <a:solidFill>
@@ -37130,9 +37480,9 @@
 </p:sld>
 </file>
 
-<file path=ppt/slides/slide43.xml><?xml version="1.0" encoding="utf-8"?>
+<file path=ppt/slides/slide44.xml><?xml version="1.0" encoding="utf-8"?>
 <p:sld xmlns:a="http://schemas.openxmlformats.org/drawingml/2006/main" xmlns:r="http://schemas.openxmlformats.org/officeDocument/2006/relationships" xmlns:p="http://schemas.openxmlformats.org/presentationml/2006/main">
-  <p:cSld name="Slide 43">
+  <p:cSld name="Slide 44">
     <p:bg>
       <p:bgPr>
         <a:solidFill>
@@ -37466,7 +37816,7 @@
                 <a:ea typeface="Courier New" pitchFamily="34" charset="-122"/>
                 <a:cs typeface="Courier New" pitchFamily="34" charset="-120"/>
               </a:rPr>
-              <a:t>5 / 41   Smart-RUDP</a:t>
+              <a:t>5 / 42   Smart-RUDP</a:t>
             </a:r>
             <a:endParaRPr lang="en-US" sz="1000" dirty="0"/>
           </a:p>
@@ -38887,7 +39237,7 @@
                 <a:ea typeface="Courier New" pitchFamily="34" charset="-122"/>
                 <a:cs typeface="Courier New" pitchFamily="34" charset="-120"/>
               </a:rPr>
-              <a:t>6 / 41   Smart-RUDP</a:t>
+              <a:t>6 / 42   Smart-RUDP</a:t>
             </a:r>
             <a:endParaRPr lang="en-US" sz="1000" dirty="0"/>
           </a:p>
@@ -39119,7 +39469,7 @@
                 <a:ea typeface="Courier New" pitchFamily="34" charset="-122"/>
                 <a:cs typeface="Courier New" pitchFamily="34" charset="-120"/>
               </a:rPr>
-              <a:t>7 / 41   Smart-RUDP</a:t>
+              <a:t>7 / 42   Smart-RUDP</a:t>
             </a:r>
             <a:endParaRPr lang="en-US" sz="1000" dirty="0"/>
           </a:p>
@@ -41459,7 +41809,7 @@
                 <a:ea typeface="Courier New" pitchFamily="34" charset="-122"/>
                 <a:cs typeface="Courier New" pitchFamily="34" charset="-120"/>
               </a:rPr>
-              <a:t>8 / 41   Smart-RUDP</a:t>
+              <a:t>8 / 42   Smart-RUDP</a:t>
             </a:r>
             <a:endParaRPr lang="en-US" sz="1000" dirty="0"/>
           </a:p>
@@ -41699,7 +42049,7 @@
                 <a:ea typeface="Courier New" pitchFamily="34" charset="-122"/>
                 <a:cs typeface="Courier New" pitchFamily="34" charset="-120"/>
               </a:rPr>
-              <a:t>9 / 41   Smart-RUDP</a:t>
+              <a:t>9 / 42   Smart-RUDP</a:t>
             </a:r>
             <a:endParaRPr lang="en-US" sz="1000" dirty="0"/>
           </a:p>
